--- a/images/chap4/chap4_core_diagrams.pptx
+++ b/images/chap4/chap4_core_diagrams.pptx
@@ -1,16 +1,18 @@
 
 <file path=ppt/presentation.xml><?xml version="1.0" encoding="utf-8"?>
-<p:presentation xmlns:a="http://schemas.openxmlformats.org/drawingml/2006/main" xmlns:r="http://schemas.openxmlformats.org/officeDocument/2006/relationships" xmlns:p="http://schemas.openxmlformats.org/presentationml/2006/main" saveSubsetFonts="1" autoCompressPictures="0">
+<p:presentation xmlns:a="http://schemas.openxmlformats.org/drawingml/2006/main" xmlns:r="http://schemas.openxmlformats.org/officeDocument/2006/relationships" xmlns:p="http://schemas.openxmlformats.org/presentationml/2006/main" autoCompressPictures="0">
   <p:sldMasterIdLst>
     <p:sldMasterId id="2147483648" r:id="rId1"/>
   </p:sldMasterIdLst>
+  <p:notesMasterIdLst>
+    <p:notesMasterId r:id="rId5"/>
+  </p:notesMasterIdLst>
   <p:sldIdLst>
-    <p:sldId id="256" r:id="rId7"/>
-    <p:sldId id="257" r:id="rId8"/>
-    <p:sldId id="258" r:id="rId9"/>
-    <p:sldId id="259" r:id="rId10"/>
+    <p:sldId id="256" r:id="rId2"/>
+    <p:sldId id="258" r:id="rId3"/>
+    <p:sldId id="259" r:id="rId4"/>
   </p:sldIdLst>
-  <p:sldSz cx="12191695" cy="6858000" type="screen4x3"/>
+  <p:sldSz cx="12192000" cy="6858000"/>
   <p:notesSz cx="6858000" cy="9144000"/>
   <p:defaultTextStyle>
     <a:defPPr>
@@ -107,7 +109,428 @@
       </a:defRPr>
     </a:lvl9pPr>
   </p:defaultTextStyle>
+  <p:extLst>
+    <p:ext uri="{EFAFB233-063F-42B5-8137-9DF3F51BA10A}">
+      <p15:sldGuideLst xmlns:p15="http://schemas.microsoft.com/office/powerpoint/2012/main">
+        <p15:guide id="1" orient="horz" pos="2095" userDrawn="1">
+          <p15:clr>
+            <a:srgbClr val="A4A3A4"/>
+          </p15:clr>
+        </p15:guide>
+        <p15:guide id="2" pos="2914" userDrawn="1">
+          <p15:clr>
+            <a:srgbClr val="A4A3A4"/>
+          </p15:clr>
+        </p15:guide>
+      </p15:sldGuideLst>
+    </p:ext>
+  </p:extLst>
 </p:presentation>
+</file>
+
+<file path=ppt/notesMasters/notesMaster1.xml><?xml version="1.0" encoding="utf-8"?>
+<p:notesMaster xmlns:a="http://schemas.openxmlformats.org/drawingml/2006/main" xmlns:r="http://schemas.openxmlformats.org/officeDocument/2006/relationships" xmlns:p="http://schemas.openxmlformats.org/presentationml/2006/main">
+  <p:cSld>
+    <p:bg>
+      <p:bgRef idx="1001">
+        <a:schemeClr val="bg1"/>
+      </p:bgRef>
+    </p:bg>
+    <p:spTree>
+      <p:nvGrpSpPr>
+        <p:cNvPr id="1" name=""/>
+        <p:cNvGrpSpPr/>
+        <p:nvPr/>
+      </p:nvGrpSpPr>
+      <p:grpSpPr>
+        <a:xfrm>
+          <a:off x="0" y="0"/>
+          <a:ext cx="0" cy="0"/>
+          <a:chOff x="0" y="0"/>
+          <a:chExt cx="0" cy="0"/>
+        </a:xfrm>
+      </p:grpSpPr>
+      <p:sp>
+        <p:nvSpPr>
+          <p:cNvPr id="2" name="页眉占位符 1"/>
+          <p:cNvSpPr>
+            <a:spLocks noGrp="1"/>
+          </p:cNvSpPr>
+          <p:nvPr>
+            <p:ph type="hdr" sz="quarter"/>
+          </p:nvPr>
+        </p:nvSpPr>
+        <p:spPr>
+          <a:xfrm>
+            <a:off x="0" y="0"/>
+            <a:ext cx="2971800" cy="458788"/>
+          </a:xfrm>
+          <a:prstGeom prst="rect">
+            <a:avLst/>
+          </a:prstGeom>
+        </p:spPr>
+        <p:txBody>
+          <a:bodyPr vert="horz" lIns="91440" tIns="45720" rIns="91440" bIns="45720" rtlCol="0"/>
+          <a:lstStyle>
+            <a:lvl1pPr algn="l">
+              <a:defRPr sz="1200"/>
+            </a:lvl1pPr>
+          </a:lstStyle>
+          <a:p>
+            <a:endParaRPr lang="zh-CN" altLang="en-US"/>
+          </a:p>
+        </p:txBody>
+      </p:sp>
+      <p:sp>
+        <p:nvSpPr>
+          <p:cNvPr id="3" name="日期占位符 2"/>
+          <p:cNvSpPr>
+            <a:spLocks noGrp="1"/>
+          </p:cNvSpPr>
+          <p:nvPr>
+            <p:ph type="dt" idx="1"/>
+          </p:nvPr>
+        </p:nvSpPr>
+        <p:spPr>
+          <a:xfrm>
+            <a:off x="3884613" y="0"/>
+            <a:ext cx="2971800" cy="458788"/>
+          </a:xfrm>
+          <a:prstGeom prst="rect">
+            <a:avLst/>
+          </a:prstGeom>
+        </p:spPr>
+        <p:txBody>
+          <a:bodyPr vert="horz" lIns="91440" tIns="45720" rIns="91440" bIns="45720" rtlCol="0"/>
+          <a:lstStyle>
+            <a:lvl1pPr algn="r">
+              <a:defRPr sz="1200"/>
+            </a:lvl1pPr>
+          </a:lstStyle>
+          <a:p>
+            <a:fld id="{D2A48B96-639E-45A3-A0BA-2464DFDB1FAA}" type="datetimeFigureOut">
+              <a:rPr lang="zh-CN" altLang="en-US" smtClean="0"/>
+              <a:t>2026/4/23</a:t>
+            </a:fld>
+            <a:endParaRPr lang="zh-CN" altLang="en-US"/>
+          </a:p>
+        </p:txBody>
+      </p:sp>
+      <p:sp>
+        <p:nvSpPr>
+          <p:cNvPr id="4" name="幻灯片图像占位符 3"/>
+          <p:cNvSpPr>
+            <a:spLocks noGrp="1" noRot="1" noChangeAspect="1"/>
+          </p:cNvSpPr>
+          <p:nvPr>
+            <p:ph type="sldImg" idx="2"/>
+          </p:nvPr>
+        </p:nvSpPr>
+        <p:spPr>
+          <a:xfrm>
+            <a:off x="685943" y="1143000"/>
+            <a:ext cx="5486114" cy="3086100"/>
+          </a:xfrm>
+          <a:prstGeom prst="rect">
+            <a:avLst/>
+          </a:prstGeom>
+          <a:noFill/>
+          <a:ln w="12700">
+            <a:solidFill>
+              <a:prstClr val="black"/>
+            </a:solidFill>
+          </a:ln>
+        </p:spPr>
+        <p:txBody>
+          <a:bodyPr vert="horz" lIns="91440" tIns="45720" rIns="91440" bIns="45720" rtlCol="0" anchor="ctr"/>
+          <a:lstStyle/>
+          <a:p>
+            <a:endParaRPr lang="zh-CN" altLang="en-US"/>
+          </a:p>
+        </p:txBody>
+      </p:sp>
+      <p:sp>
+        <p:nvSpPr>
+          <p:cNvPr id="5" name="备注占位符 4"/>
+          <p:cNvSpPr>
+            <a:spLocks noGrp="1"/>
+          </p:cNvSpPr>
+          <p:nvPr>
+            <p:ph type="body" sz="quarter" idx="3"/>
+          </p:nvPr>
+        </p:nvSpPr>
+        <p:spPr>
+          <a:xfrm>
+            <a:off x="685800" y="4400550"/>
+            <a:ext cx="5486400" cy="3600450"/>
+          </a:xfrm>
+          <a:prstGeom prst="rect">
+            <a:avLst/>
+          </a:prstGeom>
+        </p:spPr>
+        <p:txBody>
+          <a:bodyPr vert="horz" lIns="91440" tIns="45720" rIns="91440" bIns="45720" rtlCol="0"/>
+          <a:lstStyle/>
+          <a:p>
+            <a:pPr lvl="0"/>
+            <a:r>
+              <a:rPr lang="zh-CN" altLang="en-US"/>
+              <a:t>单击此处编辑母版文本样式</a:t>
+            </a:r>
+          </a:p>
+          <a:p>
+            <a:pPr lvl="1"/>
+            <a:r>
+              <a:rPr lang="zh-CN" altLang="en-US"/>
+              <a:t>第二级</a:t>
+            </a:r>
+          </a:p>
+          <a:p>
+            <a:pPr lvl="2"/>
+            <a:r>
+              <a:rPr lang="zh-CN" altLang="en-US"/>
+              <a:t>第三级</a:t>
+            </a:r>
+          </a:p>
+          <a:p>
+            <a:pPr lvl="3"/>
+            <a:r>
+              <a:rPr lang="zh-CN" altLang="en-US"/>
+              <a:t>第四级</a:t>
+            </a:r>
+          </a:p>
+          <a:p>
+            <a:pPr lvl="4"/>
+            <a:r>
+              <a:rPr lang="zh-CN" altLang="en-US"/>
+              <a:t>第五级</a:t>
+            </a:r>
+          </a:p>
+        </p:txBody>
+      </p:sp>
+      <p:sp>
+        <p:nvSpPr>
+          <p:cNvPr id="6" name="页脚占位符 5"/>
+          <p:cNvSpPr>
+            <a:spLocks noGrp="1"/>
+          </p:cNvSpPr>
+          <p:nvPr>
+            <p:ph type="ftr" sz="quarter" idx="4"/>
+          </p:nvPr>
+        </p:nvSpPr>
+        <p:spPr>
+          <a:xfrm>
+            <a:off x="0" y="8685213"/>
+            <a:ext cx="2971800" cy="458787"/>
+          </a:xfrm>
+          <a:prstGeom prst="rect">
+            <a:avLst/>
+          </a:prstGeom>
+        </p:spPr>
+        <p:txBody>
+          <a:bodyPr vert="horz" lIns="91440" tIns="45720" rIns="91440" bIns="45720" rtlCol="0" anchor="b"/>
+          <a:lstStyle>
+            <a:lvl1pPr algn="l">
+              <a:defRPr sz="1200"/>
+            </a:lvl1pPr>
+          </a:lstStyle>
+          <a:p>
+            <a:endParaRPr lang="zh-CN" altLang="en-US"/>
+          </a:p>
+        </p:txBody>
+      </p:sp>
+      <p:sp>
+        <p:nvSpPr>
+          <p:cNvPr id="7" name="灯片编号占位符 6"/>
+          <p:cNvSpPr>
+            <a:spLocks noGrp="1"/>
+          </p:cNvSpPr>
+          <p:nvPr>
+            <p:ph type="sldNum" sz="quarter" idx="5"/>
+          </p:nvPr>
+        </p:nvSpPr>
+        <p:spPr>
+          <a:xfrm>
+            <a:off x="3884613" y="8685213"/>
+            <a:ext cx="2971800" cy="458787"/>
+          </a:xfrm>
+          <a:prstGeom prst="rect">
+            <a:avLst/>
+          </a:prstGeom>
+        </p:spPr>
+        <p:txBody>
+          <a:bodyPr vert="horz" lIns="91440" tIns="45720" rIns="91440" bIns="45720" rtlCol="0" anchor="b"/>
+          <a:lstStyle>
+            <a:lvl1pPr algn="r">
+              <a:defRPr sz="1200"/>
+            </a:lvl1pPr>
+          </a:lstStyle>
+          <a:p>
+            <a:fld id="{A6837353-30EB-4A48-80EB-173D804AEFBD}" type="slidenum">
+              <a:rPr lang="zh-CN" altLang="en-US" smtClean="0"/>
+              <a:t>‹#›</a:t>
+            </a:fld>
+            <a:endParaRPr lang="zh-CN" altLang="en-US"/>
+          </a:p>
+        </p:txBody>
+      </p:sp>
+    </p:spTree>
+  </p:cSld>
+  <p:clrMap bg1="lt1" tx1="dk1" bg2="lt2" tx2="dk2" accent1="accent1" accent2="accent2" accent3="accent3" accent4="accent4" accent5="accent5" accent6="accent6" hlink="hlink" folHlink="folHlink"/>
+  <p:notesStyle>
+    <a:lvl1pPr marL="0" algn="l" defTabSz="914400" rtl="0" eaLnBrk="1" latinLnBrk="0" hangingPunct="1">
+      <a:defRPr sz="1200" kern="1200">
+        <a:solidFill>
+          <a:schemeClr val="tx1"/>
+        </a:solidFill>
+        <a:latin typeface="+mn-lt"/>
+        <a:ea typeface="+mn-ea"/>
+        <a:cs typeface="+mn-cs"/>
+      </a:defRPr>
+    </a:lvl1pPr>
+    <a:lvl2pPr marL="457200" algn="l" defTabSz="914400" rtl="0" eaLnBrk="1" latinLnBrk="0" hangingPunct="1">
+      <a:defRPr sz="1200" kern="1200">
+        <a:solidFill>
+          <a:schemeClr val="tx1"/>
+        </a:solidFill>
+        <a:latin typeface="+mn-lt"/>
+        <a:ea typeface="+mn-ea"/>
+        <a:cs typeface="+mn-cs"/>
+      </a:defRPr>
+    </a:lvl2pPr>
+    <a:lvl3pPr marL="914400" algn="l" defTabSz="914400" rtl="0" eaLnBrk="1" latinLnBrk="0" hangingPunct="1">
+      <a:defRPr sz="1200" kern="1200">
+        <a:solidFill>
+          <a:schemeClr val="tx1"/>
+        </a:solidFill>
+        <a:latin typeface="+mn-lt"/>
+        <a:ea typeface="+mn-ea"/>
+        <a:cs typeface="+mn-cs"/>
+      </a:defRPr>
+    </a:lvl3pPr>
+    <a:lvl4pPr marL="1371600" algn="l" defTabSz="914400" rtl="0" eaLnBrk="1" latinLnBrk="0" hangingPunct="1">
+      <a:defRPr sz="1200" kern="1200">
+        <a:solidFill>
+          <a:schemeClr val="tx1"/>
+        </a:solidFill>
+        <a:latin typeface="+mn-lt"/>
+        <a:ea typeface="+mn-ea"/>
+        <a:cs typeface="+mn-cs"/>
+      </a:defRPr>
+    </a:lvl4pPr>
+    <a:lvl5pPr marL="1828800" algn="l" defTabSz="914400" rtl="0" eaLnBrk="1" latinLnBrk="0" hangingPunct="1">
+      <a:defRPr sz="1200" kern="1200">
+        <a:solidFill>
+          <a:schemeClr val="tx1"/>
+        </a:solidFill>
+        <a:latin typeface="+mn-lt"/>
+        <a:ea typeface="+mn-ea"/>
+        <a:cs typeface="+mn-cs"/>
+      </a:defRPr>
+    </a:lvl5pPr>
+    <a:lvl6pPr marL="2286000" algn="l" defTabSz="914400" rtl="0" eaLnBrk="1" latinLnBrk="0" hangingPunct="1">
+      <a:defRPr sz="1200" kern="1200">
+        <a:solidFill>
+          <a:schemeClr val="tx1"/>
+        </a:solidFill>
+        <a:latin typeface="+mn-lt"/>
+        <a:ea typeface="+mn-ea"/>
+        <a:cs typeface="+mn-cs"/>
+      </a:defRPr>
+    </a:lvl6pPr>
+    <a:lvl7pPr marL="2743200" algn="l" defTabSz="914400" rtl="0" eaLnBrk="1" latinLnBrk="0" hangingPunct="1">
+      <a:defRPr sz="1200" kern="1200">
+        <a:solidFill>
+          <a:schemeClr val="tx1"/>
+        </a:solidFill>
+        <a:latin typeface="+mn-lt"/>
+        <a:ea typeface="+mn-ea"/>
+        <a:cs typeface="+mn-cs"/>
+      </a:defRPr>
+    </a:lvl7pPr>
+    <a:lvl8pPr marL="3200400" algn="l" defTabSz="914400" rtl="0" eaLnBrk="1" latinLnBrk="0" hangingPunct="1">
+      <a:defRPr sz="1200" kern="1200">
+        <a:solidFill>
+          <a:schemeClr val="tx1"/>
+        </a:solidFill>
+        <a:latin typeface="+mn-lt"/>
+        <a:ea typeface="+mn-ea"/>
+        <a:cs typeface="+mn-cs"/>
+      </a:defRPr>
+    </a:lvl8pPr>
+    <a:lvl9pPr marL="3657600" algn="l" defTabSz="914400" rtl="0" eaLnBrk="1" latinLnBrk="0" hangingPunct="1">
+      <a:defRPr sz="1200" kern="1200">
+        <a:solidFill>
+          <a:schemeClr val="tx1"/>
+        </a:solidFill>
+        <a:latin typeface="+mn-lt"/>
+        <a:ea typeface="+mn-ea"/>
+        <a:cs typeface="+mn-cs"/>
+      </a:defRPr>
+    </a:lvl9pPr>
+  </p:notesStyle>
+</p:notesMaster>
+</file>
+
+<file path=ppt/notesSlides/notesSlide1.xml><?xml version="1.0" encoding="utf-8"?>
+<p:notes xmlns:a="http://schemas.openxmlformats.org/drawingml/2006/main" xmlns:r="http://schemas.openxmlformats.org/officeDocument/2006/relationships" xmlns:p="http://schemas.openxmlformats.org/presentationml/2006/main">
+  <p:cSld>
+    <p:spTree>
+      <p:nvGrpSpPr>
+        <p:cNvPr id="1" name=""/>
+        <p:cNvGrpSpPr/>
+        <p:nvPr/>
+      </p:nvGrpSpPr>
+      <p:grpSpPr>
+        <a:xfrm>
+          <a:off x="0" y="0"/>
+          <a:ext cx="0" cy="0"/>
+          <a:chOff x="0" y="0"/>
+          <a:chExt cx="0" cy="0"/>
+        </a:xfrm>
+      </p:grpSpPr>
+      <p:sp>
+        <p:nvSpPr>
+          <p:cNvPr id="2" name="幻灯片图像占位符 1"/>
+          <p:cNvSpPr>
+            <a:spLocks noGrp="1" noRot="1" noChangeAspect="1"/>
+          </p:cNvSpPr>
+          <p:nvPr>
+            <p:ph type="sldImg" idx="2"/>
+          </p:nvPr>
+        </p:nvSpPr>
+        <p:spPr>
+          <a:xfrm>
+            <a:off x="685800" y="1143000"/>
+            <a:ext cx="5486400" cy="3086100"/>
+          </a:xfrm>
+        </p:spPr>
+      </p:sp>
+      <p:sp>
+        <p:nvSpPr>
+          <p:cNvPr id="3" name="文本占位符 2"/>
+          <p:cNvSpPr>
+            <a:spLocks noGrp="1"/>
+          </p:cNvSpPr>
+          <p:nvPr>
+            <p:ph type="body" idx="3"/>
+          </p:nvPr>
+        </p:nvSpPr>
+        <p:spPr/>
+        <p:txBody>
+          <a:bodyPr/>
+          <a:lstStyle/>
+          <a:p>
+            <a:endParaRPr lang="zh-CN" altLang="en-US"/>
+          </a:p>
+        </p:txBody>
+      </p:sp>
+    </p:spTree>
+  </p:cSld>
+  <p:clrMapOvr>
+    <a:masterClrMapping/>
+  </p:clrMapOvr>
+</p:notes>
 </file>
 
 <file path=ppt/slideLayouts/slideLayout1.xml><?xml version="1.0" encoding="utf-8"?>
@@ -148,10 +571,9 @@
           <a:lstStyle/>
           <a:p>
             <a:r>
-              <a:rPr lang="en-US" smtClean="0"/>
+              <a:rPr lang="en-US"/>
               <a:t>Click to edit Master title style</a:t>
             </a:r>
-            <a:endParaRPr lang="en-US"/>
           </a:p>
         </p:txBody>
       </p:sp>
@@ -267,10 +689,9 @@
           </a:lstStyle>
           <a:p>
             <a:r>
-              <a:rPr lang="en-US" smtClean="0"/>
+              <a:rPr lang="en-US"/>
               <a:t>Click to edit Master subtitle style</a:t>
             </a:r>
-            <a:endParaRPr lang="en-US"/>
           </a:p>
         </p:txBody>
       </p:sp>
@@ -291,7 +712,7 @@
           <a:p>
             <a:fld id="{5BCAD085-E8A6-8845-BD4E-CB4CCA059FC4}" type="datetimeFigureOut">
               <a:rPr lang="en-US" smtClean="0"/>
-              <a:t>1/27/13</a:t>
+              <a:t>4/23/2026</a:t>
             </a:fld>
             <a:endParaRPr lang="en-US"/>
           </a:p>
@@ -340,11 +761,6 @@
         </p:txBody>
       </p:sp>
     </p:spTree>
-    <p:extLst>
-      <p:ext uri="{BB962C8B-B14F-4D97-AF65-F5344CB8AC3E}">
-        <p14:creationId xmlns:p14="http://schemas.microsoft.com/office/powerpoint/2010/main" val="3168075583"/>
-      </p:ext>
-    </p:extLst>
   </p:cSld>
   <p:clrMapOvr>
     <a:masterClrMapping/>
@@ -385,10 +801,9 @@
           <a:lstStyle/>
           <a:p>
             <a:r>
-              <a:rPr lang="en-US" smtClean="0"/>
+              <a:rPr lang="en-US"/>
               <a:t>Click to edit Master title style</a:t>
             </a:r>
-            <a:endParaRPr lang="en-US"/>
           </a:p>
         </p:txBody>
       </p:sp>
@@ -409,38 +824,37 @@
           <a:p>
             <a:pPr lvl="0"/>
             <a:r>
-              <a:rPr lang="en-US" smtClean="0"/>
+              <a:rPr lang="en-US"/>
               <a:t>Click to edit Master text styles</a:t>
             </a:r>
           </a:p>
           <a:p>
             <a:pPr lvl="1"/>
             <a:r>
-              <a:rPr lang="en-US" smtClean="0"/>
+              <a:rPr lang="en-US"/>
               <a:t>Second level</a:t>
             </a:r>
           </a:p>
           <a:p>
             <a:pPr lvl="2"/>
             <a:r>
-              <a:rPr lang="en-US" smtClean="0"/>
+              <a:rPr lang="en-US"/>
               <a:t>Third level</a:t>
             </a:r>
           </a:p>
           <a:p>
             <a:pPr lvl="3"/>
             <a:r>
-              <a:rPr lang="en-US" smtClean="0"/>
+              <a:rPr lang="en-US"/>
               <a:t>Fourth level</a:t>
             </a:r>
           </a:p>
           <a:p>
             <a:pPr lvl="4"/>
             <a:r>
-              <a:rPr lang="en-US" smtClean="0"/>
+              <a:rPr lang="en-US"/>
               <a:t>Fifth level</a:t>
             </a:r>
-            <a:endParaRPr lang="en-US"/>
           </a:p>
         </p:txBody>
       </p:sp>
@@ -461,7 +875,7 @@
           <a:p>
             <a:fld id="{5BCAD085-E8A6-8845-BD4E-CB4CCA059FC4}" type="datetimeFigureOut">
               <a:rPr lang="en-US" smtClean="0"/>
-              <a:t>1/27/13</a:t>
+              <a:t>4/23/2026</a:t>
             </a:fld>
             <a:endParaRPr lang="en-US"/>
           </a:p>
@@ -510,11 +924,6 @@
         </p:txBody>
       </p:sp>
     </p:spTree>
-    <p:extLst>
-      <p:ext uri="{BB962C8B-B14F-4D97-AF65-F5344CB8AC3E}">
-        <p14:creationId xmlns:p14="http://schemas.microsoft.com/office/powerpoint/2010/main" val="2910927964"/>
-      </p:ext>
-    </p:extLst>
   </p:cSld>
   <p:clrMapOvr>
     <a:masterClrMapping/>
@@ -560,10 +969,9 @@
           <a:lstStyle/>
           <a:p>
             <a:r>
-              <a:rPr lang="en-US" smtClean="0"/>
+              <a:rPr lang="en-US"/>
               <a:t>Click to edit Master title style</a:t>
             </a:r>
-            <a:endParaRPr lang="en-US"/>
           </a:p>
         </p:txBody>
       </p:sp>
@@ -589,38 +997,37 @@
           <a:p>
             <a:pPr lvl="0"/>
             <a:r>
-              <a:rPr lang="en-US" smtClean="0"/>
+              <a:rPr lang="en-US"/>
               <a:t>Click to edit Master text styles</a:t>
             </a:r>
           </a:p>
           <a:p>
             <a:pPr lvl="1"/>
             <a:r>
-              <a:rPr lang="en-US" smtClean="0"/>
+              <a:rPr lang="en-US"/>
               <a:t>Second level</a:t>
             </a:r>
           </a:p>
           <a:p>
             <a:pPr lvl="2"/>
             <a:r>
-              <a:rPr lang="en-US" smtClean="0"/>
+              <a:rPr lang="en-US"/>
               <a:t>Third level</a:t>
             </a:r>
           </a:p>
           <a:p>
             <a:pPr lvl="3"/>
             <a:r>
-              <a:rPr lang="en-US" smtClean="0"/>
+              <a:rPr lang="en-US"/>
               <a:t>Fourth level</a:t>
             </a:r>
           </a:p>
           <a:p>
             <a:pPr lvl="4"/>
             <a:r>
-              <a:rPr lang="en-US" smtClean="0"/>
+              <a:rPr lang="en-US"/>
               <a:t>Fifth level</a:t>
             </a:r>
-            <a:endParaRPr lang="en-US"/>
           </a:p>
         </p:txBody>
       </p:sp>
@@ -641,7 +1048,7 @@
           <a:p>
             <a:fld id="{5BCAD085-E8A6-8845-BD4E-CB4CCA059FC4}" type="datetimeFigureOut">
               <a:rPr lang="en-US" smtClean="0"/>
-              <a:t>1/27/13</a:t>
+              <a:t>4/23/2026</a:t>
             </a:fld>
             <a:endParaRPr lang="en-US"/>
           </a:p>
@@ -690,11 +1097,6 @@
         </p:txBody>
       </p:sp>
     </p:spTree>
-    <p:extLst>
-      <p:ext uri="{BB962C8B-B14F-4D97-AF65-F5344CB8AC3E}">
-        <p14:creationId xmlns:p14="http://schemas.microsoft.com/office/powerpoint/2010/main" val="3612223792"/>
-      </p:ext>
-    </p:extLst>
   </p:cSld>
   <p:clrMapOvr>
     <a:masterClrMapping/>
@@ -735,10 +1137,9 @@
           <a:lstStyle/>
           <a:p>
             <a:r>
-              <a:rPr lang="en-US" smtClean="0"/>
+              <a:rPr lang="en-US"/>
               <a:t>Click to edit Master title style</a:t>
             </a:r>
-            <a:endParaRPr lang="en-US"/>
           </a:p>
         </p:txBody>
       </p:sp>
@@ -759,38 +1160,37 @@
           <a:p>
             <a:pPr lvl="0"/>
             <a:r>
-              <a:rPr lang="en-US" smtClean="0"/>
+              <a:rPr lang="en-US"/>
               <a:t>Click to edit Master text styles</a:t>
             </a:r>
           </a:p>
           <a:p>
             <a:pPr lvl="1"/>
             <a:r>
-              <a:rPr lang="en-US" smtClean="0"/>
+              <a:rPr lang="en-US"/>
               <a:t>Second level</a:t>
             </a:r>
           </a:p>
           <a:p>
             <a:pPr lvl="2"/>
             <a:r>
-              <a:rPr lang="en-US" smtClean="0"/>
+              <a:rPr lang="en-US"/>
               <a:t>Third level</a:t>
             </a:r>
           </a:p>
           <a:p>
             <a:pPr lvl="3"/>
             <a:r>
-              <a:rPr lang="en-US" smtClean="0"/>
+              <a:rPr lang="en-US"/>
               <a:t>Fourth level</a:t>
             </a:r>
           </a:p>
           <a:p>
             <a:pPr lvl="4"/>
             <a:r>
-              <a:rPr lang="en-US" smtClean="0"/>
+              <a:rPr lang="en-US"/>
               <a:t>Fifth level</a:t>
             </a:r>
-            <a:endParaRPr lang="en-US"/>
           </a:p>
         </p:txBody>
       </p:sp>
@@ -811,7 +1211,7 @@
           <a:p>
             <a:fld id="{5BCAD085-E8A6-8845-BD4E-CB4CCA059FC4}" type="datetimeFigureOut">
               <a:rPr lang="en-US" smtClean="0"/>
-              <a:t>1/27/13</a:t>
+              <a:t>4/23/2026</a:t>
             </a:fld>
             <a:endParaRPr lang="en-US"/>
           </a:p>
@@ -860,11 +1260,6 @@
         </p:txBody>
       </p:sp>
     </p:spTree>
-    <p:extLst>
-      <p:ext uri="{BB962C8B-B14F-4D97-AF65-F5344CB8AC3E}">
-        <p14:creationId xmlns:p14="http://schemas.microsoft.com/office/powerpoint/2010/main" val="2614314258"/>
-      </p:ext>
-    </p:extLst>
   </p:cSld>
   <p:clrMapOvr>
     <a:masterClrMapping/>
@@ -914,10 +1309,9 @@
           </a:lstStyle>
           <a:p>
             <a:r>
-              <a:rPr lang="en-US" smtClean="0"/>
+              <a:rPr lang="en-US"/>
               <a:t>Click to edit Master title style</a:t>
             </a:r>
-            <a:endParaRPr lang="en-US"/>
           </a:p>
         </p:txBody>
       </p:sp>
@@ -1034,7 +1428,7 @@
           <a:p>
             <a:pPr lvl="0"/>
             <a:r>
-              <a:rPr lang="en-US" smtClean="0"/>
+              <a:rPr lang="en-US"/>
               <a:t>Click to edit Master text styles</a:t>
             </a:r>
           </a:p>
@@ -1057,7 +1451,7 @@
           <a:p>
             <a:fld id="{5BCAD085-E8A6-8845-BD4E-CB4CCA059FC4}" type="datetimeFigureOut">
               <a:rPr lang="en-US" smtClean="0"/>
-              <a:t>1/27/13</a:t>
+              <a:t>4/23/2026</a:t>
             </a:fld>
             <a:endParaRPr lang="en-US"/>
           </a:p>
@@ -1106,11 +1500,6 @@
         </p:txBody>
       </p:sp>
     </p:spTree>
-    <p:extLst>
-      <p:ext uri="{BB962C8B-B14F-4D97-AF65-F5344CB8AC3E}">
-        <p14:creationId xmlns:p14="http://schemas.microsoft.com/office/powerpoint/2010/main" val="960648375"/>
-      </p:ext>
-    </p:extLst>
   </p:cSld>
   <p:clrMapOvr>
     <a:masterClrMapping/>
@@ -1151,10 +1540,9 @@
           <a:lstStyle/>
           <a:p>
             <a:r>
-              <a:rPr lang="en-US" smtClean="0"/>
+              <a:rPr lang="en-US"/>
               <a:t>Click to edit Master title style</a:t>
             </a:r>
-            <a:endParaRPr lang="en-US"/>
           </a:p>
         </p:txBody>
       </p:sp>
@@ -1208,38 +1596,37 @@
           <a:p>
             <a:pPr lvl="0"/>
             <a:r>
-              <a:rPr lang="en-US" smtClean="0"/>
+              <a:rPr lang="en-US"/>
               <a:t>Click to edit Master text styles</a:t>
             </a:r>
           </a:p>
           <a:p>
             <a:pPr lvl="1"/>
             <a:r>
-              <a:rPr lang="en-US" smtClean="0"/>
+              <a:rPr lang="en-US"/>
               <a:t>Second level</a:t>
             </a:r>
           </a:p>
           <a:p>
             <a:pPr lvl="2"/>
             <a:r>
-              <a:rPr lang="en-US" smtClean="0"/>
+              <a:rPr lang="en-US"/>
               <a:t>Third level</a:t>
             </a:r>
           </a:p>
           <a:p>
             <a:pPr lvl="3"/>
             <a:r>
-              <a:rPr lang="en-US" smtClean="0"/>
+              <a:rPr lang="en-US"/>
               <a:t>Fourth level</a:t>
             </a:r>
           </a:p>
           <a:p>
             <a:pPr lvl="4"/>
             <a:r>
-              <a:rPr lang="en-US" smtClean="0"/>
+              <a:rPr lang="en-US"/>
               <a:t>Fifth level</a:t>
             </a:r>
-            <a:endParaRPr lang="en-US"/>
           </a:p>
         </p:txBody>
       </p:sp>
@@ -1293,38 +1680,37 @@
           <a:p>
             <a:pPr lvl="0"/>
             <a:r>
-              <a:rPr lang="en-US" smtClean="0"/>
+              <a:rPr lang="en-US"/>
               <a:t>Click to edit Master text styles</a:t>
             </a:r>
           </a:p>
           <a:p>
             <a:pPr lvl="1"/>
             <a:r>
-              <a:rPr lang="en-US" smtClean="0"/>
+              <a:rPr lang="en-US"/>
               <a:t>Second level</a:t>
             </a:r>
           </a:p>
           <a:p>
             <a:pPr lvl="2"/>
             <a:r>
-              <a:rPr lang="en-US" smtClean="0"/>
+              <a:rPr lang="en-US"/>
               <a:t>Third level</a:t>
             </a:r>
           </a:p>
           <a:p>
             <a:pPr lvl="3"/>
             <a:r>
-              <a:rPr lang="en-US" smtClean="0"/>
+              <a:rPr lang="en-US"/>
               <a:t>Fourth level</a:t>
             </a:r>
           </a:p>
           <a:p>
             <a:pPr lvl="4"/>
             <a:r>
-              <a:rPr lang="en-US" smtClean="0"/>
+              <a:rPr lang="en-US"/>
               <a:t>Fifth level</a:t>
             </a:r>
-            <a:endParaRPr lang="en-US"/>
           </a:p>
         </p:txBody>
       </p:sp>
@@ -1345,7 +1731,7 @@
           <a:p>
             <a:fld id="{5BCAD085-E8A6-8845-BD4E-CB4CCA059FC4}" type="datetimeFigureOut">
               <a:rPr lang="en-US" smtClean="0"/>
-              <a:t>1/27/13</a:t>
+              <a:t>4/23/2026</a:t>
             </a:fld>
             <a:endParaRPr lang="en-US"/>
           </a:p>
@@ -1394,11 +1780,6 @@
         </p:txBody>
       </p:sp>
     </p:spTree>
-    <p:extLst>
-      <p:ext uri="{BB962C8B-B14F-4D97-AF65-F5344CB8AC3E}">
-        <p14:creationId xmlns:p14="http://schemas.microsoft.com/office/powerpoint/2010/main" val="2782244947"/>
-      </p:ext>
-    </p:extLst>
   </p:cSld>
   <p:clrMapOvr>
     <a:masterClrMapping/>
@@ -1443,10 +1824,9 @@
           </a:lstStyle>
           <a:p>
             <a:r>
-              <a:rPr lang="en-US" smtClean="0"/>
+              <a:rPr lang="en-US"/>
               <a:t>Click to edit Master title style</a:t>
             </a:r>
-            <a:endParaRPr lang="en-US"/>
           </a:p>
         </p:txBody>
       </p:sp>
@@ -1509,7 +1889,7 @@
           <a:p>
             <a:pPr lvl="0"/>
             <a:r>
-              <a:rPr lang="en-US" smtClean="0"/>
+              <a:rPr lang="en-US"/>
               <a:t>Click to edit Master text styles</a:t>
             </a:r>
           </a:p>
@@ -1565,38 +1945,37 @@
           <a:p>
             <a:pPr lvl="0"/>
             <a:r>
-              <a:rPr lang="en-US" smtClean="0"/>
+              <a:rPr lang="en-US"/>
               <a:t>Click to edit Master text styles</a:t>
             </a:r>
           </a:p>
           <a:p>
             <a:pPr lvl="1"/>
             <a:r>
-              <a:rPr lang="en-US" smtClean="0"/>
+              <a:rPr lang="en-US"/>
               <a:t>Second level</a:t>
             </a:r>
           </a:p>
           <a:p>
             <a:pPr lvl="2"/>
             <a:r>
-              <a:rPr lang="en-US" smtClean="0"/>
+              <a:rPr lang="en-US"/>
               <a:t>Third level</a:t>
             </a:r>
           </a:p>
           <a:p>
             <a:pPr lvl="3"/>
             <a:r>
-              <a:rPr lang="en-US" smtClean="0"/>
+              <a:rPr lang="en-US"/>
               <a:t>Fourth level</a:t>
             </a:r>
           </a:p>
           <a:p>
             <a:pPr lvl="4"/>
             <a:r>
-              <a:rPr lang="en-US" smtClean="0"/>
+              <a:rPr lang="en-US"/>
               <a:t>Fifth level</a:t>
             </a:r>
-            <a:endParaRPr lang="en-US"/>
           </a:p>
         </p:txBody>
       </p:sp>
@@ -1659,7 +2038,7 @@
           <a:p>
             <a:pPr lvl="0"/>
             <a:r>
-              <a:rPr lang="en-US" smtClean="0"/>
+              <a:rPr lang="en-US"/>
               <a:t>Click to edit Master text styles</a:t>
             </a:r>
           </a:p>
@@ -1715,38 +2094,37 @@
           <a:p>
             <a:pPr lvl="0"/>
             <a:r>
-              <a:rPr lang="en-US" smtClean="0"/>
+              <a:rPr lang="en-US"/>
               <a:t>Click to edit Master text styles</a:t>
             </a:r>
           </a:p>
           <a:p>
             <a:pPr lvl="1"/>
             <a:r>
-              <a:rPr lang="en-US" smtClean="0"/>
+              <a:rPr lang="en-US"/>
               <a:t>Second level</a:t>
             </a:r>
           </a:p>
           <a:p>
             <a:pPr lvl="2"/>
             <a:r>
-              <a:rPr lang="en-US" smtClean="0"/>
+              <a:rPr lang="en-US"/>
               <a:t>Third level</a:t>
             </a:r>
           </a:p>
           <a:p>
             <a:pPr lvl="3"/>
             <a:r>
-              <a:rPr lang="en-US" smtClean="0"/>
+              <a:rPr lang="en-US"/>
               <a:t>Fourth level</a:t>
             </a:r>
           </a:p>
           <a:p>
             <a:pPr lvl="4"/>
             <a:r>
-              <a:rPr lang="en-US" smtClean="0"/>
+              <a:rPr lang="en-US"/>
               <a:t>Fifth level</a:t>
             </a:r>
-            <a:endParaRPr lang="en-US"/>
           </a:p>
         </p:txBody>
       </p:sp>
@@ -1767,7 +2145,7 @@
           <a:p>
             <a:fld id="{5BCAD085-E8A6-8845-BD4E-CB4CCA059FC4}" type="datetimeFigureOut">
               <a:rPr lang="en-US" smtClean="0"/>
-              <a:t>1/27/13</a:t>
+              <a:t>4/23/2026</a:t>
             </a:fld>
             <a:endParaRPr lang="en-US"/>
           </a:p>
@@ -1816,11 +2194,6 @@
         </p:txBody>
       </p:sp>
     </p:spTree>
-    <p:extLst>
-      <p:ext uri="{BB962C8B-B14F-4D97-AF65-F5344CB8AC3E}">
-        <p14:creationId xmlns:p14="http://schemas.microsoft.com/office/powerpoint/2010/main" val="990158736"/>
-      </p:ext>
-    </p:extLst>
   </p:cSld>
   <p:clrMapOvr>
     <a:masterClrMapping/>
@@ -1861,10 +2234,9 @@
           <a:lstStyle/>
           <a:p>
             <a:r>
-              <a:rPr lang="en-US" smtClean="0"/>
+              <a:rPr lang="en-US"/>
               <a:t>Click to edit Master title style</a:t>
             </a:r>
-            <a:endParaRPr lang="en-US"/>
           </a:p>
         </p:txBody>
       </p:sp>
@@ -1885,7 +2257,7 @@
           <a:p>
             <a:fld id="{5BCAD085-E8A6-8845-BD4E-CB4CCA059FC4}" type="datetimeFigureOut">
               <a:rPr lang="en-US" smtClean="0"/>
-              <a:t>1/27/13</a:t>
+              <a:t>4/23/2026</a:t>
             </a:fld>
             <a:endParaRPr lang="en-US"/>
           </a:p>
@@ -1934,11 +2306,6 @@
         </p:txBody>
       </p:sp>
     </p:spTree>
-    <p:extLst>
-      <p:ext uri="{BB962C8B-B14F-4D97-AF65-F5344CB8AC3E}">
-        <p14:creationId xmlns:p14="http://schemas.microsoft.com/office/powerpoint/2010/main" val="727027711"/>
-      </p:ext>
-    </p:extLst>
   </p:cSld>
   <p:clrMapOvr>
     <a:masterClrMapping/>
@@ -1980,7 +2347,7 @@
           <a:p>
             <a:fld id="{5BCAD085-E8A6-8845-BD4E-CB4CCA059FC4}" type="datetimeFigureOut">
               <a:rPr lang="en-US" smtClean="0"/>
-              <a:t>1/27/13</a:t>
+              <a:t>4/23/2026</a:t>
             </a:fld>
             <a:endParaRPr lang="en-US"/>
           </a:p>
@@ -2029,11 +2396,6 @@
         </p:txBody>
       </p:sp>
     </p:spTree>
-    <p:extLst>
-      <p:ext uri="{BB962C8B-B14F-4D97-AF65-F5344CB8AC3E}">
-        <p14:creationId xmlns:p14="http://schemas.microsoft.com/office/powerpoint/2010/main" val="1212999818"/>
-      </p:ext>
-    </p:extLst>
   </p:cSld>
   <p:clrMapOvr>
     <a:masterClrMapping/>
@@ -2083,10 +2445,9 @@
           </a:lstStyle>
           <a:p>
             <a:r>
-              <a:rPr lang="en-US" smtClean="0"/>
+              <a:rPr lang="en-US"/>
               <a:t>Click to edit Master title style</a:t>
             </a:r>
-            <a:endParaRPr lang="en-US"/>
           </a:p>
         </p:txBody>
       </p:sp>
@@ -2140,38 +2501,37 @@
           <a:p>
             <a:pPr lvl="0"/>
             <a:r>
-              <a:rPr lang="en-US" smtClean="0"/>
+              <a:rPr lang="en-US"/>
               <a:t>Click to edit Master text styles</a:t>
             </a:r>
           </a:p>
           <a:p>
             <a:pPr lvl="1"/>
             <a:r>
-              <a:rPr lang="en-US" smtClean="0"/>
+              <a:rPr lang="en-US"/>
               <a:t>Second level</a:t>
             </a:r>
           </a:p>
           <a:p>
             <a:pPr lvl="2"/>
             <a:r>
-              <a:rPr lang="en-US" smtClean="0"/>
+              <a:rPr lang="en-US"/>
               <a:t>Third level</a:t>
             </a:r>
           </a:p>
           <a:p>
             <a:pPr lvl="3"/>
             <a:r>
-              <a:rPr lang="en-US" smtClean="0"/>
+              <a:rPr lang="en-US"/>
               <a:t>Fourth level</a:t>
             </a:r>
           </a:p>
           <a:p>
             <a:pPr lvl="4"/>
             <a:r>
-              <a:rPr lang="en-US" smtClean="0"/>
+              <a:rPr lang="en-US"/>
               <a:t>Fifth level</a:t>
             </a:r>
-            <a:endParaRPr lang="en-US"/>
           </a:p>
         </p:txBody>
       </p:sp>
@@ -2234,7 +2594,7 @@
           <a:p>
             <a:pPr lvl="0"/>
             <a:r>
-              <a:rPr lang="en-US" smtClean="0"/>
+              <a:rPr lang="en-US"/>
               <a:t>Click to edit Master text styles</a:t>
             </a:r>
           </a:p>
@@ -2257,7 +2617,7 @@
           <a:p>
             <a:fld id="{5BCAD085-E8A6-8845-BD4E-CB4CCA059FC4}" type="datetimeFigureOut">
               <a:rPr lang="en-US" smtClean="0"/>
-              <a:t>1/27/13</a:t>
+              <a:t>4/23/2026</a:t>
             </a:fld>
             <a:endParaRPr lang="en-US"/>
           </a:p>
@@ -2306,11 +2666,6 @@
         </p:txBody>
       </p:sp>
     </p:spTree>
-    <p:extLst>
-      <p:ext uri="{BB962C8B-B14F-4D97-AF65-F5344CB8AC3E}">
-        <p14:creationId xmlns:p14="http://schemas.microsoft.com/office/powerpoint/2010/main" val="1840726560"/>
-      </p:ext>
-    </p:extLst>
   </p:cSld>
   <p:clrMapOvr>
     <a:masterClrMapping/>
@@ -2360,10 +2715,9 @@
           </a:lstStyle>
           <a:p>
             <a:r>
-              <a:rPr lang="en-US" smtClean="0"/>
+              <a:rPr lang="en-US"/>
               <a:t>Click to edit Master title style</a:t>
             </a:r>
-            <a:endParaRPr lang="en-US"/>
           </a:p>
         </p:txBody>
       </p:sp>
@@ -2487,7 +2841,7 @@
           <a:p>
             <a:pPr lvl="0"/>
             <a:r>
-              <a:rPr lang="en-US" smtClean="0"/>
+              <a:rPr lang="en-US"/>
               <a:t>Click to edit Master text styles</a:t>
             </a:r>
           </a:p>
@@ -2510,7 +2864,7 @@
           <a:p>
             <a:fld id="{5BCAD085-E8A6-8845-BD4E-CB4CCA059FC4}" type="datetimeFigureOut">
               <a:rPr lang="en-US" smtClean="0"/>
-              <a:t>1/27/13</a:t>
+              <a:t>4/23/2026</a:t>
             </a:fld>
             <a:endParaRPr lang="en-US"/>
           </a:p>
@@ -2559,11 +2913,6 @@
         </p:txBody>
       </p:sp>
     </p:spTree>
-    <p:extLst>
-      <p:ext uri="{BB962C8B-B14F-4D97-AF65-F5344CB8AC3E}">
-        <p14:creationId xmlns:p14="http://schemas.microsoft.com/office/powerpoint/2010/main" val="3889236939"/>
-      </p:ext>
-    </p:extLst>
   </p:cSld>
   <p:clrMapOvr>
     <a:masterClrMapping/>
@@ -2619,10 +2968,9 @@
           <a:lstStyle/>
           <a:p>
             <a:r>
-              <a:rPr lang="en-US" smtClean="0"/>
+              <a:rPr lang="en-US"/>
               <a:t>Click to edit Master title style</a:t>
             </a:r>
-            <a:endParaRPr lang="en-US"/>
           </a:p>
         </p:txBody>
       </p:sp>
@@ -2653,38 +3001,37 @@
           <a:p>
             <a:pPr lvl="0"/>
             <a:r>
-              <a:rPr lang="en-US" smtClean="0"/>
+              <a:rPr lang="en-US"/>
               <a:t>Click to edit Master text styles</a:t>
             </a:r>
           </a:p>
           <a:p>
             <a:pPr lvl="1"/>
             <a:r>
-              <a:rPr lang="en-US" smtClean="0"/>
+              <a:rPr lang="en-US"/>
               <a:t>Second level</a:t>
             </a:r>
           </a:p>
           <a:p>
             <a:pPr lvl="2"/>
             <a:r>
-              <a:rPr lang="en-US" smtClean="0"/>
+              <a:rPr lang="en-US"/>
               <a:t>Third level</a:t>
             </a:r>
           </a:p>
           <a:p>
             <a:pPr lvl="3"/>
             <a:r>
-              <a:rPr lang="en-US" smtClean="0"/>
+              <a:rPr lang="en-US"/>
               <a:t>Fourth level</a:t>
             </a:r>
           </a:p>
           <a:p>
             <a:pPr lvl="4"/>
             <a:r>
-              <a:rPr lang="en-US" smtClean="0"/>
+              <a:rPr lang="en-US"/>
               <a:t>Fifth level</a:t>
             </a:r>
-            <a:endParaRPr lang="en-US"/>
           </a:p>
         </p:txBody>
       </p:sp>
@@ -2723,7 +3070,7 @@
           <a:p>
             <a:fld id="{5BCAD085-E8A6-8845-BD4E-CB4CCA059FC4}" type="datetimeFigureOut">
               <a:rPr lang="en-US" smtClean="0"/>
-              <a:t>1/27/13</a:t>
+              <a:t>4/23/2026</a:t>
             </a:fld>
             <a:endParaRPr lang="en-US"/>
           </a:p>
@@ -2808,11 +3155,6 @@
         </p:txBody>
       </p:sp>
     </p:spTree>
-    <p:extLst>
-      <p:ext uri="{BB962C8B-B14F-4D97-AF65-F5344CB8AC3E}">
-        <p14:creationId xmlns:p14="http://schemas.microsoft.com/office/powerpoint/2010/main" val="2209977519"/>
-      </p:ext>
-    </p:extLst>
   </p:cSld>
   <p:clrMap bg1="lt1" tx1="dk1" bg2="lt2" tx2="dk2" accent1="accent1" accent2="accent2" accent3="accent3" accent4="accent4" accent5="accent5" accent6="accent6" hlink="hlink" folHlink="folHlink"/>
   <p:sldLayoutIdLst>
@@ -2850,7 +3192,7 @@
         <a:spcBef>
           <a:spcPct val="20000"/>
         </a:spcBef>
-        <a:buFont typeface="Arial"/>
+        <a:buFont typeface="Arial" panose="020B0604020202020204"/>
         <a:buChar char="•"/>
         <a:defRPr sz="3200" kern="1200">
           <a:solidFill>
@@ -2865,7 +3207,7 @@
         <a:spcBef>
           <a:spcPct val="20000"/>
         </a:spcBef>
-        <a:buFont typeface="Arial"/>
+        <a:buFont typeface="Arial" panose="020B0604020202020204"/>
         <a:buChar char="–"/>
         <a:defRPr sz="2800" kern="1200">
           <a:solidFill>
@@ -2880,7 +3222,7 @@
         <a:spcBef>
           <a:spcPct val="20000"/>
         </a:spcBef>
-        <a:buFont typeface="Arial"/>
+        <a:buFont typeface="Arial" panose="020B0604020202020204"/>
         <a:buChar char="•"/>
         <a:defRPr sz="2400" kern="1200">
           <a:solidFill>
@@ -2895,7 +3237,7 @@
         <a:spcBef>
           <a:spcPct val="20000"/>
         </a:spcBef>
-        <a:buFont typeface="Arial"/>
+        <a:buFont typeface="Arial" panose="020B0604020202020204"/>
         <a:buChar char="–"/>
         <a:defRPr sz="2000" kern="1200">
           <a:solidFill>
@@ -2910,7 +3252,7 @@
         <a:spcBef>
           <a:spcPct val="20000"/>
         </a:spcBef>
-        <a:buFont typeface="Arial"/>
+        <a:buFont typeface="Arial" panose="020B0604020202020204"/>
         <a:buChar char="»"/>
         <a:defRPr sz="2000" kern="1200">
           <a:solidFill>
@@ -2925,7 +3267,7 @@
         <a:spcBef>
           <a:spcPct val="20000"/>
         </a:spcBef>
-        <a:buFont typeface="Arial"/>
+        <a:buFont typeface="Arial" panose="020B0604020202020204"/>
         <a:buChar char="•"/>
         <a:defRPr sz="2000" kern="1200">
           <a:solidFill>
@@ -2940,7 +3282,7 @@
         <a:spcBef>
           <a:spcPct val="20000"/>
         </a:spcBef>
-        <a:buFont typeface="Arial"/>
+        <a:buFont typeface="Arial" panose="020B0604020202020204"/>
         <a:buChar char="•"/>
         <a:defRPr sz="2000" kern="1200">
           <a:solidFill>
@@ -2955,7 +3297,7 @@
         <a:spcBef>
           <a:spcPct val="20000"/>
         </a:spcBef>
-        <a:buFont typeface="Arial"/>
+        <a:buFont typeface="Arial" panose="020B0604020202020204"/>
         <a:buChar char="•"/>
         <a:defRPr sz="2000" kern="1200">
           <a:solidFill>
@@ -2970,7 +3312,7 @@
         <a:spcBef>
           <a:spcPct val="20000"/>
         </a:spcBef>
-        <a:buFont typeface="Arial"/>
+        <a:buFont typeface="Arial" panose="020B0604020202020204"/>
         <a:buChar char="•"/>
         <a:defRPr sz="2000" kern="1200">
           <a:solidFill>
@@ -3082,7 +3424,7 @@
 </file>
 
 <file path=ppt/slides/slide1.xml><?xml version="1.0" encoding="utf-8"?>
-<p:sld xmlns:a="http://schemas.openxmlformats.org/drawingml/2006/main" xmlns:p="http://schemas.openxmlformats.org/presentationml/2006/main" xmlns:r="http://schemas.openxmlformats.org/officeDocument/2006/relationships">
+<p:sld xmlns:a="http://schemas.openxmlformats.org/drawingml/2006/main" xmlns:r="http://schemas.openxmlformats.org/officeDocument/2006/relationships" xmlns:p="http://schemas.openxmlformats.org/presentationml/2006/main">
   <p:cSld>
     <p:bg>
       <p:bgPr>
@@ -3098,27 +3440,34 @@
         <p:cNvGrpSpPr/>
         <p:nvPr/>
       </p:nvGrpSpPr>
-      <p:grpSpPr/>
-      <p:sp>
-        <p:nvSpPr>
-          <p:cNvPr id="2" name="Rounded Rectangle 1"/>
+      <p:grpSpPr>
+        <a:xfrm>
+          <a:off x="0" y="0"/>
+          <a:ext cx="0" cy="0"/>
+          <a:chOff x="0" y="0"/>
+          <a:chExt cx="0" cy="0"/>
+        </a:xfrm>
+      </p:grpSpPr>
+      <p:sp>
+        <p:nvSpPr>
+          <p:cNvPr id="3" name="Rectangle 2"/>
           <p:cNvSpPr/>
           <p:nvPr/>
         </p:nvSpPr>
         <p:spPr>
           <a:xfrm>
-            <a:off x="2331720" y="201168"/>
-            <a:ext cx="7543800" cy="6309360"/>
-          </a:xfrm>
-          <a:prstGeom prst="roundRect">
+            <a:off x="4892040" y="329184"/>
+            <a:ext cx="2377440" cy="420624"/>
+          </a:xfrm>
+          <a:prstGeom prst="rect">
             <a:avLst/>
           </a:prstGeom>
           <a:solidFill>
             <a:srgbClr val="FFFFFF"/>
           </a:solidFill>
-          <a:ln w="10160">
+          <a:ln w="13970">
             <a:solidFill>
-              <a:srgbClr val="B8B8B8"/>
+              <a:srgbClr val="4A4A4A"/>
             </a:solidFill>
           </a:ln>
         </p:spPr>
@@ -3137,7 +3486,7 @@
           </a:fontRef>
         </p:style>
         <p:txBody>
-          <a:bodyPr rtlCol="0" anchor="ctr" wrap="square" lIns="0" rIns="0" tIns="0" bIns="0"/>
+          <a:bodyPr wrap="square" lIns="0" tIns="0" rIns="0" bIns="0" rtlCol="0" anchor="ctr"/>
           <a:lstStyle/>
           <a:p>
             <a:pPr algn="ctr">
@@ -3149,29 +3498,212 @@
               </a:spcAft>
             </a:pPr>
             <a:r>
-              <a:rPr sz="1300" b="0" i="0">
+              <a:rPr sz="1400" b="0" i="0">
                 <a:solidFill>
                   <a:srgbClr val="1E1E1E"/>
                 </a:solidFill>
-                <a:latin typeface="Microsoft YaHei"/>
+                <a:latin typeface="微软雅黑" panose="020B0503020204020204" charset="-122"/>
               </a:rPr>
-              <a:t/>
-            </a:r>
-          </a:p>
-        </p:txBody>
-      </p:sp>
-      <p:sp>
-        <p:nvSpPr>
-          <p:cNvPr id="3" name="Rectangle 2"/>
+              <a:t>选择漏洞并发起分析会话</a:t>
+            </a:r>
+          </a:p>
+        </p:txBody>
+      </p:sp>
+      <p:sp>
+        <p:nvSpPr>
+          <p:cNvPr id="4" name="Rectangle 3"/>
           <p:cNvSpPr/>
           <p:nvPr/>
         </p:nvSpPr>
         <p:spPr>
           <a:xfrm>
-            <a:off x="4892040" y="329184"/>
-            <a:ext cx="2377440" cy="420624"/>
+            <a:off x="4983480" y="1060704"/>
+            <a:ext cx="2194560" cy="384048"/>
           </a:xfrm>
           <a:prstGeom prst="rect">
+            <a:avLst/>
+          </a:prstGeom>
+          <a:solidFill>
+            <a:srgbClr val="FFFFFF"/>
+          </a:solidFill>
+          <a:ln w="13970">
+            <a:solidFill>
+              <a:srgbClr val="7A7A7A"/>
+            </a:solidFill>
+          </a:ln>
+        </p:spPr>
+        <p:style>
+          <a:lnRef idx="1">
+            <a:schemeClr val="accent1"/>
+          </a:lnRef>
+          <a:fillRef idx="3">
+            <a:schemeClr val="accent1"/>
+          </a:fillRef>
+          <a:effectRef idx="2">
+            <a:schemeClr val="accent1"/>
+          </a:effectRef>
+          <a:fontRef idx="minor">
+            <a:schemeClr val="lt1"/>
+          </a:fontRef>
+        </p:style>
+        <p:txBody>
+          <a:bodyPr wrap="square" lIns="0" tIns="0" rIns="0" bIns="0" rtlCol="0" anchor="ctr"/>
+          <a:lstStyle/>
+          <a:p>
+            <a:pPr algn="ctr">
+              <a:spcBef>
+                <a:spcPts val="0"/>
+              </a:spcBef>
+              <a:spcAft>
+                <a:spcPts val="0"/>
+              </a:spcAft>
+            </a:pPr>
+            <a:r>
+              <a:rPr sz="1400" b="0" i="0">
+                <a:solidFill>
+                  <a:srgbClr val="1E1E1E"/>
+                </a:solidFill>
+                <a:latin typeface="微软雅黑" panose="020B0503020204020204" charset="-122"/>
+              </a:rPr>
+              <a:t>构建安全上下文</a:t>
+            </a:r>
+          </a:p>
+        </p:txBody>
+      </p:sp>
+      <p:sp>
+        <p:nvSpPr>
+          <p:cNvPr id="5" name="Rectangle 4"/>
+          <p:cNvSpPr/>
+          <p:nvPr/>
+        </p:nvSpPr>
+        <p:spPr>
+          <a:xfrm>
+            <a:off x="4846320" y="1755648"/>
+            <a:ext cx="2468880" cy="457200"/>
+          </a:xfrm>
+          <a:prstGeom prst="rect">
+            <a:avLst/>
+          </a:prstGeom>
+          <a:solidFill>
+            <a:srgbClr val="FFFFFF"/>
+          </a:solidFill>
+          <a:ln w="13970">
+            <a:solidFill>
+              <a:srgbClr val="7A7A7A"/>
+            </a:solidFill>
+          </a:ln>
+        </p:spPr>
+        <p:style>
+          <a:lnRef idx="1">
+            <a:schemeClr val="accent1"/>
+          </a:lnRef>
+          <a:fillRef idx="3">
+            <a:schemeClr val="accent1"/>
+          </a:fillRef>
+          <a:effectRef idx="2">
+            <a:schemeClr val="accent1"/>
+          </a:effectRef>
+          <a:fontRef idx="minor">
+            <a:schemeClr val="lt1"/>
+          </a:fontRef>
+        </p:style>
+        <p:txBody>
+          <a:bodyPr wrap="square" lIns="0" tIns="0" rIns="0" bIns="0" rtlCol="0" anchor="ctr"/>
+          <a:lstStyle/>
+          <a:p>
+            <a:pPr algn="ctr">
+              <a:spcBef>
+                <a:spcPts val="0"/>
+              </a:spcBef>
+              <a:spcAft>
+                <a:spcPts val="0"/>
+              </a:spcAft>
+            </a:pPr>
+            <a:r>
+              <a:rPr sz="1400" b="0" i="0">
+                <a:solidFill>
+                  <a:srgbClr val="1E1E1E"/>
+                </a:solidFill>
+                <a:latin typeface="微软雅黑" panose="020B0503020204020204" charset="-122"/>
+              </a:rPr>
+              <a:t>生成候选监控 / 防护策略</a:t>
+            </a:r>
+          </a:p>
+        </p:txBody>
+      </p:sp>
+      <p:sp>
+        <p:nvSpPr>
+          <p:cNvPr id="6" name="Rectangle 5"/>
+          <p:cNvSpPr/>
+          <p:nvPr/>
+        </p:nvSpPr>
+        <p:spPr>
+          <a:xfrm>
+            <a:off x="4736592" y="2633472"/>
+            <a:ext cx="2697480" cy="530352"/>
+          </a:xfrm>
+          <a:prstGeom prst="rect">
+            <a:avLst/>
+          </a:prstGeom>
+          <a:solidFill>
+            <a:srgbClr val="FFFFFF"/>
+          </a:solidFill>
+          <a:ln w="13970">
+            <a:solidFill>
+              <a:srgbClr val="7A7A7A"/>
+            </a:solidFill>
+          </a:ln>
+        </p:spPr>
+        <p:style>
+          <a:lnRef idx="1">
+            <a:schemeClr val="accent1"/>
+          </a:lnRef>
+          <a:fillRef idx="3">
+            <a:schemeClr val="accent1"/>
+          </a:fillRef>
+          <a:effectRef idx="2">
+            <a:schemeClr val="accent1"/>
+          </a:effectRef>
+          <a:fontRef idx="minor">
+            <a:schemeClr val="lt1"/>
+          </a:fontRef>
+        </p:style>
+        <p:txBody>
+          <a:bodyPr wrap="square" lIns="0" tIns="0" rIns="0" bIns="0" rtlCol="0" anchor="ctr"/>
+          <a:lstStyle/>
+          <a:p>
+            <a:pPr algn="ctr">
+              <a:spcBef>
+                <a:spcPts val="0"/>
+              </a:spcBef>
+              <a:spcAft>
+                <a:spcPts val="0"/>
+              </a:spcAft>
+            </a:pPr>
+            <a:r>
+              <a:rPr sz="1400" b="0" i="0">
+                <a:solidFill>
+                  <a:srgbClr val="1E1E1E"/>
+                </a:solidFill>
+                <a:latin typeface="微软雅黑" panose="020B0503020204020204" charset="-122"/>
+              </a:rPr>
+              <a:t>专家三维评审与同类型排序</a:t>
+            </a:r>
+          </a:p>
+        </p:txBody>
+      </p:sp>
+      <p:sp>
+        <p:nvSpPr>
+          <p:cNvPr id="7" name="Diamond 6"/>
+          <p:cNvSpPr/>
+          <p:nvPr/>
+        </p:nvSpPr>
+        <p:spPr>
+          <a:xfrm>
+            <a:off x="5074920" y="3584448"/>
+            <a:ext cx="2011680" cy="841248"/>
+          </a:xfrm>
+          <a:prstGeom prst="diamond">
             <a:avLst/>
           </a:prstGeom>
           <a:solidFill>
@@ -3198,7 +3730,7 @@
           </a:fontRef>
         </p:style>
         <p:txBody>
-          <a:bodyPr rtlCol="0" anchor="ctr" wrap="square" lIns="0" rIns="0" tIns="0" bIns="0"/>
+          <a:bodyPr wrap="square" lIns="0" tIns="0" rIns="0" bIns="0" rtlCol="0" anchor="ctr"/>
           <a:lstStyle/>
           <a:p>
             <a:pPr algn="ctr">
@@ -3210,27 +3742,89 @@
               </a:spcAft>
             </a:pPr>
             <a:r>
-              <a:rPr sz="1300" b="0" i="0">
+              <a:rPr sz="1400" b="0" i="0">
                 <a:solidFill>
                   <a:srgbClr val="1E1E1E"/>
                 </a:solidFill>
-                <a:latin typeface="Microsoft YaHei"/>
+                <a:latin typeface="微软雅黑" panose="020B0503020204020204" charset="-122"/>
               </a:rPr>
-              <a:t>选择漏洞并发起分析会话</a:t>
-            </a:r>
-          </a:p>
-        </p:txBody>
-      </p:sp>
-      <p:sp>
-        <p:nvSpPr>
-          <p:cNvPr id="4" name="Rectangle 3"/>
+              <a:t>是否需要
+反馈修订</a:t>
+            </a:r>
+          </a:p>
+        </p:txBody>
+      </p:sp>
+      <p:sp>
+        <p:nvSpPr>
+          <p:cNvPr id="8" name="Rectangle 7"/>
           <p:cNvSpPr/>
           <p:nvPr/>
         </p:nvSpPr>
         <p:spPr>
           <a:xfrm>
-            <a:off x="4983480" y="1060704"/>
-            <a:ext cx="2194560" cy="384048"/>
+            <a:off x="2697480" y="4681728"/>
+            <a:ext cx="2286000" cy="475488"/>
+          </a:xfrm>
+          <a:prstGeom prst="rect">
+            <a:avLst/>
+          </a:prstGeom>
+          <a:solidFill>
+            <a:srgbClr val="F6F6F6"/>
+          </a:solidFill>
+          <a:ln w="13970">
+            <a:solidFill>
+              <a:srgbClr val="4A4A4A"/>
+            </a:solidFill>
+          </a:ln>
+        </p:spPr>
+        <p:style>
+          <a:lnRef idx="1">
+            <a:schemeClr val="accent1"/>
+          </a:lnRef>
+          <a:fillRef idx="3">
+            <a:schemeClr val="accent1"/>
+          </a:fillRef>
+          <a:effectRef idx="2">
+            <a:schemeClr val="accent1"/>
+          </a:effectRef>
+          <a:fontRef idx="minor">
+            <a:schemeClr val="lt1"/>
+          </a:fontRef>
+        </p:style>
+        <p:txBody>
+          <a:bodyPr wrap="square" lIns="0" tIns="0" rIns="0" bIns="0" rtlCol="0" anchor="ctr"/>
+          <a:lstStyle/>
+          <a:p>
+            <a:pPr algn="ctr">
+              <a:spcBef>
+                <a:spcPts val="0"/>
+              </a:spcBef>
+              <a:spcAft>
+                <a:spcPts val="0"/>
+              </a:spcAft>
+            </a:pPr>
+            <a:r>
+              <a:rPr sz="1400" b="0" i="0">
+                <a:solidFill>
+                  <a:srgbClr val="1E1E1E"/>
+                </a:solidFill>
+                <a:latin typeface="微软雅黑" panose="020B0503020204020204" charset="-122"/>
+              </a:rPr>
+              <a:t>反馈优化并重新生成</a:t>
+            </a:r>
+          </a:p>
+        </p:txBody>
+      </p:sp>
+      <p:sp>
+        <p:nvSpPr>
+          <p:cNvPr id="9" name="Rectangle 8"/>
+          <p:cNvSpPr/>
+          <p:nvPr/>
+        </p:nvSpPr>
+        <p:spPr>
+          <a:xfrm>
+            <a:off x="5029200" y="4736592"/>
+            <a:ext cx="2103120" cy="457200"/>
           </a:xfrm>
           <a:prstGeom prst="rect">
             <a:avLst/>
@@ -3259,7 +3853,7 @@
           </a:fontRef>
         </p:style>
         <p:txBody>
-          <a:bodyPr rtlCol="0" anchor="ctr" wrap="square" lIns="0" rIns="0" tIns="0" bIns="0"/>
+          <a:bodyPr wrap="square" lIns="0" tIns="0" rIns="0" bIns="0" rtlCol="0" anchor="ctr"/>
           <a:lstStyle/>
           <a:p>
             <a:pPr algn="ctr">
@@ -3271,27 +3865,27 @@
               </a:spcAft>
             </a:pPr>
             <a:r>
-              <a:rPr sz="1300" b="0" i="0">
+              <a:rPr sz="1400" b="0" i="0">
                 <a:solidFill>
                   <a:srgbClr val="1E1E1E"/>
                 </a:solidFill>
-                <a:latin typeface="Microsoft YaHei"/>
+                <a:latin typeface="微软雅黑" panose="020B0503020204020204" charset="-122"/>
               </a:rPr>
-              <a:t>构建安全上下文</a:t>
-            </a:r>
-          </a:p>
-        </p:txBody>
-      </p:sp>
-      <p:sp>
-        <p:nvSpPr>
-          <p:cNvPr id="5" name="Rectangle 4"/>
+              <a:t>确认交付结果</a:t>
+            </a:r>
+          </a:p>
+        </p:txBody>
+      </p:sp>
+      <p:sp>
+        <p:nvSpPr>
+          <p:cNvPr id="10" name="Rectangle 9"/>
           <p:cNvSpPr/>
           <p:nvPr/>
         </p:nvSpPr>
         <p:spPr>
           <a:xfrm>
-            <a:off x="4846320" y="1755648"/>
-            <a:ext cx="2468880" cy="457200"/>
+            <a:off x="4892040" y="5532120"/>
+            <a:ext cx="2377440" cy="457200"/>
           </a:xfrm>
           <a:prstGeom prst="rect">
             <a:avLst/>
@@ -3301,7 +3895,7 @@
           </a:solidFill>
           <a:ln w="13970">
             <a:solidFill>
-              <a:srgbClr val="7A7A7A"/>
+              <a:srgbClr val="4A4A4A"/>
             </a:solidFill>
           </a:ln>
         </p:spPr>
@@ -3320,7 +3914,7 @@
           </a:fontRef>
         </p:style>
         <p:txBody>
-          <a:bodyPr rtlCol="0" anchor="ctr" wrap="square" lIns="0" rIns="0" tIns="0" bIns="0"/>
+          <a:bodyPr wrap="square" lIns="0" tIns="0" rIns="0" bIns="0" rtlCol="0" anchor="ctr"/>
           <a:lstStyle/>
           <a:p>
             <a:pPr algn="ctr">
@@ -3332,317 +3926,11 @@
               </a:spcAft>
             </a:pPr>
             <a:r>
-              <a:rPr sz="1300" b="0" i="0">
+              <a:rPr sz="1400" b="0" i="0">
                 <a:solidFill>
                   <a:srgbClr val="1E1E1E"/>
                 </a:solidFill>
-                <a:latin typeface="Microsoft YaHei"/>
-              </a:rPr>
-              <a:t>生成候选监控 / 防护策略</a:t>
-            </a:r>
-          </a:p>
-        </p:txBody>
-      </p:sp>
-      <p:sp>
-        <p:nvSpPr>
-          <p:cNvPr id="6" name="Rectangle 5"/>
-          <p:cNvSpPr/>
-          <p:nvPr/>
-        </p:nvSpPr>
-        <p:spPr>
-          <a:xfrm>
-            <a:off x="4736592" y="2633472"/>
-            <a:ext cx="2697480" cy="530352"/>
-          </a:xfrm>
-          <a:prstGeom prst="rect">
-            <a:avLst/>
-          </a:prstGeom>
-          <a:solidFill>
-            <a:srgbClr val="FFFFFF"/>
-          </a:solidFill>
-          <a:ln w="13970">
-            <a:solidFill>
-              <a:srgbClr val="7A7A7A"/>
-            </a:solidFill>
-          </a:ln>
-        </p:spPr>
-        <p:style>
-          <a:lnRef idx="1">
-            <a:schemeClr val="accent1"/>
-          </a:lnRef>
-          <a:fillRef idx="3">
-            <a:schemeClr val="accent1"/>
-          </a:fillRef>
-          <a:effectRef idx="2">
-            <a:schemeClr val="accent1"/>
-          </a:effectRef>
-          <a:fontRef idx="minor">
-            <a:schemeClr val="lt1"/>
-          </a:fontRef>
-        </p:style>
-        <p:txBody>
-          <a:bodyPr rtlCol="0" anchor="ctr" wrap="square" lIns="0" rIns="0" tIns="0" bIns="0"/>
-          <a:lstStyle/>
-          <a:p>
-            <a:pPr algn="ctr">
-              <a:spcBef>
-                <a:spcPts val="0"/>
-              </a:spcBef>
-              <a:spcAft>
-                <a:spcPts val="0"/>
-              </a:spcAft>
-            </a:pPr>
-            <a:r>
-              <a:rPr sz="1300" b="0" i="0">
-                <a:solidFill>
-                  <a:srgbClr val="1E1E1E"/>
-                </a:solidFill>
-                <a:latin typeface="Microsoft YaHei"/>
-              </a:rPr>
-              <a:t>专家三维评审与同类型排序</a:t>
-            </a:r>
-          </a:p>
-        </p:txBody>
-      </p:sp>
-      <p:sp>
-        <p:nvSpPr>
-          <p:cNvPr id="7" name="Diamond 6"/>
-          <p:cNvSpPr/>
-          <p:nvPr/>
-        </p:nvSpPr>
-        <p:spPr>
-          <a:xfrm>
-            <a:off x="5074920" y="3584448"/>
-            <a:ext cx="2011680" cy="841248"/>
-          </a:xfrm>
-          <a:prstGeom prst="diamond">
-            <a:avLst/>
-          </a:prstGeom>
-          <a:solidFill>
-            <a:srgbClr val="FFFFFF"/>
-          </a:solidFill>
-          <a:ln w="13970">
-            <a:solidFill>
-              <a:srgbClr val="4A4A4A"/>
-            </a:solidFill>
-          </a:ln>
-        </p:spPr>
-        <p:style>
-          <a:lnRef idx="1">
-            <a:schemeClr val="accent1"/>
-          </a:lnRef>
-          <a:fillRef idx="3">
-            <a:schemeClr val="accent1"/>
-          </a:fillRef>
-          <a:effectRef idx="2">
-            <a:schemeClr val="accent1"/>
-          </a:effectRef>
-          <a:fontRef idx="minor">
-            <a:schemeClr val="lt1"/>
-          </a:fontRef>
-        </p:style>
-        <p:txBody>
-          <a:bodyPr rtlCol="0" anchor="ctr" wrap="square" lIns="0" rIns="0" tIns="0" bIns="0"/>
-          <a:lstStyle/>
-          <a:p>
-            <a:pPr algn="ctr">
-              <a:spcBef>
-                <a:spcPts val="0"/>
-              </a:spcBef>
-              <a:spcAft>
-                <a:spcPts val="0"/>
-              </a:spcAft>
-            </a:pPr>
-            <a:r>
-              <a:rPr sz="1300" b="0" i="0">
-                <a:solidFill>
-                  <a:srgbClr val="1E1E1E"/>
-                </a:solidFill>
-                <a:latin typeface="Microsoft YaHei"/>
-              </a:rPr>
-              <a:t>是否需要
-反馈修订</a:t>
-            </a:r>
-          </a:p>
-        </p:txBody>
-      </p:sp>
-      <p:sp>
-        <p:nvSpPr>
-          <p:cNvPr id="8" name="Rectangle 7"/>
-          <p:cNvSpPr/>
-          <p:nvPr/>
-        </p:nvSpPr>
-        <p:spPr>
-          <a:xfrm>
-            <a:off x="2697480" y="4681728"/>
-            <a:ext cx="2286000" cy="475488"/>
-          </a:xfrm>
-          <a:prstGeom prst="rect">
-            <a:avLst/>
-          </a:prstGeom>
-          <a:solidFill>
-            <a:srgbClr val="F6F6F6"/>
-          </a:solidFill>
-          <a:ln w="13970">
-            <a:solidFill>
-              <a:srgbClr val="4A4A4A"/>
-            </a:solidFill>
-          </a:ln>
-        </p:spPr>
-        <p:style>
-          <a:lnRef idx="1">
-            <a:schemeClr val="accent1"/>
-          </a:lnRef>
-          <a:fillRef idx="3">
-            <a:schemeClr val="accent1"/>
-          </a:fillRef>
-          <a:effectRef idx="2">
-            <a:schemeClr val="accent1"/>
-          </a:effectRef>
-          <a:fontRef idx="minor">
-            <a:schemeClr val="lt1"/>
-          </a:fontRef>
-        </p:style>
-        <p:txBody>
-          <a:bodyPr rtlCol="0" anchor="ctr" wrap="square" lIns="0" rIns="0" tIns="0" bIns="0"/>
-          <a:lstStyle/>
-          <a:p>
-            <a:pPr algn="ctr">
-              <a:spcBef>
-                <a:spcPts val="0"/>
-              </a:spcBef>
-              <a:spcAft>
-                <a:spcPts val="0"/>
-              </a:spcAft>
-            </a:pPr>
-            <a:r>
-              <a:rPr sz="1300" b="0" i="0">
-                <a:solidFill>
-                  <a:srgbClr val="1E1E1E"/>
-                </a:solidFill>
-                <a:latin typeface="Microsoft YaHei"/>
-              </a:rPr>
-              <a:t>反馈优化并重新生成</a:t>
-            </a:r>
-          </a:p>
-        </p:txBody>
-      </p:sp>
-      <p:sp>
-        <p:nvSpPr>
-          <p:cNvPr id="9" name="Rectangle 8"/>
-          <p:cNvSpPr/>
-          <p:nvPr/>
-        </p:nvSpPr>
-        <p:spPr>
-          <a:xfrm>
-            <a:off x="5029200" y="4736592"/>
-            <a:ext cx="2103120" cy="457200"/>
-          </a:xfrm>
-          <a:prstGeom prst="rect">
-            <a:avLst/>
-          </a:prstGeom>
-          <a:solidFill>
-            <a:srgbClr val="FFFFFF"/>
-          </a:solidFill>
-          <a:ln w="13970">
-            <a:solidFill>
-              <a:srgbClr val="7A7A7A"/>
-            </a:solidFill>
-          </a:ln>
-        </p:spPr>
-        <p:style>
-          <a:lnRef idx="1">
-            <a:schemeClr val="accent1"/>
-          </a:lnRef>
-          <a:fillRef idx="3">
-            <a:schemeClr val="accent1"/>
-          </a:fillRef>
-          <a:effectRef idx="2">
-            <a:schemeClr val="accent1"/>
-          </a:effectRef>
-          <a:fontRef idx="minor">
-            <a:schemeClr val="lt1"/>
-          </a:fontRef>
-        </p:style>
-        <p:txBody>
-          <a:bodyPr rtlCol="0" anchor="ctr" wrap="square" lIns="0" rIns="0" tIns="0" bIns="0"/>
-          <a:lstStyle/>
-          <a:p>
-            <a:pPr algn="ctr">
-              <a:spcBef>
-                <a:spcPts val="0"/>
-              </a:spcBef>
-              <a:spcAft>
-                <a:spcPts val="0"/>
-              </a:spcAft>
-            </a:pPr>
-            <a:r>
-              <a:rPr sz="1300" b="0" i="0">
-                <a:solidFill>
-                  <a:srgbClr val="1E1E1E"/>
-                </a:solidFill>
-                <a:latin typeface="Microsoft YaHei"/>
-              </a:rPr>
-              <a:t>确认交付结果</a:t>
-            </a:r>
-          </a:p>
-        </p:txBody>
-      </p:sp>
-      <p:sp>
-        <p:nvSpPr>
-          <p:cNvPr id="10" name="Rectangle 9"/>
-          <p:cNvSpPr/>
-          <p:nvPr/>
-        </p:nvSpPr>
-        <p:spPr>
-          <a:xfrm>
-            <a:off x="4892040" y="5532120"/>
-            <a:ext cx="2377440" cy="457200"/>
-          </a:xfrm>
-          <a:prstGeom prst="rect">
-            <a:avLst/>
-          </a:prstGeom>
-          <a:solidFill>
-            <a:srgbClr val="FFFFFF"/>
-          </a:solidFill>
-          <a:ln w="13970">
-            <a:solidFill>
-              <a:srgbClr val="4A4A4A"/>
-            </a:solidFill>
-          </a:ln>
-        </p:spPr>
-        <p:style>
-          <a:lnRef idx="1">
-            <a:schemeClr val="accent1"/>
-          </a:lnRef>
-          <a:fillRef idx="3">
-            <a:schemeClr val="accent1"/>
-          </a:fillRef>
-          <a:effectRef idx="2">
-            <a:schemeClr val="accent1"/>
-          </a:effectRef>
-          <a:fontRef idx="minor">
-            <a:schemeClr val="lt1"/>
-          </a:fontRef>
-        </p:style>
-        <p:txBody>
-          <a:bodyPr rtlCol="0" anchor="ctr" wrap="square" lIns="0" rIns="0" tIns="0" bIns="0"/>
-          <a:lstStyle/>
-          <a:p>
-            <a:pPr algn="ctr">
-              <a:spcBef>
-                <a:spcPts val="0"/>
-              </a:spcBef>
-              <a:spcAft>
-                <a:spcPts val="0"/>
-              </a:spcAft>
-            </a:pPr>
-            <a:r>
-              <a:rPr sz="1300" b="0" i="0">
-                <a:solidFill>
-                  <a:srgbClr val="1E1E1E"/>
-                </a:solidFill>
-                <a:latin typeface="Microsoft YaHei"/>
+                <a:latin typeface="微软雅黑" panose="020B0503020204020204" charset="-122"/>
               </a:rPr>
               <a:t>部署验证并记录审计</a:t>
             </a:r>
@@ -3837,7 +4125,7 @@
         </p:nvSpPr>
         <p:spPr>
           <a:xfrm>
-            <a:off x="5463540" y="4462272"/>
+            <a:off x="5470525" y="4455287"/>
             <a:ext cx="502920" cy="256032"/>
           </a:xfrm>
           <a:prstGeom prst="roundRect">
@@ -3867,7 +4155,7 @@
           </a:fontRef>
         </p:style>
         <p:txBody>
-          <a:bodyPr rtlCol="0" anchor="ctr" wrap="square" lIns="0" rIns="0" tIns="0" bIns="0"/>
+          <a:bodyPr wrap="square" lIns="0" tIns="0" rIns="0" bIns="0" rtlCol="0" anchor="ctr"/>
           <a:lstStyle/>
           <a:p>
             <a:pPr algn="ctr">
@@ -3879,11 +4167,11 @@
               </a:spcAft>
             </a:pPr>
             <a:r>
-              <a:rPr sz="950" b="0" i="0">
+              <a:rPr sz="1050" b="0" i="0">
                 <a:solidFill>
                   <a:srgbClr val="1E1E1E"/>
                 </a:solidFill>
-                <a:latin typeface="Microsoft YaHei"/>
+                <a:latin typeface="微软雅黑" panose="020B0503020204020204" charset="-122"/>
               </a:rPr>
               <a:t>否</a:t>
             </a:r>
@@ -4035,7 +4323,7 @@
           </a:fontRef>
         </p:style>
         <p:txBody>
-          <a:bodyPr rtlCol="0" anchor="ctr" wrap="square" lIns="0" rIns="0" tIns="0" bIns="0"/>
+          <a:bodyPr wrap="square" lIns="0" tIns="0" rIns="0" bIns="0" rtlCol="0" anchor="ctr"/>
           <a:lstStyle/>
           <a:p>
             <a:pPr algn="ctr">
@@ -4047,183 +4335,13 @@
               </a:spcAft>
             </a:pPr>
             <a:r>
-              <a:rPr sz="950" b="0" i="0">
+              <a:rPr sz="1050" b="0" i="0">
                 <a:solidFill>
                   <a:srgbClr val="1E1E1E"/>
                 </a:solidFill>
-                <a:latin typeface="Microsoft YaHei"/>
+                <a:latin typeface="微软雅黑" panose="020B0503020204020204" charset="-122"/>
               </a:rPr>
               <a:t>是</a:t>
-            </a:r>
-          </a:p>
-        </p:txBody>
-      </p:sp>
-      <p:cxnSp>
-        <p:nvCxnSpPr>
-          <p:cNvPr id="21" name="Connector 20"/>
-          <p:cNvCxnSpPr/>
-          <p:nvPr/>
-        </p:nvCxnSpPr>
-        <p:spPr>
-          <a:xfrm flipH="1">
-            <a:off x="4572000" y="4919472"/>
-            <a:ext cx="411480" cy="0"/>
-          </a:xfrm>
-          <a:prstGeom prst="line">
-            <a:avLst/>
-          </a:prstGeom>
-          <a:ln w="12700">
-            <a:solidFill>
-              <a:srgbClr val="7A7A7A"/>
-            </a:solidFill>
-            <a:prstDash val="dash"/>
-          </a:ln>
-        </p:spPr>
-        <p:style>
-          <a:lnRef idx="2">
-            <a:schemeClr val="accent1"/>
-          </a:lnRef>
-          <a:fillRef idx="0">
-            <a:schemeClr val="accent1"/>
-          </a:fillRef>
-          <a:effectRef idx="1">
-            <a:schemeClr val="accent1"/>
-          </a:effectRef>
-          <a:fontRef idx="minor">
-            <a:schemeClr val="tx1"/>
-          </a:fontRef>
-        </p:style>
-      </p:cxnSp>
-      <p:cxnSp>
-        <p:nvCxnSpPr>
-          <p:cNvPr id="22" name="Connector 21"/>
-          <p:cNvCxnSpPr/>
-          <p:nvPr/>
-        </p:nvCxnSpPr>
-        <p:spPr>
-          <a:xfrm flipV="1">
-            <a:off x="4572000" y="1993392"/>
-            <a:ext cx="0" cy="2926080"/>
-          </a:xfrm>
-          <a:prstGeom prst="line">
-            <a:avLst/>
-          </a:prstGeom>
-          <a:ln w="12700">
-            <a:solidFill>
-              <a:srgbClr val="7A7A7A"/>
-            </a:solidFill>
-            <a:prstDash val="dash"/>
-          </a:ln>
-        </p:spPr>
-        <p:style>
-          <a:lnRef idx="2">
-            <a:schemeClr val="accent1"/>
-          </a:lnRef>
-          <a:fillRef idx="0">
-            <a:schemeClr val="accent1"/>
-          </a:fillRef>
-          <a:effectRef idx="1">
-            <a:schemeClr val="accent1"/>
-          </a:effectRef>
-          <a:fontRef idx="minor">
-            <a:schemeClr val="tx1"/>
-          </a:fontRef>
-        </p:style>
-      </p:cxnSp>
-      <p:cxnSp>
-        <p:nvCxnSpPr>
-          <p:cNvPr id="23" name="Connector 22"/>
-          <p:cNvCxnSpPr/>
-          <p:nvPr/>
-        </p:nvCxnSpPr>
-        <p:spPr>
-          <a:xfrm>
-            <a:off x="4572000" y="1993392"/>
-            <a:ext cx="274320" cy="0"/>
-          </a:xfrm>
-          <a:prstGeom prst="line">
-            <a:avLst/>
-          </a:prstGeom>
-          <a:ln w="12700">
-            <a:solidFill>
-              <a:srgbClr val="7A7A7A"/>
-            </a:solidFill>
-            <a:prstDash val="dash"/>
-            <a:tailEnd type="arrow"/>
-          </a:ln>
-        </p:spPr>
-        <p:style>
-          <a:lnRef idx="2">
-            <a:schemeClr val="accent1"/>
-          </a:lnRef>
-          <a:fillRef idx="0">
-            <a:schemeClr val="accent1"/>
-          </a:fillRef>
-          <a:effectRef idx="1">
-            <a:schemeClr val="accent1"/>
-          </a:effectRef>
-          <a:fontRef idx="minor">
-            <a:schemeClr val="tx1"/>
-          </a:fontRef>
-        </p:style>
-      </p:cxnSp>
-      <p:sp>
-        <p:nvSpPr>
-          <p:cNvPr id="24" name="Rounded Rectangle 23"/>
-          <p:cNvSpPr/>
-          <p:nvPr/>
-        </p:nvSpPr>
-        <p:spPr>
-          <a:xfrm>
-            <a:off x="3296412" y="2267712"/>
-            <a:ext cx="1417320" cy="256032"/>
-          </a:xfrm>
-          <a:prstGeom prst="roundRect">
-            <a:avLst/>
-          </a:prstGeom>
-          <a:solidFill>
-            <a:srgbClr val="FFFFFF"/>
-          </a:solidFill>
-          <a:ln w="10160">
-            <a:solidFill>
-              <a:srgbClr val="B8B8B8"/>
-            </a:solidFill>
-          </a:ln>
-        </p:spPr>
-        <p:style>
-          <a:lnRef idx="1">
-            <a:schemeClr val="accent1"/>
-          </a:lnRef>
-          <a:fillRef idx="3">
-            <a:schemeClr val="accent1"/>
-          </a:fillRef>
-          <a:effectRef idx="2">
-            <a:schemeClr val="accent1"/>
-          </a:effectRef>
-          <a:fontRef idx="minor">
-            <a:schemeClr val="lt1"/>
-          </a:fontRef>
-        </p:style>
-        <p:txBody>
-          <a:bodyPr rtlCol="0" anchor="ctr" wrap="square" lIns="0" rIns="0" tIns="0" bIns="0"/>
-          <a:lstStyle/>
-          <a:p>
-            <a:pPr algn="ctr">
-              <a:spcBef>
-                <a:spcPts val="0"/>
-              </a:spcBef>
-              <a:spcAft>
-                <a:spcPts val="0"/>
-              </a:spcAft>
-            </a:pPr>
-            <a:r>
-              <a:rPr sz="950" b="0" i="0">
-                <a:solidFill>
-                  <a:srgbClr val="1E1E1E"/>
-                </a:solidFill>
-                <a:latin typeface="Microsoft YaHei"/>
-              </a:rPr>
-              <a:t>修订后返回生成阶段</a:t>
             </a:r>
           </a:p>
         </p:txBody>
@@ -4237,7 +4355,7 @@
 </file>
 
 <file path=ppt/slides/slide2.xml><?xml version="1.0" encoding="utf-8"?>
-<p:sld xmlns:a="http://schemas.openxmlformats.org/drawingml/2006/main" xmlns:p="http://schemas.openxmlformats.org/presentationml/2006/main" xmlns:r="http://schemas.openxmlformats.org/officeDocument/2006/relationships">
+<p:sld xmlns:a="http://schemas.openxmlformats.org/drawingml/2006/main" xmlns:r="http://schemas.openxmlformats.org/officeDocument/2006/relationships" xmlns:p="http://schemas.openxmlformats.org/presentationml/2006/main">
   <p:cSld>
     <p:bg>
       <p:bgPr>
@@ -4253,25 +4371,30 @@
         <p:cNvGrpSpPr/>
         <p:nvPr/>
       </p:nvGrpSpPr>
-      <p:grpSpPr/>
-      <p:sp>
-        <p:nvSpPr>
-          <p:cNvPr id="2" name="Rectangle 1"/>
+      <p:grpSpPr>
+        <a:xfrm>
+          <a:off x="0" y="0"/>
+          <a:ext cx="0" cy="0"/>
+          <a:chOff x="0" y="0"/>
+          <a:chExt cx="0" cy="0"/>
+        </a:xfrm>
+      </p:grpSpPr>
+      <p:sp>
+        <p:nvSpPr>
+          <p:cNvPr id="2" name="Oval 1"/>
           <p:cNvSpPr/>
           <p:nvPr/>
         </p:nvSpPr>
         <p:spPr>
           <a:xfrm>
-            <a:off x="347472" y="365760"/>
-            <a:ext cx="1828800" cy="384048"/>
-          </a:xfrm>
-          <a:prstGeom prst="rect">
-            <a:avLst/>
-          </a:prstGeom>
-          <a:solidFill>
-            <a:srgbClr val="FFFFFF"/>
-          </a:solidFill>
-          <a:ln w="13970">
+            <a:off x="813816" y="1280160"/>
+            <a:ext cx="237744" cy="237744"/>
+          </a:xfrm>
+          <a:prstGeom prst="ellipse">
+            <a:avLst/>
+          </a:prstGeom>
+          <a:noFill/>
+          <a:ln w="12700">
             <a:solidFill>
               <a:srgbClr val="4A4A4A"/>
             </a:solidFill>
@@ -4292,7 +4415,174 @@
           </a:fontRef>
         </p:style>
         <p:txBody>
-          <a:bodyPr rtlCol="0" anchor="ctr" wrap="square" lIns="0" rIns="0" tIns="0" bIns="0"/>
+          <a:bodyPr rtlCol="0" anchor="ctr"/>
+          <a:lstStyle/>
+          <a:p>
+            <a:pPr algn="ctr"/>
+            <a:endParaRPr sz="2800"/>
+          </a:p>
+        </p:txBody>
+      </p:sp>
+      <p:cxnSp>
+        <p:nvCxnSpPr>
+          <p:cNvPr id="3" name="Connector 2"/>
+          <p:cNvCxnSpPr/>
+          <p:nvPr/>
+        </p:nvCxnSpPr>
+        <p:spPr>
+          <a:xfrm>
+            <a:off x="932688" y="1536192"/>
+            <a:ext cx="0" cy="502920"/>
+          </a:xfrm>
+          <a:prstGeom prst="line">
+            <a:avLst/>
+          </a:prstGeom>
+          <a:ln w="12700">
+            <a:solidFill>
+              <a:srgbClr val="4A4A4A"/>
+            </a:solidFill>
+          </a:ln>
+        </p:spPr>
+        <p:style>
+          <a:lnRef idx="2">
+            <a:schemeClr val="accent1"/>
+          </a:lnRef>
+          <a:fillRef idx="0">
+            <a:schemeClr val="accent1"/>
+          </a:fillRef>
+          <a:effectRef idx="1">
+            <a:schemeClr val="accent1"/>
+          </a:effectRef>
+          <a:fontRef idx="minor">
+            <a:schemeClr val="tx1"/>
+          </a:fontRef>
+        </p:style>
+      </p:cxnSp>
+      <p:cxnSp>
+        <p:nvCxnSpPr>
+          <p:cNvPr id="4" name="Connector 3"/>
+          <p:cNvCxnSpPr/>
+          <p:nvPr/>
+        </p:nvCxnSpPr>
+        <p:spPr>
+          <a:xfrm>
+            <a:off x="749808" y="1764792"/>
+            <a:ext cx="365760" cy="0"/>
+          </a:xfrm>
+          <a:prstGeom prst="line">
+            <a:avLst/>
+          </a:prstGeom>
+          <a:ln w="12700">
+            <a:solidFill>
+              <a:srgbClr val="4A4A4A"/>
+            </a:solidFill>
+          </a:ln>
+        </p:spPr>
+        <p:style>
+          <a:lnRef idx="2">
+            <a:schemeClr val="accent1"/>
+          </a:lnRef>
+          <a:fillRef idx="0">
+            <a:schemeClr val="accent1"/>
+          </a:fillRef>
+          <a:effectRef idx="1">
+            <a:schemeClr val="accent1"/>
+          </a:effectRef>
+          <a:fontRef idx="minor">
+            <a:schemeClr val="tx1"/>
+          </a:fontRef>
+        </p:style>
+      </p:cxnSp>
+      <p:cxnSp>
+        <p:nvCxnSpPr>
+          <p:cNvPr id="5" name="Connector 4"/>
+          <p:cNvCxnSpPr/>
+          <p:nvPr/>
+        </p:nvCxnSpPr>
+        <p:spPr>
+          <a:xfrm flipH="1">
+            <a:off x="768096" y="2039112"/>
+            <a:ext cx="164592" cy="301752"/>
+          </a:xfrm>
+          <a:prstGeom prst="line">
+            <a:avLst/>
+          </a:prstGeom>
+          <a:ln w="12700">
+            <a:solidFill>
+              <a:srgbClr val="4A4A4A"/>
+            </a:solidFill>
+          </a:ln>
+        </p:spPr>
+        <p:style>
+          <a:lnRef idx="2">
+            <a:schemeClr val="accent1"/>
+          </a:lnRef>
+          <a:fillRef idx="0">
+            <a:schemeClr val="accent1"/>
+          </a:fillRef>
+          <a:effectRef idx="1">
+            <a:schemeClr val="accent1"/>
+          </a:effectRef>
+          <a:fontRef idx="minor">
+            <a:schemeClr val="tx1"/>
+          </a:fontRef>
+        </p:style>
+      </p:cxnSp>
+      <p:cxnSp>
+        <p:nvCxnSpPr>
+          <p:cNvPr id="6" name="Connector 5"/>
+          <p:cNvCxnSpPr/>
+          <p:nvPr/>
+        </p:nvCxnSpPr>
+        <p:spPr>
+          <a:xfrm>
+            <a:off x="932688" y="2039112"/>
+            <a:ext cx="164592" cy="301752"/>
+          </a:xfrm>
+          <a:prstGeom prst="line">
+            <a:avLst/>
+          </a:prstGeom>
+          <a:ln w="12700">
+            <a:solidFill>
+              <a:srgbClr val="4A4A4A"/>
+            </a:solidFill>
+          </a:ln>
+        </p:spPr>
+        <p:style>
+          <a:lnRef idx="2">
+            <a:schemeClr val="accent1"/>
+          </a:lnRef>
+          <a:fillRef idx="0">
+            <a:schemeClr val="accent1"/>
+          </a:fillRef>
+          <a:effectRef idx="1">
+            <a:schemeClr val="accent1"/>
+          </a:effectRef>
+          <a:fontRef idx="minor">
+            <a:schemeClr val="tx1"/>
+          </a:fontRef>
+        </p:style>
+      </p:cxnSp>
+      <p:sp>
+        <p:nvSpPr>
+          <p:cNvPr id="7" name="TextBox 6"/>
+          <p:cNvSpPr txBox="1"/>
+          <p:nvPr/>
+        </p:nvSpPr>
+        <p:spPr>
+          <a:xfrm>
+            <a:off x="201167" y="2400872"/>
+            <a:ext cx="1463040" cy="245745"/>
+          </a:xfrm>
+          <a:prstGeom prst="rect">
+            <a:avLst/>
+          </a:prstGeom>
+          <a:noFill/>
+        </p:spPr>
+        <p:txBody>
+          <a:bodyPr wrap="square" lIns="0" tIns="0" rIns="0" bIns="0" anchor="ctr">
+            <a:spAutoFit/>
+          </a:bodyPr>
           <a:lstStyle/>
           <a:p>
             <a:pPr algn="ctr">
@@ -4304,11 +4594,11 @@
               </a:spcAft>
             </a:pPr>
             <a:r>
-              <a:rPr sz="1300" b="0" i="0">
+              <a:rPr sz="1600" b="0" i="0">
                 <a:solidFill>
                   <a:srgbClr val="1E1E1E"/>
                 </a:solidFill>
-                <a:latin typeface="Microsoft YaHei"/>
+                <a:latin typeface="微软雅黑" panose="020B0503020204020204" charset="-122"/>
               </a:rPr>
               <a:t>安全工程师</a:t>
             </a:r>
@@ -4317,22 +4607,20 @@
       </p:sp>
       <p:sp>
         <p:nvSpPr>
-          <p:cNvPr id="3" name="Rectangle 2"/>
+          <p:cNvPr id="8" name="Oval 7"/>
           <p:cNvSpPr/>
           <p:nvPr/>
         </p:nvSpPr>
         <p:spPr>
           <a:xfrm>
-            <a:off x="10012680" y="365760"/>
-            <a:ext cx="1828800" cy="384048"/>
-          </a:xfrm>
-          <a:prstGeom prst="rect">
-            <a:avLst/>
-          </a:prstGeom>
-          <a:solidFill>
-            <a:srgbClr val="FFFFFF"/>
-          </a:solidFill>
-          <a:ln w="13970">
+            <a:off x="813816" y="4114800"/>
+            <a:ext cx="237744" cy="237744"/>
+          </a:xfrm>
+          <a:prstGeom prst="ellipse">
+            <a:avLst/>
+          </a:prstGeom>
+          <a:noFill/>
+          <a:ln w="12700">
             <a:solidFill>
               <a:srgbClr val="4A4A4A"/>
             </a:solidFill>
@@ -4353,7 +4641,174 @@
           </a:fontRef>
         </p:style>
         <p:txBody>
-          <a:bodyPr rtlCol="0" anchor="ctr" wrap="square" lIns="0" rIns="0" tIns="0" bIns="0"/>
+          <a:bodyPr rtlCol="0" anchor="ctr"/>
+          <a:lstStyle/>
+          <a:p>
+            <a:pPr algn="ctr"/>
+            <a:endParaRPr sz="2800"/>
+          </a:p>
+        </p:txBody>
+      </p:sp>
+      <p:cxnSp>
+        <p:nvCxnSpPr>
+          <p:cNvPr id="9" name="Connector 8"/>
+          <p:cNvCxnSpPr/>
+          <p:nvPr/>
+        </p:nvCxnSpPr>
+        <p:spPr>
+          <a:xfrm>
+            <a:off x="932688" y="4370832"/>
+            <a:ext cx="0" cy="502920"/>
+          </a:xfrm>
+          <a:prstGeom prst="line">
+            <a:avLst/>
+          </a:prstGeom>
+          <a:ln w="12700">
+            <a:solidFill>
+              <a:srgbClr val="4A4A4A"/>
+            </a:solidFill>
+          </a:ln>
+        </p:spPr>
+        <p:style>
+          <a:lnRef idx="2">
+            <a:schemeClr val="accent1"/>
+          </a:lnRef>
+          <a:fillRef idx="0">
+            <a:schemeClr val="accent1"/>
+          </a:fillRef>
+          <a:effectRef idx="1">
+            <a:schemeClr val="accent1"/>
+          </a:effectRef>
+          <a:fontRef idx="minor">
+            <a:schemeClr val="tx1"/>
+          </a:fontRef>
+        </p:style>
+      </p:cxnSp>
+      <p:cxnSp>
+        <p:nvCxnSpPr>
+          <p:cNvPr id="10" name="Connector 9"/>
+          <p:cNvCxnSpPr/>
+          <p:nvPr/>
+        </p:nvCxnSpPr>
+        <p:spPr>
+          <a:xfrm>
+            <a:off x="749808" y="4599432"/>
+            <a:ext cx="365760" cy="0"/>
+          </a:xfrm>
+          <a:prstGeom prst="line">
+            <a:avLst/>
+          </a:prstGeom>
+          <a:ln w="12700">
+            <a:solidFill>
+              <a:srgbClr val="4A4A4A"/>
+            </a:solidFill>
+          </a:ln>
+        </p:spPr>
+        <p:style>
+          <a:lnRef idx="2">
+            <a:schemeClr val="accent1"/>
+          </a:lnRef>
+          <a:fillRef idx="0">
+            <a:schemeClr val="accent1"/>
+          </a:fillRef>
+          <a:effectRef idx="1">
+            <a:schemeClr val="accent1"/>
+          </a:effectRef>
+          <a:fontRef idx="minor">
+            <a:schemeClr val="tx1"/>
+          </a:fontRef>
+        </p:style>
+      </p:cxnSp>
+      <p:cxnSp>
+        <p:nvCxnSpPr>
+          <p:cNvPr id="11" name="Connector 10"/>
+          <p:cNvCxnSpPr/>
+          <p:nvPr/>
+        </p:nvCxnSpPr>
+        <p:spPr>
+          <a:xfrm flipH="1">
+            <a:off x="768096" y="4873752"/>
+            <a:ext cx="164592" cy="301752"/>
+          </a:xfrm>
+          <a:prstGeom prst="line">
+            <a:avLst/>
+          </a:prstGeom>
+          <a:ln w="12700">
+            <a:solidFill>
+              <a:srgbClr val="4A4A4A"/>
+            </a:solidFill>
+          </a:ln>
+        </p:spPr>
+        <p:style>
+          <a:lnRef idx="2">
+            <a:schemeClr val="accent1"/>
+          </a:lnRef>
+          <a:fillRef idx="0">
+            <a:schemeClr val="accent1"/>
+          </a:fillRef>
+          <a:effectRef idx="1">
+            <a:schemeClr val="accent1"/>
+          </a:effectRef>
+          <a:fontRef idx="minor">
+            <a:schemeClr val="tx1"/>
+          </a:fontRef>
+        </p:style>
+      </p:cxnSp>
+      <p:cxnSp>
+        <p:nvCxnSpPr>
+          <p:cNvPr id="12" name="Connector 11"/>
+          <p:cNvCxnSpPr/>
+          <p:nvPr/>
+        </p:nvCxnSpPr>
+        <p:spPr>
+          <a:xfrm>
+            <a:off x="932688" y="4873752"/>
+            <a:ext cx="164592" cy="301752"/>
+          </a:xfrm>
+          <a:prstGeom prst="line">
+            <a:avLst/>
+          </a:prstGeom>
+          <a:ln w="12700">
+            <a:solidFill>
+              <a:srgbClr val="4A4A4A"/>
+            </a:solidFill>
+          </a:ln>
+        </p:spPr>
+        <p:style>
+          <a:lnRef idx="2">
+            <a:schemeClr val="accent1"/>
+          </a:lnRef>
+          <a:fillRef idx="0">
+            <a:schemeClr val="accent1"/>
+          </a:fillRef>
+          <a:effectRef idx="1">
+            <a:schemeClr val="accent1"/>
+          </a:effectRef>
+          <a:fontRef idx="minor">
+            <a:schemeClr val="tx1"/>
+          </a:fontRef>
+        </p:style>
+      </p:cxnSp>
+      <p:sp>
+        <p:nvSpPr>
+          <p:cNvPr id="13" name="TextBox 12"/>
+          <p:cNvSpPr txBox="1"/>
+          <p:nvPr/>
+        </p:nvSpPr>
+        <p:spPr>
+          <a:xfrm>
+            <a:off x="201167" y="5235512"/>
+            <a:ext cx="1463040" cy="245745"/>
+          </a:xfrm>
+          <a:prstGeom prst="rect">
+            <a:avLst/>
+          </a:prstGeom>
+          <a:noFill/>
+        </p:spPr>
+        <p:txBody>
+          <a:bodyPr wrap="square" lIns="0" tIns="0" rIns="0" bIns="0" anchor="ctr">
+            <a:spAutoFit/>
+          </a:bodyPr>
           <a:lstStyle/>
           <a:p>
             <a:pPr algn="ctr">
@@ -4365,11 +4820,11 @@
               </a:spcAft>
             </a:pPr>
             <a:r>
-              <a:rPr sz="1300" b="0" i="0">
+              <a:rPr sz="1600" b="0" i="0">
                 <a:solidFill>
                   <a:srgbClr val="1E1E1E"/>
                 </a:solidFill>
-                <a:latin typeface="Microsoft YaHei"/>
+                <a:latin typeface="微软雅黑" panose="020B0503020204020204" charset="-122"/>
               </a:rPr>
               <a:t>专家评审员</a:t>
             </a:r>
@@ -4378,14 +4833,14 @@
       </p:sp>
       <p:sp>
         <p:nvSpPr>
-          <p:cNvPr id="4" name="Rounded Rectangle 3"/>
+          <p:cNvPr id="14" name="Rounded Rectangle 13"/>
           <p:cNvSpPr/>
           <p:nvPr/>
         </p:nvSpPr>
         <p:spPr>
           <a:xfrm>
-            <a:off x="2834640" y="237744"/>
-            <a:ext cx="6492240" cy="6144768"/>
+            <a:off x="2057400" y="401520"/>
+            <a:ext cx="7131050" cy="5916389"/>
           </a:xfrm>
           <a:prstGeom prst="roundRect">
             <a:avLst/>
@@ -4414,7 +4869,55 @@
           </a:fontRef>
         </p:style>
         <p:txBody>
-          <a:bodyPr rtlCol="0" anchor="ctr" wrap="square" lIns="0" rIns="0" tIns="0" bIns="0"/>
+          <a:bodyPr rtlCol="0" anchor="ctr"/>
+          <a:lstStyle/>
+          <a:p>
+            <a:pPr algn="ctr"/>
+            <a:endParaRPr sz="2800"/>
+          </a:p>
+        </p:txBody>
+      </p:sp>
+      <p:sp>
+        <p:nvSpPr>
+          <p:cNvPr id="15" name="Oval 14"/>
+          <p:cNvSpPr/>
+          <p:nvPr/>
+        </p:nvSpPr>
+        <p:spPr>
+          <a:xfrm>
+            <a:off x="2880360" y="854710"/>
+            <a:ext cx="2497455" cy="818515"/>
+          </a:xfrm>
+          <a:prstGeom prst="ellipse">
+            <a:avLst/>
+          </a:prstGeom>
+          <a:solidFill>
+            <a:schemeClr val="bg1">
+              <a:lumMod val="85000"/>
+            </a:schemeClr>
+          </a:solidFill>
+          <a:ln w="13970">
+            <a:solidFill>
+              <a:srgbClr val="7A7A7A"/>
+            </a:solidFill>
+          </a:ln>
+        </p:spPr>
+        <p:style>
+          <a:lnRef idx="1">
+            <a:schemeClr val="accent1"/>
+          </a:lnRef>
+          <a:fillRef idx="3">
+            <a:schemeClr val="accent1"/>
+          </a:fillRef>
+          <a:effectRef idx="2">
+            <a:schemeClr val="accent1"/>
+          </a:effectRef>
+          <a:fontRef idx="minor">
+            <a:schemeClr val="lt1"/>
+          </a:fontRef>
+        </p:style>
+        <p:txBody>
+          <a:bodyPr wrap="square" lIns="0" tIns="0" rIns="0" bIns="0" rtlCol="0" anchor="ctr"/>
           <a:lstStyle/>
           <a:p>
             <a:pPr algn="ctr">
@@ -4426,33 +4929,41 @@
               </a:spcAft>
             </a:pPr>
             <a:r>
-              <a:rPr sz="1300" b="0" i="0">
+              <a:rPr lang="zh-CN" altLang="en-US" sz="1600" b="0" i="0" dirty="0">
                 <a:solidFill>
                   <a:srgbClr val="1E1E1E"/>
                 </a:solidFill>
-                <a:latin typeface="Microsoft YaHei"/>
+                <a:latin typeface="微软雅黑" panose="020B0503020204020204" charset="-122"/>
               </a:rPr>
-              <a:t/>
-            </a:r>
-          </a:p>
-        </p:txBody>
-      </p:sp>
-      <p:sp>
-        <p:nvSpPr>
-          <p:cNvPr id="5" name="Rectangle 4"/>
+              <a:t>知识库管理</a:t>
+            </a:r>
+            <a:endParaRPr sz="1600" b="0" i="0" dirty="0">
+              <a:solidFill>
+                <a:srgbClr val="1E1E1E"/>
+              </a:solidFill>
+              <a:latin typeface="微软雅黑" panose="020B0503020204020204" charset="-122"/>
+            </a:endParaRPr>
+          </a:p>
+        </p:txBody>
+      </p:sp>
+      <p:sp>
+        <p:nvSpPr>
+          <p:cNvPr id="16" name="Oval 15"/>
           <p:cNvSpPr/>
           <p:nvPr/>
         </p:nvSpPr>
         <p:spPr>
           <a:xfrm>
-            <a:off x="3749039" y="658368"/>
-            <a:ext cx="1874519" cy="365760"/>
-          </a:xfrm>
-          <a:prstGeom prst="rect">
+            <a:off x="2880360" y="2308117"/>
+            <a:ext cx="2029460" cy="818515"/>
+          </a:xfrm>
+          <a:prstGeom prst="ellipse">
             <a:avLst/>
           </a:prstGeom>
           <a:solidFill>
-            <a:srgbClr val="FFFFFF"/>
+            <a:schemeClr val="bg1">
+              <a:lumMod val="85000"/>
+            </a:schemeClr>
           </a:solidFill>
           <a:ln w="13970">
             <a:solidFill>
@@ -4475,7 +4986,7 @@
           </a:fontRef>
         </p:style>
         <p:txBody>
-          <a:bodyPr rtlCol="0" anchor="ctr" wrap="square" lIns="0" rIns="0" tIns="0" bIns="0"/>
+          <a:bodyPr wrap="square" lIns="0" tIns="0" rIns="0" bIns="0" rtlCol="0" anchor="ctr"/>
           <a:lstStyle/>
           <a:p>
             <a:pPr algn="ctr">
@@ -4487,33 +4998,41 @@
               </a:spcAft>
             </a:pPr>
             <a:r>
-              <a:rPr sz="1300" b="0" i="0">
+              <a:rPr lang="zh-CN" altLang="en-US" sz="1600" dirty="0">
                 <a:solidFill>
                   <a:srgbClr val="1E1E1E"/>
                 </a:solidFill>
-                <a:latin typeface="Microsoft YaHei"/>
+                <a:latin typeface="微软雅黑" panose="020B0503020204020204" charset="-122"/>
               </a:rPr>
-              <a:t>漏洞知识与证据管理</a:t>
-            </a:r>
-          </a:p>
-        </p:txBody>
-      </p:sp>
-      <p:sp>
-        <p:nvSpPr>
-          <p:cNvPr id="6" name="Rectangle 5"/>
+              <a:t>智能体调度</a:t>
+            </a:r>
+            <a:endParaRPr sz="1600" b="0" i="0" dirty="0">
+              <a:solidFill>
+                <a:srgbClr val="1E1E1E"/>
+              </a:solidFill>
+              <a:latin typeface="微软雅黑" panose="020B0503020204020204" charset="-122"/>
+            </a:endParaRPr>
+          </a:p>
+        </p:txBody>
+      </p:sp>
+      <p:sp>
+        <p:nvSpPr>
+          <p:cNvPr id="17" name="Oval 16"/>
           <p:cNvSpPr/>
           <p:nvPr/>
         </p:nvSpPr>
         <p:spPr>
           <a:xfrm>
-            <a:off x="3749039" y="1554480"/>
-            <a:ext cx="1874519" cy="420624"/>
-          </a:xfrm>
-          <a:prstGeom prst="rect">
+            <a:off x="6635432" y="2273281"/>
+            <a:ext cx="2029460" cy="818515"/>
+          </a:xfrm>
+          <a:prstGeom prst="ellipse">
             <a:avLst/>
           </a:prstGeom>
           <a:solidFill>
-            <a:srgbClr val="FFFFFF"/>
+            <a:schemeClr val="bg1">
+              <a:lumMod val="85000"/>
+            </a:schemeClr>
           </a:solidFill>
           <a:ln w="13970">
             <a:solidFill>
@@ -4536,7 +5055,7 @@
           </a:fontRef>
         </p:style>
         <p:txBody>
-          <a:bodyPr rtlCol="0" anchor="ctr" wrap="square" lIns="0" rIns="0" tIns="0" bIns="0"/>
+          <a:bodyPr wrap="square" lIns="0" tIns="0" rIns="0" bIns="0" rtlCol="0" anchor="ctr"/>
           <a:lstStyle/>
           <a:p>
             <a:pPr algn="ctr">
@@ -4548,57 +5067,21 @@
               </a:spcAft>
             </a:pPr>
             <a:r>
-              <a:rPr sz="1300" b="0" i="0">
+              <a:rPr lang="zh-CN" sz="1600" b="0" i="0" dirty="0">
                 <a:solidFill>
                   <a:srgbClr val="1E1E1E"/>
                 </a:solidFill>
-                <a:latin typeface="Microsoft YaHei"/>
+                <a:latin typeface="微软雅黑" panose="020B0503020204020204" charset="-122"/>
               </a:rPr>
-              <a:t>安全上下文构建</a:t>
-            </a:r>
-          </a:p>
-        </p:txBody>
-      </p:sp>
-      <p:sp>
-        <p:nvSpPr>
-          <p:cNvPr id="7" name="Rectangle 6"/>
-          <p:cNvSpPr/>
-          <p:nvPr/>
-        </p:nvSpPr>
-        <p:spPr>
-          <a:xfrm>
-            <a:off x="3749039" y="2523744"/>
-            <a:ext cx="1874519" cy="493776"/>
-          </a:xfrm>
-          <a:prstGeom prst="rect">
-            <a:avLst/>
-          </a:prstGeom>
-          <a:solidFill>
-            <a:srgbClr val="FFFFFF"/>
-          </a:solidFill>
-          <a:ln w="13970">
-            <a:solidFill>
-              <a:srgbClr val="7A7A7A"/>
-            </a:solidFill>
-          </a:ln>
-        </p:spPr>
-        <p:style>
-          <a:lnRef idx="1">
-            <a:schemeClr val="accent1"/>
-          </a:lnRef>
-          <a:fillRef idx="3">
-            <a:schemeClr val="accent1"/>
-          </a:fillRef>
-          <a:effectRef idx="2">
-            <a:schemeClr val="accent1"/>
-          </a:effectRef>
-          <a:fontRef idx="minor">
-            <a:schemeClr val="lt1"/>
-          </a:fontRef>
-        </p:style>
-        <p:txBody>
-          <a:bodyPr rtlCol="0" anchor="ctr" wrap="square" lIns="0" rIns="0" tIns="0" bIns="0"/>
-          <a:lstStyle/>
+              <a:t>候选安全策略</a:t>
+            </a:r>
+            <a:endParaRPr lang="en-US" altLang="zh-CN" sz="1600" b="0" i="0" dirty="0">
+              <a:solidFill>
+                <a:srgbClr val="1E1E1E"/>
+              </a:solidFill>
+              <a:latin typeface="微软雅黑" panose="020B0503020204020204" charset="-122"/>
+            </a:endParaRPr>
+          </a:p>
           <a:p>
             <a:pPr algn="ctr">
               <a:spcBef>
@@ -4609,34 +5092,41 @@
               </a:spcAft>
             </a:pPr>
             <a:r>
-              <a:rPr sz="1300" b="0" i="0">
+              <a:rPr lang="zh-CN" altLang="en-US" sz="1600" b="0" i="0" dirty="0">
                 <a:solidFill>
                   <a:srgbClr val="1E1E1E"/>
                 </a:solidFill>
-                <a:latin typeface="Microsoft YaHei"/>
+                <a:latin typeface="微软雅黑" panose="020B0503020204020204" charset="-122"/>
               </a:rPr>
-              <a:t>结构化漏洞分析与
-候选策略生成</a:t>
-            </a:r>
-          </a:p>
-        </p:txBody>
-      </p:sp>
-      <p:sp>
-        <p:nvSpPr>
-          <p:cNvPr id="8" name="Rectangle 7"/>
+              <a:t>生成</a:t>
+            </a:r>
+            <a:endParaRPr lang="zh-CN" sz="1600" b="0" i="0" dirty="0">
+              <a:solidFill>
+                <a:srgbClr val="1E1E1E"/>
+              </a:solidFill>
+              <a:latin typeface="微软雅黑" panose="020B0503020204020204" charset="-122"/>
+            </a:endParaRPr>
+          </a:p>
+        </p:txBody>
+      </p:sp>
+      <p:sp>
+        <p:nvSpPr>
+          <p:cNvPr id="19" name="Oval 18"/>
           <p:cNvSpPr/>
           <p:nvPr/>
         </p:nvSpPr>
         <p:spPr>
           <a:xfrm>
-            <a:off x="6400800" y="2523744"/>
-            <a:ext cx="1828800" cy="493776"/>
-          </a:xfrm>
-          <a:prstGeom prst="rect">
+            <a:off x="3141511" y="5178391"/>
+            <a:ext cx="1741170" cy="704850"/>
+          </a:xfrm>
+          <a:prstGeom prst="ellipse">
             <a:avLst/>
           </a:prstGeom>
           <a:solidFill>
-            <a:srgbClr val="FFFFFF"/>
+            <a:schemeClr val="bg1">
+              <a:lumMod val="85000"/>
+            </a:schemeClr>
           </a:solidFill>
           <a:ln w="13970">
             <a:solidFill>
@@ -4659,7 +5149,7 @@
           </a:fontRef>
         </p:style>
         <p:txBody>
-          <a:bodyPr rtlCol="0" anchor="ctr" wrap="square" lIns="0" rIns="0" tIns="0" bIns="0"/>
+          <a:bodyPr wrap="square" lIns="0" tIns="0" rIns="0" bIns="0" rtlCol="0" anchor="ctr"/>
           <a:lstStyle/>
           <a:p>
             <a:pPr algn="ctr">
@@ -4671,38 +5161,45 @@
               </a:spcAft>
             </a:pPr>
             <a:r>
-              <a:rPr sz="1300" b="0" i="0">
+              <a:rPr lang="zh-CN" altLang="en-US" sz="1600" dirty="0">
                 <a:solidFill>
                   <a:srgbClr val="1E1E1E"/>
                 </a:solidFill>
-                <a:latin typeface="Microsoft YaHei"/>
+                <a:latin typeface="微软雅黑" panose="020B0503020204020204" charset="-122"/>
               </a:rPr>
-              <a:t>三维评审与
-同类型排序</a:t>
-            </a:r>
-          </a:p>
-        </p:txBody>
-      </p:sp>
-      <p:sp>
-        <p:nvSpPr>
-          <p:cNvPr id="9" name="Rectangle 8"/>
+              <a:t>质量评审</a:t>
+            </a:r>
+            <a:endParaRPr sz="1600" b="0" i="0" dirty="0">
+              <a:solidFill>
+                <a:srgbClr val="1E1E1E"/>
+              </a:solidFill>
+              <a:latin typeface="微软雅黑" panose="020B0503020204020204" charset="-122"/>
+            </a:endParaRPr>
+          </a:p>
+        </p:txBody>
+      </p:sp>
+      <p:sp>
+        <p:nvSpPr>
+          <p:cNvPr id="22" name="Oval 21"/>
           <p:cNvSpPr/>
           <p:nvPr/>
         </p:nvSpPr>
         <p:spPr>
           <a:xfrm>
-            <a:off x="6400800" y="3730752"/>
-            <a:ext cx="1828800" cy="420624"/>
-          </a:xfrm>
-          <a:prstGeom prst="rect">
+            <a:off x="6823293" y="3788202"/>
+            <a:ext cx="1409700" cy="704850"/>
+          </a:xfrm>
+          <a:prstGeom prst="ellipse">
             <a:avLst/>
           </a:prstGeom>
           <a:solidFill>
-            <a:srgbClr val="F6F6F6"/>
+            <a:schemeClr val="bg1">
+              <a:lumMod val="85000"/>
+            </a:schemeClr>
           </a:solidFill>
           <a:ln w="13970">
             <a:solidFill>
-              <a:srgbClr val="4A4A4A"/>
+              <a:srgbClr val="7A7A7A"/>
             </a:solidFill>
           </a:ln>
         </p:spPr>
@@ -4721,7 +5218,7 @@
           </a:fontRef>
         </p:style>
         <p:txBody>
-          <a:bodyPr rtlCol="0" anchor="ctr" wrap="square" lIns="0" rIns="0" tIns="0" bIns="0"/>
+          <a:bodyPr wrap="square" lIns="0" tIns="0" rIns="0" bIns="0" rtlCol="0" anchor="ctr"/>
           <a:lstStyle/>
           <a:p>
             <a:pPr algn="ctr">
@@ -4733,37 +5230,39 @@
               </a:spcAft>
             </a:pPr>
             <a:r>
-              <a:rPr sz="1300" b="0" i="0">
+              <a:rPr sz="1600" b="0" i="0">
                 <a:solidFill>
                   <a:srgbClr val="1E1E1E"/>
                 </a:solidFill>
-                <a:latin typeface="Microsoft YaHei"/>
+                <a:latin typeface="微软雅黑" panose="020B0503020204020204" charset="-122"/>
               </a:rPr>
-              <a:t>反馈优化</a:t>
-            </a:r>
-          </a:p>
-        </p:txBody>
-      </p:sp>
-      <p:sp>
-        <p:nvSpPr>
-          <p:cNvPr id="10" name="Rectangle 9"/>
+              <a:t>部署验证</a:t>
+            </a:r>
+          </a:p>
+        </p:txBody>
+      </p:sp>
+      <p:sp>
+        <p:nvSpPr>
+          <p:cNvPr id="23" name="Oval 22"/>
           <p:cNvSpPr/>
           <p:nvPr/>
         </p:nvSpPr>
         <p:spPr>
           <a:xfrm>
-            <a:off x="6400800" y="4773168"/>
-            <a:ext cx="1828800" cy="420624"/>
-          </a:xfrm>
-          <a:prstGeom prst="rect">
+            <a:off x="2883400" y="3807968"/>
+            <a:ext cx="2145665" cy="704850"/>
+          </a:xfrm>
+          <a:prstGeom prst="ellipse">
             <a:avLst/>
           </a:prstGeom>
           <a:solidFill>
-            <a:srgbClr val="FFFFFF"/>
+            <a:schemeClr val="bg1">
+              <a:lumMod val="85000"/>
+            </a:schemeClr>
           </a:solidFill>
           <a:ln w="13970">
             <a:solidFill>
-              <a:srgbClr val="4A4A4A"/>
+              <a:srgbClr val="7A7A7A"/>
             </a:solidFill>
           </a:ln>
         </p:spPr>
@@ -4782,7 +5281,7 @@
           </a:fontRef>
         </p:style>
         <p:txBody>
-          <a:bodyPr rtlCol="0" anchor="ctr" wrap="square" lIns="0" rIns="0" tIns="0" bIns="0"/>
+          <a:bodyPr wrap="square" lIns="0" tIns="0" rIns="0" bIns="0" rtlCol="0" anchor="ctr"/>
           <a:lstStyle/>
           <a:p>
             <a:pPr algn="ctr">
@@ -4794,568 +5293,41 @@
               </a:spcAft>
             </a:pPr>
             <a:r>
-              <a:rPr sz="1300" b="0" i="0">
+              <a:rPr lang="zh-CN" altLang="en-US" sz="1600" b="0" i="0" dirty="0">
                 <a:solidFill>
                   <a:srgbClr val="1E1E1E"/>
                 </a:solidFill>
-                <a:latin typeface="Microsoft YaHei"/>
+                <a:latin typeface="微软雅黑" panose="020B0503020204020204" charset="-122"/>
               </a:rPr>
-              <a:t>确认结果与部署验证</a:t>
-            </a:r>
-          </a:p>
-        </p:txBody>
-      </p:sp>
-      <p:sp>
-        <p:nvSpPr>
-          <p:cNvPr id="11" name="Rectangle 10"/>
-          <p:cNvSpPr/>
-          <p:nvPr/>
-        </p:nvSpPr>
-        <p:spPr>
-          <a:xfrm>
-            <a:off x="502920" y="1444752"/>
-            <a:ext cx="1508760" cy="420624"/>
-          </a:xfrm>
-          <a:prstGeom prst="rect">
-            <a:avLst/>
-          </a:prstGeom>
-          <a:solidFill>
-            <a:srgbClr val="F6F6F6"/>
-          </a:solidFill>
-          <a:ln w="12700">
+              <a:t>策略管理</a:t>
+            </a:r>
+            <a:endParaRPr sz="1600" b="0" i="0" dirty="0">
+              <a:solidFill>
+                <a:srgbClr val="1E1E1E"/>
+              </a:solidFill>
+              <a:latin typeface="微软雅黑" panose="020B0503020204020204" charset="-122"/>
+            </a:endParaRPr>
+          </a:p>
+        </p:txBody>
+      </p:sp>
+      <p:cxnSp>
+        <p:nvCxnSpPr>
+          <p:cNvPr id="24" name="Connector 23"/>
+          <p:cNvCxnSpPr/>
+          <p:nvPr/>
+        </p:nvCxnSpPr>
+        <p:spPr>
+          <a:xfrm flipV="1">
+            <a:off x="1298448" y="1271016"/>
+            <a:ext cx="1581912" cy="393192"/>
+          </a:xfrm>
+          <a:prstGeom prst="line">
+            <a:avLst/>
+          </a:prstGeom>
+          <a:ln w="11430">
             <a:solidFill>
               <a:srgbClr val="4A4A4A"/>
             </a:solidFill>
-          </a:ln>
-        </p:spPr>
-        <p:style>
-          <a:lnRef idx="1">
-            <a:schemeClr val="accent1"/>
-          </a:lnRef>
-          <a:fillRef idx="3">
-            <a:schemeClr val="accent1"/>
-          </a:fillRef>
-          <a:effectRef idx="2">
-            <a:schemeClr val="accent1"/>
-          </a:effectRef>
-          <a:fontRef idx="minor">
-            <a:schemeClr val="lt1"/>
-          </a:fontRef>
-        </p:style>
-        <p:txBody>
-          <a:bodyPr rtlCol="0" anchor="ctr"/>
-          <a:lstStyle/>
-          <a:p>
-            <a:pPr algn="ctr"/>
-          </a:p>
-        </p:txBody>
-      </p:sp>
-      <p:sp>
-        <p:nvSpPr>
-          <p:cNvPr id="12" name="Oval 11"/>
-          <p:cNvSpPr/>
-          <p:nvPr/>
-        </p:nvSpPr>
-        <p:spPr>
-          <a:xfrm>
-            <a:off x="502920" y="1353312"/>
-            <a:ext cx="1508760" cy="219456"/>
-          </a:xfrm>
-          <a:prstGeom prst="ellipse">
-            <a:avLst/>
-          </a:prstGeom>
-          <a:solidFill>
-            <a:srgbClr val="F6F6F6"/>
-          </a:solidFill>
-          <a:ln w="12700">
-            <a:solidFill>
-              <a:srgbClr val="4A4A4A"/>
-            </a:solidFill>
-          </a:ln>
-        </p:spPr>
-        <p:style>
-          <a:lnRef idx="1">
-            <a:schemeClr val="accent1"/>
-          </a:lnRef>
-          <a:fillRef idx="3">
-            <a:schemeClr val="accent1"/>
-          </a:fillRef>
-          <a:effectRef idx="2">
-            <a:schemeClr val="accent1"/>
-          </a:effectRef>
-          <a:fontRef idx="minor">
-            <a:schemeClr val="lt1"/>
-          </a:fontRef>
-        </p:style>
-        <p:txBody>
-          <a:bodyPr rtlCol="0" anchor="ctr"/>
-          <a:lstStyle/>
-          <a:p>
-            <a:pPr algn="ctr"/>
-          </a:p>
-        </p:txBody>
-      </p:sp>
-      <p:sp>
-        <p:nvSpPr>
-          <p:cNvPr id="13" name="Oval 12"/>
-          <p:cNvSpPr/>
-          <p:nvPr/>
-        </p:nvSpPr>
-        <p:spPr>
-          <a:xfrm>
-            <a:off x="502920" y="1737360"/>
-            <a:ext cx="1508760" cy="219456"/>
-          </a:xfrm>
-          <a:prstGeom prst="ellipse">
-            <a:avLst/>
-          </a:prstGeom>
-          <a:solidFill>
-            <a:srgbClr val="F6F6F6"/>
-          </a:solidFill>
-          <a:ln w="12700">
-            <a:solidFill>
-              <a:srgbClr val="4A4A4A"/>
-            </a:solidFill>
-          </a:ln>
-        </p:spPr>
-        <p:style>
-          <a:lnRef idx="1">
-            <a:schemeClr val="accent1"/>
-          </a:lnRef>
-          <a:fillRef idx="3">
-            <a:schemeClr val="accent1"/>
-          </a:fillRef>
-          <a:effectRef idx="2">
-            <a:schemeClr val="accent1"/>
-          </a:effectRef>
-          <a:fontRef idx="minor">
-            <a:schemeClr val="lt1"/>
-          </a:fontRef>
-        </p:style>
-        <p:txBody>
-          <a:bodyPr rtlCol="0" anchor="ctr"/>
-          <a:lstStyle/>
-          <a:p>
-            <a:pPr algn="ctr"/>
-          </a:p>
-        </p:txBody>
-      </p:sp>
-      <p:sp>
-        <p:nvSpPr>
-          <p:cNvPr id="14" name="TextBox 13"/>
-          <p:cNvSpPr txBox="1"/>
-          <p:nvPr/>
-        </p:nvSpPr>
-        <p:spPr>
-          <a:xfrm>
-            <a:off x="576072" y="1499616"/>
-            <a:ext cx="1362456" cy="402336"/>
-          </a:xfrm>
-          <a:prstGeom prst="rect">
-            <a:avLst/>
-          </a:prstGeom>
-          <a:noFill/>
-        </p:spPr>
-        <p:txBody>
-          <a:bodyPr wrap="square" anchor="ctr" lIns="0" rIns="0" tIns="0" bIns="0">
-            <a:spAutoFit/>
-          </a:bodyPr>
-          <a:lstStyle/>
-          <a:p>
-            <a:pPr algn="ctr">
-              <a:spcBef>
-                <a:spcPts val="0"/>
-              </a:spcBef>
-              <a:spcAft>
-                <a:spcPts val="0"/>
-              </a:spcAft>
-            </a:pPr>
-            <a:r>
-              <a:rPr sz="1150" b="0" i="0">
-                <a:solidFill>
-                  <a:srgbClr val="1E1E1E"/>
-                </a:solidFill>
-                <a:latin typeface="Microsoft YaHei"/>
-              </a:rPr>
-              <a:t>CVE 与多源证据</a:t>
-            </a:r>
-          </a:p>
-        </p:txBody>
-      </p:sp>
-      <p:sp>
-        <p:nvSpPr>
-          <p:cNvPr id="15" name="Rectangle 14"/>
-          <p:cNvSpPr/>
-          <p:nvPr/>
-        </p:nvSpPr>
-        <p:spPr>
-          <a:xfrm>
-            <a:off x="502920" y="2880360"/>
-            <a:ext cx="1508760" cy="420624"/>
-          </a:xfrm>
-          <a:prstGeom prst="rect">
-            <a:avLst/>
-          </a:prstGeom>
-          <a:solidFill>
-            <a:srgbClr val="F6F6F6"/>
-          </a:solidFill>
-          <a:ln w="12700">
-            <a:solidFill>
-              <a:srgbClr val="4A4A4A"/>
-            </a:solidFill>
-          </a:ln>
-        </p:spPr>
-        <p:style>
-          <a:lnRef idx="1">
-            <a:schemeClr val="accent1"/>
-          </a:lnRef>
-          <a:fillRef idx="3">
-            <a:schemeClr val="accent1"/>
-          </a:fillRef>
-          <a:effectRef idx="2">
-            <a:schemeClr val="accent1"/>
-          </a:effectRef>
-          <a:fontRef idx="minor">
-            <a:schemeClr val="lt1"/>
-          </a:fontRef>
-        </p:style>
-        <p:txBody>
-          <a:bodyPr rtlCol="0" anchor="ctr"/>
-          <a:lstStyle/>
-          <a:p>
-            <a:pPr algn="ctr"/>
-          </a:p>
-        </p:txBody>
-      </p:sp>
-      <p:sp>
-        <p:nvSpPr>
-          <p:cNvPr id="16" name="Oval 15"/>
-          <p:cNvSpPr/>
-          <p:nvPr/>
-        </p:nvSpPr>
-        <p:spPr>
-          <a:xfrm>
-            <a:off x="502920" y="2788920"/>
-            <a:ext cx="1508760" cy="219456"/>
-          </a:xfrm>
-          <a:prstGeom prst="ellipse">
-            <a:avLst/>
-          </a:prstGeom>
-          <a:solidFill>
-            <a:srgbClr val="F6F6F6"/>
-          </a:solidFill>
-          <a:ln w="12700">
-            <a:solidFill>
-              <a:srgbClr val="4A4A4A"/>
-            </a:solidFill>
-          </a:ln>
-        </p:spPr>
-        <p:style>
-          <a:lnRef idx="1">
-            <a:schemeClr val="accent1"/>
-          </a:lnRef>
-          <a:fillRef idx="3">
-            <a:schemeClr val="accent1"/>
-          </a:fillRef>
-          <a:effectRef idx="2">
-            <a:schemeClr val="accent1"/>
-          </a:effectRef>
-          <a:fontRef idx="minor">
-            <a:schemeClr val="lt1"/>
-          </a:fontRef>
-        </p:style>
-        <p:txBody>
-          <a:bodyPr rtlCol="0" anchor="ctr"/>
-          <a:lstStyle/>
-          <a:p>
-            <a:pPr algn="ctr"/>
-          </a:p>
-        </p:txBody>
-      </p:sp>
-      <p:sp>
-        <p:nvSpPr>
-          <p:cNvPr id="17" name="Oval 16"/>
-          <p:cNvSpPr/>
-          <p:nvPr/>
-        </p:nvSpPr>
-        <p:spPr>
-          <a:xfrm>
-            <a:off x="502920" y="3172968"/>
-            <a:ext cx="1508760" cy="219456"/>
-          </a:xfrm>
-          <a:prstGeom prst="ellipse">
-            <a:avLst/>
-          </a:prstGeom>
-          <a:solidFill>
-            <a:srgbClr val="F6F6F6"/>
-          </a:solidFill>
-          <a:ln w="12700">
-            <a:solidFill>
-              <a:srgbClr val="4A4A4A"/>
-            </a:solidFill>
-          </a:ln>
-        </p:spPr>
-        <p:style>
-          <a:lnRef idx="1">
-            <a:schemeClr val="accent1"/>
-          </a:lnRef>
-          <a:fillRef idx="3">
-            <a:schemeClr val="accent1"/>
-          </a:fillRef>
-          <a:effectRef idx="2">
-            <a:schemeClr val="accent1"/>
-          </a:effectRef>
-          <a:fontRef idx="minor">
-            <a:schemeClr val="lt1"/>
-          </a:fontRef>
-        </p:style>
-        <p:txBody>
-          <a:bodyPr rtlCol="0" anchor="ctr"/>
-          <a:lstStyle/>
-          <a:p>
-            <a:pPr algn="ctr"/>
-          </a:p>
-        </p:txBody>
-      </p:sp>
-      <p:sp>
-        <p:nvSpPr>
-          <p:cNvPr id="18" name="TextBox 17"/>
-          <p:cNvSpPr txBox="1"/>
-          <p:nvPr/>
-        </p:nvSpPr>
-        <p:spPr>
-          <a:xfrm>
-            <a:off x="576072" y="2935224"/>
-            <a:ext cx="1362456" cy="402336"/>
-          </a:xfrm>
-          <a:prstGeom prst="rect">
-            <a:avLst/>
-          </a:prstGeom>
-          <a:noFill/>
-        </p:spPr>
-        <p:txBody>
-          <a:bodyPr wrap="square" anchor="ctr" lIns="0" rIns="0" tIns="0" bIns="0">
-            <a:spAutoFit/>
-          </a:bodyPr>
-          <a:lstStyle/>
-          <a:p>
-            <a:pPr algn="ctr">
-              <a:spcBef>
-                <a:spcPts val="0"/>
-              </a:spcBef>
-              <a:spcAft>
-                <a:spcPts val="0"/>
-              </a:spcAft>
-            </a:pPr>
-            <a:r>
-              <a:rPr sz="1150" b="0" i="0">
-                <a:solidFill>
-                  <a:srgbClr val="1E1E1E"/>
-                </a:solidFill>
-                <a:latin typeface="Microsoft YaHei"/>
-              </a:rPr>
-              <a:t>候选策略与
-中间结果</a:t>
-            </a:r>
-          </a:p>
-        </p:txBody>
-      </p:sp>
-      <p:sp>
-        <p:nvSpPr>
-          <p:cNvPr id="19" name="Rectangle 18"/>
-          <p:cNvSpPr/>
-          <p:nvPr/>
-        </p:nvSpPr>
-        <p:spPr>
-          <a:xfrm>
-            <a:off x="502920" y="4800600"/>
-            <a:ext cx="1508760" cy="420624"/>
-          </a:xfrm>
-          <a:prstGeom prst="rect">
-            <a:avLst/>
-          </a:prstGeom>
-          <a:solidFill>
-            <a:srgbClr val="F6F6F6"/>
-          </a:solidFill>
-          <a:ln w="12700">
-            <a:solidFill>
-              <a:srgbClr val="4A4A4A"/>
-            </a:solidFill>
-          </a:ln>
-        </p:spPr>
-        <p:style>
-          <a:lnRef idx="1">
-            <a:schemeClr val="accent1"/>
-          </a:lnRef>
-          <a:fillRef idx="3">
-            <a:schemeClr val="accent1"/>
-          </a:fillRef>
-          <a:effectRef idx="2">
-            <a:schemeClr val="accent1"/>
-          </a:effectRef>
-          <a:fontRef idx="minor">
-            <a:schemeClr val="lt1"/>
-          </a:fontRef>
-        </p:style>
-        <p:txBody>
-          <a:bodyPr rtlCol="0" anchor="ctr"/>
-          <a:lstStyle/>
-          <a:p>
-            <a:pPr algn="ctr"/>
-          </a:p>
-        </p:txBody>
-      </p:sp>
-      <p:sp>
-        <p:nvSpPr>
-          <p:cNvPr id="20" name="Oval 19"/>
-          <p:cNvSpPr/>
-          <p:nvPr/>
-        </p:nvSpPr>
-        <p:spPr>
-          <a:xfrm>
-            <a:off x="502920" y="4709160"/>
-            <a:ext cx="1508760" cy="219456"/>
-          </a:xfrm>
-          <a:prstGeom prst="ellipse">
-            <a:avLst/>
-          </a:prstGeom>
-          <a:solidFill>
-            <a:srgbClr val="F6F6F6"/>
-          </a:solidFill>
-          <a:ln w="12700">
-            <a:solidFill>
-              <a:srgbClr val="4A4A4A"/>
-            </a:solidFill>
-          </a:ln>
-        </p:spPr>
-        <p:style>
-          <a:lnRef idx="1">
-            <a:schemeClr val="accent1"/>
-          </a:lnRef>
-          <a:fillRef idx="3">
-            <a:schemeClr val="accent1"/>
-          </a:fillRef>
-          <a:effectRef idx="2">
-            <a:schemeClr val="accent1"/>
-          </a:effectRef>
-          <a:fontRef idx="minor">
-            <a:schemeClr val="lt1"/>
-          </a:fontRef>
-        </p:style>
-        <p:txBody>
-          <a:bodyPr rtlCol="0" anchor="ctr"/>
-          <a:lstStyle/>
-          <a:p>
-            <a:pPr algn="ctr"/>
-          </a:p>
-        </p:txBody>
-      </p:sp>
-      <p:sp>
-        <p:nvSpPr>
-          <p:cNvPr id="21" name="Oval 20"/>
-          <p:cNvSpPr/>
-          <p:nvPr/>
-        </p:nvSpPr>
-        <p:spPr>
-          <a:xfrm>
-            <a:off x="502920" y="5093208"/>
-            <a:ext cx="1508760" cy="219456"/>
-          </a:xfrm>
-          <a:prstGeom prst="ellipse">
-            <a:avLst/>
-          </a:prstGeom>
-          <a:solidFill>
-            <a:srgbClr val="F6F6F6"/>
-          </a:solidFill>
-          <a:ln w="12700">
-            <a:solidFill>
-              <a:srgbClr val="4A4A4A"/>
-            </a:solidFill>
-          </a:ln>
-        </p:spPr>
-        <p:style>
-          <a:lnRef idx="1">
-            <a:schemeClr val="accent1"/>
-          </a:lnRef>
-          <a:fillRef idx="3">
-            <a:schemeClr val="accent1"/>
-          </a:fillRef>
-          <a:effectRef idx="2">
-            <a:schemeClr val="accent1"/>
-          </a:effectRef>
-          <a:fontRef idx="minor">
-            <a:schemeClr val="lt1"/>
-          </a:fontRef>
-        </p:style>
-        <p:txBody>
-          <a:bodyPr rtlCol="0" anchor="ctr"/>
-          <a:lstStyle/>
-          <a:p>
-            <a:pPr algn="ctr"/>
-          </a:p>
-        </p:txBody>
-      </p:sp>
-      <p:sp>
-        <p:nvSpPr>
-          <p:cNvPr id="22" name="TextBox 21"/>
-          <p:cNvSpPr txBox="1"/>
-          <p:nvPr/>
-        </p:nvSpPr>
-        <p:spPr>
-          <a:xfrm>
-            <a:off x="576072" y="4855464"/>
-            <a:ext cx="1362456" cy="402336"/>
-          </a:xfrm>
-          <a:prstGeom prst="rect">
-            <a:avLst/>
-          </a:prstGeom>
-          <a:noFill/>
-        </p:spPr>
-        <p:txBody>
-          <a:bodyPr wrap="square" anchor="ctr" lIns="0" rIns="0" tIns="0" bIns="0">
-            <a:spAutoFit/>
-          </a:bodyPr>
-          <a:lstStyle/>
-          <a:p>
-            <a:pPr algn="ctr">
-              <a:spcBef>
-                <a:spcPts val="0"/>
-              </a:spcBef>
-              <a:spcAft>
-                <a:spcPts val="0"/>
-              </a:spcAft>
-            </a:pPr>
-            <a:r>
-              <a:rPr sz="1150" b="0" i="0">
-                <a:solidFill>
-                  <a:srgbClr val="1E1E1E"/>
-                </a:solidFill>
-                <a:latin typeface="Microsoft YaHei"/>
-              </a:rPr>
-              <a:t>排序与审计记录</a:t>
-            </a:r>
-          </a:p>
-        </p:txBody>
-      </p:sp>
-      <p:cxnSp>
-        <p:nvCxnSpPr>
-          <p:cNvPr id="23" name="Connector 22"/>
-          <p:cNvCxnSpPr/>
-          <p:nvPr/>
-        </p:nvCxnSpPr>
-        <p:spPr>
-          <a:xfrm>
-            <a:off x="2176272" y="557784"/>
-            <a:ext cx="1572767" cy="283464"/>
-          </a:xfrm>
-          <a:prstGeom prst="line">
-            <a:avLst/>
-          </a:prstGeom>
-          <a:ln w="12700">
-            <a:solidFill>
-              <a:srgbClr val="4A4A4A"/>
-            </a:solidFill>
-            <a:tailEnd type="arrow"/>
           </a:ln>
         </p:spPr>
         <p:style>
@@ -5373,86 +5345,26 @@
           </a:fontRef>
         </p:style>
       </p:cxnSp>
-      <p:sp>
-        <p:nvSpPr>
-          <p:cNvPr id="24" name="Rounded Rectangle 23"/>
-          <p:cNvSpPr/>
-          <p:nvPr/>
-        </p:nvSpPr>
-        <p:spPr>
-          <a:xfrm>
-            <a:off x="2331720" y="384048"/>
-            <a:ext cx="1005840" cy="256032"/>
-          </a:xfrm>
-          <a:prstGeom prst="roundRect">
-            <a:avLst/>
-          </a:prstGeom>
-          <a:solidFill>
-            <a:srgbClr val="FFFFFF"/>
-          </a:solidFill>
-          <a:ln w="10160">
-            <a:solidFill>
-              <a:srgbClr val="B8B8B8"/>
-            </a:solidFill>
-          </a:ln>
-        </p:spPr>
-        <p:style>
-          <a:lnRef idx="1">
-            <a:schemeClr val="accent1"/>
-          </a:lnRef>
-          <a:fillRef idx="3">
-            <a:schemeClr val="accent1"/>
-          </a:fillRef>
-          <a:effectRef idx="2">
-            <a:schemeClr val="accent1"/>
-          </a:effectRef>
-          <a:fontRef idx="minor">
-            <a:schemeClr val="lt1"/>
-          </a:fontRef>
-        </p:style>
-        <p:txBody>
-          <a:bodyPr rtlCol="0" anchor="ctr" wrap="square" lIns="0" rIns="0" tIns="0" bIns="0"/>
-          <a:lstStyle/>
-          <a:p>
-            <a:pPr algn="ctr">
-              <a:spcBef>
-                <a:spcPts val="0"/>
-              </a:spcBef>
-              <a:spcAft>
-                <a:spcPts val="0"/>
-              </a:spcAft>
-            </a:pPr>
-            <a:r>
-              <a:rPr sz="950" b="0" i="0">
-                <a:solidFill>
-                  <a:srgbClr val="1E1E1E"/>
-                </a:solidFill>
-                <a:latin typeface="Microsoft YaHei"/>
-              </a:rPr>
-              <a:t>发起会话 / 查询</a:t>
-            </a:r>
-          </a:p>
-        </p:txBody>
-      </p:sp>
       <p:cxnSp>
         <p:nvCxnSpPr>
-          <p:cNvPr id="25" name="Connector 24"/>
-          <p:cNvCxnSpPr/>
+          <p:cNvPr id="27" name="Connector 26"/>
+          <p:cNvCxnSpPr>
+            <a:cxnSpLocks/>
+          </p:cNvCxnSpPr>
           <p:nvPr/>
         </p:nvCxnSpPr>
         <p:spPr>
           <a:xfrm>
-            <a:off x="5623560" y="2770632"/>
-            <a:ext cx="777240" cy="0"/>
+            <a:off x="1254760" y="2207895"/>
+            <a:ext cx="1560195" cy="711835"/>
           </a:xfrm>
           <a:prstGeom prst="line">
             <a:avLst/>
           </a:prstGeom>
-          <a:ln w="12700">
+          <a:ln w="11430">
             <a:solidFill>
               <a:srgbClr val="4A4A4A"/>
             </a:solidFill>
-            <a:tailEnd type="arrow"/>
           </a:ln>
         </p:spPr>
         <p:style>
@@ -5470,179 +5382,23 @@
           </a:fontRef>
         </p:style>
       </p:cxnSp>
-      <p:sp>
-        <p:nvSpPr>
-          <p:cNvPr id="26" name="Rounded Rectangle 25"/>
-          <p:cNvSpPr/>
-          <p:nvPr/>
-        </p:nvSpPr>
-        <p:spPr>
-          <a:xfrm>
-            <a:off x="5596128" y="2267712"/>
-            <a:ext cx="914400" cy="256032"/>
-          </a:xfrm>
-          <a:prstGeom prst="roundRect">
-            <a:avLst/>
-          </a:prstGeom>
-          <a:solidFill>
-            <a:srgbClr val="FFFFFF"/>
-          </a:solidFill>
-          <a:ln w="10160">
-            <a:solidFill>
-              <a:srgbClr val="B8B8B8"/>
-            </a:solidFill>
-          </a:ln>
-        </p:spPr>
-        <p:style>
-          <a:lnRef idx="1">
-            <a:schemeClr val="accent1"/>
-          </a:lnRef>
-          <a:fillRef idx="3">
-            <a:schemeClr val="accent1"/>
-          </a:fillRef>
-          <a:effectRef idx="2">
-            <a:schemeClr val="accent1"/>
-          </a:effectRef>
-          <a:fontRef idx="minor">
-            <a:schemeClr val="lt1"/>
-          </a:fontRef>
-        </p:style>
-        <p:txBody>
-          <a:bodyPr rtlCol="0" anchor="ctr" wrap="square" lIns="0" rIns="0" tIns="0" bIns="0"/>
-          <a:lstStyle/>
-          <a:p>
-            <a:pPr algn="ctr">
-              <a:spcBef>
-                <a:spcPts val="0"/>
-              </a:spcBef>
-              <a:spcAft>
-                <a:spcPts val="0"/>
-              </a:spcAft>
-            </a:pPr>
-            <a:r>
-              <a:rPr sz="950" b="0" i="0">
-                <a:solidFill>
-                  <a:srgbClr val="1E1E1E"/>
-                </a:solidFill>
-                <a:latin typeface="Microsoft YaHei"/>
-              </a:rPr>
-              <a:t>候选提交评审</a:t>
-            </a:r>
-          </a:p>
-        </p:txBody>
-      </p:sp>
       <p:cxnSp>
         <p:nvCxnSpPr>
-          <p:cNvPr id="27" name="Connector 26"/>
-          <p:cNvCxnSpPr/>
+          <p:cNvPr id="28" name="Connector 27"/>
+          <p:cNvCxnSpPr>
+            <a:cxnSpLocks/>
+          </p:cNvCxnSpPr>
           <p:nvPr/>
         </p:nvCxnSpPr>
         <p:spPr>
-          <a:xfrm flipH="1">
-            <a:off x="8229600" y="557784"/>
-            <a:ext cx="1783080" cy="2212848"/>
+          <a:xfrm flipV="1">
+            <a:off x="1400375" y="1633765"/>
+            <a:ext cx="1545390" cy="2985734"/>
           </a:xfrm>
           <a:prstGeom prst="line">
             <a:avLst/>
           </a:prstGeom>
-          <a:ln w="12700">
-            <a:solidFill>
-              <a:srgbClr val="4A4A4A"/>
-            </a:solidFill>
-            <a:tailEnd type="arrow"/>
-          </a:ln>
-        </p:spPr>
-        <p:style>
-          <a:lnRef idx="2">
-            <a:schemeClr val="accent1"/>
-          </a:lnRef>
-          <a:fillRef idx="0">
-            <a:schemeClr val="accent1"/>
-          </a:fillRef>
-          <a:effectRef idx="1">
-            <a:schemeClr val="accent1"/>
-          </a:effectRef>
-          <a:fontRef idx="minor">
-            <a:schemeClr val="tx1"/>
-          </a:fontRef>
-        </p:style>
-      </p:cxnSp>
-      <p:sp>
-        <p:nvSpPr>
-          <p:cNvPr id="28" name="Rounded Rectangle 27"/>
-          <p:cNvSpPr/>
-          <p:nvPr/>
-        </p:nvSpPr>
-        <p:spPr>
-          <a:xfrm>
-            <a:off x="8650224" y="1444752"/>
-            <a:ext cx="841248" cy="256032"/>
-          </a:xfrm>
-          <a:prstGeom prst="roundRect">
-            <a:avLst/>
-          </a:prstGeom>
-          <a:solidFill>
-            <a:srgbClr val="FFFFFF"/>
-          </a:solidFill>
-          <a:ln w="10160">
-            <a:solidFill>
-              <a:srgbClr val="B8B8B8"/>
-            </a:solidFill>
-          </a:ln>
-        </p:spPr>
-        <p:style>
-          <a:lnRef idx="1">
-            <a:schemeClr val="accent1"/>
-          </a:lnRef>
-          <a:fillRef idx="3">
-            <a:schemeClr val="accent1"/>
-          </a:fillRef>
-          <a:effectRef idx="2">
-            <a:schemeClr val="accent1"/>
-          </a:effectRef>
-          <a:fontRef idx="minor">
-            <a:schemeClr val="lt1"/>
-          </a:fontRef>
-        </p:style>
-        <p:txBody>
-          <a:bodyPr rtlCol="0" anchor="ctr" wrap="square" lIns="0" rIns="0" tIns="0" bIns="0"/>
-          <a:lstStyle/>
-          <a:p>
-            <a:pPr algn="ctr">
-              <a:spcBef>
-                <a:spcPts val="0"/>
-              </a:spcBef>
-              <a:spcAft>
-                <a:spcPts val="0"/>
-              </a:spcAft>
-            </a:pPr>
-            <a:r>
-              <a:rPr sz="950" b="0" i="0">
-                <a:solidFill>
-                  <a:srgbClr val="1E1E1E"/>
-                </a:solidFill>
-                <a:latin typeface="Microsoft YaHei"/>
-              </a:rPr>
-              <a:t>评审意见</a:t>
-            </a:r>
-          </a:p>
-        </p:txBody>
-      </p:sp>
-      <p:cxnSp>
-        <p:nvCxnSpPr>
-          <p:cNvPr id="29" name="Connector 28"/>
-          <p:cNvCxnSpPr/>
-          <p:nvPr/>
-        </p:nvCxnSpPr>
-        <p:spPr>
-          <a:xfrm flipH="1">
-            <a:off x="7178040" y="3941063"/>
-            <a:ext cx="1051560" cy="0"/>
-          </a:xfrm>
-          <a:prstGeom prst="line">
-            <a:avLst/>
-          </a:prstGeom>
-          <a:ln w="12700">
+          <a:ln w="11430">
             <a:solidFill>
               <a:srgbClr val="4A4A4A"/>
             </a:solidFill>
@@ -5666,18 +5422,20 @@
       <p:cxnSp>
         <p:nvCxnSpPr>
           <p:cNvPr id="30" name="Connector 29"/>
-          <p:cNvCxnSpPr/>
+          <p:cNvCxnSpPr>
+            <a:cxnSpLocks/>
+          </p:cNvCxnSpPr>
           <p:nvPr/>
         </p:nvCxnSpPr>
         <p:spPr>
-          <a:xfrm flipV="1">
-            <a:off x="7178040" y="3017520"/>
-            <a:ext cx="0" cy="923543"/>
+          <a:xfrm>
+            <a:off x="1266698" y="4987163"/>
+            <a:ext cx="1874813" cy="494094"/>
           </a:xfrm>
           <a:prstGeom prst="line">
             <a:avLst/>
           </a:prstGeom>
-          <a:ln w="12700">
+          <a:ln w="11430">
             <a:solidFill>
               <a:srgbClr val="4A4A4A"/>
             </a:solidFill>
@@ -5701,21 +5459,26 @@
       <p:cxnSp>
         <p:nvCxnSpPr>
           <p:cNvPr id="31" name="Connector 30"/>
-          <p:cNvCxnSpPr/>
+          <p:cNvCxnSpPr>
+            <a:cxnSpLocks/>
+            <a:stCxn id="16" idx="6"/>
+            <a:endCxn id="17" idx="2"/>
+          </p:cNvCxnSpPr>
           <p:nvPr/>
         </p:nvCxnSpPr>
         <p:spPr>
-          <a:xfrm flipH="1">
-            <a:off x="5623560" y="3017520"/>
-            <a:ext cx="1554480" cy="0"/>
+          <a:xfrm flipV="1">
+            <a:off x="4909820" y="2682539"/>
+            <a:ext cx="1725612" cy="34836"/>
           </a:xfrm>
           <a:prstGeom prst="line">
             <a:avLst/>
           </a:prstGeom>
           <a:ln w="12700">
             <a:solidFill>
-              <a:srgbClr val="4A4A4A"/>
+              <a:srgbClr val="7A7A7A"/>
             </a:solidFill>
+            <a:prstDash val="dash"/>
             <a:tailEnd type="arrow"/>
           </a:ln>
         </p:spPr>
@@ -5736,24 +5499,269 @@
       </p:cxnSp>
       <p:sp>
         <p:nvSpPr>
-          <p:cNvPr id="32" name="Rounded Rectangle 31"/>
+          <p:cNvPr id="37" name="文本框 36"/>
+          <p:cNvSpPr txBox="1"/>
+          <p:nvPr/>
+        </p:nvSpPr>
+        <p:spPr>
+          <a:xfrm>
+            <a:off x="4995934" y="2379662"/>
+            <a:ext cx="1567815" cy="368300"/>
+          </a:xfrm>
+          <a:prstGeom prst="rect">
+            <a:avLst/>
+          </a:prstGeom>
+          <a:noFill/>
+        </p:spPr>
+        <p:txBody>
+          <a:bodyPr wrap="square" rtlCol="0">
+            <a:spAutoFit/>
+          </a:bodyPr>
+          <a:lstStyle/>
+          <a:p>
+            <a:r>
+              <a:rPr lang="en-US" altLang="zh-CN" dirty="0">
+                <a:latin typeface="Times New Roman" panose="02020603050405020304" charset="0"/>
+                <a:cs typeface="Times New Roman" panose="02020603050405020304" charset="0"/>
+              </a:rPr>
+              <a:t>&lt;&lt;include&gt;&gt;</a:t>
+            </a:r>
+          </a:p>
+        </p:txBody>
+      </p:sp>
+      <p:sp>
+        <p:nvSpPr>
+          <p:cNvPr id="40" name="文本框 39"/>
+          <p:cNvSpPr txBox="1"/>
+          <p:nvPr/>
+        </p:nvSpPr>
+        <p:spPr>
+          <a:xfrm>
+            <a:off x="3895090" y="4632023"/>
+            <a:ext cx="1567815" cy="368300"/>
+          </a:xfrm>
+          <a:prstGeom prst="rect">
+            <a:avLst/>
+          </a:prstGeom>
+          <a:noFill/>
+        </p:spPr>
+        <p:txBody>
+          <a:bodyPr wrap="square" rtlCol="0">
+            <a:spAutoFit/>
+          </a:bodyPr>
+          <a:lstStyle/>
+          <a:p>
+            <a:r>
+              <a:rPr lang="en-US" altLang="zh-CN" dirty="0">
+                <a:latin typeface="Times New Roman" panose="02020603050405020304" charset="0"/>
+                <a:cs typeface="Times New Roman" panose="02020603050405020304" charset="0"/>
+              </a:rPr>
+              <a:t>&lt;&lt;extend&gt;&gt;</a:t>
+            </a:r>
+          </a:p>
+        </p:txBody>
+      </p:sp>
+      <p:cxnSp>
+        <p:nvCxnSpPr>
+          <p:cNvPr id="44" name="Connector 26">
+            <a:extLst>
+              <a:ext uri="{FF2B5EF4-FFF2-40B4-BE49-F238E27FC236}">
+                <a16:creationId xmlns:a16="http://schemas.microsoft.com/office/drawing/2014/main" id="{51AF5ED8-28CD-D9C3-E434-FE3D30F94685}"/>
+              </a:ext>
+            </a:extLst>
+          </p:cNvPr>
+          <p:cNvCxnSpPr>
+            <a:cxnSpLocks/>
+            <a:endCxn id="23" idx="2"/>
+          </p:cNvCxnSpPr>
+          <p:nvPr/>
+        </p:nvCxnSpPr>
+        <p:spPr>
+          <a:xfrm>
+            <a:off x="1247357" y="2812161"/>
+            <a:ext cx="1636043" cy="1348232"/>
+          </a:xfrm>
+          <a:prstGeom prst="line">
+            <a:avLst/>
+          </a:prstGeom>
+          <a:ln w="11430">
+            <a:solidFill>
+              <a:srgbClr val="4A4A4A"/>
+            </a:solidFill>
+          </a:ln>
+        </p:spPr>
+        <p:style>
+          <a:lnRef idx="2">
+            <a:schemeClr val="accent1"/>
+          </a:lnRef>
+          <a:fillRef idx="0">
+            <a:schemeClr val="accent1"/>
+          </a:fillRef>
+          <a:effectRef idx="1">
+            <a:schemeClr val="accent1"/>
+          </a:effectRef>
+          <a:fontRef idx="minor">
+            <a:schemeClr val="tx1"/>
+          </a:fontRef>
+        </p:style>
+      </p:cxnSp>
+      <p:cxnSp>
+        <p:nvCxnSpPr>
+          <p:cNvPr id="47" name="Connector 30">
+            <a:extLst>
+              <a:ext uri="{FF2B5EF4-FFF2-40B4-BE49-F238E27FC236}">
+                <a16:creationId xmlns:a16="http://schemas.microsoft.com/office/drawing/2014/main" id="{456846DE-D15A-A79D-5951-0629822F1AD2}"/>
+              </a:ext>
+            </a:extLst>
+          </p:cNvPr>
+          <p:cNvCxnSpPr>
+            <a:cxnSpLocks/>
+          </p:cNvCxnSpPr>
+          <p:nvPr/>
+        </p:nvCxnSpPr>
+        <p:spPr>
+          <a:xfrm>
+            <a:off x="5029065" y="4140627"/>
+            <a:ext cx="1740126" cy="11175"/>
+          </a:xfrm>
+          <a:prstGeom prst="line">
+            <a:avLst/>
+          </a:prstGeom>
+          <a:ln w="12700">
+            <a:solidFill>
+              <a:srgbClr val="7A7A7A"/>
+            </a:solidFill>
+            <a:prstDash val="dash"/>
+            <a:tailEnd type="arrow"/>
+          </a:ln>
+        </p:spPr>
+        <p:style>
+          <a:lnRef idx="2">
+            <a:schemeClr val="accent1"/>
+          </a:lnRef>
+          <a:fillRef idx="0">
+            <a:schemeClr val="accent1"/>
+          </a:fillRef>
+          <a:effectRef idx="1">
+            <a:schemeClr val="accent1"/>
+          </a:effectRef>
+          <a:fontRef idx="minor">
+            <a:schemeClr val="tx1"/>
+          </a:fontRef>
+        </p:style>
+      </p:cxnSp>
+      <p:sp>
+        <p:nvSpPr>
+          <p:cNvPr id="51" name="文本框 50">
+            <a:extLst>
+              <a:ext uri="{FF2B5EF4-FFF2-40B4-BE49-F238E27FC236}">
+                <a16:creationId xmlns:a16="http://schemas.microsoft.com/office/drawing/2014/main" id="{58418B9D-ED73-AA22-5723-CC34A16C9B76}"/>
+              </a:ext>
+            </a:extLst>
+          </p:cNvPr>
+          <p:cNvSpPr txBox="1"/>
+          <p:nvPr/>
+        </p:nvSpPr>
+        <p:spPr>
+          <a:xfrm>
+            <a:off x="5201376" y="3768314"/>
+            <a:ext cx="1567815" cy="368300"/>
+          </a:xfrm>
+          <a:prstGeom prst="rect">
+            <a:avLst/>
+          </a:prstGeom>
+          <a:noFill/>
+        </p:spPr>
+        <p:txBody>
+          <a:bodyPr wrap="square" rtlCol="0">
+            <a:spAutoFit/>
+          </a:bodyPr>
+          <a:lstStyle/>
+          <a:p>
+            <a:r>
+              <a:rPr lang="en-US" altLang="zh-CN" dirty="0">
+                <a:latin typeface="Times New Roman" panose="02020603050405020304" charset="0"/>
+                <a:cs typeface="Times New Roman" panose="02020603050405020304" charset="0"/>
+              </a:rPr>
+              <a:t>&lt;&lt;include&gt;&gt;</a:t>
+            </a:r>
+          </a:p>
+        </p:txBody>
+      </p:sp>
+      <p:cxnSp>
+        <p:nvCxnSpPr>
+          <p:cNvPr id="53" name="Connector 30">
+            <a:extLst>
+              <a:ext uri="{FF2B5EF4-FFF2-40B4-BE49-F238E27FC236}">
+                <a16:creationId xmlns:a16="http://schemas.microsoft.com/office/drawing/2014/main" id="{80E15376-E3A1-B3C7-2C71-088BDD3E3743}"/>
+              </a:ext>
+            </a:extLst>
+          </p:cNvPr>
+          <p:cNvCxnSpPr>
+            <a:cxnSpLocks/>
+            <a:endCxn id="55" idx="2"/>
+          </p:cNvCxnSpPr>
+          <p:nvPr/>
+        </p:nvCxnSpPr>
+        <p:spPr>
+          <a:xfrm flipV="1">
+            <a:off x="5257457" y="816980"/>
+            <a:ext cx="826525" cy="288145"/>
+          </a:xfrm>
+          <a:prstGeom prst="line">
+            <a:avLst/>
+          </a:prstGeom>
+          <a:ln w="12700">
+            <a:solidFill>
+              <a:srgbClr val="7A7A7A"/>
+            </a:solidFill>
+            <a:prstDash val="dash"/>
+            <a:tailEnd type="arrow"/>
+          </a:ln>
+        </p:spPr>
+        <p:style>
+          <a:lnRef idx="2">
+            <a:schemeClr val="accent1"/>
+          </a:lnRef>
+          <a:fillRef idx="0">
+            <a:schemeClr val="accent1"/>
+          </a:fillRef>
+          <a:effectRef idx="1">
+            <a:schemeClr val="accent1"/>
+          </a:effectRef>
+          <a:fontRef idx="minor">
+            <a:schemeClr val="tx1"/>
+          </a:fontRef>
+        </p:style>
+      </p:cxnSp>
+      <p:sp>
+        <p:nvSpPr>
+          <p:cNvPr id="54" name="Oval 16">
+            <a:extLst>
+              <a:ext uri="{FF2B5EF4-FFF2-40B4-BE49-F238E27FC236}">
+                <a16:creationId xmlns:a16="http://schemas.microsoft.com/office/drawing/2014/main" id="{3CCBBAF3-0120-D820-AB68-E04217318C9F}"/>
+              </a:ext>
+            </a:extLst>
+          </p:cNvPr>
           <p:cNvSpPr/>
           <p:nvPr/>
         </p:nvSpPr>
         <p:spPr>
           <a:xfrm>
-            <a:off x="6300216" y="3273552"/>
-            <a:ext cx="841248" cy="256032"/>
-          </a:xfrm>
-          <a:prstGeom prst="roundRect">
+            <a:off x="6044247" y="1254951"/>
+            <a:ext cx="1964055" cy="544840"/>
+          </a:xfrm>
+          <a:prstGeom prst="ellipse">
             <a:avLst/>
           </a:prstGeom>
           <a:solidFill>
-            <a:srgbClr val="FFFFFF"/>
+            <a:schemeClr val="bg1">
+              <a:lumMod val="85000"/>
+            </a:schemeClr>
           </a:solidFill>
-          <a:ln w="10160">
+          <a:ln w="13970">
             <a:solidFill>
-              <a:srgbClr val="B8B8B8"/>
+              <a:srgbClr val="7A7A7A"/>
             </a:solidFill>
           </a:ln>
         </p:spPr>
@@ -5772,7 +5780,7 @@
           </a:fontRef>
         </p:style>
         <p:txBody>
-          <a:bodyPr rtlCol="0" anchor="ctr" wrap="square" lIns="0" rIns="0" tIns="0" bIns="0"/>
+          <a:bodyPr wrap="square" lIns="0" tIns="0" rIns="0" bIns="0" rtlCol="0" anchor="ctr"/>
           <a:lstStyle/>
           <a:p>
             <a:pPr algn="ctr">
@@ -5784,73 +5792,51 @@
               </a:spcAft>
             </a:pPr>
             <a:r>
-              <a:rPr sz="950" b="0" i="0">
+              <a:rPr lang="zh-CN" altLang="en-US" sz="1600" b="0" i="0" dirty="0">
                 <a:solidFill>
                   <a:srgbClr val="1E1E1E"/>
                 </a:solidFill>
-                <a:latin typeface="Microsoft YaHei"/>
+                <a:latin typeface="微软雅黑" panose="020B0503020204020204" charset="-122"/>
               </a:rPr>
-              <a:t>修订建议</a:t>
-            </a:r>
-          </a:p>
-        </p:txBody>
-      </p:sp>
-      <p:cxnSp>
-        <p:nvCxnSpPr>
-          <p:cNvPr id="33" name="Connector 32"/>
-          <p:cNvCxnSpPr/>
-          <p:nvPr/>
-        </p:nvCxnSpPr>
-        <p:spPr>
-          <a:xfrm flipH="1">
-            <a:off x="2011680" y="4983480"/>
-            <a:ext cx="6217920" cy="27432"/>
-          </a:xfrm>
-          <a:prstGeom prst="line">
-            <a:avLst/>
-          </a:prstGeom>
-          <a:ln w="12700">
+              <a:t>向量数据构建</a:t>
+            </a:r>
+            <a:endParaRPr lang="zh-CN" sz="1600" b="0" i="0" dirty="0">
+              <a:solidFill>
+                <a:srgbClr val="1E1E1E"/>
+              </a:solidFill>
+              <a:latin typeface="微软雅黑" panose="020B0503020204020204" charset="-122"/>
+            </a:endParaRPr>
+          </a:p>
+        </p:txBody>
+      </p:sp>
+      <p:sp>
+        <p:nvSpPr>
+          <p:cNvPr id="55" name="Oval 16">
+            <a:extLst>
+              <a:ext uri="{FF2B5EF4-FFF2-40B4-BE49-F238E27FC236}">
+                <a16:creationId xmlns:a16="http://schemas.microsoft.com/office/drawing/2014/main" id="{AE6E9073-AB78-CDC6-88C6-FA41BF5FECB4}"/>
+              </a:ext>
+            </a:extLst>
+          </p:cNvPr>
+          <p:cNvSpPr/>
+          <p:nvPr/>
+        </p:nvSpPr>
+        <p:spPr>
+          <a:xfrm>
+            <a:off x="6083982" y="540091"/>
+            <a:ext cx="1964055" cy="553778"/>
+          </a:xfrm>
+          <a:prstGeom prst="ellipse">
+            <a:avLst/>
+          </a:prstGeom>
+          <a:solidFill>
+            <a:schemeClr val="bg1">
+              <a:lumMod val="85000"/>
+            </a:schemeClr>
+          </a:solidFill>
+          <a:ln w="13970">
             <a:solidFill>
-              <a:srgbClr val="4A4A4A"/>
-            </a:solidFill>
-            <a:tailEnd type="arrow"/>
-          </a:ln>
-        </p:spPr>
-        <p:style>
-          <a:lnRef idx="2">
-            <a:schemeClr val="accent1"/>
-          </a:lnRef>
-          <a:fillRef idx="0">
-            <a:schemeClr val="accent1"/>
-          </a:fillRef>
-          <a:effectRef idx="1">
-            <a:schemeClr val="accent1"/>
-          </a:effectRef>
-          <a:fontRef idx="minor">
-            <a:schemeClr val="tx1"/>
-          </a:fontRef>
-        </p:style>
-      </p:cxnSp>
-      <p:sp>
-        <p:nvSpPr>
-          <p:cNvPr id="34" name="Rounded Rectangle 33"/>
-          <p:cNvSpPr/>
-          <p:nvPr/>
-        </p:nvSpPr>
-        <p:spPr>
-          <a:xfrm>
-            <a:off x="4379976" y="4608576"/>
-            <a:ext cx="1298448" cy="256032"/>
-          </a:xfrm>
-          <a:prstGeom prst="roundRect">
-            <a:avLst/>
-          </a:prstGeom>
-          <a:solidFill>
-            <a:srgbClr val="FFFFFF"/>
-          </a:solidFill>
-          <a:ln w="10160">
-            <a:solidFill>
-              <a:srgbClr val="B8B8B8"/>
+              <a:srgbClr val="7A7A7A"/>
             </a:solidFill>
           </a:ln>
         </p:spPr>
@@ -5869,7 +5855,7 @@
           </a:fontRef>
         </p:style>
         <p:txBody>
-          <a:bodyPr rtlCol="0" anchor="ctr" wrap="square" lIns="0" rIns="0" tIns="0" bIns="0"/>
+          <a:bodyPr wrap="square" lIns="0" tIns="0" rIns="0" bIns="0" rtlCol="0" anchor="ctr"/>
           <a:lstStyle/>
           <a:p>
             <a:pPr algn="ctr">
@@ -5881,27 +5867,43 @@
               </a:spcAft>
             </a:pPr>
             <a:r>
-              <a:rPr sz="950" b="0" i="0">
+              <a:rPr lang="zh-CN" altLang="en-US" sz="1600" b="0" i="0" dirty="0">
                 <a:solidFill>
                   <a:srgbClr val="1E1E1E"/>
                 </a:solidFill>
-                <a:latin typeface="Microsoft YaHei"/>
+                <a:latin typeface="微软雅黑" panose="020B0503020204020204" charset="-122"/>
               </a:rPr>
-              <a:t>写入审计与排序记录</a:t>
-            </a:r>
+              <a:t>开源信息抓取</a:t>
+            </a:r>
+            <a:endParaRPr lang="zh-CN" sz="1600" b="0" i="0" dirty="0">
+              <a:solidFill>
+                <a:srgbClr val="1E1E1E"/>
+              </a:solidFill>
+              <a:latin typeface="微软雅黑" panose="020B0503020204020204" charset="-122"/>
+            </a:endParaRPr>
           </a:p>
         </p:txBody>
       </p:sp>
       <p:cxnSp>
         <p:nvCxnSpPr>
-          <p:cNvPr id="35" name="Connector 34"/>
-          <p:cNvCxnSpPr/>
+          <p:cNvPr id="59" name="Connector 30">
+            <a:extLst>
+              <a:ext uri="{FF2B5EF4-FFF2-40B4-BE49-F238E27FC236}">
+                <a16:creationId xmlns:a16="http://schemas.microsoft.com/office/drawing/2014/main" id="{84F38380-8BB7-4A4B-447C-E30D77D34E69}"/>
+              </a:ext>
+            </a:extLst>
+          </p:cNvPr>
+          <p:cNvCxnSpPr>
+            <a:cxnSpLocks/>
+            <a:stCxn id="15" idx="6"/>
+            <a:endCxn id="54" idx="2"/>
+          </p:cNvCxnSpPr>
           <p:nvPr/>
         </p:nvCxnSpPr>
         <p:spPr>
           <a:xfrm>
-            <a:off x="2011680" y="1664208"/>
-            <a:ext cx="1737359" cy="73152"/>
+            <a:off x="5377815" y="1263968"/>
+            <a:ext cx="666432" cy="263403"/>
           </a:xfrm>
           <a:prstGeom prst="line">
             <a:avLst/>
@@ -5929,26 +5931,280 @@
           </a:fontRef>
         </p:style>
       </p:cxnSp>
-      <p:sp>
-        <p:nvSpPr>
-          <p:cNvPr id="36" name="Rounded Rectangle 35"/>
+      <p:cxnSp>
+        <p:nvCxnSpPr>
+          <p:cNvPr id="64" name="Connector 30">
+            <a:extLst>
+              <a:ext uri="{FF2B5EF4-FFF2-40B4-BE49-F238E27FC236}">
+                <a16:creationId xmlns:a16="http://schemas.microsoft.com/office/drawing/2014/main" id="{440098FD-21E7-5DBC-E671-36F65F8C3AD8}"/>
+              </a:ext>
+            </a:extLst>
+          </p:cNvPr>
+          <p:cNvCxnSpPr>
+            <a:cxnSpLocks/>
+            <a:stCxn id="19" idx="0"/>
+            <a:endCxn id="23" idx="4"/>
+          </p:cNvCxnSpPr>
+          <p:nvPr/>
+        </p:nvCxnSpPr>
+        <p:spPr>
+          <a:xfrm flipH="1" flipV="1">
+            <a:off x="3956233" y="4512818"/>
+            <a:ext cx="55863" cy="665573"/>
+          </a:xfrm>
+          <a:prstGeom prst="line">
+            <a:avLst/>
+          </a:prstGeom>
+          <a:ln w="12700">
+            <a:solidFill>
+              <a:srgbClr val="7A7A7A"/>
+            </a:solidFill>
+            <a:prstDash val="dash"/>
+            <a:tailEnd type="arrow"/>
+          </a:ln>
+        </p:spPr>
+        <p:style>
+          <a:lnRef idx="2">
+            <a:schemeClr val="accent1"/>
+          </a:lnRef>
+          <a:fillRef idx="0">
+            <a:schemeClr val="accent1"/>
+          </a:fillRef>
+          <a:effectRef idx="1">
+            <a:schemeClr val="accent1"/>
+          </a:effectRef>
+          <a:fontRef idx="minor">
+            <a:schemeClr val="tx1"/>
+          </a:fontRef>
+        </p:style>
+      </p:cxnSp>
+      <p:cxnSp>
+        <p:nvCxnSpPr>
+          <p:cNvPr id="70" name="Connector 30">
+            <a:extLst>
+              <a:ext uri="{FF2B5EF4-FFF2-40B4-BE49-F238E27FC236}">
+                <a16:creationId xmlns:a16="http://schemas.microsoft.com/office/drawing/2014/main" id="{7B4E49CC-8374-78E4-45A4-F02279C5B69C}"/>
+              </a:ext>
+            </a:extLst>
+          </p:cNvPr>
+          <p:cNvCxnSpPr>
+            <a:cxnSpLocks/>
+            <a:stCxn id="16" idx="4"/>
+            <a:endCxn id="23" idx="0"/>
+          </p:cNvCxnSpPr>
+          <p:nvPr/>
+        </p:nvCxnSpPr>
+        <p:spPr>
+          <a:xfrm>
+            <a:off x="3895090" y="3126632"/>
+            <a:ext cx="61143" cy="681336"/>
+          </a:xfrm>
+          <a:prstGeom prst="line">
+            <a:avLst/>
+          </a:prstGeom>
+          <a:ln w="12700">
+            <a:solidFill>
+              <a:srgbClr val="7A7A7A"/>
+            </a:solidFill>
+            <a:prstDash val="dash"/>
+            <a:tailEnd type="arrow"/>
+          </a:ln>
+        </p:spPr>
+        <p:style>
+          <a:lnRef idx="2">
+            <a:schemeClr val="accent1"/>
+          </a:lnRef>
+          <a:fillRef idx="0">
+            <a:schemeClr val="accent1"/>
+          </a:fillRef>
+          <a:effectRef idx="1">
+            <a:schemeClr val="accent1"/>
+          </a:effectRef>
+          <a:fontRef idx="minor">
+            <a:schemeClr val="tx1"/>
+          </a:fontRef>
+        </p:style>
+      </p:cxnSp>
+      <p:sp>
+        <p:nvSpPr>
+          <p:cNvPr id="75" name="文本框 74">
+            <a:extLst>
+              <a:ext uri="{FF2B5EF4-FFF2-40B4-BE49-F238E27FC236}">
+                <a16:creationId xmlns:a16="http://schemas.microsoft.com/office/drawing/2014/main" id="{AEEB1418-C1A2-E195-0D5F-1E1F1E6AC818}"/>
+              </a:ext>
+            </a:extLst>
+          </p:cNvPr>
+          <p:cNvSpPr txBox="1"/>
+          <p:nvPr/>
+        </p:nvSpPr>
+        <p:spPr>
+          <a:xfrm>
+            <a:off x="3907851" y="3240330"/>
+            <a:ext cx="1567815" cy="368300"/>
+          </a:xfrm>
+          <a:prstGeom prst="rect">
+            <a:avLst/>
+          </a:prstGeom>
+          <a:noFill/>
+        </p:spPr>
+        <p:txBody>
+          <a:bodyPr wrap="square" rtlCol="0">
+            <a:spAutoFit/>
+          </a:bodyPr>
+          <a:lstStyle/>
+          <a:p>
+            <a:r>
+              <a:rPr lang="en-US" altLang="zh-CN" dirty="0">
+                <a:latin typeface="Times New Roman" panose="02020603050405020304" charset="0"/>
+                <a:cs typeface="Times New Roman" panose="02020603050405020304" charset="0"/>
+              </a:rPr>
+              <a:t>&lt;&lt;extend&gt;&gt;</a:t>
+            </a:r>
+          </a:p>
+        </p:txBody>
+      </p:sp>
+      <p:sp>
+        <p:nvSpPr>
+          <p:cNvPr id="76" name="文本框 75">
+            <a:extLst>
+              <a:ext uri="{FF2B5EF4-FFF2-40B4-BE49-F238E27FC236}">
+                <a16:creationId xmlns:a16="http://schemas.microsoft.com/office/drawing/2014/main" id="{348D6E62-8849-947B-59A9-8E154753E4D6}"/>
+              </a:ext>
+            </a:extLst>
+          </p:cNvPr>
+          <p:cNvSpPr txBox="1"/>
+          <p:nvPr/>
+        </p:nvSpPr>
+        <p:spPr>
+          <a:xfrm>
+            <a:off x="5163955" y="1378273"/>
+            <a:ext cx="1567815" cy="261610"/>
+          </a:xfrm>
+          <a:prstGeom prst="rect">
+            <a:avLst/>
+          </a:prstGeom>
+          <a:noFill/>
+        </p:spPr>
+        <p:txBody>
+          <a:bodyPr wrap="square" rtlCol="0">
+            <a:spAutoFit/>
+          </a:bodyPr>
+          <a:lstStyle/>
+          <a:p>
+            <a:r>
+              <a:rPr lang="en-US" altLang="zh-CN" sz="1100" dirty="0">
+                <a:latin typeface="Times New Roman" panose="02020603050405020304" charset="0"/>
+                <a:cs typeface="Times New Roman" panose="02020603050405020304" charset="0"/>
+              </a:rPr>
+              <a:t>&lt;&lt;include&gt;&gt;</a:t>
+            </a:r>
+          </a:p>
+        </p:txBody>
+      </p:sp>
+      <p:sp>
+        <p:nvSpPr>
+          <p:cNvPr id="77" name="文本框 76">
+            <a:extLst>
+              <a:ext uri="{FF2B5EF4-FFF2-40B4-BE49-F238E27FC236}">
+                <a16:creationId xmlns:a16="http://schemas.microsoft.com/office/drawing/2014/main" id="{BAC6C51F-2978-71B0-A054-61D1354A9554}"/>
+              </a:ext>
+            </a:extLst>
+          </p:cNvPr>
+          <p:cNvSpPr txBox="1"/>
+          <p:nvPr/>
+        </p:nvSpPr>
+        <p:spPr>
+          <a:xfrm>
+            <a:off x="5029065" y="708971"/>
+            <a:ext cx="1567815" cy="276999"/>
+          </a:xfrm>
+          <a:prstGeom prst="rect">
+            <a:avLst/>
+          </a:prstGeom>
+          <a:noFill/>
+        </p:spPr>
+        <p:txBody>
+          <a:bodyPr wrap="square" rtlCol="0">
+            <a:spAutoFit/>
+          </a:bodyPr>
+          <a:lstStyle/>
+          <a:p>
+            <a:r>
+              <a:rPr lang="en-US" altLang="zh-CN" sz="1200" dirty="0">
+                <a:latin typeface="Times New Roman" panose="02020603050405020304" charset="0"/>
+                <a:cs typeface="Times New Roman" panose="02020603050405020304" charset="0"/>
+              </a:rPr>
+              <a:t>&lt;&lt;include&gt;&gt;</a:t>
+            </a:r>
+          </a:p>
+        </p:txBody>
+      </p:sp>
+      <p:sp>
+        <p:nvSpPr>
+          <p:cNvPr id="78" name="文本框 77">
+            <a:extLst>
+              <a:ext uri="{FF2B5EF4-FFF2-40B4-BE49-F238E27FC236}">
+                <a16:creationId xmlns:a16="http://schemas.microsoft.com/office/drawing/2014/main" id="{2291DBB1-573E-8C16-00B6-8894E0BA5030}"/>
+              </a:ext>
+            </a:extLst>
+          </p:cNvPr>
+          <p:cNvSpPr txBox="1"/>
+          <p:nvPr/>
+        </p:nvSpPr>
+        <p:spPr>
+          <a:xfrm>
+            <a:off x="4904723" y="5131215"/>
+            <a:ext cx="1567815" cy="276999"/>
+          </a:xfrm>
+          <a:prstGeom prst="rect">
+            <a:avLst/>
+          </a:prstGeom>
+          <a:noFill/>
+        </p:spPr>
+        <p:txBody>
+          <a:bodyPr wrap="square" rtlCol="0">
+            <a:spAutoFit/>
+          </a:bodyPr>
+          <a:lstStyle/>
+          <a:p>
+            <a:r>
+              <a:rPr lang="en-US" altLang="zh-CN" sz="1200" dirty="0">
+                <a:latin typeface="Times New Roman" panose="02020603050405020304" charset="0"/>
+                <a:cs typeface="Times New Roman" panose="02020603050405020304" charset="0"/>
+              </a:rPr>
+              <a:t>&lt;&lt;include&gt;&gt;</a:t>
+            </a:r>
+          </a:p>
+        </p:txBody>
+      </p:sp>
+      <p:sp>
+        <p:nvSpPr>
+          <p:cNvPr id="79" name="Oval 16">
+            <a:extLst>
+              <a:ext uri="{FF2B5EF4-FFF2-40B4-BE49-F238E27FC236}">
+                <a16:creationId xmlns:a16="http://schemas.microsoft.com/office/drawing/2014/main" id="{0B0155B9-4003-932E-89CB-6101C8B290A2}"/>
+              </a:ext>
+            </a:extLst>
+          </p:cNvPr>
           <p:cNvSpPr/>
           <p:nvPr/>
         </p:nvSpPr>
         <p:spPr>
           <a:xfrm>
-            <a:off x="2400300" y="1261872"/>
-            <a:ext cx="777240" cy="256032"/>
-          </a:xfrm>
-          <a:prstGeom prst="roundRect">
+            <a:off x="6083981" y="4873752"/>
+            <a:ext cx="1964055" cy="553778"/>
+          </a:xfrm>
+          <a:prstGeom prst="ellipse">
             <a:avLst/>
           </a:prstGeom>
           <a:solidFill>
-            <a:srgbClr val="FFFFFF"/>
+            <a:schemeClr val="bg1">
+              <a:lumMod val="85000"/>
+            </a:schemeClr>
           </a:solidFill>
-          <a:ln w="10160">
+          <a:ln w="13970">
             <a:solidFill>
-              <a:srgbClr val="B8B8B8"/>
+              <a:srgbClr val="7A7A7A"/>
             </a:solidFill>
           </a:ln>
         </p:spPr>
@@ -5967,7 +6223,7 @@
           </a:fontRef>
         </p:style>
         <p:txBody>
-          <a:bodyPr rtlCol="0" anchor="ctr" wrap="square" lIns="0" rIns="0" tIns="0" bIns="0"/>
+          <a:bodyPr wrap="square" lIns="0" tIns="0" rIns="0" bIns="0" rtlCol="0" anchor="ctr"/>
           <a:lstStyle/>
           <a:p>
             <a:pPr algn="ctr">
@@ -5979,74 +6235,51 @@
               </a:spcAft>
             </a:pPr>
             <a:r>
-              <a:rPr sz="950" b="0" i="0">
+              <a:rPr lang="zh-CN" altLang="en-US" sz="1600" b="0" i="0" dirty="0">
                 <a:solidFill>
                   <a:srgbClr val="1E1E1E"/>
                 </a:solidFill>
-                <a:latin typeface="Microsoft YaHei"/>
+                <a:latin typeface="微软雅黑" panose="020B0503020204020204" charset="-122"/>
               </a:rPr>
-              <a:t>检索证据</a:t>
-            </a:r>
-          </a:p>
-        </p:txBody>
-      </p:sp>
-      <p:cxnSp>
-        <p:nvCxnSpPr>
-          <p:cNvPr id="37" name="Connector 36"/>
-          <p:cNvCxnSpPr/>
-          <p:nvPr/>
-        </p:nvCxnSpPr>
-        <p:spPr>
-          <a:xfrm flipV="1">
-            <a:off x="2011680" y="2834640"/>
-            <a:ext cx="1737359" cy="256032"/>
-          </a:xfrm>
-          <a:prstGeom prst="line">
-            <a:avLst/>
-          </a:prstGeom>
-          <a:ln w="12700">
+              <a:t>智能评审</a:t>
+            </a:r>
+            <a:endParaRPr lang="zh-CN" sz="1600" b="0" i="0" dirty="0">
+              <a:solidFill>
+                <a:srgbClr val="1E1E1E"/>
+              </a:solidFill>
+              <a:latin typeface="微软雅黑" panose="020B0503020204020204" charset="-122"/>
+            </a:endParaRPr>
+          </a:p>
+        </p:txBody>
+      </p:sp>
+      <p:sp>
+        <p:nvSpPr>
+          <p:cNvPr id="80" name="Oval 16">
+            <a:extLst>
+              <a:ext uri="{FF2B5EF4-FFF2-40B4-BE49-F238E27FC236}">
+                <a16:creationId xmlns:a16="http://schemas.microsoft.com/office/drawing/2014/main" id="{DAA285B3-E1E4-6B3B-71B5-BC43AB089094}"/>
+              </a:ext>
+            </a:extLst>
+          </p:cNvPr>
+          <p:cNvSpPr/>
+          <p:nvPr/>
+        </p:nvSpPr>
+        <p:spPr>
+          <a:xfrm>
+            <a:off x="6111874" y="5479727"/>
+            <a:ext cx="1964055" cy="553778"/>
+          </a:xfrm>
+          <a:prstGeom prst="ellipse">
+            <a:avLst/>
+          </a:prstGeom>
+          <a:solidFill>
+            <a:schemeClr val="bg1">
+              <a:lumMod val="85000"/>
+            </a:schemeClr>
+          </a:solidFill>
+          <a:ln w="13970">
             <a:solidFill>
               <a:srgbClr val="7A7A7A"/>
-            </a:solidFill>
-            <a:prstDash val="dash"/>
-            <a:tailEnd type="arrow"/>
-          </a:ln>
-        </p:spPr>
-        <p:style>
-          <a:lnRef idx="2">
-            <a:schemeClr val="accent1"/>
-          </a:lnRef>
-          <a:fillRef idx="0">
-            <a:schemeClr val="accent1"/>
-          </a:fillRef>
-          <a:effectRef idx="1">
-            <a:schemeClr val="accent1"/>
-          </a:effectRef>
-          <a:fontRef idx="minor">
-            <a:schemeClr val="tx1"/>
-          </a:fontRef>
-        </p:style>
-      </p:cxnSp>
-      <p:sp>
-        <p:nvSpPr>
-          <p:cNvPr id="38" name="Rounded Rectangle 37"/>
-          <p:cNvSpPr/>
-          <p:nvPr/>
-        </p:nvSpPr>
-        <p:spPr>
-          <a:xfrm>
-            <a:off x="2354580" y="2962656"/>
-            <a:ext cx="1234440" cy="256032"/>
-          </a:xfrm>
-          <a:prstGeom prst="roundRect">
-            <a:avLst/>
-          </a:prstGeom>
-          <a:solidFill>
-            <a:srgbClr val="FFFFFF"/>
-          </a:solidFill>
-          <a:ln w="10160">
-            <a:solidFill>
-              <a:srgbClr val="B8B8B8"/>
             </a:solidFill>
           </a:ln>
         </p:spPr>
@@ -6065,7 +6298,7 @@
           </a:fontRef>
         </p:style>
         <p:txBody>
-          <a:bodyPr rtlCol="0" anchor="ctr" wrap="square" lIns="0" rIns="0" tIns="0" bIns="0"/>
+          <a:bodyPr wrap="square" lIns="0" tIns="0" rIns="0" bIns="0" rtlCol="0" anchor="ctr"/>
           <a:lstStyle/>
           <a:p>
             <a:pPr algn="ctr">
@@ -6077,13 +6310,149 @@
               </a:spcAft>
             </a:pPr>
             <a:r>
-              <a:rPr sz="950" b="0" i="0">
+              <a:rPr lang="zh-CN" altLang="en-US" sz="1600" b="0" i="0" dirty="0">
                 <a:solidFill>
                   <a:srgbClr val="1E1E1E"/>
                 </a:solidFill>
-                <a:latin typeface="Microsoft YaHei"/>
+                <a:latin typeface="微软雅黑" panose="020B0503020204020204" charset="-122"/>
               </a:rPr>
-              <a:t>读取候选与中间结果</a:t>
+              <a:t>人工评审</a:t>
+            </a:r>
+            <a:endParaRPr lang="zh-CN" sz="1600" b="0" i="0" dirty="0">
+              <a:solidFill>
+                <a:srgbClr val="1E1E1E"/>
+              </a:solidFill>
+              <a:latin typeface="微软雅黑" panose="020B0503020204020204" charset="-122"/>
+            </a:endParaRPr>
+          </a:p>
+        </p:txBody>
+      </p:sp>
+      <p:cxnSp>
+        <p:nvCxnSpPr>
+          <p:cNvPr id="81" name="Connector 30">
+            <a:extLst>
+              <a:ext uri="{FF2B5EF4-FFF2-40B4-BE49-F238E27FC236}">
+                <a16:creationId xmlns:a16="http://schemas.microsoft.com/office/drawing/2014/main" id="{F2410A80-1381-0B63-A531-C18B002BD7F7}"/>
+              </a:ext>
+            </a:extLst>
+          </p:cNvPr>
+          <p:cNvCxnSpPr>
+            <a:cxnSpLocks/>
+            <a:stCxn id="19" idx="6"/>
+            <a:endCxn id="79" idx="2"/>
+          </p:cNvCxnSpPr>
+          <p:nvPr/>
+        </p:nvCxnSpPr>
+        <p:spPr>
+          <a:xfrm flipV="1">
+            <a:off x="4882681" y="5150641"/>
+            <a:ext cx="1201300" cy="380175"/>
+          </a:xfrm>
+          <a:prstGeom prst="line">
+            <a:avLst/>
+          </a:prstGeom>
+          <a:ln w="12700">
+            <a:solidFill>
+              <a:srgbClr val="7A7A7A"/>
+            </a:solidFill>
+            <a:prstDash val="dash"/>
+            <a:tailEnd type="arrow"/>
+          </a:ln>
+        </p:spPr>
+        <p:style>
+          <a:lnRef idx="2">
+            <a:schemeClr val="accent1"/>
+          </a:lnRef>
+          <a:fillRef idx="0">
+            <a:schemeClr val="accent1"/>
+          </a:fillRef>
+          <a:effectRef idx="1">
+            <a:schemeClr val="accent1"/>
+          </a:effectRef>
+          <a:fontRef idx="minor">
+            <a:schemeClr val="tx1"/>
+          </a:fontRef>
+        </p:style>
+      </p:cxnSp>
+      <p:cxnSp>
+        <p:nvCxnSpPr>
+          <p:cNvPr id="82" name="Connector 30">
+            <a:extLst>
+              <a:ext uri="{FF2B5EF4-FFF2-40B4-BE49-F238E27FC236}">
+                <a16:creationId xmlns:a16="http://schemas.microsoft.com/office/drawing/2014/main" id="{95F26BBB-7AF5-1991-5FDC-FC7ED9A5AA06}"/>
+              </a:ext>
+            </a:extLst>
+          </p:cNvPr>
+          <p:cNvCxnSpPr>
+            <a:cxnSpLocks/>
+          </p:cNvCxnSpPr>
+          <p:nvPr/>
+        </p:nvCxnSpPr>
+        <p:spPr>
+          <a:xfrm>
+            <a:off x="4882681" y="5665896"/>
+            <a:ext cx="1197446" cy="90720"/>
+          </a:xfrm>
+          <a:prstGeom prst="line">
+            <a:avLst/>
+          </a:prstGeom>
+          <a:ln w="12700">
+            <a:solidFill>
+              <a:srgbClr val="7A7A7A"/>
+            </a:solidFill>
+            <a:prstDash val="dash"/>
+            <a:tailEnd type="arrow"/>
+          </a:ln>
+        </p:spPr>
+        <p:style>
+          <a:lnRef idx="2">
+            <a:schemeClr val="accent1"/>
+          </a:lnRef>
+          <a:fillRef idx="0">
+            <a:schemeClr val="accent1"/>
+          </a:fillRef>
+          <a:effectRef idx="1">
+            <a:schemeClr val="accent1"/>
+          </a:effectRef>
+          <a:fontRef idx="minor">
+            <a:schemeClr val="tx1"/>
+          </a:fontRef>
+        </p:style>
+      </p:cxnSp>
+      <p:sp>
+        <p:nvSpPr>
+          <p:cNvPr id="87" name="文本框 86">
+            <a:extLst>
+              <a:ext uri="{FF2B5EF4-FFF2-40B4-BE49-F238E27FC236}">
+                <a16:creationId xmlns:a16="http://schemas.microsoft.com/office/drawing/2014/main" id="{F68C18C2-B66B-BD70-BF70-D6B734C74CB8}"/>
+              </a:ext>
+            </a:extLst>
+          </p:cNvPr>
+          <p:cNvSpPr txBox="1"/>
+          <p:nvPr/>
+        </p:nvSpPr>
+        <p:spPr>
+          <a:xfrm>
+            <a:off x="4839017" y="5663261"/>
+            <a:ext cx="1567815" cy="276999"/>
+          </a:xfrm>
+          <a:prstGeom prst="rect">
+            <a:avLst/>
+          </a:prstGeom>
+          <a:noFill/>
+        </p:spPr>
+        <p:txBody>
+          <a:bodyPr wrap="square" rtlCol="0">
+            <a:spAutoFit/>
+          </a:bodyPr>
+          <a:lstStyle/>
+          <a:p>
+            <a:r>
+              <a:rPr lang="en-US" altLang="zh-CN" sz="1200" dirty="0">
+                <a:latin typeface="Times New Roman" panose="02020603050405020304" charset="0"/>
+                <a:cs typeface="Times New Roman" panose="02020603050405020304" charset="0"/>
+              </a:rPr>
+              <a:t>&lt;&lt;include&gt;&gt;</a:t>
             </a:r>
           </a:p>
         </p:txBody>
@@ -6097,7 +6466,7 @@
 </file>
 
 <file path=ppt/slides/slide3.xml><?xml version="1.0" encoding="utf-8"?>
-<p:sld xmlns:a="http://schemas.openxmlformats.org/drawingml/2006/main" xmlns:p="http://schemas.openxmlformats.org/presentationml/2006/main" xmlns:r="http://schemas.openxmlformats.org/officeDocument/2006/relationships">
+<p:sld xmlns:a="http://schemas.openxmlformats.org/drawingml/2006/main" xmlns:r="http://schemas.openxmlformats.org/officeDocument/2006/relationships" xmlns:p="http://schemas.openxmlformats.org/presentationml/2006/main">
   <p:cSld>
     <p:bg>
       <p:bgPr>
@@ -6113,25 +6482,34 @@
         <p:cNvGrpSpPr/>
         <p:nvPr/>
       </p:nvGrpSpPr>
-      <p:grpSpPr/>
-      <p:sp>
-        <p:nvSpPr>
-          <p:cNvPr id="2" name="Oval 1"/>
+      <p:grpSpPr>
+        <a:xfrm>
+          <a:off x="0" y="0"/>
+          <a:ext cx="0" cy="0"/>
+          <a:chOff x="0" y="0"/>
+          <a:chExt cx="0" cy="0"/>
+        </a:xfrm>
+      </p:grpSpPr>
+      <p:sp>
+        <p:nvSpPr>
+          <p:cNvPr id="2" name="Rectangle 1"/>
           <p:cNvSpPr/>
           <p:nvPr/>
         </p:nvSpPr>
         <p:spPr>
           <a:xfrm>
-            <a:off x="813816" y="1280160"/>
-            <a:ext cx="237744" cy="237744"/>
-          </a:xfrm>
-          <a:prstGeom prst="ellipse">
-            <a:avLst/>
-          </a:prstGeom>
-          <a:noFill/>
-          <a:ln w="12700">
+            <a:off x="2853817" y="775970"/>
+            <a:ext cx="2267712" cy="2377440"/>
+          </a:xfrm>
+          <a:prstGeom prst="rect">
+            <a:avLst/>
+          </a:prstGeom>
+          <a:solidFill>
+            <a:srgbClr val="FFFFFF"/>
+          </a:solidFill>
+          <a:ln w="19050">
             <a:solidFill>
-              <a:srgbClr val="4A4A4A"/>
+              <a:schemeClr val="tx1"/>
             </a:solidFill>
           </a:ln>
         </p:spPr>
@@ -6154,6 +6532,7 @@
           <a:lstStyle/>
           <a:p>
             <a:pPr algn="ctr"/>
+            <a:endParaRPr/>
           </a:p>
         </p:txBody>
       </p:sp>
@@ -6165,15 +6544,15 @@
         </p:nvCxnSpPr>
         <p:spPr>
           <a:xfrm>
-            <a:off x="932688" y="1536192"/>
-            <a:ext cx="0" cy="502920"/>
+            <a:off x="2853817" y="1196594"/>
+            <a:ext cx="2267712" cy="0"/>
           </a:xfrm>
           <a:prstGeom prst="line">
             <a:avLst/>
           </a:prstGeom>
-          <a:ln w="12700">
+          <a:ln w="11430">
             <a:solidFill>
-              <a:srgbClr val="4A4A4A"/>
+              <a:srgbClr val="B8B8B8"/>
             </a:solidFill>
           </a:ln>
         </p:spPr>
@@ -6200,15 +6579,15 @@
         </p:nvCxnSpPr>
         <p:spPr>
           <a:xfrm>
-            <a:off x="749808" y="1764792"/>
-            <a:ext cx="365760" cy="0"/>
+            <a:off x="2853817" y="2560015"/>
+            <a:ext cx="2267712" cy="0"/>
           </a:xfrm>
           <a:prstGeom prst="line">
             <a:avLst/>
           </a:prstGeom>
-          <a:ln w="12700">
+          <a:ln w="11430">
             <a:solidFill>
-              <a:srgbClr val="4A4A4A"/>
+              <a:srgbClr val="B8B8B8"/>
             </a:solidFill>
           </a:ln>
         </p:spPr>
@@ -6227,86 +6606,16 @@
           </a:fontRef>
         </p:style>
       </p:cxnSp>
-      <p:cxnSp>
-        <p:nvCxnSpPr>
-          <p:cNvPr id="5" name="Connector 4"/>
-          <p:cNvCxnSpPr/>
-          <p:nvPr/>
-        </p:nvCxnSpPr>
-        <p:spPr>
-          <a:xfrm flipH="1">
-            <a:off x="768096" y="2039112"/>
-            <a:ext cx="164592" cy="301752"/>
-          </a:xfrm>
-          <a:prstGeom prst="line">
-            <a:avLst/>
-          </a:prstGeom>
-          <a:ln w="12700">
-            <a:solidFill>
-              <a:srgbClr val="4A4A4A"/>
-            </a:solidFill>
-          </a:ln>
-        </p:spPr>
-        <p:style>
-          <a:lnRef idx="2">
-            <a:schemeClr val="accent1"/>
-          </a:lnRef>
-          <a:fillRef idx="0">
-            <a:schemeClr val="accent1"/>
-          </a:fillRef>
-          <a:effectRef idx="1">
-            <a:schemeClr val="accent1"/>
-          </a:effectRef>
-          <a:fontRef idx="minor">
-            <a:schemeClr val="tx1"/>
-          </a:fontRef>
-        </p:style>
-      </p:cxnSp>
-      <p:cxnSp>
-        <p:nvCxnSpPr>
-          <p:cNvPr id="6" name="Connector 5"/>
-          <p:cNvCxnSpPr/>
-          <p:nvPr/>
-        </p:nvCxnSpPr>
-        <p:spPr>
-          <a:xfrm>
-            <a:off x="932688" y="2039112"/>
-            <a:ext cx="164592" cy="301752"/>
-          </a:xfrm>
-          <a:prstGeom prst="line">
-            <a:avLst/>
-          </a:prstGeom>
-          <a:ln w="12700">
-            <a:solidFill>
-              <a:srgbClr val="4A4A4A"/>
-            </a:solidFill>
-          </a:ln>
-        </p:spPr>
-        <p:style>
-          <a:lnRef idx="2">
-            <a:schemeClr val="accent1"/>
-          </a:lnRef>
-          <a:fillRef idx="0">
-            <a:schemeClr val="accent1"/>
-          </a:fillRef>
-          <a:effectRef idx="1">
-            <a:schemeClr val="accent1"/>
-          </a:effectRef>
-          <a:fontRef idx="minor">
-            <a:schemeClr val="tx1"/>
-          </a:fontRef>
-        </p:style>
-      </p:cxnSp>
-      <p:sp>
-        <p:nvSpPr>
-          <p:cNvPr id="7" name="TextBox 6"/>
+      <p:sp>
+        <p:nvSpPr>
+          <p:cNvPr id="5" name="TextBox 4"/>
           <p:cNvSpPr txBox="1"/>
           <p:nvPr/>
         </p:nvSpPr>
         <p:spPr>
           <a:xfrm>
-            <a:off x="201167" y="2377440"/>
-            <a:ext cx="1463040" cy="292608"/>
+            <a:off x="2908681" y="803402"/>
+            <a:ext cx="2157984" cy="384048"/>
           </a:xfrm>
           <a:prstGeom prst="rect">
             <a:avLst/>
@@ -6314,7 +6623,7 @@
           <a:noFill/>
         </p:spPr>
         <p:txBody>
-          <a:bodyPr wrap="square" anchor="ctr" lIns="0" rIns="0" tIns="0" bIns="0">
+          <a:bodyPr wrap="square" lIns="0" tIns="0" rIns="0" bIns="0" anchor="ctr">
             <a:spAutoFit/>
           </a:bodyPr>
           <a:lstStyle/>
@@ -6328,35 +6637,128 @@
               </a:spcAft>
             </a:pPr>
             <a:r>
+              <a:rPr sz="1300" b="0" i="0">
+                <a:solidFill>
+                  <a:srgbClr val="1E1E1E"/>
+                </a:solidFill>
+                <a:latin typeface="微软雅黑" panose="020B0503020204020204" charset="-122"/>
+              </a:rPr>
+              <a:t>CVE</a:t>
+            </a:r>
+          </a:p>
+        </p:txBody>
+      </p:sp>
+      <p:sp>
+        <p:nvSpPr>
+          <p:cNvPr id="6" name="TextBox 5"/>
+          <p:cNvSpPr txBox="1"/>
+          <p:nvPr/>
+        </p:nvSpPr>
+        <p:spPr>
+          <a:xfrm>
+            <a:off x="2934462" y="1258061"/>
+            <a:ext cx="2084831" cy="1049731"/>
+          </a:xfrm>
+          <a:prstGeom prst="rect">
+            <a:avLst/>
+          </a:prstGeom>
+          <a:noFill/>
+        </p:spPr>
+        <p:txBody>
+          <a:bodyPr wrap="square" lIns="0" tIns="0" rIns="0" bIns="0" anchor="t">
+            <a:spAutoFit/>
+          </a:bodyPr>
+          <a:lstStyle/>
+          <a:p>
+            <a:pPr algn="l">
+              <a:spcBef>
+                <a:spcPts val="0"/>
+              </a:spcBef>
+              <a:spcAft>
+                <a:spcPts val="0"/>
+              </a:spcAft>
+            </a:pPr>
+            <a:r>
               <a:rPr sz="1150" b="0" i="0">
                 <a:solidFill>
                   <a:srgbClr val="1E1E1E"/>
                 </a:solidFill>
-                <a:latin typeface="Microsoft YaHei"/>
+                <a:latin typeface="微软雅黑" panose="020B0503020204020204" charset="-122"/>
               </a:rPr>
-              <a:t>安全工程师</a:t>
-            </a:r>
-          </a:p>
-        </p:txBody>
-      </p:sp>
-      <p:sp>
-        <p:nvSpPr>
-          <p:cNvPr id="8" name="Oval 7"/>
+              <a:t>- String cve_id
+- String summary
+- String description
+- Float cvss_score
+- String severity
+- Date published_date
+- Enum status</a:t>
+            </a:r>
+          </a:p>
+        </p:txBody>
+      </p:sp>
+      <p:sp>
+        <p:nvSpPr>
+          <p:cNvPr id="7" name="TextBox 6"/>
+          <p:cNvSpPr txBox="1"/>
+          <p:nvPr/>
+        </p:nvSpPr>
+        <p:spPr>
+          <a:xfrm>
+            <a:off x="2910840" y="2626995"/>
+            <a:ext cx="2084705" cy="452755"/>
+          </a:xfrm>
+          <a:prstGeom prst="rect">
+            <a:avLst/>
+          </a:prstGeom>
+          <a:noFill/>
+        </p:spPr>
+        <p:txBody>
+          <a:bodyPr wrap="square" lIns="0" tIns="0" rIns="0" bIns="0" anchor="t">
+            <a:noAutofit/>
+          </a:bodyPr>
+          <a:lstStyle/>
+          <a:p>
+            <a:pPr algn="l">
+              <a:spcBef>
+                <a:spcPts val="0"/>
+              </a:spcBef>
+              <a:spcAft>
+                <a:spcPts val="0"/>
+              </a:spcAft>
+            </a:pPr>
+            <a:r>
+              <a:rPr sz="1150" b="0" i="0">
+                <a:solidFill>
+                  <a:srgbClr val="1E1E1E"/>
+                </a:solidFill>
+                <a:latin typeface="微软雅黑" panose="020B0503020204020204" charset="-122"/>
+              </a:rPr>
+              <a:t>+ getSeverityLevel(): String
++ toFeatureVector(): List</a:t>
+            </a:r>
+          </a:p>
+        </p:txBody>
+      </p:sp>
+      <p:sp>
+        <p:nvSpPr>
+          <p:cNvPr id="8" name="Rectangle 7"/>
           <p:cNvSpPr/>
           <p:nvPr/>
         </p:nvSpPr>
         <p:spPr>
           <a:xfrm>
-            <a:off x="813816" y="4114800"/>
-            <a:ext cx="237744" cy="237744"/>
-          </a:xfrm>
-          <a:prstGeom prst="ellipse">
-            <a:avLst/>
-          </a:prstGeom>
-          <a:noFill/>
-          <a:ln w="12700">
+            <a:off x="5694045" y="773938"/>
+            <a:ext cx="2761488" cy="2176272"/>
+          </a:xfrm>
+          <a:prstGeom prst="rect">
+            <a:avLst/>
+          </a:prstGeom>
+          <a:solidFill>
+            <a:srgbClr val="FFFFFF"/>
+          </a:solidFill>
+          <a:ln w="19050">
             <a:solidFill>
-              <a:srgbClr val="4A4A4A"/>
+              <a:schemeClr val="tx1"/>
             </a:solidFill>
           </a:ln>
         </p:spPr>
@@ -6379,6 +6781,7 @@
           <a:lstStyle/>
           <a:p>
             <a:pPr algn="ctr"/>
+            <a:endParaRPr/>
           </a:p>
         </p:txBody>
       </p:sp>
@@ -6390,15 +6793,15 @@
         </p:nvCxnSpPr>
         <p:spPr>
           <a:xfrm>
-            <a:off x="932688" y="4370832"/>
-            <a:ext cx="0" cy="502920"/>
+            <a:off x="5694045" y="1194562"/>
+            <a:ext cx="2761488" cy="0"/>
           </a:xfrm>
           <a:prstGeom prst="line">
             <a:avLst/>
           </a:prstGeom>
-          <a:ln w="12700">
+          <a:ln w="11430">
             <a:solidFill>
-              <a:srgbClr val="4A4A4A"/>
+              <a:srgbClr val="B8B8B8"/>
             </a:solidFill>
           </a:ln>
         </p:spPr>
@@ -6425,15 +6828,15 @@
         </p:nvCxnSpPr>
         <p:spPr>
           <a:xfrm>
-            <a:off x="749808" y="4599432"/>
-            <a:ext cx="365760" cy="0"/>
+            <a:off x="5694045" y="2239172"/>
+            <a:ext cx="2761488" cy="0"/>
           </a:xfrm>
           <a:prstGeom prst="line">
             <a:avLst/>
           </a:prstGeom>
-          <a:ln w="12700">
+          <a:ln w="11430">
             <a:solidFill>
-              <a:srgbClr val="4A4A4A"/>
+              <a:srgbClr val="B8B8B8"/>
             </a:solidFill>
           </a:ln>
         </p:spPr>
@@ -6452,86 +6855,16 @@
           </a:fontRef>
         </p:style>
       </p:cxnSp>
-      <p:cxnSp>
-        <p:nvCxnSpPr>
-          <p:cNvPr id="11" name="Connector 10"/>
-          <p:cNvCxnSpPr/>
-          <p:nvPr/>
-        </p:nvCxnSpPr>
-        <p:spPr>
-          <a:xfrm flipH="1">
-            <a:off x="768096" y="4873752"/>
-            <a:ext cx="164592" cy="301752"/>
-          </a:xfrm>
-          <a:prstGeom prst="line">
-            <a:avLst/>
-          </a:prstGeom>
-          <a:ln w="12700">
-            <a:solidFill>
-              <a:srgbClr val="4A4A4A"/>
-            </a:solidFill>
-          </a:ln>
-        </p:spPr>
-        <p:style>
-          <a:lnRef idx="2">
-            <a:schemeClr val="accent1"/>
-          </a:lnRef>
-          <a:fillRef idx="0">
-            <a:schemeClr val="accent1"/>
-          </a:fillRef>
-          <a:effectRef idx="1">
-            <a:schemeClr val="accent1"/>
-          </a:effectRef>
-          <a:fontRef idx="minor">
-            <a:schemeClr val="tx1"/>
-          </a:fontRef>
-        </p:style>
-      </p:cxnSp>
-      <p:cxnSp>
-        <p:nvCxnSpPr>
-          <p:cNvPr id="12" name="Connector 11"/>
-          <p:cNvCxnSpPr/>
-          <p:nvPr/>
-        </p:nvCxnSpPr>
-        <p:spPr>
-          <a:xfrm>
-            <a:off x="932688" y="4873752"/>
-            <a:ext cx="164592" cy="301752"/>
-          </a:xfrm>
-          <a:prstGeom prst="line">
-            <a:avLst/>
-          </a:prstGeom>
-          <a:ln w="12700">
-            <a:solidFill>
-              <a:srgbClr val="4A4A4A"/>
-            </a:solidFill>
-          </a:ln>
-        </p:spPr>
-        <p:style>
-          <a:lnRef idx="2">
-            <a:schemeClr val="accent1"/>
-          </a:lnRef>
-          <a:fillRef idx="0">
-            <a:schemeClr val="accent1"/>
-          </a:fillRef>
-          <a:effectRef idx="1">
-            <a:schemeClr val="accent1"/>
-          </a:effectRef>
-          <a:fontRef idx="minor">
-            <a:schemeClr val="tx1"/>
-          </a:fontRef>
-        </p:style>
-      </p:cxnSp>
-      <p:sp>
-        <p:nvSpPr>
-          <p:cNvPr id="13" name="TextBox 12"/>
+      <p:sp>
+        <p:nvSpPr>
+          <p:cNvPr id="11" name="TextBox 10"/>
           <p:cNvSpPr txBox="1"/>
           <p:nvPr/>
         </p:nvSpPr>
         <p:spPr>
           <a:xfrm>
-            <a:off x="201167" y="5212080"/>
-            <a:ext cx="1463040" cy="292608"/>
+            <a:off x="5748909" y="801370"/>
+            <a:ext cx="2651760" cy="384048"/>
           </a:xfrm>
           <a:prstGeom prst="rect">
             <a:avLst/>
@@ -6539,7 +6872,7 @@
           <a:noFill/>
         </p:spPr>
         <p:txBody>
-          <a:bodyPr wrap="square" anchor="ctr" lIns="0" rIns="0" tIns="0" bIns="0">
+          <a:bodyPr wrap="square" lIns="0" tIns="0" rIns="0" bIns="0" anchor="ctr">
             <a:spAutoFit/>
           </a:bodyPr>
           <a:lstStyle/>
@@ -6553,1343 +6886,27 @@
               </a:spcAft>
             </a:pPr>
             <a:r>
-              <a:rPr sz="1150" b="0" i="0">
-                <a:solidFill>
-                  <a:srgbClr val="1E1E1E"/>
-                </a:solidFill>
-                <a:latin typeface="Microsoft YaHei"/>
-              </a:rPr>
-              <a:t>专家评审员</a:t>
-            </a:r>
-          </a:p>
-        </p:txBody>
-      </p:sp>
-      <p:sp>
-        <p:nvSpPr>
-          <p:cNvPr id="14" name="Rounded Rectangle 13"/>
-          <p:cNvSpPr/>
-          <p:nvPr/>
-        </p:nvSpPr>
-        <p:spPr>
-          <a:xfrm>
-            <a:off x="2057400" y="411480"/>
-            <a:ext cx="8092440" cy="5897880"/>
-          </a:xfrm>
-          <a:prstGeom prst="roundRect">
-            <a:avLst/>
-          </a:prstGeom>
-          <a:solidFill>
-            <a:srgbClr val="FFFFFF"/>
-          </a:solidFill>
-          <a:ln w="10160">
-            <a:solidFill>
-              <a:srgbClr val="B8B8B8"/>
-            </a:solidFill>
-          </a:ln>
-        </p:spPr>
-        <p:style>
-          <a:lnRef idx="1">
-            <a:schemeClr val="accent1"/>
-          </a:lnRef>
-          <a:fillRef idx="3">
-            <a:schemeClr val="accent1"/>
-          </a:fillRef>
-          <a:effectRef idx="2">
-            <a:schemeClr val="accent1"/>
-          </a:effectRef>
-          <a:fontRef idx="minor">
-            <a:schemeClr val="lt1"/>
-          </a:fontRef>
-        </p:style>
-        <p:txBody>
-          <a:bodyPr rtlCol="0" anchor="ctr"/>
-          <a:lstStyle/>
-          <a:p>
-            <a:pPr algn="ctr"/>
-          </a:p>
-        </p:txBody>
-      </p:sp>
-      <p:sp>
-        <p:nvSpPr>
-          <p:cNvPr id="15" name="Oval 14"/>
-          <p:cNvSpPr/>
-          <p:nvPr/>
-        </p:nvSpPr>
-        <p:spPr>
-          <a:xfrm>
-            <a:off x="2880360" y="1078992"/>
-            <a:ext cx="1463040" cy="384048"/>
-          </a:xfrm>
-          <a:prstGeom prst="ellipse">
-            <a:avLst/>
-          </a:prstGeom>
-          <a:solidFill>
-            <a:srgbClr val="FFFFFF"/>
-          </a:solidFill>
-          <a:ln w="13970">
-            <a:solidFill>
-              <a:srgbClr val="7A7A7A"/>
-            </a:solidFill>
-          </a:ln>
-        </p:spPr>
-        <p:style>
-          <a:lnRef idx="1">
-            <a:schemeClr val="accent1"/>
-          </a:lnRef>
-          <a:fillRef idx="3">
-            <a:schemeClr val="accent1"/>
-          </a:fillRef>
-          <a:effectRef idx="2">
-            <a:schemeClr val="accent1"/>
-          </a:effectRef>
-          <a:fontRef idx="minor">
-            <a:schemeClr val="lt1"/>
-          </a:fontRef>
-        </p:style>
-        <p:txBody>
-          <a:bodyPr rtlCol="0" anchor="ctr" wrap="square" lIns="0" rIns="0" tIns="0" bIns="0"/>
-          <a:lstStyle/>
-          <a:p>
-            <a:pPr algn="ctr">
-              <a:spcBef>
-                <a:spcPts val="0"/>
-              </a:spcBef>
-              <a:spcAft>
-                <a:spcPts val="0"/>
-              </a:spcAft>
-            </a:pPr>
-            <a:r>
-              <a:rPr sz="1150" b="0" i="0">
-                <a:solidFill>
-                  <a:srgbClr val="1E1E1E"/>
-                </a:solidFill>
-                <a:latin typeface="Microsoft YaHei"/>
-              </a:rPr>
-              <a:t>浏览漏洞知识与证据</a:t>
-            </a:r>
-          </a:p>
-        </p:txBody>
-      </p:sp>
-      <p:sp>
-        <p:nvSpPr>
-          <p:cNvPr id="16" name="Oval 15"/>
-          <p:cNvSpPr/>
-          <p:nvPr/>
-        </p:nvSpPr>
-        <p:spPr>
-          <a:xfrm>
-            <a:off x="2880360" y="1847088"/>
-            <a:ext cx="1188720" cy="384048"/>
-          </a:xfrm>
-          <a:prstGeom prst="ellipse">
-            <a:avLst/>
-          </a:prstGeom>
-          <a:solidFill>
-            <a:srgbClr val="FFFFFF"/>
-          </a:solidFill>
-          <a:ln w="13970">
-            <a:solidFill>
-              <a:srgbClr val="7A7A7A"/>
-            </a:solidFill>
-          </a:ln>
-        </p:spPr>
-        <p:style>
-          <a:lnRef idx="1">
-            <a:schemeClr val="accent1"/>
-          </a:lnRef>
-          <a:fillRef idx="3">
-            <a:schemeClr val="accent1"/>
-          </a:fillRef>
-          <a:effectRef idx="2">
-            <a:schemeClr val="accent1"/>
-          </a:effectRef>
-          <a:fontRef idx="minor">
-            <a:schemeClr val="lt1"/>
-          </a:fontRef>
-        </p:style>
-        <p:txBody>
-          <a:bodyPr rtlCol="0" anchor="ctr" wrap="square" lIns="0" rIns="0" tIns="0" bIns="0"/>
-          <a:lstStyle/>
-          <a:p>
-            <a:pPr algn="ctr">
-              <a:spcBef>
-                <a:spcPts val="0"/>
-              </a:spcBef>
-              <a:spcAft>
-                <a:spcPts val="0"/>
-              </a:spcAft>
-            </a:pPr>
-            <a:r>
-              <a:rPr sz="1150" b="0" i="0">
-                <a:solidFill>
-                  <a:srgbClr val="1E1E1E"/>
-                </a:solidFill>
-                <a:latin typeface="Microsoft YaHei"/>
-              </a:rPr>
-              <a:t>创建分析会话</a:t>
-            </a:r>
-          </a:p>
-        </p:txBody>
-      </p:sp>
-      <p:sp>
-        <p:nvSpPr>
-          <p:cNvPr id="17" name="Oval 16"/>
-          <p:cNvSpPr/>
-          <p:nvPr/>
-        </p:nvSpPr>
-        <p:spPr>
-          <a:xfrm>
-            <a:off x="5074920" y="1847088"/>
-            <a:ext cx="1188720" cy="384048"/>
-          </a:xfrm>
-          <a:prstGeom prst="ellipse">
-            <a:avLst/>
-          </a:prstGeom>
-          <a:solidFill>
-            <a:srgbClr val="FFFFFF"/>
-          </a:solidFill>
-          <a:ln w="13970">
-            <a:solidFill>
-              <a:srgbClr val="7A7A7A"/>
-            </a:solidFill>
-          </a:ln>
-        </p:spPr>
-        <p:style>
-          <a:lnRef idx="1">
-            <a:schemeClr val="accent1"/>
-          </a:lnRef>
-          <a:fillRef idx="3">
-            <a:schemeClr val="accent1"/>
-          </a:fillRef>
-          <a:effectRef idx="2">
-            <a:schemeClr val="accent1"/>
-          </a:effectRef>
-          <a:fontRef idx="minor">
-            <a:schemeClr val="lt1"/>
-          </a:fontRef>
-        </p:style>
-        <p:txBody>
-          <a:bodyPr rtlCol="0" anchor="ctr" wrap="square" lIns="0" rIns="0" tIns="0" bIns="0"/>
-          <a:lstStyle/>
-          <a:p>
-            <a:pPr algn="ctr">
-              <a:spcBef>
-                <a:spcPts val="0"/>
-              </a:spcBef>
-              <a:spcAft>
-                <a:spcPts val="0"/>
-              </a:spcAft>
-            </a:pPr>
-            <a:r>
-              <a:rPr sz="1150" b="0" i="0">
-                <a:solidFill>
-                  <a:srgbClr val="1E1E1E"/>
-                </a:solidFill>
-                <a:latin typeface="Microsoft YaHei"/>
-              </a:rPr>
-              <a:t>生成候选策略</a:t>
-            </a:r>
-          </a:p>
-        </p:txBody>
-      </p:sp>
-      <p:sp>
-        <p:nvSpPr>
-          <p:cNvPr id="18" name="Oval 17"/>
-          <p:cNvSpPr/>
-          <p:nvPr/>
-        </p:nvSpPr>
-        <p:spPr>
-          <a:xfrm>
-            <a:off x="2880360" y="2670048"/>
-            <a:ext cx="1463040" cy="384048"/>
-          </a:xfrm>
-          <a:prstGeom prst="ellipse">
-            <a:avLst/>
-          </a:prstGeom>
-          <a:solidFill>
-            <a:srgbClr val="FFFFFF"/>
-          </a:solidFill>
-          <a:ln w="13970">
-            <a:solidFill>
-              <a:srgbClr val="7A7A7A"/>
-            </a:solidFill>
-          </a:ln>
-        </p:spPr>
-        <p:style>
-          <a:lnRef idx="1">
-            <a:schemeClr val="accent1"/>
-          </a:lnRef>
-          <a:fillRef idx="3">
-            <a:schemeClr val="accent1"/>
-          </a:fillRef>
-          <a:effectRef idx="2">
-            <a:schemeClr val="accent1"/>
-          </a:effectRef>
-          <a:fontRef idx="minor">
-            <a:schemeClr val="lt1"/>
-          </a:fontRef>
-        </p:style>
-        <p:txBody>
-          <a:bodyPr rtlCol="0" anchor="ctr" wrap="square" lIns="0" rIns="0" tIns="0" bIns="0"/>
-          <a:lstStyle/>
-          <a:p>
-            <a:pPr algn="ctr">
-              <a:spcBef>
-                <a:spcPts val="0"/>
-              </a:spcBef>
-              <a:spcAft>
-                <a:spcPts val="0"/>
-              </a:spcAft>
-            </a:pPr>
-            <a:r>
-              <a:rPr sz="1150" b="0" i="0">
-                <a:solidFill>
-                  <a:srgbClr val="1E1E1E"/>
-                </a:solidFill>
-                <a:latin typeface="Microsoft YaHei"/>
-              </a:rPr>
-              <a:t>反馈修订与再生成</a:t>
-            </a:r>
-          </a:p>
-        </p:txBody>
-      </p:sp>
-      <p:sp>
-        <p:nvSpPr>
-          <p:cNvPr id="19" name="Oval 18"/>
-          <p:cNvSpPr/>
-          <p:nvPr/>
-        </p:nvSpPr>
-        <p:spPr>
-          <a:xfrm>
-            <a:off x="2880360" y="4005072"/>
-            <a:ext cx="1298448" cy="384048"/>
-          </a:xfrm>
-          <a:prstGeom prst="ellipse">
-            <a:avLst/>
-          </a:prstGeom>
-          <a:solidFill>
-            <a:srgbClr val="FFFFFF"/>
-          </a:solidFill>
-          <a:ln w="13970">
-            <a:solidFill>
-              <a:srgbClr val="7A7A7A"/>
-            </a:solidFill>
-          </a:ln>
-        </p:spPr>
-        <p:style>
-          <a:lnRef idx="1">
-            <a:schemeClr val="accent1"/>
-          </a:lnRef>
-          <a:fillRef idx="3">
-            <a:schemeClr val="accent1"/>
-          </a:fillRef>
-          <a:effectRef idx="2">
-            <a:schemeClr val="accent1"/>
-          </a:effectRef>
-          <a:fontRef idx="minor">
-            <a:schemeClr val="lt1"/>
-          </a:fontRef>
-        </p:style>
-        <p:txBody>
-          <a:bodyPr rtlCol="0" anchor="ctr" wrap="square" lIns="0" rIns="0" tIns="0" bIns="0"/>
-          <a:lstStyle/>
-          <a:p>
-            <a:pPr algn="ctr">
-              <a:spcBef>
-                <a:spcPts val="0"/>
-              </a:spcBef>
-              <a:spcAft>
-                <a:spcPts val="0"/>
-              </a:spcAft>
-            </a:pPr>
-            <a:r>
-              <a:rPr sz="1150" b="0" i="0">
-                <a:solidFill>
-                  <a:srgbClr val="1E1E1E"/>
-                </a:solidFill>
-                <a:latin typeface="Microsoft YaHei"/>
-              </a:rPr>
-              <a:t>三维质量评审</a:t>
-            </a:r>
-          </a:p>
-        </p:txBody>
-      </p:sp>
-      <p:sp>
-        <p:nvSpPr>
-          <p:cNvPr id="20" name="Oval 19"/>
-          <p:cNvSpPr/>
-          <p:nvPr/>
-        </p:nvSpPr>
-        <p:spPr>
-          <a:xfrm>
-            <a:off x="2880360" y="4773168"/>
-            <a:ext cx="1353312" cy="384048"/>
-          </a:xfrm>
-          <a:prstGeom prst="ellipse">
-            <a:avLst/>
-          </a:prstGeom>
-          <a:solidFill>
-            <a:srgbClr val="FFFFFF"/>
-          </a:solidFill>
-          <a:ln w="13970">
-            <a:solidFill>
-              <a:srgbClr val="7A7A7A"/>
-            </a:solidFill>
-          </a:ln>
-        </p:spPr>
-        <p:style>
-          <a:lnRef idx="1">
-            <a:schemeClr val="accent1"/>
-          </a:lnRef>
-          <a:fillRef idx="3">
-            <a:schemeClr val="accent1"/>
-          </a:fillRef>
-          <a:effectRef idx="2">
-            <a:schemeClr val="accent1"/>
-          </a:effectRef>
-          <a:fontRef idx="minor">
-            <a:schemeClr val="lt1"/>
-          </a:fontRef>
-        </p:style>
-        <p:txBody>
-          <a:bodyPr rtlCol="0" anchor="ctr" wrap="square" lIns="0" rIns="0" tIns="0" bIns="0"/>
-          <a:lstStyle/>
-          <a:p>
-            <a:pPr algn="ctr">
-              <a:spcBef>
-                <a:spcPts val="0"/>
-              </a:spcBef>
-              <a:spcAft>
-                <a:spcPts val="0"/>
-              </a:spcAft>
-            </a:pPr>
-            <a:r>
-              <a:rPr sz="1150" b="0" i="0">
-                <a:solidFill>
-                  <a:srgbClr val="1E1E1E"/>
-                </a:solidFill>
-                <a:latin typeface="Microsoft YaHei"/>
-              </a:rPr>
-              <a:t>同类型候选排序</a:t>
-            </a:r>
-          </a:p>
-        </p:txBody>
-      </p:sp>
-      <p:sp>
-        <p:nvSpPr>
-          <p:cNvPr id="21" name="Oval 20"/>
-          <p:cNvSpPr/>
-          <p:nvPr/>
-        </p:nvSpPr>
-        <p:spPr>
-          <a:xfrm>
-            <a:off x="5074920" y="4773168"/>
-            <a:ext cx="1298448" cy="384048"/>
-          </a:xfrm>
-          <a:prstGeom prst="ellipse">
-            <a:avLst/>
-          </a:prstGeom>
-          <a:solidFill>
-            <a:srgbClr val="FFFFFF"/>
-          </a:solidFill>
-          <a:ln w="13970">
-            <a:solidFill>
-              <a:srgbClr val="7A7A7A"/>
-            </a:solidFill>
-          </a:ln>
-        </p:spPr>
-        <p:style>
-          <a:lnRef idx="1">
-            <a:schemeClr val="accent1"/>
-          </a:lnRef>
-          <a:fillRef idx="3">
-            <a:schemeClr val="accent1"/>
-          </a:fillRef>
-          <a:effectRef idx="2">
-            <a:schemeClr val="accent1"/>
-          </a:effectRef>
-          <a:fontRef idx="minor">
-            <a:schemeClr val="lt1"/>
-          </a:fontRef>
-        </p:style>
-        <p:txBody>
-          <a:bodyPr rtlCol="0" anchor="ctr" wrap="square" lIns="0" rIns="0" tIns="0" bIns="0"/>
-          <a:lstStyle/>
-          <a:p>
-            <a:pPr algn="ctr">
-              <a:spcBef>
-                <a:spcPts val="0"/>
-              </a:spcBef>
-              <a:spcAft>
-                <a:spcPts val="0"/>
-              </a:spcAft>
-            </a:pPr>
-            <a:r>
-              <a:rPr sz="1150" b="0" i="0">
-                <a:solidFill>
-                  <a:srgbClr val="1E1E1E"/>
-                </a:solidFill>
-                <a:latin typeface="Microsoft YaHei"/>
-              </a:rPr>
-              <a:t>确认交付结果</a:t>
-            </a:r>
-          </a:p>
-        </p:txBody>
-      </p:sp>
-      <p:sp>
-        <p:nvSpPr>
-          <p:cNvPr id="22" name="Oval 21"/>
-          <p:cNvSpPr/>
-          <p:nvPr/>
-        </p:nvSpPr>
-        <p:spPr>
-          <a:xfrm>
-            <a:off x="7406640" y="4773168"/>
-            <a:ext cx="1051560" cy="384048"/>
-          </a:xfrm>
-          <a:prstGeom prst="ellipse">
-            <a:avLst/>
-          </a:prstGeom>
-          <a:solidFill>
-            <a:srgbClr val="FFFFFF"/>
-          </a:solidFill>
-          <a:ln w="13970">
-            <a:solidFill>
-              <a:srgbClr val="7A7A7A"/>
-            </a:solidFill>
-          </a:ln>
-        </p:spPr>
-        <p:style>
-          <a:lnRef idx="1">
-            <a:schemeClr val="accent1"/>
-          </a:lnRef>
-          <a:fillRef idx="3">
-            <a:schemeClr val="accent1"/>
-          </a:fillRef>
-          <a:effectRef idx="2">
-            <a:schemeClr val="accent1"/>
-          </a:effectRef>
-          <a:fontRef idx="minor">
-            <a:schemeClr val="lt1"/>
-          </a:fontRef>
-        </p:style>
-        <p:txBody>
-          <a:bodyPr rtlCol="0" anchor="ctr" wrap="square" lIns="0" rIns="0" tIns="0" bIns="0"/>
-          <a:lstStyle/>
-          <a:p>
-            <a:pPr algn="ctr">
-              <a:spcBef>
-                <a:spcPts val="0"/>
-              </a:spcBef>
-              <a:spcAft>
-                <a:spcPts val="0"/>
-              </a:spcAft>
-            </a:pPr>
-            <a:r>
-              <a:rPr sz="1150" b="0" i="0">
-                <a:solidFill>
-                  <a:srgbClr val="1E1E1E"/>
-                </a:solidFill>
-                <a:latin typeface="Microsoft YaHei"/>
-              </a:rPr>
-              <a:t>部署验证</a:t>
-            </a:r>
-          </a:p>
-        </p:txBody>
-      </p:sp>
-      <p:sp>
-        <p:nvSpPr>
-          <p:cNvPr id="23" name="Oval 22"/>
-          <p:cNvSpPr/>
-          <p:nvPr/>
-        </p:nvSpPr>
-        <p:spPr>
-          <a:xfrm>
-            <a:off x="4937760" y="5532120"/>
-            <a:ext cx="1600200" cy="384048"/>
-          </a:xfrm>
-          <a:prstGeom prst="ellipse">
-            <a:avLst/>
-          </a:prstGeom>
-          <a:solidFill>
-            <a:srgbClr val="FFFFFF"/>
-          </a:solidFill>
-          <a:ln w="13970">
-            <a:solidFill>
-              <a:srgbClr val="7A7A7A"/>
-            </a:solidFill>
-          </a:ln>
-        </p:spPr>
-        <p:style>
-          <a:lnRef idx="1">
-            <a:schemeClr val="accent1"/>
-          </a:lnRef>
-          <a:fillRef idx="3">
-            <a:schemeClr val="accent1"/>
-          </a:fillRef>
-          <a:effectRef idx="2">
-            <a:schemeClr val="accent1"/>
-          </a:effectRef>
-          <a:fontRef idx="minor">
-            <a:schemeClr val="lt1"/>
-          </a:fontRef>
-        </p:style>
-        <p:txBody>
-          <a:bodyPr rtlCol="0" anchor="ctr" wrap="square" lIns="0" rIns="0" tIns="0" bIns="0"/>
-          <a:lstStyle/>
-          <a:p>
-            <a:pPr algn="ctr">
-              <a:spcBef>
-                <a:spcPts val="0"/>
-              </a:spcBef>
-              <a:spcAft>
-                <a:spcPts val="0"/>
-              </a:spcAft>
-            </a:pPr>
-            <a:r>
-              <a:rPr sz="1150" b="0" i="0">
-                <a:solidFill>
-                  <a:srgbClr val="1E1E1E"/>
-                </a:solidFill>
-                <a:latin typeface="Microsoft YaHei"/>
-              </a:rPr>
-              <a:t>查看评审与审计记录</a:t>
-            </a:r>
-          </a:p>
-        </p:txBody>
-      </p:sp>
-      <p:cxnSp>
-        <p:nvCxnSpPr>
-          <p:cNvPr id="24" name="Connector 23"/>
-          <p:cNvCxnSpPr/>
-          <p:nvPr/>
-        </p:nvCxnSpPr>
-        <p:spPr>
-          <a:xfrm flipV="1">
-            <a:off x="1298448" y="1271016"/>
-            <a:ext cx="1581912" cy="393192"/>
-          </a:xfrm>
-          <a:prstGeom prst="line">
-            <a:avLst/>
-          </a:prstGeom>
-          <a:ln w="11430">
-            <a:solidFill>
-              <a:srgbClr val="4A4A4A"/>
-            </a:solidFill>
-          </a:ln>
-        </p:spPr>
-        <p:style>
-          <a:lnRef idx="2">
-            <a:schemeClr val="accent1"/>
-          </a:lnRef>
-          <a:fillRef idx="0">
-            <a:schemeClr val="accent1"/>
-          </a:fillRef>
-          <a:effectRef idx="1">
-            <a:schemeClr val="accent1"/>
-          </a:effectRef>
-          <a:fontRef idx="minor">
-            <a:schemeClr val="tx1"/>
-          </a:fontRef>
-        </p:style>
-      </p:cxnSp>
-      <p:cxnSp>
-        <p:nvCxnSpPr>
-          <p:cNvPr id="25" name="Connector 24"/>
-          <p:cNvCxnSpPr/>
-          <p:nvPr/>
-        </p:nvCxnSpPr>
-        <p:spPr>
-          <a:xfrm>
-            <a:off x="1298448" y="1828800"/>
-            <a:ext cx="1581912" cy="210312"/>
-          </a:xfrm>
-          <a:prstGeom prst="line">
-            <a:avLst/>
-          </a:prstGeom>
-          <a:ln w="11430">
-            <a:solidFill>
-              <a:srgbClr val="4A4A4A"/>
-            </a:solidFill>
-          </a:ln>
-        </p:spPr>
-        <p:style>
-          <a:lnRef idx="2">
-            <a:schemeClr val="accent1"/>
-          </a:lnRef>
-          <a:fillRef idx="0">
-            <a:schemeClr val="accent1"/>
-          </a:fillRef>
-          <a:effectRef idx="1">
-            <a:schemeClr val="accent1"/>
-          </a:effectRef>
-          <a:fontRef idx="minor">
-            <a:schemeClr val="tx1"/>
-          </a:fontRef>
-        </p:style>
-      </p:cxnSp>
-      <p:cxnSp>
-        <p:nvCxnSpPr>
-          <p:cNvPr id="26" name="Connector 25"/>
-          <p:cNvCxnSpPr/>
-          <p:nvPr/>
-        </p:nvCxnSpPr>
-        <p:spPr>
-          <a:xfrm>
-            <a:off x="1298448" y="2057400"/>
-            <a:ext cx="1581912" cy="804672"/>
-          </a:xfrm>
-          <a:prstGeom prst="line">
-            <a:avLst/>
-          </a:prstGeom>
-          <a:ln w="11430">
-            <a:solidFill>
-              <a:srgbClr val="4A4A4A"/>
-            </a:solidFill>
-          </a:ln>
-        </p:spPr>
-        <p:style>
-          <a:lnRef idx="2">
-            <a:schemeClr val="accent1"/>
-          </a:lnRef>
-          <a:fillRef idx="0">
-            <a:schemeClr val="accent1"/>
-          </a:fillRef>
-          <a:effectRef idx="1">
-            <a:schemeClr val="accent1"/>
-          </a:effectRef>
-          <a:fontRef idx="minor">
-            <a:schemeClr val="tx1"/>
-          </a:fontRef>
-        </p:style>
-      </p:cxnSp>
-      <p:cxnSp>
-        <p:nvCxnSpPr>
-          <p:cNvPr id="27" name="Connector 26"/>
-          <p:cNvCxnSpPr/>
-          <p:nvPr/>
-        </p:nvCxnSpPr>
-        <p:spPr>
-          <a:xfrm>
-            <a:off x="1298448" y="2240280"/>
-            <a:ext cx="3776472" cy="2724912"/>
-          </a:xfrm>
-          <a:prstGeom prst="line">
-            <a:avLst/>
-          </a:prstGeom>
-          <a:ln w="11430">
-            <a:solidFill>
-              <a:srgbClr val="4A4A4A"/>
-            </a:solidFill>
-          </a:ln>
-        </p:spPr>
-        <p:style>
-          <a:lnRef idx="2">
-            <a:schemeClr val="accent1"/>
-          </a:lnRef>
-          <a:fillRef idx="0">
-            <a:schemeClr val="accent1"/>
-          </a:fillRef>
-          <a:effectRef idx="1">
-            <a:schemeClr val="accent1"/>
-          </a:effectRef>
-          <a:fontRef idx="minor">
-            <a:schemeClr val="tx1"/>
-          </a:fontRef>
-        </p:style>
-      </p:cxnSp>
-      <p:cxnSp>
-        <p:nvCxnSpPr>
-          <p:cNvPr id="28" name="Connector 27"/>
-          <p:cNvCxnSpPr/>
-          <p:nvPr/>
-        </p:nvCxnSpPr>
-        <p:spPr>
-          <a:xfrm flipV="1">
-            <a:off x="1298448" y="4197096"/>
-            <a:ext cx="1581912" cy="356616"/>
-          </a:xfrm>
-          <a:prstGeom prst="line">
-            <a:avLst/>
-          </a:prstGeom>
-          <a:ln w="11430">
-            <a:solidFill>
-              <a:srgbClr val="4A4A4A"/>
-            </a:solidFill>
-          </a:ln>
-        </p:spPr>
-        <p:style>
-          <a:lnRef idx="2">
-            <a:schemeClr val="accent1"/>
-          </a:lnRef>
-          <a:fillRef idx="0">
-            <a:schemeClr val="accent1"/>
-          </a:fillRef>
-          <a:effectRef idx="1">
-            <a:schemeClr val="accent1"/>
-          </a:effectRef>
-          <a:fontRef idx="minor">
-            <a:schemeClr val="tx1"/>
-          </a:fontRef>
-        </p:style>
-      </p:cxnSp>
-      <p:cxnSp>
-        <p:nvCxnSpPr>
-          <p:cNvPr id="29" name="Connector 28"/>
-          <p:cNvCxnSpPr/>
-          <p:nvPr/>
-        </p:nvCxnSpPr>
-        <p:spPr>
-          <a:xfrm>
-            <a:off x="1298448" y="4736592"/>
-            <a:ext cx="1581912" cy="228600"/>
-          </a:xfrm>
-          <a:prstGeom prst="line">
-            <a:avLst/>
-          </a:prstGeom>
-          <a:ln w="11430">
-            <a:solidFill>
-              <a:srgbClr val="4A4A4A"/>
-            </a:solidFill>
-          </a:ln>
-        </p:spPr>
-        <p:style>
-          <a:lnRef idx="2">
-            <a:schemeClr val="accent1"/>
-          </a:lnRef>
-          <a:fillRef idx="0">
-            <a:schemeClr val="accent1"/>
-          </a:fillRef>
-          <a:effectRef idx="1">
-            <a:schemeClr val="accent1"/>
-          </a:effectRef>
-          <a:fontRef idx="minor">
-            <a:schemeClr val="tx1"/>
-          </a:fontRef>
-        </p:style>
-      </p:cxnSp>
-      <p:cxnSp>
-        <p:nvCxnSpPr>
-          <p:cNvPr id="30" name="Connector 29"/>
-          <p:cNvCxnSpPr/>
-          <p:nvPr/>
-        </p:nvCxnSpPr>
-        <p:spPr>
-          <a:xfrm>
-            <a:off x="1298448" y="4956048"/>
-            <a:ext cx="3639312" cy="768096"/>
-          </a:xfrm>
-          <a:prstGeom prst="line">
-            <a:avLst/>
-          </a:prstGeom>
-          <a:ln w="11430">
-            <a:solidFill>
-              <a:srgbClr val="4A4A4A"/>
-            </a:solidFill>
-          </a:ln>
-        </p:spPr>
-        <p:style>
-          <a:lnRef idx="2">
-            <a:schemeClr val="accent1"/>
-          </a:lnRef>
-          <a:fillRef idx="0">
-            <a:schemeClr val="accent1"/>
-          </a:fillRef>
-          <a:effectRef idx="1">
-            <a:schemeClr val="accent1"/>
-          </a:effectRef>
-          <a:fontRef idx="minor">
-            <a:schemeClr val="tx1"/>
-          </a:fontRef>
-        </p:style>
-      </p:cxnSp>
-      <p:cxnSp>
-        <p:nvCxnSpPr>
-          <p:cNvPr id="31" name="Connector 30"/>
-          <p:cNvCxnSpPr/>
-          <p:nvPr/>
-        </p:nvCxnSpPr>
-        <p:spPr>
-          <a:xfrm>
-            <a:off x="4069080" y="2039112"/>
-            <a:ext cx="1005840" cy="0"/>
-          </a:xfrm>
-          <a:prstGeom prst="line">
-            <a:avLst/>
-          </a:prstGeom>
-          <a:ln w="12700">
-            <a:solidFill>
-              <a:srgbClr val="7A7A7A"/>
-            </a:solidFill>
-            <a:prstDash val="dash"/>
-            <a:tailEnd type="arrow"/>
-          </a:ln>
-        </p:spPr>
-        <p:style>
-          <a:lnRef idx="2">
-            <a:schemeClr val="accent1"/>
-          </a:lnRef>
-          <a:fillRef idx="0">
-            <a:schemeClr val="accent1"/>
-          </a:fillRef>
-          <a:effectRef idx="1">
-            <a:schemeClr val="accent1"/>
-          </a:effectRef>
-          <a:fontRef idx="minor">
-            <a:schemeClr val="tx1"/>
-          </a:fontRef>
-        </p:style>
-      </p:cxnSp>
-      <p:sp>
-        <p:nvSpPr>
-          <p:cNvPr id="32" name="Rounded Rectangle 31"/>
-          <p:cNvSpPr/>
-          <p:nvPr/>
-        </p:nvSpPr>
-        <p:spPr>
-          <a:xfrm>
-            <a:off x="4242816" y="1591055"/>
-            <a:ext cx="658368" cy="256032"/>
-          </a:xfrm>
-          <a:prstGeom prst="roundRect">
-            <a:avLst/>
-          </a:prstGeom>
-          <a:solidFill>
-            <a:srgbClr val="FFFFFF"/>
-          </a:solidFill>
-          <a:ln w="10160">
-            <a:solidFill>
-              <a:srgbClr val="B8B8B8"/>
-            </a:solidFill>
-          </a:ln>
-        </p:spPr>
-        <p:style>
-          <a:lnRef idx="1">
-            <a:schemeClr val="accent1"/>
-          </a:lnRef>
-          <a:fillRef idx="3">
-            <a:schemeClr val="accent1"/>
-          </a:fillRef>
-          <a:effectRef idx="2">
-            <a:schemeClr val="accent1"/>
-          </a:effectRef>
-          <a:fontRef idx="minor">
-            <a:schemeClr val="lt1"/>
-          </a:fontRef>
-        </p:style>
-        <p:txBody>
-          <a:bodyPr rtlCol="0" anchor="ctr" wrap="square" lIns="0" rIns="0" tIns="0" bIns="0"/>
-          <a:lstStyle/>
-          <a:p>
-            <a:pPr algn="ctr">
-              <a:spcBef>
-                <a:spcPts val="0"/>
-              </a:spcBef>
-              <a:spcAft>
-                <a:spcPts val="0"/>
-              </a:spcAft>
-            </a:pPr>
-            <a:r>
-              <a:rPr sz="950" b="0" i="0">
-                <a:solidFill>
-                  <a:srgbClr val="1E1E1E"/>
-                </a:solidFill>
-                <a:latin typeface="Microsoft YaHei"/>
-              </a:rPr>
-              <a:t>触发</a:t>
-            </a:r>
-          </a:p>
-        </p:txBody>
-      </p:sp>
-      <p:cxnSp>
-        <p:nvCxnSpPr>
-          <p:cNvPr id="33" name="Connector 32"/>
-          <p:cNvCxnSpPr/>
-          <p:nvPr/>
-        </p:nvCxnSpPr>
-        <p:spPr>
-          <a:xfrm flipV="1">
-            <a:off x="4343400" y="2231136"/>
-            <a:ext cx="731520" cy="630936"/>
-          </a:xfrm>
-          <a:prstGeom prst="line">
-            <a:avLst/>
-          </a:prstGeom>
-          <a:ln w="12700">
-            <a:solidFill>
-              <a:srgbClr val="7A7A7A"/>
-            </a:solidFill>
-            <a:prstDash val="dash"/>
-            <a:tailEnd type="arrow"/>
-          </a:ln>
-        </p:spPr>
-        <p:style>
-          <a:lnRef idx="2">
-            <a:schemeClr val="accent1"/>
-          </a:lnRef>
-          <a:fillRef idx="0">
-            <a:schemeClr val="accent1"/>
-          </a:fillRef>
-          <a:effectRef idx="1">
-            <a:schemeClr val="accent1"/>
-          </a:effectRef>
-          <a:fontRef idx="minor">
-            <a:schemeClr val="tx1"/>
-          </a:fontRef>
-        </p:style>
-      </p:cxnSp>
-      <p:sp>
-        <p:nvSpPr>
-          <p:cNvPr id="34" name="Rounded Rectangle 33"/>
-          <p:cNvSpPr/>
-          <p:nvPr/>
-        </p:nvSpPr>
-        <p:spPr>
-          <a:xfrm>
-            <a:off x="4215383" y="2359152"/>
-            <a:ext cx="804672" cy="256032"/>
-          </a:xfrm>
-          <a:prstGeom prst="roundRect">
-            <a:avLst/>
-          </a:prstGeom>
-          <a:solidFill>
-            <a:srgbClr val="FFFFFF"/>
-          </a:solidFill>
-          <a:ln w="10160">
-            <a:solidFill>
-              <a:srgbClr val="B8B8B8"/>
-            </a:solidFill>
-          </a:ln>
-        </p:spPr>
-        <p:style>
-          <a:lnRef idx="1">
-            <a:schemeClr val="accent1"/>
-          </a:lnRef>
-          <a:fillRef idx="3">
-            <a:schemeClr val="accent1"/>
-          </a:fillRef>
-          <a:effectRef idx="2">
-            <a:schemeClr val="accent1"/>
-          </a:effectRef>
-          <a:fontRef idx="minor">
-            <a:schemeClr val="lt1"/>
-          </a:fontRef>
-        </p:style>
-        <p:txBody>
-          <a:bodyPr rtlCol="0" anchor="ctr" wrap="square" lIns="0" rIns="0" tIns="0" bIns="0"/>
-          <a:lstStyle/>
-          <a:p>
-            <a:pPr algn="ctr">
-              <a:spcBef>
-                <a:spcPts val="0"/>
-              </a:spcBef>
-              <a:spcAft>
-                <a:spcPts val="0"/>
-              </a:spcAft>
-            </a:pPr>
-            <a:r>
-              <a:rPr sz="950" b="0" i="0">
-                <a:solidFill>
-                  <a:srgbClr val="1E1E1E"/>
-                </a:solidFill>
-                <a:latin typeface="Microsoft YaHei"/>
-              </a:rPr>
-              <a:t>反馈驱动</a:t>
-            </a:r>
-          </a:p>
-        </p:txBody>
-      </p:sp>
-      <p:cxnSp>
-        <p:nvCxnSpPr>
-          <p:cNvPr id="35" name="Connector 34"/>
-          <p:cNvCxnSpPr/>
-          <p:nvPr/>
-        </p:nvCxnSpPr>
-        <p:spPr>
-          <a:xfrm>
-            <a:off x="6373368" y="4965192"/>
-            <a:ext cx="1033272" cy="0"/>
-          </a:xfrm>
-          <a:prstGeom prst="line">
-            <a:avLst/>
-          </a:prstGeom>
-          <a:ln w="12700">
-            <a:solidFill>
-              <a:srgbClr val="7A7A7A"/>
-            </a:solidFill>
-            <a:prstDash val="dash"/>
-            <a:tailEnd type="arrow"/>
-          </a:ln>
-        </p:spPr>
-        <p:style>
-          <a:lnRef idx="2">
-            <a:schemeClr val="accent1"/>
-          </a:lnRef>
-          <a:fillRef idx="0">
-            <a:schemeClr val="accent1"/>
-          </a:fillRef>
-          <a:effectRef idx="1">
-            <a:schemeClr val="accent1"/>
-          </a:effectRef>
-          <a:fontRef idx="minor">
-            <a:schemeClr val="tx1"/>
-          </a:fontRef>
-        </p:style>
-      </p:cxnSp>
-      <p:sp>
-        <p:nvSpPr>
-          <p:cNvPr id="36" name="Rounded Rectangle 35"/>
-          <p:cNvSpPr/>
-          <p:nvPr/>
-        </p:nvSpPr>
-        <p:spPr>
-          <a:xfrm>
-            <a:off x="6437376" y="4517136"/>
-            <a:ext cx="932688" cy="256032"/>
-          </a:xfrm>
-          <a:prstGeom prst="roundRect">
-            <a:avLst/>
-          </a:prstGeom>
-          <a:solidFill>
-            <a:srgbClr val="FFFFFF"/>
-          </a:solidFill>
-          <a:ln w="10160">
-            <a:solidFill>
-              <a:srgbClr val="B8B8B8"/>
-            </a:solidFill>
-          </a:ln>
-        </p:spPr>
-        <p:style>
-          <a:lnRef idx="1">
-            <a:schemeClr val="accent1"/>
-          </a:lnRef>
-          <a:fillRef idx="3">
-            <a:schemeClr val="accent1"/>
-          </a:fillRef>
-          <a:effectRef idx="2">
-            <a:schemeClr val="accent1"/>
-          </a:effectRef>
-          <a:fontRef idx="minor">
-            <a:schemeClr val="lt1"/>
-          </a:fontRef>
-        </p:style>
-        <p:txBody>
-          <a:bodyPr rtlCol="0" anchor="ctr" wrap="square" lIns="0" rIns="0" tIns="0" bIns="0"/>
-          <a:lstStyle/>
-          <a:p>
-            <a:pPr algn="ctr">
-              <a:spcBef>
-                <a:spcPts val="0"/>
-              </a:spcBef>
-              <a:spcAft>
-                <a:spcPts val="0"/>
-              </a:spcAft>
-            </a:pPr>
-            <a:r>
-              <a:rPr sz="950" b="0" i="0">
-                <a:solidFill>
-                  <a:srgbClr val="1E1E1E"/>
-                </a:solidFill>
-                <a:latin typeface="Microsoft YaHei"/>
-              </a:rPr>
-              <a:t>通过后执行</a:t>
-            </a:r>
-          </a:p>
-        </p:txBody>
-      </p:sp>
-    </p:spTree>
-  </p:cSld>
-  <p:clrMapOvr>
-    <a:masterClrMapping/>
-  </p:clrMapOvr>
-</p:sld>
-</file>
-
-<file path=ppt/slides/slide4.xml><?xml version="1.0" encoding="utf-8"?>
-<p:sld xmlns:a="http://schemas.openxmlformats.org/drawingml/2006/main" xmlns:p="http://schemas.openxmlformats.org/presentationml/2006/main" xmlns:r="http://schemas.openxmlformats.org/officeDocument/2006/relationships">
-  <p:cSld>
-    <p:bg>
-      <p:bgPr>
-        <a:solidFill>
-          <a:srgbClr val="FFFFFF"/>
-        </a:solidFill>
-        <a:effectLst/>
-      </p:bgPr>
-    </p:bg>
-    <p:spTree>
-      <p:nvGrpSpPr>
-        <p:cNvPr id="1" name=""/>
-        <p:cNvGrpSpPr/>
-        <p:nvPr/>
-      </p:nvGrpSpPr>
-      <p:grpSpPr/>
-      <p:sp>
-        <p:nvSpPr>
-          <p:cNvPr id="2" name="Rectangle 1"/>
-          <p:cNvSpPr/>
-          <p:nvPr/>
-        </p:nvSpPr>
-        <p:spPr>
-          <a:xfrm>
-            <a:off x="164592" y="1371600"/>
-            <a:ext cx="2267712" cy="2377440"/>
-          </a:xfrm>
-          <a:prstGeom prst="rect">
-            <a:avLst/>
-          </a:prstGeom>
-          <a:solidFill>
-            <a:srgbClr val="FFFFFF"/>
-          </a:solidFill>
-          <a:ln w="12700">
-            <a:solidFill>
-              <a:srgbClr val="7A7A7A"/>
-            </a:solidFill>
-          </a:ln>
-        </p:spPr>
-        <p:style>
-          <a:lnRef idx="1">
-            <a:schemeClr val="accent1"/>
-          </a:lnRef>
-          <a:fillRef idx="3">
-            <a:schemeClr val="accent1"/>
-          </a:fillRef>
-          <a:effectRef idx="2">
-            <a:schemeClr val="accent1"/>
-          </a:effectRef>
-          <a:fontRef idx="minor">
-            <a:schemeClr val="lt1"/>
-          </a:fontRef>
-        </p:style>
-        <p:txBody>
-          <a:bodyPr rtlCol="0" anchor="ctr"/>
-          <a:lstStyle/>
-          <a:p>
-            <a:pPr algn="ctr"/>
-          </a:p>
-        </p:txBody>
-      </p:sp>
-      <p:cxnSp>
-        <p:nvCxnSpPr>
-          <p:cNvPr id="3" name="Connector 2"/>
-          <p:cNvCxnSpPr/>
-          <p:nvPr/>
-        </p:nvCxnSpPr>
-        <p:spPr>
-          <a:xfrm>
-            <a:off x="164592" y="1792224"/>
-            <a:ext cx="2267712" cy="0"/>
-          </a:xfrm>
-          <a:prstGeom prst="line">
-            <a:avLst/>
-          </a:prstGeom>
-          <a:ln w="11430">
-            <a:solidFill>
-              <a:srgbClr val="B8B8B8"/>
-            </a:solidFill>
-          </a:ln>
-        </p:spPr>
-        <p:style>
-          <a:lnRef idx="2">
-            <a:schemeClr val="accent1"/>
-          </a:lnRef>
-          <a:fillRef idx="0">
-            <a:schemeClr val="accent1"/>
-          </a:fillRef>
-          <a:effectRef idx="1">
-            <a:schemeClr val="accent1"/>
-          </a:effectRef>
-          <a:fontRef idx="minor">
-            <a:schemeClr val="tx1"/>
-          </a:fontRef>
-        </p:style>
-      </p:cxnSp>
-      <p:cxnSp>
-        <p:nvCxnSpPr>
-          <p:cNvPr id="4" name="Connector 3"/>
-          <p:cNvCxnSpPr/>
-          <p:nvPr/>
-        </p:nvCxnSpPr>
-        <p:spPr>
-          <a:xfrm>
-            <a:off x="164592" y="2933395"/>
-            <a:ext cx="2267712" cy="0"/>
-          </a:xfrm>
-          <a:prstGeom prst="line">
-            <a:avLst/>
-          </a:prstGeom>
-          <a:ln w="11430">
-            <a:solidFill>
-              <a:srgbClr val="B8B8B8"/>
-            </a:solidFill>
-          </a:ln>
-        </p:spPr>
-        <p:style>
-          <a:lnRef idx="2">
-            <a:schemeClr val="accent1"/>
-          </a:lnRef>
-          <a:fillRef idx="0">
-            <a:schemeClr val="accent1"/>
-          </a:fillRef>
-          <a:effectRef idx="1">
-            <a:schemeClr val="accent1"/>
-          </a:effectRef>
-          <a:fontRef idx="minor">
-            <a:schemeClr val="tx1"/>
-          </a:fontRef>
-        </p:style>
-      </p:cxnSp>
-      <p:sp>
-        <p:nvSpPr>
-          <p:cNvPr id="5" name="TextBox 4"/>
-          <p:cNvSpPr txBox="1"/>
-          <p:nvPr/>
-        </p:nvSpPr>
-        <p:spPr>
-          <a:xfrm>
-            <a:off x="219456" y="1399032"/>
-            <a:ext cx="2157984" cy="384048"/>
-          </a:xfrm>
-          <a:prstGeom prst="rect">
-            <a:avLst/>
-          </a:prstGeom>
-          <a:noFill/>
-        </p:spPr>
-        <p:txBody>
-          <a:bodyPr wrap="square" anchor="ctr" lIns="0" rIns="0" tIns="0" bIns="0">
-            <a:spAutoFit/>
-          </a:bodyPr>
-          <a:lstStyle/>
-          <a:p>
-            <a:pPr algn="ctr">
-              <a:spcBef>
-                <a:spcPts val="0"/>
-              </a:spcBef>
-              <a:spcAft>
-                <a:spcPts val="0"/>
-              </a:spcAft>
-            </a:pPr>
-            <a:r>
               <a:rPr sz="1300" b="0" i="0">
                 <a:solidFill>
                   <a:srgbClr val="1E1E1E"/>
                 </a:solidFill>
-                <a:latin typeface="Microsoft YaHei"/>
+                <a:latin typeface="微软雅黑" panose="020B0503020204020204" charset="-122"/>
               </a:rPr>
-              <a:t>CVE</a:t>
-            </a:r>
-          </a:p>
-        </p:txBody>
-      </p:sp>
-      <p:sp>
-        <p:nvSpPr>
-          <p:cNvPr id="6" name="TextBox 5"/>
+              <a:t>Session</a:t>
+            </a:r>
+          </a:p>
+        </p:txBody>
+      </p:sp>
+      <p:sp>
+        <p:nvSpPr>
+          <p:cNvPr id="12" name="TextBox 11"/>
           <p:cNvSpPr txBox="1"/>
           <p:nvPr/>
         </p:nvSpPr>
         <p:spPr>
           <a:xfrm>
-            <a:off x="256032" y="1856231"/>
-            <a:ext cx="2084831" cy="1049731"/>
+            <a:off x="5785485" y="1258570"/>
+            <a:ext cx="2578608" cy="953170"/>
           </a:xfrm>
           <a:prstGeom prst="rect">
             <a:avLst/>
@@ -7897,7 +6914,7 @@
           <a:noFill/>
         </p:spPr>
         <p:txBody>
-          <a:bodyPr wrap="square" anchor="t" lIns="0" rIns="0" tIns="0" bIns="0">
+          <a:bodyPr wrap="square" lIns="0" tIns="0" rIns="0" bIns="0" anchor="t">
             <a:spAutoFit/>
           </a:bodyPr>
           <a:lstStyle/>
@@ -7915,14 +6932,12 @@
                 <a:solidFill>
                   <a:srgbClr val="1E1E1E"/>
                 </a:solidFill>
-                <a:latin typeface="Microsoft YaHei"/>
+                <a:latin typeface="微软雅黑" panose="020B0503020204020204" charset="-122"/>
               </a:rPr>
-              <a:t>- String cve_id
-- String summary
-- String description
-- Float cvss_score
-- String severity
-- Date published_date
+              <a:t>- String session_id
+- String model_name
+- String prompt_template
+- DateTime created_at
 - Enum status</a:t>
             </a:r>
           </a:p>
@@ -7930,14 +6945,14 @@
       </p:sp>
       <p:sp>
         <p:nvSpPr>
-          <p:cNvPr id="7" name="TextBox 6"/>
+          <p:cNvPr id="13" name="TextBox 12"/>
           <p:cNvSpPr txBox="1"/>
           <p:nvPr/>
         </p:nvSpPr>
         <p:spPr>
           <a:xfrm>
-            <a:off x="256032" y="2997403"/>
-            <a:ext cx="2084831" cy="724204"/>
+            <a:off x="5785485" y="2303145"/>
+            <a:ext cx="2578735" cy="481330"/>
           </a:xfrm>
           <a:prstGeom prst="rect">
             <a:avLst/>
@@ -7945,8 +6960,8 @@
           <a:noFill/>
         </p:spPr>
         <p:txBody>
-          <a:bodyPr wrap="square" anchor="t" lIns="0" rIns="0" tIns="0" bIns="0">
-            <a:spAutoFit/>
+          <a:bodyPr wrap="square" lIns="0" tIns="0" rIns="0" bIns="0" anchor="t">
+            <a:noAutofit/>
           </a:bodyPr>
           <a:lstStyle/>
           <a:p>
@@ -7963,24 +6978,24 @@
                 <a:solidFill>
                   <a:srgbClr val="1E1E1E"/>
                 </a:solidFill>
-                <a:latin typeface="Microsoft YaHei"/>
+                <a:latin typeface="微软雅黑" panose="020B0503020204020204" charset="-122"/>
               </a:rPr>
-              <a:t>+ getSeverityLevel(): String
-+ toFeatureVector(): List</a:t>
-            </a:r>
-          </a:p>
-        </p:txBody>
-      </p:sp>
-      <p:sp>
-        <p:nvSpPr>
-          <p:cNvPr id="8" name="Rectangle 7"/>
+              <a:t>+ initWorkspace(): void
++ getLatestStrategy(): Strategy</a:t>
+            </a:r>
+          </a:p>
+        </p:txBody>
+      </p:sp>
+      <p:sp>
+        <p:nvSpPr>
+          <p:cNvPr id="14" name="Rectangle 13"/>
           <p:cNvSpPr/>
           <p:nvPr/>
         </p:nvSpPr>
         <p:spPr>
           <a:xfrm>
-            <a:off x="3246120" y="1572768"/>
-            <a:ext cx="2761488" cy="2176272"/>
+            <a:off x="3070225" y="3524885"/>
+            <a:ext cx="2176145" cy="2277745"/>
           </a:xfrm>
           <a:prstGeom prst="rect">
             <a:avLst/>
@@ -7988,9 +7003,9 @@
           <a:solidFill>
             <a:srgbClr val="FFFFFF"/>
           </a:solidFill>
-          <a:ln w="12700">
+          <a:ln w="19050">
             <a:solidFill>
-              <a:srgbClr val="7A7A7A"/>
+              <a:schemeClr val="tx1"/>
             </a:solidFill>
           </a:ln>
         </p:spPr>
@@ -8013,252 +7028,7 @@
           <a:lstStyle/>
           <a:p>
             <a:pPr algn="ctr"/>
-          </a:p>
-        </p:txBody>
-      </p:sp>
-      <p:cxnSp>
-        <p:nvCxnSpPr>
-          <p:cNvPr id="9" name="Connector 8"/>
-          <p:cNvCxnSpPr/>
-          <p:nvPr/>
-        </p:nvCxnSpPr>
-        <p:spPr>
-          <a:xfrm>
-            <a:off x="3246120" y="1993392"/>
-            <a:ext cx="2761488" cy="0"/>
-          </a:xfrm>
-          <a:prstGeom prst="line">
-            <a:avLst/>
-          </a:prstGeom>
-          <a:ln w="11430">
-            <a:solidFill>
-              <a:srgbClr val="B8B8B8"/>
-            </a:solidFill>
-          </a:ln>
-        </p:spPr>
-        <p:style>
-          <a:lnRef idx="2">
-            <a:schemeClr val="accent1"/>
-          </a:lnRef>
-          <a:fillRef idx="0">
-            <a:schemeClr val="accent1"/>
-          </a:fillRef>
-          <a:effectRef idx="1">
-            <a:schemeClr val="accent1"/>
-          </a:effectRef>
-          <a:fontRef idx="minor">
-            <a:schemeClr val="tx1"/>
-          </a:fontRef>
-        </p:style>
-      </p:cxnSp>
-      <p:cxnSp>
-        <p:nvCxnSpPr>
-          <p:cNvPr id="10" name="Connector 9"/>
-          <p:cNvCxnSpPr/>
-          <p:nvPr/>
-        </p:nvCxnSpPr>
-        <p:spPr>
-          <a:xfrm>
-            <a:off x="3246120" y="3038002"/>
-            <a:ext cx="2761488" cy="0"/>
-          </a:xfrm>
-          <a:prstGeom prst="line">
-            <a:avLst/>
-          </a:prstGeom>
-          <a:ln w="11430">
-            <a:solidFill>
-              <a:srgbClr val="B8B8B8"/>
-            </a:solidFill>
-          </a:ln>
-        </p:spPr>
-        <p:style>
-          <a:lnRef idx="2">
-            <a:schemeClr val="accent1"/>
-          </a:lnRef>
-          <a:fillRef idx="0">
-            <a:schemeClr val="accent1"/>
-          </a:fillRef>
-          <a:effectRef idx="1">
-            <a:schemeClr val="accent1"/>
-          </a:effectRef>
-          <a:fontRef idx="minor">
-            <a:schemeClr val="tx1"/>
-          </a:fontRef>
-        </p:style>
-      </p:cxnSp>
-      <p:sp>
-        <p:nvSpPr>
-          <p:cNvPr id="11" name="TextBox 10"/>
-          <p:cNvSpPr txBox="1"/>
-          <p:nvPr/>
-        </p:nvSpPr>
-        <p:spPr>
-          <a:xfrm>
-            <a:off x="3300984" y="1600200"/>
-            <a:ext cx="2651760" cy="384048"/>
-          </a:xfrm>
-          <a:prstGeom prst="rect">
-            <a:avLst/>
-          </a:prstGeom>
-          <a:noFill/>
-        </p:spPr>
-        <p:txBody>
-          <a:bodyPr wrap="square" anchor="ctr" lIns="0" rIns="0" tIns="0" bIns="0">
-            <a:spAutoFit/>
-          </a:bodyPr>
-          <a:lstStyle/>
-          <a:p>
-            <a:pPr algn="ctr">
-              <a:spcBef>
-                <a:spcPts val="0"/>
-              </a:spcBef>
-              <a:spcAft>
-                <a:spcPts val="0"/>
-              </a:spcAft>
-            </a:pPr>
-            <a:r>
-              <a:rPr sz="1300" b="0" i="0">
-                <a:solidFill>
-                  <a:srgbClr val="1E1E1E"/>
-                </a:solidFill>
-                <a:latin typeface="Microsoft YaHei"/>
-              </a:rPr>
-              <a:t>Session</a:t>
-            </a:r>
-          </a:p>
-        </p:txBody>
-      </p:sp>
-      <p:sp>
-        <p:nvSpPr>
-          <p:cNvPr id="12" name="TextBox 11"/>
-          <p:cNvSpPr txBox="1"/>
-          <p:nvPr/>
-        </p:nvSpPr>
-        <p:spPr>
-          <a:xfrm>
-            <a:off x="3337560" y="2057400"/>
-            <a:ext cx="2578608" cy="953170"/>
-          </a:xfrm>
-          <a:prstGeom prst="rect">
-            <a:avLst/>
-          </a:prstGeom>
-          <a:noFill/>
-        </p:spPr>
-        <p:txBody>
-          <a:bodyPr wrap="square" anchor="t" lIns="0" rIns="0" tIns="0" bIns="0">
-            <a:spAutoFit/>
-          </a:bodyPr>
-          <a:lstStyle/>
-          <a:p>
-            <a:pPr algn="l">
-              <a:spcBef>
-                <a:spcPts val="0"/>
-              </a:spcBef>
-              <a:spcAft>
-                <a:spcPts val="0"/>
-              </a:spcAft>
-            </a:pPr>
-            <a:r>
-              <a:rPr sz="1150" b="0" i="0">
-                <a:solidFill>
-                  <a:srgbClr val="1E1E1E"/>
-                </a:solidFill>
-                <a:latin typeface="Microsoft YaHei"/>
-              </a:rPr>
-              <a:t>- String session_id
-- String model_name
-- String prompt_template
-- DateTime created_at
-- Enum status</a:t>
-            </a:r>
-          </a:p>
-        </p:txBody>
-      </p:sp>
-      <p:sp>
-        <p:nvSpPr>
-          <p:cNvPr id="13" name="TextBox 12"/>
-          <p:cNvSpPr txBox="1"/>
-          <p:nvPr/>
-        </p:nvSpPr>
-        <p:spPr>
-          <a:xfrm>
-            <a:off x="3337560" y="3102010"/>
-            <a:ext cx="2578608" cy="619597"/>
-          </a:xfrm>
-          <a:prstGeom prst="rect">
-            <a:avLst/>
-          </a:prstGeom>
-          <a:noFill/>
-        </p:spPr>
-        <p:txBody>
-          <a:bodyPr wrap="square" anchor="t" lIns="0" rIns="0" tIns="0" bIns="0">
-            <a:spAutoFit/>
-          </a:bodyPr>
-          <a:lstStyle/>
-          <a:p>
-            <a:pPr algn="l">
-              <a:spcBef>
-                <a:spcPts val="0"/>
-              </a:spcBef>
-              <a:spcAft>
-                <a:spcPts val="0"/>
-              </a:spcAft>
-            </a:pPr>
-            <a:r>
-              <a:rPr sz="1150" b="0" i="0">
-                <a:solidFill>
-                  <a:srgbClr val="1E1E1E"/>
-                </a:solidFill>
-                <a:latin typeface="Microsoft YaHei"/>
-              </a:rPr>
-              <a:t>+ initWorkspace(): void
-+ getLatestStrategy(): Strategy</a:t>
-            </a:r>
-          </a:p>
-        </p:txBody>
-      </p:sp>
-      <p:sp>
-        <p:nvSpPr>
-          <p:cNvPr id="14" name="Rectangle 13"/>
-          <p:cNvSpPr/>
-          <p:nvPr/>
-        </p:nvSpPr>
-        <p:spPr>
-          <a:xfrm>
-            <a:off x="6601968" y="1874519"/>
-            <a:ext cx="2176272" cy="1883664"/>
-          </a:xfrm>
-          <a:prstGeom prst="rect">
-            <a:avLst/>
-          </a:prstGeom>
-          <a:solidFill>
-            <a:srgbClr val="FFFFFF"/>
-          </a:solidFill>
-          <a:ln w="12700">
-            <a:solidFill>
-              <a:srgbClr val="7A7A7A"/>
-            </a:solidFill>
-          </a:ln>
-        </p:spPr>
-        <p:style>
-          <a:lnRef idx="1">
-            <a:schemeClr val="accent1"/>
-          </a:lnRef>
-          <a:fillRef idx="3">
-            <a:schemeClr val="accent1"/>
-          </a:fillRef>
-          <a:effectRef idx="2">
-            <a:schemeClr val="accent1"/>
-          </a:effectRef>
-          <a:fontRef idx="minor">
-            <a:schemeClr val="lt1"/>
-          </a:fontRef>
-        </p:style>
-        <p:txBody>
-          <a:bodyPr rtlCol="0" anchor="ctr"/>
-          <a:lstStyle/>
-          <a:p>
-            <a:pPr algn="ctr"/>
+            <a:endParaRPr/>
           </a:p>
         </p:txBody>
       </p:sp>
@@ -8270,7 +7040,7 @@
         </p:nvCxnSpPr>
         <p:spPr>
           <a:xfrm>
-            <a:off x="6601968" y="2295144"/>
+            <a:off x="3070098" y="3945509"/>
             <a:ext cx="2176272" cy="0"/>
           </a:xfrm>
           <a:prstGeom prst="line">
@@ -8305,7 +7075,7 @@
         </p:nvCxnSpPr>
         <p:spPr>
           <a:xfrm>
-            <a:off x="6601968" y="3199302"/>
+            <a:off x="3070098" y="5261782"/>
             <a:ext cx="2176272" cy="0"/>
           </a:xfrm>
           <a:prstGeom prst="line">
@@ -8340,7 +7110,7 @@
         </p:nvSpPr>
         <p:spPr>
           <a:xfrm>
-            <a:off x="6656831" y="1901951"/>
+            <a:off x="3124961" y="3552316"/>
             <a:ext cx="2066543" cy="384048"/>
           </a:xfrm>
           <a:prstGeom prst="rect">
@@ -8349,7 +7119,7 @@
           <a:noFill/>
         </p:spPr>
         <p:txBody>
-          <a:bodyPr wrap="square" anchor="ctr" lIns="0" rIns="0" tIns="0" bIns="0">
+          <a:bodyPr wrap="square" lIns="0" tIns="0" rIns="0" bIns="0" anchor="ctr">
             <a:spAutoFit/>
           </a:bodyPr>
           <a:lstStyle/>
@@ -8367,7 +7137,7 @@
                 <a:solidFill>
                   <a:srgbClr val="1E1E1E"/>
                 </a:solidFill>
-                <a:latin typeface="Microsoft YaHei"/>
+                <a:latin typeface="微软雅黑" panose="020B0503020204020204" charset="-122"/>
               </a:rPr>
               <a:t>Strategy</a:t>
             </a:r>
@@ -8382,8 +7152,8 @@
         </p:nvSpPr>
         <p:spPr>
           <a:xfrm>
-            <a:off x="6693407" y="2359151"/>
-            <a:ext cx="1993391" cy="812718"/>
+            <a:off x="3096260" y="3964305"/>
+            <a:ext cx="2455545" cy="1177925"/>
           </a:xfrm>
           <a:prstGeom prst="rect">
             <a:avLst/>
@@ -8391,8 +7161,8 @@
           <a:noFill/>
         </p:spPr>
         <p:txBody>
-          <a:bodyPr wrap="square" anchor="t" lIns="0" rIns="0" tIns="0" bIns="0">
-            <a:spAutoFit/>
+          <a:bodyPr wrap="square" lIns="0" tIns="0" rIns="0" bIns="0" anchor="t">
+            <a:noAutofit/>
           </a:bodyPr>
           <a:lstStyle/>
           <a:p>
@@ -8409,7 +7179,7 @@
                 <a:solidFill>
                   <a:srgbClr val="1E1E1E"/>
                 </a:solidFill>
-                <a:latin typeface="Microsoft YaHei"/>
+                <a:latin typeface="微软雅黑" panose="020B0503020204020204" charset="-122"/>
               </a:rPr>
               <a:t>- String strategy_id
 - String content
@@ -8429,7 +7199,7 @@
         </p:nvSpPr>
         <p:spPr>
           <a:xfrm>
-            <a:off x="6693407" y="3263310"/>
+            <a:off x="3124707" y="5335315"/>
             <a:ext cx="1993391" cy="467441"/>
           </a:xfrm>
           <a:prstGeom prst="rect">
@@ -8438,7 +7208,7 @@
           <a:noFill/>
         </p:spPr>
         <p:txBody>
-          <a:bodyPr wrap="square" anchor="t" lIns="0" rIns="0" tIns="0" bIns="0">
+          <a:bodyPr wrap="square" lIns="0" tIns="0" rIns="0" bIns="0" anchor="t">
             <a:spAutoFit/>
           </a:bodyPr>
           <a:lstStyle/>
@@ -8456,7 +7226,7 @@
                 <a:solidFill>
                   <a:srgbClr val="1E1E1E"/>
                 </a:solidFill>
-                <a:latin typeface="Microsoft YaHei"/>
+                <a:latin typeface="微软雅黑" panose="020B0503020204020204" charset="-122"/>
               </a:rPr>
               <a:t>+ render(): String
 + diff(other): String</a:t>
@@ -8472,7 +7242,7 @@
         </p:nvSpPr>
         <p:spPr>
           <a:xfrm>
-            <a:off x="9628632" y="1426464"/>
+            <a:off x="6132957" y="3684524"/>
             <a:ext cx="2286000" cy="2286000"/>
           </a:xfrm>
           <a:prstGeom prst="rect">
@@ -8481,9 +7251,9 @@
           <a:solidFill>
             <a:srgbClr val="FFFFFF"/>
           </a:solidFill>
-          <a:ln w="12700">
+          <a:ln w="19050">
             <a:solidFill>
-              <a:srgbClr val="7A7A7A"/>
+              <a:schemeClr val="tx1"/>
             </a:solidFill>
           </a:ln>
         </p:spPr>
@@ -8506,6 +7276,7 @@
           <a:lstStyle/>
           <a:p>
             <a:pPr algn="ctr"/>
+            <a:endParaRPr/>
           </a:p>
         </p:txBody>
       </p:sp>
@@ -8517,7 +7288,7 @@
         </p:nvCxnSpPr>
         <p:spPr>
           <a:xfrm>
-            <a:off x="9628632" y="1847088"/>
+            <a:off x="6132957" y="4105148"/>
             <a:ext cx="2286000" cy="0"/>
           </a:xfrm>
           <a:prstGeom prst="line">
@@ -8552,7 +7323,7 @@
         </p:nvCxnSpPr>
         <p:spPr>
           <a:xfrm>
-            <a:off x="9628632" y="2944368"/>
+            <a:off x="6114542" y="5389753"/>
             <a:ext cx="2286000" cy="0"/>
           </a:xfrm>
           <a:prstGeom prst="line">
@@ -8587,7 +7358,7 @@
         </p:nvSpPr>
         <p:spPr>
           <a:xfrm>
-            <a:off x="9683496" y="1453896"/>
+            <a:off x="6187821" y="3711956"/>
             <a:ext cx="2176272" cy="384048"/>
           </a:xfrm>
           <a:prstGeom prst="rect">
@@ -8596,7 +7367,7 @@
           <a:noFill/>
         </p:spPr>
         <p:txBody>
-          <a:bodyPr wrap="square" anchor="ctr" lIns="0" rIns="0" tIns="0" bIns="0">
+          <a:bodyPr wrap="square" lIns="0" tIns="0" rIns="0" bIns="0" anchor="ctr">
             <a:spAutoFit/>
           </a:bodyPr>
           <a:lstStyle/>
@@ -8614,7 +7385,7 @@
                 <a:solidFill>
                   <a:srgbClr val="1E1E1E"/>
                 </a:solidFill>
-                <a:latin typeface="Microsoft YaHei"/>
+                <a:latin typeface="微软雅黑" panose="020B0503020204020204" charset="-122"/>
               </a:rPr>
               <a:t>Ranking</a:t>
             </a:r>
@@ -8629,8 +7400,8 @@
         </p:nvSpPr>
         <p:spPr>
           <a:xfrm>
-            <a:off x="9720072" y="1911095"/>
-            <a:ext cx="2103120" cy="1005839"/>
+            <a:off x="6224270" y="4161155"/>
+            <a:ext cx="2103120" cy="1061720"/>
           </a:xfrm>
           <a:prstGeom prst="rect">
             <a:avLst/>
@@ -8638,7 +7409,7 @@
           <a:noFill/>
         </p:spPr>
         <p:txBody>
-          <a:bodyPr wrap="square" anchor="t" lIns="0" rIns="0" tIns="0" bIns="0">
+          <a:bodyPr wrap="square" lIns="0" tIns="0" rIns="0" bIns="0" anchor="t">
             <a:spAutoFit/>
           </a:bodyPr>
           <a:lstStyle/>
@@ -8656,13 +7427,13 @@
                 <a:solidFill>
                   <a:srgbClr val="1E1E1E"/>
                 </a:solidFill>
-                <a:latin typeface="Microsoft YaHei"/>
+                <a:latin typeface="微软雅黑" panose="020B0503020204020204" charset="-122"/>
               </a:rPr>
               <a:t>- String ranking_id
 - String user_id
 - DateTime created_at
 - List&lt;String&gt; order
-- Map&lt;String, Float&gt; dimension_scores
+- Map&lt;String, Float&gt; scores
 - String comment</a:t>
             </a:r>
           </a:p>
@@ -8676,7 +7447,7 @@
         </p:nvSpPr>
         <p:spPr>
           <a:xfrm>
-            <a:off x="9720072" y="3008375"/>
+            <a:off x="6224397" y="5559170"/>
             <a:ext cx="2103120" cy="676656"/>
           </a:xfrm>
           <a:prstGeom prst="rect">
@@ -8685,7 +7456,7 @@
           <a:noFill/>
         </p:spPr>
         <p:txBody>
-          <a:bodyPr wrap="square" anchor="t" lIns="0" rIns="0" tIns="0" bIns="0">
+          <a:bodyPr wrap="square" lIns="0" tIns="0" rIns="0" bIns="0" anchor="t">
             <a:spAutoFit/>
           </a:bodyPr>
           <a:lstStyle/>
@@ -8703,7 +7474,7 @@
                 <a:solidFill>
                   <a:srgbClr val="1E1E1E"/>
                 </a:solidFill>
-                <a:latin typeface="Microsoft YaHei"/>
+                <a:latin typeface="微软雅黑" panose="020B0503020204020204" charset="-122"/>
               </a:rPr>
               <a:t>+ validate(): Boolean
 + toPreferencePair(): Pair</a:t>
@@ -8719,8 +7490,8 @@
         </p:nvCxnSpPr>
         <p:spPr>
           <a:xfrm>
-            <a:off x="2432304" y="2560320"/>
-            <a:ext cx="813816" cy="0"/>
+            <a:off x="5118354" y="1761490"/>
+            <a:ext cx="575945" cy="0"/>
           </a:xfrm>
           <a:prstGeom prst="line">
             <a:avLst/>
@@ -8749,14 +7520,14 @@
       </p:cxnSp>
       <p:sp>
         <p:nvSpPr>
-          <p:cNvPr id="27" name="TextBox 26"/>
+          <p:cNvPr id="28" name="TextBox 27"/>
           <p:cNvSpPr txBox="1"/>
           <p:nvPr/>
         </p:nvSpPr>
         <p:spPr>
           <a:xfrm>
-            <a:off x="2450592" y="2267712"/>
-            <a:ext cx="731520" cy="182880"/>
+            <a:off x="5125593" y="1543050"/>
+            <a:ext cx="164592" cy="146304"/>
           </a:xfrm>
           <a:prstGeom prst="rect">
             <a:avLst/>
@@ -8764,7 +7535,7 @@
           <a:noFill/>
         </p:spPr>
         <p:txBody>
-          <a:bodyPr wrap="square" anchor="ctr" lIns="0" rIns="0" tIns="0" bIns="0">
+          <a:bodyPr wrap="square" lIns="0" tIns="0" rIns="0" bIns="0" anchor="ctr">
             <a:spAutoFit/>
           </a:bodyPr>
           <a:lstStyle/>
@@ -8778,27 +7549,27 @@
               </a:spcAft>
             </a:pPr>
             <a:r>
-              <a:rPr sz="1150" b="0" i="0">
+              <a:rPr sz="950" b="0" i="0">
                 <a:solidFill>
                   <a:srgbClr val="1E1E1E"/>
                 </a:solidFill>
-                <a:latin typeface="Microsoft YaHei"/>
+                <a:latin typeface="微软雅黑" panose="020B0503020204020204" charset="-122"/>
               </a:rPr>
-              <a:t>发起分析</a:t>
-            </a:r>
-          </a:p>
-        </p:txBody>
-      </p:sp>
-      <p:sp>
-        <p:nvSpPr>
-          <p:cNvPr id="28" name="TextBox 27"/>
+              <a:t>1</a:t>
+            </a:r>
+          </a:p>
+        </p:txBody>
+      </p:sp>
+      <p:sp>
+        <p:nvSpPr>
+          <p:cNvPr id="29" name="TextBox 28"/>
           <p:cNvSpPr txBox="1"/>
           <p:nvPr/>
         </p:nvSpPr>
         <p:spPr>
           <a:xfrm>
-            <a:off x="2487168" y="2697480"/>
-            <a:ext cx="164592" cy="146304"/>
+            <a:off x="5361305" y="1551432"/>
+            <a:ext cx="292608" cy="146304"/>
           </a:xfrm>
           <a:prstGeom prst="rect">
             <a:avLst/>
@@ -8806,7 +7577,7 @@
           <a:noFill/>
         </p:spPr>
         <p:txBody>
-          <a:bodyPr wrap="square" anchor="ctr" lIns="0" rIns="0" tIns="0" bIns="0">
+          <a:bodyPr wrap="square" lIns="0" tIns="0" rIns="0" bIns="0" anchor="ctr">
             <a:spAutoFit/>
           </a:bodyPr>
           <a:lstStyle/>
@@ -8824,23 +7595,59 @@
                 <a:solidFill>
                   <a:srgbClr val="1E1E1E"/>
                 </a:solidFill>
-                <a:latin typeface="Microsoft YaHei"/>
+                <a:latin typeface="微软雅黑" panose="020B0503020204020204" charset="-122"/>
               </a:rPr>
-              <a:t>1</a:t>
-            </a:r>
-          </a:p>
-        </p:txBody>
-      </p:sp>
-      <p:sp>
-        <p:nvSpPr>
-          <p:cNvPr id="29" name="TextBox 28"/>
+              <a:t>0..*</a:t>
+            </a:r>
+          </a:p>
+        </p:txBody>
+      </p:sp>
+      <p:cxnSp>
+        <p:nvCxnSpPr>
+          <p:cNvPr id="30" name="Connector 29"/>
+          <p:cNvCxnSpPr/>
+          <p:nvPr/>
+        </p:nvCxnSpPr>
+        <p:spPr>
+          <a:xfrm flipH="1">
+            <a:off x="5246243" y="2950337"/>
+            <a:ext cx="447675" cy="574675"/>
+          </a:xfrm>
+          <a:prstGeom prst="line">
+            <a:avLst/>
+          </a:prstGeom>
+          <a:ln w="12700">
+            <a:solidFill>
+              <a:srgbClr val="4A4A4A"/>
+            </a:solidFill>
+            <a:tailEnd type="arrow"/>
+          </a:ln>
+        </p:spPr>
+        <p:style>
+          <a:lnRef idx="2">
+            <a:schemeClr val="accent1"/>
+          </a:lnRef>
+          <a:fillRef idx="0">
+            <a:schemeClr val="accent1"/>
+          </a:fillRef>
+          <a:effectRef idx="1">
+            <a:schemeClr val="accent1"/>
+          </a:effectRef>
+          <a:fontRef idx="minor">
+            <a:schemeClr val="tx1"/>
+          </a:fontRef>
+        </p:style>
+      </p:cxnSp>
+      <p:sp>
+        <p:nvSpPr>
+          <p:cNvPr id="32" name="TextBox 31"/>
           <p:cNvSpPr txBox="1"/>
           <p:nvPr/>
         </p:nvSpPr>
         <p:spPr>
           <a:xfrm>
-            <a:off x="2926080" y="2267712"/>
-            <a:ext cx="292608" cy="146304"/>
+            <a:off x="5654675" y="3065145"/>
+            <a:ext cx="270510" cy="261620"/>
           </a:xfrm>
           <a:prstGeom prst="rect">
             <a:avLst/>
@@ -8848,8 +7655,8 @@
           <a:noFill/>
         </p:spPr>
         <p:txBody>
-          <a:bodyPr wrap="square" anchor="ctr" lIns="0" rIns="0" tIns="0" bIns="0">
-            <a:spAutoFit/>
+          <a:bodyPr wrap="square" lIns="0" tIns="0" rIns="0" bIns="0" anchor="ctr">
+            <a:noAutofit/>
           </a:bodyPr>
           <a:lstStyle/>
           <a:p>
@@ -8866,59 +7673,23 @@
                 <a:solidFill>
                   <a:srgbClr val="1E1E1E"/>
                 </a:solidFill>
-                <a:latin typeface="Microsoft YaHei"/>
+                <a:latin typeface="微软雅黑" panose="020B0503020204020204" charset="-122"/>
               </a:rPr>
-              <a:t>0..*</a:t>
-            </a:r>
-          </a:p>
-        </p:txBody>
-      </p:sp>
-      <p:cxnSp>
-        <p:nvCxnSpPr>
-          <p:cNvPr id="30" name="Connector 29"/>
-          <p:cNvCxnSpPr/>
-          <p:nvPr/>
-        </p:nvCxnSpPr>
-        <p:spPr>
-          <a:xfrm>
-            <a:off x="6007608" y="2816352"/>
-            <a:ext cx="594360" cy="0"/>
-          </a:xfrm>
-          <a:prstGeom prst="line">
-            <a:avLst/>
-          </a:prstGeom>
-          <a:ln w="12700">
-            <a:solidFill>
-              <a:srgbClr val="4A4A4A"/>
-            </a:solidFill>
-            <a:tailEnd type="arrow"/>
-          </a:ln>
-        </p:spPr>
-        <p:style>
-          <a:lnRef idx="2">
-            <a:schemeClr val="accent1"/>
-          </a:lnRef>
-          <a:fillRef idx="0">
-            <a:schemeClr val="accent1"/>
-          </a:fillRef>
-          <a:effectRef idx="1">
-            <a:schemeClr val="accent1"/>
-          </a:effectRef>
-          <a:fontRef idx="minor">
-            <a:schemeClr val="tx1"/>
-          </a:fontRef>
-        </p:style>
-      </p:cxnSp>
-      <p:sp>
-        <p:nvSpPr>
-          <p:cNvPr id="31" name="TextBox 30"/>
+              <a:t>1</a:t>
+            </a:r>
+          </a:p>
+        </p:txBody>
+      </p:sp>
+      <p:sp>
+        <p:nvSpPr>
+          <p:cNvPr id="33" name="TextBox 32"/>
           <p:cNvSpPr txBox="1"/>
           <p:nvPr/>
         </p:nvSpPr>
         <p:spPr>
           <a:xfrm>
-            <a:off x="6016752" y="2523744"/>
-            <a:ext cx="502920" cy="182880"/>
+            <a:off x="5325237" y="3473704"/>
+            <a:ext cx="329184" cy="146304"/>
           </a:xfrm>
           <a:prstGeom prst="rect">
             <a:avLst/>
@@ -8926,7 +7697,7 @@
           <a:noFill/>
         </p:spPr>
         <p:txBody>
-          <a:bodyPr wrap="square" anchor="ctr" lIns="0" rIns="0" tIns="0" bIns="0">
+          <a:bodyPr wrap="square" lIns="0" tIns="0" rIns="0" bIns="0" anchor="ctr">
             <a:spAutoFit/>
           </a:bodyPr>
           <a:lstStyle/>
@@ -8940,27 +7711,63 @@
               </a:spcAft>
             </a:pPr>
             <a:r>
-              <a:rPr sz="1150" b="0" i="0">
+              <a:rPr sz="950" b="0" i="0">
                 <a:solidFill>
                   <a:srgbClr val="1E1E1E"/>
                 </a:solidFill>
-                <a:latin typeface="Microsoft YaHei"/>
+                <a:latin typeface="微软雅黑" panose="020B0503020204020204" charset="-122"/>
               </a:rPr>
-              <a:t>生成</a:t>
-            </a:r>
-          </a:p>
-        </p:txBody>
-      </p:sp>
-      <p:sp>
-        <p:nvSpPr>
-          <p:cNvPr id="32" name="TextBox 31"/>
+              <a:t>1..*</a:t>
+            </a:r>
+          </a:p>
+        </p:txBody>
+      </p:sp>
+      <p:cxnSp>
+        <p:nvCxnSpPr>
+          <p:cNvPr id="36" name="Connector 35"/>
+          <p:cNvCxnSpPr/>
+          <p:nvPr/>
+        </p:nvCxnSpPr>
+        <p:spPr>
+          <a:xfrm>
+            <a:off x="7142607" y="2936113"/>
+            <a:ext cx="0" cy="749808"/>
+          </a:xfrm>
+          <a:prstGeom prst="line">
+            <a:avLst/>
+          </a:prstGeom>
+          <a:ln w="12700">
+            <a:solidFill>
+              <a:srgbClr val="4A4A4A"/>
+            </a:solidFill>
+            <a:tailEnd type="arrow"/>
+          </a:ln>
+        </p:spPr>
+        <p:style>
+          <a:lnRef idx="2">
+            <a:schemeClr val="accent1"/>
+          </a:lnRef>
+          <a:fillRef idx="0">
+            <a:schemeClr val="accent1"/>
+          </a:fillRef>
+          <a:effectRef idx="1">
+            <a:schemeClr val="accent1"/>
+          </a:effectRef>
+          <a:fontRef idx="minor">
+            <a:schemeClr val="tx1"/>
+          </a:fontRef>
+        </p:style>
+      </p:cxnSp>
+      <p:sp>
+        <p:nvSpPr>
+          <p:cNvPr id="38" name="TextBox 37"/>
           <p:cNvSpPr txBox="1"/>
           <p:nvPr/>
         </p:nvSpPr>
         <p:spPr>
           <a:xfrm>
-            <a:off x="5980176" y="2962656"/>
-            <a:ext cx="164592" cy="146304"/>
+            <a:off x="7142480" y="3014345"/>
+            <a:ext cx="304800" cy="312420"/>
           </a:xfrm>
           <a:prstGeom prst="rect">
             <a:avLst/>
@@ -8968,8 +7775,8 @@
           <a:noFill/>
         </p:spPr>
         <p:txBody>
-          <a:bodyPr wrap="square" anchor="ctr" lIns="0" rIns="0" tIns="0" bIns="0">
-            <a:spAutoFit/>
+          <a:bodyPr wrap="square" lIns="0" tIns="0" rIns="0" bIns="0" anchor="ctr">
+            <a:noAutofit/>
           </a:bodyPr>
           <a:lstStyle/>
           <a:p>
@@ -8986,7 +7793,7 @@
                 <a:solidFill>
                   <a:srgbClr val="1E1E1E"/>
                 </a:solidFill>
-                <a:latin typeface="Microsoft YaHei"/>
+                <a:latin typeface="微软雅黑" panose="020B0503020204020204" charset="-122"/>
               </a:rPr>
               <a:t>1</a:t>
             </a:r>
@@ -8995,14 +7802,14 @@
       </p:sp>
       <p:sp>
         <p:nvSpPr>
-          <p:cNvPr id="33" name="TextBox 32"/>
+          <p:cNvPr id="39" name="TextBox 38"/>
           <p:cNvSpPr txBox="1"/>
           <p:nvPr/>
         </p:nvSpPr>
         <p:spPr>
           <a:xfrm>
-            <a:off x="6336792" y="2523744"/>
-            <a:ext cx="329184" cy="146304"/>
+            <a:off x="7221093" y="3556381"/>
+            <a:ext cx="292608" cy="146304"/>
           </a:xfrm>
           <a:prstGeom prst="rect">
             <a:avLst/>
@@ -9010,7 +7817,7 @@
           <a:noFill/>
         </p:spPr>
         <p:txBody>
-          <a:bodyPr wrap="square" anchor="ctr" lIns="0" rIns="0" tIns="0" bIns="0">
+          <a:bodyPr wrap="square" lIns="0" tIns="0" rIns="0" bIns="0" anchor="ctr">
             <a:spAutoFit/>
           </a:bodyPr>
           <a:lstStyle/>
@@ -9028,23 +7835,23 @@
                 <a:solidFill>
                   <a:srgbClr val="1E1E1E"/>
                 </a:solidFill>
-                <a:latin typeface="Microsoft YaHei"/>
+                <a:latin typeface="微软雅黑" panose="020B0503020204020204" charset="-122"/>
               </a:rPr>
-              <a:t>1..*</a:t>
+              <a:t>0..*</a:t>
             </a:r>
           </a:p>
         </p:txBody>
       </p:sp>
       <p:cxnSp>
         <p:nvCxnSpPr>
-          <p:cNvPr id="34" name="Connector 33"/>
+          <p:cNvPr id="40" name="Connector 39"/>
           <p:cNvCxnSpPr/>
           <p:nvPr/>
         </p:nvCxnSpPr>
         <p:spPr>
-          <a:xfrm flipV="1">
-            <a:off x="6007608" y="1115568"/>
-            <a:ext cx="0" cy="877824"/>
+          <a:xfrm flipH="1">
+            <a:off x="5246497" y="5325872"/>
+            <a:ext cx="886460" cy="0"/>
           </a:xfrm>
           <a:prstGeom prst="line">
             <a:avLst/>
@@ -9053,6 +7860,7 @@
             <a:solidFill>
               <a:srgbClr val="4A4A4A"/>
             </a:solidFill>
+            <a:tailEnd type="arrow"/>
           </a:ln>
         </p:spPr>
         <p:style>
@@ -9070,87 +7878,16 @@
           </a:fontRef>
         </p:style>
       </p:cxnSp>
-      <p:cxnSp>
-        <p:nvCxnSpPr>
-          <p:cNvPr id="35" name="Connector 34"/>
-          <p:cNvCxnSpPr/>
-          <p:nvPr/>
-        </p:nvCxnSpPr>
-        <p:spPr>
-          <a:xfrm>
-            <a:off x="6007608" y="1115568"/>
-            <a:ext cx="3621024" cy="0"/>
-          </a:xfrm>
-          <a:prstGeom prst="line">
-            <a:avLst/>
-          </a:prstGeom>
-          <a:ln w="12700">
-            <a:solidFill>
-              <a:srgbClr val="4A4A4A"/>
-            </a:solidFill>
-          </a:ln>
-        </p:spPr>
-        <p:style>
-          <a:lnRef idx="2">
-            <a:schemeClr val="accent1"/>
-          </a:lnRef>
-          <a:fillRef idx="0">
-            <a:schemeClr val="accent1"/>
-          </a:fillRef>
-          <a:effectRef idx="1">
-            <a:schemeClr val="accent1"/>
-          </a:effectRef>
-          <a:fontRef idx="minor">
-            <a:schemeClr val="tx1"/>
-          </a:fontRef>
-        </p:style>
-      </p:cxnSp>
-      <p:cxnSp>
-        <p:nvCxnSpPr>
-          <p:cNvPr id="36" name="Connector 35"/>
-          <p:cNvCxnSpPr/>
-          <p:nvPr/>
-        </p:nvCxnSpPr>
-        <p:spPr>
-          <a:xfrm>
-            <a:off x="9628632" y="1115568"/>
-            <a:ext cx="0" cy="749808"/>
-          </a:xfrm>
-          <a:prstGeom prst="line">
-            <a:avLst/>
-          </a:prstGeom>
-          <a:ln w="12700">
-            <a:solidFill>
-              <a:srgbClr val="4A4A4A"/>
-            </a:solidFill>
-            <a:tailEnd type="arrow"/>
-          </a:ln>
-        </p:spPr>
-        <p:style>
-          <a:lnRef idx="2">
-            <a:schemeClr val="accent1"/>
-          </a:lnRef>
-          <a:fillRef idx="0">
-            <a:schemeClr val="accent1"/>
-          </a:fillRef>
-          <a:effectRef idx="1">
-            <a:schemeClr val="accent1"/>
-          </a:effectRef>
-          <a:fontRef idx="minor">
-            <a:schemeClr val="tx1"/>
-          </a:fontRef>
-        </p:style>
-      </p:cxnSp>
-      <p:sp>
-        <p:nvSpPr>
-          <p:cNvPr id="37" name="TextBox 36"/>
+      <p:sp>
+        <p:nvSpPr>
+          <p:cNvPr id="42" name="TextBox 41"/>
           <p:cNvSpPr txBox="1"/>
           <p:nvPr/>
         </p:nvSpPr>
         <p:spPr>
           <a:xfrm>
-            <a:off x="7406640" y="859536"/>
-            <a:ext cx="749808" cy="182880"/>
+            <a:off x="5081778" y="5070221"/>
+            <a:ext cx="310896" cy="146304"/>
           </a:xfrm>
           <a:prstGeom prst="rect">
             <a:avLst/>
@@ -9158,7 +7895,7 @@
           <a:noFill/>
         </p:spPr>
         <p:txBody>
-          <a:bodyPr wrap="square" anchor="ctr" lIns="0" rIns="0" tIns="0" bIns="0">
+          <a:bodyPr wrap="square" lIns="0" tIns="0" rIns="0" bIns="0" anchor="ctr">
             <a:spAutoFit/>
           </a:bodyPr>
           <a:lstStyle/>
@@ -9172,27 +7909,27 @@
               </a:spcAft>
             </a:pPr>
             <a:r>
-              <a:rPr sz="1150" b="0" i="0">
+              <a:rPr sz="950" b="0" i="0">
                 <a:solidFill>
                   <a:srgbClr val="1E1E1E"/>
                 </a:solidFill>
-                <a:latin typeface="Microsoft YaHei"/>
+                <a:latin typeface="微软雅黑" panose="020B0503020204020204" charset="-122"/>
               </a:rPr>
-              <a:t>收集评价</a:t>
-            </a:r>
-          </a:p>
-        </p:txBody>
-      </p:sp>
-      <p:sp>
-        <p:nvSpPr>
-          <p:cNvPr id="38" name="TextBox 37"/>
+              <a:t>1..*</a:t>
+            </a:r>
+          </a:p>
+        </p:txBody>
+      </p:sp>
+      <p:sp>
+        <p:nvSpPr>
+          <p:cNvPr id="43" name="TextBox 42"/>
           <p:cNvSpPr txBox="1"/>
           <p:nvPr/>
         </p:nvSpPr>
         <p:spPr>
           <a:xfrm>
-            <a:off x="6053328" y="1755648"/>
-            <a:ext cx="164592" cy="146304"/>
+            <a:off x="5639562" y="5070221"/>
+            <a:ext cx="274320" cy="146304"/>
           </a:xfrm>
           <a:prstGeom prst="rect">
             <a:avLst/>
@@ -9200,7 +7937,7 @@
           <a:noFill/>
         </p:spPr>
         <p:txBody>
-          <a:bodyPr wrap="square" anchor="ctr" lIns="0" rIns="0" tIns="0" bIns="0">
+          <a:bodyPr wrap="square" lIns="0" tIns="0" rIns="0" bIns="0" anchor="ctr">
             <a:spAutoFit/>
           </a:bodyPr>
           <a:lstStyle/>
@@ -9218,211 +7955,7 @@
                 <a:solidFill>
                   <a:srgbClr val="1E1E1E"/>
                 </a:solidFill>
-                <a:latin typeface="Microsoft YaHei"/>
-              </a:rPr>
-              <a:t>1</a:t>
-            </a:r>
-          </a:p>
-        </p:txBody>
-      </p:sp>
-      <p:sp>
-        <p:nvSpPr>
-          <p:cNvPr id="39" name="TextBox 38"/>
-          <p:cNvSpPr txBox="1"/>
-          <p:nvPr/>
-        </p:nvSpPr>
-        <p:spPr>
-          <a:xfrm>
-            <a:off x="9345168" y="859536"/>
-            <a:ext cx="292608" cy="146304"/>
-          </a:xfrm>
-          <a:prstGeom prst="rect">
-            <a:avLst/>
-          </a:prstGeom>
-          <a:noFill/>
-        </p:spPr>
-        <p:txBody>
-          <a:bodyPr wrap="square" anchor="ctr" lIns="0" rIns="0" tIns="0" bIns="0">
-            <a:spAutoFit/>
-          </a:bodyPr>
-          <a:lstStyle/>
-          <a:p>
-            <a:pPr algn="ctr">
-              <a:spcBef>
-                <a:spcPts val="0"/>
-              </a:spcBef>
-              <a:spcAft>
-                <a:spcPts val="0"/>
-              </a:spcAft>
-            </a:pPr>
-            <a:r>
-              <a:rPr sz="950" b="0" i="0">
-                <a:solidFill>
-                  <a:srgbClr val="1E1E1E"/>
-                </a:solidFill>
-                <a:latin typeface="Microsoft YaHei"/>
-              </a:rPr>
-              <a:t>0..*</a:t>
-            </a:r>
-          </a:p>
-        </p:txBody>
-      </p:sp>
-      <p:cxnSp>
-        <p:nvCxnSpPr>
-          <p:cNvPr id="40" name="Connector 39"/>
-          <p:cNvCxnSpPr/>
-          <p:nvPr/>
-        </p:nvCxnSpPr>
-        <p:spPr>
-          <a:xfrm flipH="1">
-            <a:off x="8778240" y="3273552"/>
-            <a:ext cx="850392" cy="0"/>
-          </a:xfrm>
-          <a:prstGeom prst="line">
-            <a:avLst/>
-          </a:prstGeom>
-          <a:ln w="12700">
-            <a:solidFill>
-              <a:srgbClr val="4A4A4A"/>
-            </a:solidFill>
-            <a:tailEnd type="arrow"/>
-          </a:ln>
-        </p:spPr>
-        <p:style>
-          <a:lnRef idx="2">
-            <a:schemeClr val="accent1"/>
-          </a:lnRef>
-          <a:fillRef idx="0">
-            <a:schemeClr val="accent1"/>
-          </a:fillRef>
-          <a:effectRef idx="1">
-            <a:schemeClr val="accent1"/>
-          </a:effectRef>
-          <a:fontRef idx="minor">
-            <a:schemeClr val="tx1"/>
-          </a:fontRef>
-        </p:style>
-      </p:cxnSp>
-      <p:sp>
-        <p:nvSpPr>
-          <p:cNvPr id="41" name="TextBox 40"/>
-          <p:cNvSpPr txBox="1"/>
-          <p:nvPr/>
-        </p:nvSpPr>
-        <p:spPr>
-          <a:xfrm>
-            <a:off x="8961120" y="2980944"/>
-            <a:ext cx="749808" cy="182880"/>
-          </a:xfrm>
-          <a:prstGeom prst="rect">
-            <a:avLst/>
-          </a:prstGeom>
-          <a:noFill/>
-        </p:spPr>
-        <p:txBody>
-          <a:bodyPr wrap="square" anchor="ctr" lIns="0" rIns="0" tIns="0" bIns="0">
-            <a:spAutoFit/>
-          </a:bodyPr>
-          <a:lstStyle/>
-          <a:p>
-            <a:pPr algn="ctr">
-              <a:spcBef>
-                <a:spcPts val="0"/>
-              </a:spcBef>
-              <a:spcAft>
-                <a:spcPts val="0"/>
-              </a:spcAft>
-            </a:pPr>
-            <a:r>
-              <a:rPr sz="1150" b="0" i="0">
-                <a:solidFill>
-                  <a:srgbClr val="1E1E1E"/>
-                </a:solidFill>
-                <a:latin typeface="Microsoft YaHei"/>
-              </a:rPr>
-              <a:t>排序对象</a:t>
-            </a:r>
-          </a:p>
-        </p:txBody>
-      </p:sp>
-      <p:sp>
-        <p:nvSpPr>
-          <p:cNvPr id="42" name="TextBox 41"/>
-          <p:cNvSpPr txBox="1"/>
-          <p:nvPr/>
-        </p:nvSpPr>
-        <p:spPr>
-          <a:xfrm>
-            <a:off x="8613648" y="3419856"/>
-            <a:ext cx="310896" cy="146304"/>
-          </a:xfrm>
-          <a:prstGeom prst="rect">
-            <a:avLst/>
-          </a:prstGeom>
-          <a:noFill/>
-        </p:spPr>
-        <p:txBody>
-          <a:bodyPr wrap="square" anchor="ctr" lIns="0" rIns="0" tIns="0" bIns="0">
-            <a:spAutoFit/>
-          </a:bodyPr>
-          <a:lstStyle/>
-          <a:p>
-            <a:pPr algn="ctr">
-              <a:spcBef>
-                <a:spcPts val="0"/>
-              </a:spcBef>
-              <a:spcAft>
-                <a:spcPts val="0"/>
-              </a:spcAft>
-            </a:pPr>
-            <a:r>
-              <a:rPr sz="950" b="0" i="0">
-                <a:solidFill>
-                  <a:srgbClr val="1E1E1E"/>
-                </a:solidFill>
-                <a:latin typeface="Microsoft YaHei"/>
-              </a:rPr>
-              <a:t>1..*</a:t>
-            </a:r>
-          </a:p>
-        </p:txBody>
-      </p:sp>
-      <p:sp>
-        <p:nvSpPr>
-          <p:cNvPr id="43" name="TextBox 42"/>
-          <p:cNvSpPr txBox="1"/>
-          <p:nvPr/>
-        </p:nvSpPr>
-        <p:spPr>
-          <a:xfrm>
-            <a:off x="9171432" y="3419856"/>
-            <a:ext cx="274320" cy="146304"/>
-          </a:xfrm>
-          <a:prstGeom prst="rect">
-            <a:avLst/>
-          </a:prstGeom>
-          <a:noFill/>
-        </p:spPr>
-        <p:txBody>
-          <a:bodyPr wrap="square" anchor="ctr" lIns="0" rIns="0" tIns="0" bIns="0">
-            <a:spAutoFit/>
-          </a:bodyPr>
-          <a:lstStyle/>
-          <a:p>
-            <a:pPr algn="ctr">
-              <a:spcBef>
-                <a:spcPts val="0"/>
-              </a:spcBef>
-              <a:spcAft>
-                <a:spcPts val="0"/>
-              </a:spcAft>
-            </a:pPr>
-            <a:r>
-              <a:rPr sz="950" b="0" i="0">
-                <a:solidFill>
-                  <a:srgbClr val="1E1E1E"/>
-                </a:solidFill>
-                <a:latin typeface="Microsoft YaHei"/>
+                <a:latin typeface="微软雅黑" panose="020B0503020204020204" charset="-122"/>
               </a:rPr>
               <a:t>0..*</a:t>
             </a:r>
@@ -9754,5 +8287,271 @@
     </a:lnDef>
   </a:objectDefaults>
   <a:extraClrSchemeLst/>
+  <a:extLst>
+    <a:ext uri="{05A4C25C-085E-4340-85A3-A5531E510DB2}">
+      <thm15:themeFamily xmlns:thm15="http://schemas.microsoft.com/office/thememl/2012/main" name="Office Theme" id="{62F939B6-93AF-4DB8-9C6B-D6C7DFDC589F}" vid="{4A3C46E8-61CC-4603-A589-7422A47A8E4A}"/>
+    </a:ext>
+  </a:extLst>
+</a:theme>
+</file>
+
+<file path=ppt/theme/theme2.xml><?xml version="1.0" encoding="utf-8"?>
+<a:theme xmlns:a="http://schemas.openxmlformats.org/drawingml/2006/main" name="Office 主题">
+  <a:themeElements>
+    <a:clrScheme name="Office">
+      <a:dk1>
+        <a:sysClr val="windowText" lastClr="000000"/>
+      </a:dk1>
+      <a:lt1>
+        <a:sysClr val="window" lastClr="FFFFFF"/>
+      </a:lt1>
+      <a:dk2>
+        <a:srgbClr val="44546A"/>
+      </a:dk2>
+      <a:lt2>
+        <a:srgbClr val="E7E6E6"/>
+      </a:lt2>
+      <a:accent1>
+        <a:srgbClr val="5B9BD5"/>
+      </a:accent1>
+      <a:accent2>
+        <a:srgbClr val="ED7D31"/>
+      </a:accent2>
+      <a:accent3>
+        <a:srgbClr val="A5A5A5"/>
+      </a:accent3>
+      <a:accent4>
+        <a:srgbClr val="FFC000"/>
+      </a:accent4>
+      <a:accent5>
+        <a:srgbClr val="4472C4"/>
+      </a:accent5>
+      <a:accent6>
+        <a:srgbClr val="70AD47"/>
+      </a:accent6>
+      <a:hlink>
+        <a:srgbClr val="0563C1"/>
+      </a:hlink>
+      <a:folHlink>
+        <a:srgbClr val="954F72"/>
+      </a:folHlink>
+    </a:clrScheme>
+    <a:fontScheme name="Office">
+      <a:majorFont>
+        <a:latin typeface="Calibri Light"/>
+        <a:ea typeface=""/>
+        <a:cs typeface=""/>
+        <a:font script="Jpan" typeface="ＭＳ Ｐゴシック"/>
+        <a:font script="Hang" typeface="맑은 고딕"/>
+        <a:font script="Hans" typeface="宋体"/>
+        <a:font script="Hant" typeface="新細明體"/>
+        <a:font script="Arab" typeface="Times New Roman"/>
+        <a:font script="Hebr" typeface="Times New Roman"/>
+        <a:font script="Thai" typeface="Angsana New"/>
+        <a:font script="Ethi" typeface="Nyala"/>
+        <a:font script="Beng" typeface="Vrinda"/>
+        <a:font script="Gujr" typeface="Shruti"/>
+        <a:font script="Khmr" typeface="MoolBoran"/>
+        <a:font script="Knda" typeface="Tunga"/>
+        <a:font script="Guru" typeface="Raavi"/>
+        <a:font script="Cans" typeface="Euphemia"/>
+        <a:font script="Cher" typeface="Plantagenet Cherokee"/>
+        <a:font script="Yiii" typeface="Microsoft Yi Baiti"/>
+        <a:font script="Tibt" typeface="Microsoft Himalaya"/>
+        <a:font script="Thaa" typeface="MV Boli"/>
+        <a:font script="Deva" typeface="Mangal"/>
+        <a:font script="Telu" typeface="Gautami"/>
+        <a:font script="Taml" typeface="Latha"/>
+        <a:font script="Syrc" typeface="Estrangelo Edessa"/>
+        <a:font script="Orya" typeface="Kalinga"/>
+        <a:font script="Mlym" typeface="Kartika"/>
+        <a:font script="Laoo" typeface="DokChampa"/>
+        <a:font script="Sinh" typeface="Iskoola Pota"/>
+        <a:font script="Mong" typeface="Mongolian Baiti"/>
+        <a:font script="Viet" typeface="Times New Roman"/>
+        <a:font script="Uigh" typeface="Microsoft Uighur"/>
+        <a:font script="Geor" typeface="Sylfaen"/>
+      </a:majorFont>
+      <a:minorFont>
+        <a:latin typeface="Calibri"/>
+        <a:ea typeface=""/>
+        <a:cs typeface=""/>
+        <a:font script="Jpan" typeface="ＭＳ Ｐゴシック"/>
+        <a:font script="Hang" typeface="맑은 고딕"/>
+        <a:font script="Hans" typeface="宋体"/>
+        <a:font script="Hant" typeface="新細明體"/>
+        <a:font script="Arab" typeface="Arial"/>
+        <a:font script="Hebr" typeface="Arial"/>
+        <a:font script="Thai" typeface="Cordia New"/>
+        <a:font script="Ethi" typeface="Nyala"/>
+        <a:font script="Beng" typeface="Vrinda"/>
+        <a:font script="Gujr" typeface="Shruti"/>
+        <a:font script="Khmr" typeface="DaunPenh"/>
+        <a:font script="Knda" typeface="Tunga"/>
+        <a:font script="Guru" typeface="Raavi"/>
+        <a:font script="Cans" typeface="Euphemia"/>
+        <a:font script="Cher" typeface="Plantagenet Cherokee"/>
+        <a:font script="Yiii" typeface="Microsoft Yi Baiti"/>
+        <a:font script="Tibt" typeface="Microsoft Himalaya"/>
+        <a:font script="Thaa" typeface="MV Boli"/>
+        <a:font script="Deva" typeface="Mangal"/>
+        <a:font script="Telu" typeface="Gautami"/>
+        <a:font script="Taml" typeface="Latha"/>
+        <a:font script="Syrc" typeface="Estrangelo Edessa"/>
+        <a:font script="Orya" typeface="Kalinga"/>
+        <a:font script="Mlym" typeface="Kartika"/>
+        <a:font script="Laoo" typeface="DokChampa"/>
+        <a:font script="Sinh" typeface="Iskoola Pota"/>
+        <a:font script="Mong" typeface="Mongolian Baiti"/>
+        <a:font script="Viet" typeface="Arial"/>
+        <a:font script="Uigh" typeface="Microsoft Uighur"/>
+        <a:font script="Geor" typeface="Sylfaen"/>
+      </a:minorFont>
+    </a:fontScheme>
+    <a:fmtScheme name="Office">
+      <a:fillStyleLst>
+        <a:solidFill>
+          <a:schemeClr val="phClr"/>
+        </a:solidFill>
+        <a:gradFill rotWithShape="1">
+          <a:gsLst>
+            <a:gs pos="0">
+              <a:schemeClr val="phClr">
+                <a:lumMod val="110000"/>
+                <a:satMod val="105000"/>
+                <a:tint val="67000"/>
+              </a:schemeClr>
+            </a:gs>
+            <a:gs pos="50000">
+              <a:schemeClr val="phClr">
+                <a:lumMod val="105000"/>
+                <a:satMod val="103000"/>
+                <a:tint val="73000"/>
+              </a:schemeClr>
+            </a:gs>
+            <a:gs pos="100000">
+              <a:schemeClr val="phClr">
+                <a:lumMod val="105000"/>
+                <a:satMod val="109000"/>
+                <a:tint val="81000"/>
+              </a:schemeClr>
+            </a:gs>
+          </a:gsLst>
+          <a:lin ang="5400000" scaled="0"/>
+        </a:gradFill>
+        <a:gradFill rotWithShape="1">
+          <a:gsLst>
+            <a:gs pos="0">
+              <a:schemeClr val="phClr">
+                <a:satMod val="103000"/>
+                <a:lumMod val="102000"/>
+                <a:tint val="94000"/>
+              </a:schemeClr>
+            </a:gs>
+            <a:gs pos="50000">
+              <a:schemeClr val="phClr">
+                <a:satMod val="110000"/>
+                <a:lumMod val="100000"/>
+                <a:shade val="100000"/>
+              </a:schemeClr>
+            </a:gs>
+            <a:gs pos="100000">
+              <a:schemeClr val="phClr">
+                <a:lumMod val="99000"/>
+                <a:satMod val="120000"/>
+                <a:shade val="78000"/>
+              </a:schemeClr>
+            </a:gs>
+          </a:gsLst>
+          <a:lin ang="5400000" scaled="0"/>
+        </a:gradFill>
+      </a:fillStyleLst>
+      <a:lnStyleLst>
+        <a:ln w="6350" cap="flat" cmpd="sng" algn="ctr">
+          <a:solidFill>
+            <a:schemeClr val="phClr"/>
+          </a:solidFill>
+          <a:prstDash val="solid"/>
+          <a:miter lim="800000"/>
+        </a:ln>
+        <a:ln w="12700" cap="flat" cmpd="sng" algn="ctr">
+          <a:solidFill>
+            <a:schemeClr val="phClr"/>
+          </a:solidFill>
+          <a:prstDash val="solid"/>
+          <a:miter lim="800000"/>
+        </a:ln>
+        <a:ln w="19050" cap="flat" cmpd="sng" algn="ctr">
+          <a:solidFill>
+            <a:schemeClr val="phClr"/>
+          </a:solidFill>
+          <a:prstDash val="solid"/>
+          <a:miter lim="800000"/>
+        </a:ln>
+      </a:lnStyleLst>
+      <a:effectStyleLst>
+        <a:effectStyle>
+          <a:effectLst/>
+        </a:effectStyle>
+        <a:effectStyle>
+          <a:effectLst/>
+        </a:effectStyle>
+        <a:effectStyle>
+          <a:effectLst>
+            <a:outerShdw blurRad="57150" dist="19050" dir="5400000" algn="ctr" rotWithShape="0">
+              <a:srgbClr val="000000">
+                <a:alpha val="63000"/>
+              </a:srgbClr>
+            </a:outerShdw>
+          </a:effectLst>
+        </a:effectStyle>
+      </a:effectStyleLst>
+      <a:bgFillStyleLst>
+        <a:solidFill>
+          <a:schemeClr val="phClr"/>
+        </a:solidFill>
+        <a:solidFill>
+          <a:schemeClr val="phClr">
+            <a:tint val="95000"/>
+            <a:satMod val="170000"/>
+          </a:schemeClr>
+        </a:solidFill>
+        <a:gradFill rotWithShape="1">
+          <a:gsLst>
+            <a:gs pos="0">
+              <a:schemeClr val="phClr">
+                <a:tint val="93000"/>
+                <a:satMod val="150000"/>
+                <a:shade val="98000"/>
+                <a:lumMod val="102000"/>
+              </a:schemeClr>
+            </a:gs>
+            <a:gs pos="50000">
+              <a:schemeClr val="phClr">
+                <a:tint val="98000"/>
+                <a:satMod val="130000"/>
+                <a:shade val="90000"/>
+                <a:lumMod val="103000"/>
+              </a:schemeClr>
+            </a:gs>
+            <a:gs pos="100000">
+              <a:schemeClr val="phClr">
+                <a:shade val="63000"/>
+                <a:satMod val="120000"/>
+              </a:schemeClr>
+            </a:gs>
+          </a:gsLst>
+          <a:lin ang="5400000" scaled="0"/>
+        </a:gradFill>
+      </a:bgFillStyleLst>
+    </a:fmtScheme>
+  </a:themeElements>
+  <a:objectDefaults/>
+  <a:extraClrSchemeLst/>
+  <a:extLst>
+    <a:ext uri="{05A4C25C-085E-4340-85A3-A5531E510DB2}">
+      <thm15:themeFamily xmlns:thm15="http://schemas.microsoft.com/office/thememl/2012/main" name="Office Theme" id="{62F939B6-93AF-4DB8-9C6B-D6C7DFDC589F}" vid="{4A3C46E8-61CC-4603-A589-7422A47A8E4A}"/>
+    </a:ext>
+  </a:extLst>
 </a:theme>
 </file>
--- a/images/chap4/chap4_core_diagrams.pptx
+++ b/images/chap4/chap4_core_diagrams.pptx
@@ -8,9 +8,9 @@
     <p:notesMasterId r:id="rId5"/>
   </p:notesMasterIdLst>
   <p:sldIdLst>
-    <p:sldId id="256" r:id="rId2"/>
-    <p:sldId id="258" r:id="rId3"/>
-    <p:sldId id="259" r:id="rId4"/>
+    <p:sldId id="256" r:id="rId3"/>
+    <p:sldId id="258" r:id="rId4"/>
+    <p:sldId id="259" r:id="rId6"/>
   </p:sldIdLst>
   <p:sldSz cx="12192000" cy="6858000"/>
   <p:notesSz cx="6858000" cy="9144000"/>
@@ -112,7 +112,7 @@
   <p:extLst>
     <p:ext uri="{EFAFB233-063F-42B5-8137-9DF3F51BA10A}">
       <p15:sldGuideLst xmlns:p15="http://schemas.microsoft.com/office/powerpoint/2012/main">
-        <p15:guide id="1" orient="horz" pos="2095" userDrawn="1">
+        <p15:guide id="1" orient="horz" pos="2125" userDrawn="1">
           <p15:clr>
             <a:srgbClr val="A4A3A4"/>
           </p15:clr>
@@ -210,7 +210,6 @@
           <a:p>
             <a:fld id="{D2A48B96-639E-45A3-A0BA-2464DFDB1FAA}" type="datetimeFigureOut">
               <a:rPr lang="zh-CN" altLang="en-US" smtClean="0"/>
-              <a:t>2026/4/23</a:t>
             </a:fld>
             <a:endParaRPr lang="zh-CN" altLang="en-US"/>
           </a:p>
@@ -277,6 +276,7 @@
               <a:rPr lang="zh-CN" altLang="en-US"/>
               <a:t>单击此处编辑母版文本样式</a:t>
             </a:r>
+            <a:endParaRPr lang="zh-CN" altLang="en-US"/>
           </a:p>
           <a:p>
             <a:pPr lvl="1"/>
@@ -284,6 +284,7 @@
               <a:rPr lang="zh-CN" altLang="en-US"/>
               <a:t>第二级</a:t>
             </a:r>
+            <a:endParaRPr lang="zh-CN" altLang="en-US"/>
           </a:p>
           <a:p>
             <a:pPr lvl="2"/>
@@ -291,6 +292,7 @@
               <a:rPr lang="zh-CN" altLang="en-US"/>
               <a:t>第三级</a:t>
             </a:r>
+            <a:endParaRPr lang="zh-CN" altLang="en-US"/>
           </a:p>
           <a:p>
             <a:pPr lvl="3"/>
@@ -298,6 +300,7 @@
               <a:rPr lang="zh-CN" altLang="en-US"/>
               <a:t>第四级</a:t>
             </a:r>
+            <a:endParaRPr lang="zh-CN" altLang="en-US"/>
           </a:p>
           <a:p>
             <a:pPr lvl="4"/>
@@ -305,6 +308,7 @@
               <a:rPr lang="zh-CN" altLang="en-US"/>
               <a:t>第五级</a:t>
             </a:r>
+            <a:endParaRPr lang="zh-CN" altLang="en-US"/>
           </a:p>
         </p:txBody>
       </p:sp>
@@ -368,7 +372,6 @@
           <a:p>
             <a:fld id="{A6837353-30EB-4A48-80EB-173D804AEFBD}" type="slidenum">
               <a:rPr lang="zh-CN" altLang="en-US" smtClean="0"/>
-              <a:t>‹#›</a:t>
             </a:fld>
             <a:endParaRPr lang="zh-CN" altLang="en-US"/>
           </a:p>
@@ -574,6 +577,7 @@
               <a:rPr lang="en-US"/>
               <a:t>Click to edit Master title style</a:t>
             </a:r>
+            <a:endParaRPr lang="en-US"/>
           </a:p>
         </p:txBody>
       </p:sp>
@@ -692,6 +696,7 @@
               <a:rPr lang="en-US"/>
               <a:t>Click to edit Master subtitle style</a:t>
             </a:r>
+            <a:endParaRPr lang="en-US"/>
           </a:p>
         </p:txBody>
       </p:sp>
@@ -712,7 +717,6 @@
           <a:p>
             <a:fld id="{5BCAD085-E8A6-8845-BD4E-CB4CCA059FC4}" type="datetimeFigureOut">
               <a:rPr lang="en-US" smtClean="0"/>
-              <a:t>4/23/2026</a:t>
             </a:fld>
             <a:endParaRPr lang="en-US"/>
           </a:p>
@@ -754,7 +758,6 @@
           <a:p>
             <a:fld id="{C1FF6DA9-008F-8B48-92A6-B652298478BF}" type="slidenum">
               <a:rPr lang="en-US" smtClean="0"/>
-              <a:t>‹#›</a:t>
             </a:fld>
             <a:endParaRPr lang="en-US"/>
           </a:p>
@@ -804,6 +807,7 @@
               <a:rPr lang="en-US"/>
               <a:t>Click to edit Master title style</a:t>
             </a:r>
+            <a:endParaRPr lang="en-US"/>
           </a:p>
         </p:txBody>
       </p:sp>
@@ -827,6 +831,7 @@
               <a:rPr lang="en-US"/>
               <a:t>Click to edit Master text styles</a:t>
             </a:r>
+            <a:endParaRPr lang="en-US"/>
           </a:p>
           <a:p>
             <a:pPr lvl="1"/>
@@ -834,6 +839,7 @@
               <a:rPr lang="en-US"/>
               <a:t>Second level</a:t>
             </a:r>
+            <a:endParaRPr lang="en-US"/>
           </a:p>
           <a:p>
             <a:pPr lvl="2"/>
@@ -841,6 +847,7 @@
               <a:rPr lang="en-US"/>
               <a:t>Third level</a:t>
             </a:r>
+            <a:endParaRPr lang="en-US"/>
           </a:p>
           <a:p>
             <a:pPr lvl="3"/>
@@ -848,6 +855,7 @@
               <a:rPr lang="en-US"/>
               <a:t>Fourth level</a:t>
             </a:r>
+            <a:endParaRPr lang="en-US"/>
           </a:p>
           <a:p>
             <a:pPr lvl="4"/>
@@ -855,6 +863,7 @@
               <a:rPr lang="en-US"/>
               <a:t>Fifth level</a:t>
             </a:r>
+            <a:endParaRPr lang="en-US"/>
           </a:p>
         </p:txBody>
       </p:sp>
@@ -875,7 +884,6 @@
           <a:p>
             <a:fld id="{5BCAD085-E8A6-8845-BD4E-CB4CCA059FC4}" type="datetimeFigureOut">
               <a:rPr lang="en-US" smtClean="0"/>
-              <a:t>4/23/2026</a:t>
             </a:fld>
             <a:endParaRPr lang="en-US"/>
           </a:p>
@@ -917,7 +925,6 @@
           <a:p>
             <a:fld id="{C1FF6DA9-008F-8B48-92A6-B652298478BF}" type="slidenum">
               <a:rPr lang="en-US" smtClean="0"/>
-              <a:t>‹#›</a:t>
             </a:fld>
             <a:endParaRPr lang="en-US"/>
           </a:p>
@@ -972,6 +979,7 @@
               <a:rPr lang="en-US"/>
               <a:t>Click to edit Master title style</a:t>
             </a:r>
+            <a:endParaRPr lang="en-US"/>
           </a:p>
         </p:txBody>
       </p:sp>
@@ -1000,6 +1008,7 @@
               <a:rPr lang="en-US"/>
               <a:t>Click to edit Master text styles</a:t>
             </a:r>
+            <a:endParaRPr lang="en-US"/>
           </a:p>
           <a:p>
             <a:pPr lvl="1"/>
@@ -1007,6 +1016,7 @@
               <a:rPr lang="en-US"/>
               <a:t>Second level</a:t>
             </a:r>
+            <a:endParaRPr lang="en-US"/>
           </a:p>
           <a:p>
             <a:pPr lvl="2"/>
@@ -1014,6 +1024,7 @@
               <a:rPr lang="en-US"/>
               <a:t>Third level</a:t>
             </a:r>
+            <a:endParaRPr lang="en-US"/>
           </a:p>
           <a:p>
             <a:pPr lvl="3"/>
@@ -1021,6 +1032,7 @@
               <a:rPr lang="en-US"/>
               <a:t>Fourth level</a:t>
             </a:r>
+            <a:endParaRPr lang="en-US"/>
           </a:p>
           <a:p>
             <a:pPr lvl="4"/>
@@ -1028,6 +1040,7 @@
               <a:rPr lang="en-US"/>
               <a:t>Fifth level</a:t>
             </a:r>
+            <a:endParaRPr lang="en-US"/>
           </a:p>
         </p:txBody>
       </p:sp>
@@ -1048,7 +1061,6 @@
           <a:p>
             <a:fld id="{5BCAD085-E8A6-8845-BD4E-CB4CCA059FC4}" type="datetimeFigureOut">
               <a:rPr lang="en-US" smtClean="0"/>
-              <a:t>4/23/2026</a:t>
             </a:fld>
             <a:endParaRPr lang="en-US"/>
           </a:p>
@@ -1090,7 +1102,6 @@
           <a:p>
             <a:fld id="{C1FF6DA9-008F-8B48-92A6-B652298478BF}" type="slidenum">
               <a:rPr lang="en-US" smtClean="0"/>
-              <a:t>‹#›</a:t>
             </a:fld>
             <a:endParaRPr lang="en-US"/>
           </a:p>
@@ -1140,6 +1151,7 @@
               <a:rPr lang="en-US"/>
               <a:t>Click to edit Master title style</a:t>
             </a:r>
+            <a:endParaRPr lang="en-US"/>
           </a:p>
         </p:txBody>
       </p:sp>
@@ -1163,6 +1175,7 @@
               <a:rPr lang="en-US"/>
               <a:t>Click to edit Master text styles</a:t>
             </a:r>
+            <a:endParaRPr lang="en-US"/>
           </a:p>
           <a:p>
             <a:pPr lvl="1"/>
@@ -1170,6 +1183,7 @@
               <a:rPr lang="en-US"/>
               <a:t>Second level</a:t>
             </a:r>
+            <a:endParaRPr lang="en-US"/>
           </a:p>
           <a:p>
             <a:pPr lvl="2"/>
@@ -1177,6 +1191,7 @@
               <a:rPr lang="en-US"/>
               <a:t>Third level</a:t>
             </a:r>
+            <a:endParaRPr lang="en-US"/>
           </a:p>
           <a:p>
             <a:pPr lvl="3"/>
@@ -1184,6 +1199,7 @@
               <a:rPr lang="en-US"/>
               <a:t>Fourth level</a:t>
             </a:r>
+            <a:endParaRPr lang="en-US"/>
           </a:p>
           <a:p>
             <a:pPr lvl="4"/>
@@ -1191,6 +1207,7 @@
               <a:rPr lang="en-US"/>
               <a:t>Fifth level</a:t>
             </a:r>
+            <a:endParaRPr lang="en-US"/>
           </a:p>
         </p:txBody>
       </p:sp>
@@ -1211,7 +1228,6 @@
           <a:p>
             <a:fld id="{5BCAD085-E8A6-8845-BD4E-CB4CCA059FC4}" type="datetimeFigureOut">
               <a:rPr lang="en-US" smtClean="0"/>
-              <a:t>4/23/2026</a:t>
             </a:fld>
             <a:endParaRPr lang="en-US"/>
           </a:p>
@@ -1253,7 +1269,6 @@
           <a:p>
             <a:fld id="{C1FF6DA9-008F-8B48-92A6-B652298478BF}" type="slidenum">
               <a:rPr lang="en-US" smtClean="0"/>
-              <a:t>‹#›</a:t>
             </a:fld>
             <a:endParaRPr lang="en-US"/>
           </a:p>
@@ -1312,6 +1327,7 @@
               <a:rPr lang="en-US"/>
               <a:t>Click to edit Master title style</a:t>
             </a:r>
+            <a:endParaRPr lang="en-US"/>
           </a:p>
         </p:txBody>
       </p:sp>
@@ -1431,6 +1447,7 @@
               <a:rPr lang="en-US"/>
               <a:t>Click to edit Master text styles</a:t>
             </a:r>
+            <a:endParaRPr lang="en-US"/>
           </a:p>
         </p:txBody>
       </p:sp>
@@ -1451,7 +1468,6 @@
           <a:p>
             <a:fld id="{5BCAD085-E8A6-8845-BD4E-CB4CCA059FC4}" type="datetimeFigureOut">
               <a:rPr lang="en-US" smtClean="0"/>
-              <a:t>4/23/2026</a:t>
             </a:fld>
             <a:endParaRPr lang="en-US"/>
           </a:p>
@@ -1493,7 +1509,6 @@
           <a:p>
             <a:fld id="{C1FF6DA9-008F-8B48-92A6-B652298478BF}" type="slidenum">
               <a:rPr lang="en-US" smtClean="0"/>
-              <a:t>‹#›</a:t>
             </a:fld>
             <a:endParaRPr lang="en-US"/>
           </a:p>
@@ -1543,6 +1558,7 @@
               <a:rPr lang="en-US"/>
               <a:t>Click to edit Master title style</a:t>
             </a:r>
+            <a:endParaRPr lang="en-US"/>
           </a:p>
         </p:txBody>
       </p:sp>
@@ -1599,6 +1615,7 @@
               <a:rPr lang="en-US"/>
               <a:t>Click to edit Master text styles</a:t>
             </a:r>
+            <a:endParaRPr lang="en-US"/>
           </a:p>
           <a:p>
             <a:pPr lvl="1"/>
@@ -1606,6 +1623,7 @@
               <a:rPr lang="en-US"/>
               <a:t>Second level</a:t>
             </a:r>
+            <a:endParaRPr lang="en-US"/>
           </a:p>
           <a:p>
             <a:pPr lvl="2"/>
@@ -1613,6 +1631,7 @@
               <a:rPr lang="en-US"/>
               <a:t>Third level</a:t>
             </a:r>
+            <a:endParaRPr lang="en-US"/>
           </a:p>
           <a:p>
             <a:pPr lvl="3"/>
@@ -1620,6 +1639,7 @@
               <a:rPr lang="en-US"/>
               <a:t>Fourth level</a:t>
             </a:r>
+            <a:endParaRPr lang="en-US"/>
           </a:p>
           <a:p>
             <a:pPr lvl="4"/>
@@ -1627,6 +1647,7 @@
               <a:rPr lang="en-US"/>
               <a:t>Fifth level</a:t>
             </a:r>
+            <a:endParaRPr lang="en-US"/>
           </a:p>
         </p:txBody>
       </p:sp>
@@ -1683,6 +1704,7 @@
               <a:rPr lang="en-US"/>
               <a:t>Click to edit Master text styles</a:t>
             </a:r>
+            <a:endParaRPr lang="en-US"/>
           </a:p>
           <a:p>
             <a:pPr lvl="1"/>
@@ -1690,6 +1712,7 @@
               <a:rPr lang="en-US"/>
               <a:t>Second level</a:t>
             </a:r>
+            <a:endParaRPr lang="en-US"/>
           </a:p>
           <a:p>
             <a:pPr lvl="2"/>
@@ -1697,6 +1720,7 @@
               <a:rPr lang="en-US"/>
               <a:t>Third level</a:t>
             </a:r>
+            <a:endParaRPr lang="en-US"/>
           </a:p>
           <a:p>
             <a:pPr lvl="3"/>
@@ -1704,6 +1728,7 @@
               <a:rPr lang="en-US"/>
               <a:t>Fourth level</a:t>
             </a:r>
+            <a:endParaRPr lang="en-US"/>
           </a:p>
           <a:p>
             <a:pPr lvl="4"/>
@@ -1711,6 +1736,7 @@
               <a:rPr lang="en-US"/>
               <a:t>Fifth level</a:t>
             </a:r>
+            <a:endParaRPr lang="en-US"/>
           </a:p>
         </p:txBody>
       </p:sp>
@@ -1731,7 +1757,6 @@
           <a:p>
             <a:fld id="{5BCAD085-E8A6-8845-BD4E-CB4CCA059FC4}" type="datetimeFigureOut">
               <a:rPr lang="en-US" smtClean="0"/>
-              <a:t>4/23/2026</a:t>
             </a:fld>
             <a:endParaRPr lang="en-US"/>
           </a:p>
@@ -1773,7 +1798,6 @@
           <a:p>
             <a:fld id="{C1FF6DA9-008F-8B48-92A6-B652298478BF}" type="slidenum">
               <a:rPr lang="en-US" smtClean="0"/>
-              <a:t>‹#›</a:t>
             </a:fld>
             <a:endParaRPr lang="en-US"/>
           </a:p>
@@ -1827,6 +1851,7 @@
               <a:rPr lang="en-US"/>
               <a:t>Click to edit Master title style</a:t>
             </a:r>
+            <a:endParaRPr lang="en-US"/>
           </a:p>
         </p:txBody>
       </p:sp>
@@ -1892,6 +1917,7 @@
               <a:rPr lang="en-US"/>
               <a:t>Click to edit Master text styles</a:t>
             </a:r>
+            <a:endParaRPr lang="en-US"/>
           </a:p>
         </p:txBody>
       </p:sp>
@@ -1948,6 +1974,7 @@
               <a:rPr lang="en-US"/>
               <a:t>Click to edit Master text styles</a:t>
             </a:r>
+            <a:endParaRPr lang="en-US"/>
           </a:p>
           <a:p>
             <a:pPr lvl="1"/>
@@ -1955,6 +1982,7 @@
               <a:rPr lang="en-US"/>
               <a:t>Second level</a:t>
             </a:r>
+            <a:endParaRPr lang="en-US"/>
           </a:p>
           <a:p>
             <a:pPr lvl="2"/>
@@ -1962,6 +1990,7 @@
               <a:rPr lang="en-US"/>
               <a:t>Third level</a:t>
             </a:r>
+            <a:endParaRPr lang="en-US"/>
           </a:p>
           <a:p>
             <a:pPr lvl="3"/>
@@ -1969,6 +1998,7 @@
               <a:rPr lang="en-US"/>
               <a:t>Fourth level</a:t>
             </a:r>
+            <a:endParaRPr lang="en-US"/>
           </a:p>
           <a:p>
             <a:pPr lvl="4"/>
@@ -1976,6 +2006,7 @@
               <a:rPr lang="en-US"/>
               <a:t>Fifth level</a:t>
             </a:r>
+            <a:endParaRPr lang="en-US"/>
           </a:p>
         </p:txBody>
       </p:sp>
@@ -2041,6 +2072,7 @@
               <a:rPr lang="en-US"/>
               <a:t>Click to edit Master text styles</a:t>
             </a:r>
+            <a:endParaRPr lang="en-US"/>
           </a:p>
         </p:txBody>
       </p:sp>
@@ -2097,6 +2129,7 @@
               <a:rPr lang="en-US"/>
               <a:t>Click to edit Master text styles</a:t>
             </a:r>
+            <a:endParaRPr lang="en-US"/>
           </a:p>
           <a:p>
             <a:pPr lvl="1"/>
@@ -2104,6 +2137,7 @@
               <a:rPr lang="en-US"/>
               <a:t>Second level</a:t>
             </a:r>
+            <a:endParaRPr lang="en-US"/>
           </a:p>
           <a:p>
             <a:pPr lvl="2"/>
@@ -2111,6 +2145,7 @@
               <a:rPr lang="en-US"/>
               <a:t>Third level</a:t>
             </a:r>
+            <a:endParaRPr lang="en-US"/>
           </a:p>
           <a:p>
             <a:pPr lvl="3"/>
@@ -2118,6 +2153,7 @@
               <a:rPr lang="en-US"/>
               <a:t>Fourth level</a:t>
             </a:r>
+            <a:endParaRPr lang="en-US"/>
           </a:p>
           <a:p>
             <a:pPr lvl="4"/>
@@ -2125,6 +2161,7 @@
               <a:rPr lang="en-US"/>
               <a:t>Fifth level</a:t>
             </a:r>
+            <a:endParaRPr lang="en-US"/>
           </a:p>
         </p:txBody>
       </p:sp>
@@ -2145,7 +2182,6 @@
           <a:p>
             <a:fld id="{5BCAD085-E8A6-8845-BD4E-CB4CCA059FC4}" type="datetimeFigureOut">
               <a:rPr lang="en-US" smtClean="0"/>
-              <a:t>4/23/2026</a:t>
             </a:fld>
             <a:endParaRPr lang="en-US"/>
           </a:p>
@@ -2187,7 +2223,6 @@
           <a:p>
             <a:fld id="{C1FF6DA9-008F-8B48-92A6-B652298478BF}" type="slidenum">
               <a:rPr lang="en-US" smtClean="0"/>
-              <a:t>‹#›</a:t>
             </a:fld>
             <a:endParaRPr lang="en-US"/>
           </a:p>
@@ -2237,6 +2272,7 @@
               <a:rPr lang="en-US"/>
               <a:t>Click to edit Master title style</a:t>
             </a:r>
+            <a:endParaRPr lang="en-US"/>
           </a:p>
         </p:txBody>
       </p:sp>
@@ -2257,7 +2293,6 @@
           <a:p>
             <a:fld id="{5BCAD085-E8A6-8845-BD4E-CB4CCA059FC4}" type="datetimeFigureOut">
               <a:rPr lang="en-US" smtClean="0"/>
-              <a:t>4/23/2026</a:t>
             </a:fld>
             <a:endParaRPr lang="en-US"/>
           </a:p>
@@ -2299,7 +2334,6 @@
           <a:p>
             <a:fld id="{C1FF6DA9-008F-8B48-92A6-B652298478BF}" type="slidenum">
               <a:rPr lang="en-US" smtClean="0"/>
-              <a:t>‹#›</a:t>
             </a:fld>
             <a:endParaRPr lang="en-US"/>
           </a:p>
@@ -2347,7 +2381,6 @@
           <a:p>
             <a:fld id="{5BCAD085-E8A6-8845-BD4E-CB4CCA059FC4}" type="datetimeFigureOut">
               <a:rPr lang="en-US" smtClean="0"/>
-              <a:t>4/23/2026</a:t>
             </a:fld>
             <a:endParaRPr lang="en-US"/>
           </a:p>
@@ -2389,7 +2422,6 @@
           <a:p>
             <a:fld id="{C1FF6DA9-008F-8B48-92A6-B652298478BF}" type="slidenum">
               <a:rPr lang="en-US" smtClean="0"/>
-              <a:t>‹#›</a:t>
             </a:fld>
             <a:endParaRPr lang="en-US"/>
           </a:p>
@@ -2448,6 +2480,7 @@
               <a:rPr lang="en-US"/>
               <a:t>Click to edit Master title style</a:t>
             </a:r>
+            <a:endParaRPr lang="en-US"/>
           </a:p>
         </p:txBody>
       </p:sp>
@@ -2504,6 +2537,7 @@
               <a:rPr lang="en-US"/>
               <a:t>Click to edit Master text styles</a:t>
             </a:r>
+            <a:endParaRPr lang="en-US"/>
           </a:p>
           <a:p>
             <a:pPr lvl="1"/>
@@ -2511,6 +2545,7 @@
               <a:rPr lang="en-US"/>
               <a:t>Second level</a:t>
             </a:r>
+            <a:endParaRPr lang="en-US"/>
           </a:p>
           <a:p>
             <a:pPr lvl="2"/>
@@ -2518,6 +2553,7 @@
               <a:rPr lang="en-US"/>
               <a:t>Third level</a:t>
             </a:r>
+            <a:endParaRPr lang="en-US"/>
           </a:p>
           <a:p>
             <a:pPr lvl="3"/>
@@ -2525,6 +2561,7 @@
               <a:rPr lang="en-US"/>
               <a:t>Fourth level</a:t>
             </a:r>
+            <a:endParaRPr lang="en-US"/>
           </a:p>
           <a:p>
             <a:pPr lvl="4"/>
@@ -2532,6 +2569,7 @@
               <a:rPr lang="en-US"/>
               <a:t>Fifth level</a:t>
             </a:r>
+            <a:endParaRPr lang="en-US"/>
           </a:p>
         </p:txBody>
       </p:sp>
@@ -2597,6 +2635,7 @@
               <a:rPr lang="en-US"/>
               <a:t>Click to edit Master text styles</a:t>
             </a:r>
+            <a:endParaRPr lang="en-US"/>
           </a:p>
         </p:txBody>
       </p:sp>
@@ -2617,7 +2656,6 @@
           <a:p>
             <a:fld id="{5BCAD085-E8A6-8845-BD4E-CB4CCA059FC4}" type="datetimeFigureOut">
               <a:rPr lang="en-US" smtClean="0"/>
-              <a:t>4/23/2026</a:t>
             </a:fld>
             <a:endParaRPr lang="en-US"/>
           </a:p>
@@ -2659,7 +2697,6 @@
           <a:p>
             <a:fld id="{C1FF6DA9-008F-8B48-92A6-B652298478BF}" type="slidenum">
               <a:rPr lang="en-US" smtClean="0"/>
-              <a:t>‹#›</a:t>
             </a:fld>
             <a:endParaRPr lang="en-US"/>
           </a:p>
@@ -2718,6 +2755,7 @@
               <a:rPr lang="en-US"/>
               <a:t>Click to edit Master title style</a:t>
             </a:r>
+            <a:endParaRPr lang="en-US"/>
           </a:p>
         </p:txBody>
       </p:sp>
@@ -2844,6 +2882,7 @@
               <a:rPr lang="en-US"/>
               <a:t>Click to edit Master text styles</a:t>
             </a:r>
+            <a:endParaRPr lang="en-US"/>
           </a:p>
         </p:txBody>
       </p:sp>
@@ -2864,7 +2903,6 @@
           <a:p>
             <a:fld id="{5BCAD085-E8A6-8845-BD4E-CB4CCA059FC4}" type="datetimeFigureOut">
               <a:rPr lang="en-US" smtClean="0"/>
-              <a:t>4/23/2026</a:t>
             </a:fld>
             <a:endParaRPr lang="en-US"/>
           </a:p>
@@ -2906,7 +2944,6 @@
           <a:p>
             <a:fld id="{C1FF6DA9-008F-8B48-92A6-B652298478BF}" type="slidenum">
               <a:rPr lang="en-US" smtClean="0"/>
-              <a:t>‹#›</a:t>
             </a:fld>
             <a:endParaRPr lang="en-US"/>
           </a:p>
@@ -2971,6 +3008,7 @@
               <a:rPr lang="en-US"/>
               <a:t>Click to edit Master title style</a:t>
             </a:r>
+            <a:endParaRPr lang="en-US"/>
           </a:p>
         </p:txBody>
       </p:sp>
@@ -3004,6 +3042,7 @@
               <a:rPr lang="en-US"/>
               <a:t>Click to edit Master text styles</a:t>
             </a:r>
+            <a:endParaRPr lang="en-US"/>
           </a:p>
           <a:p>
             <a:pPr lvl="1"/>
@@ -3011,6 +3050,7 @@
               <a:rPr lang="en-US"/>
               <a:t>Second level</a:t>
             </a:r>
+            <a:endParaRPr lang="en-US"/>
           </a:p>
           <a:p>
             <a:pPr lvl="2"/>
@@ -3018,6 +3058,7 @@
               <a:rPr lang="en-US"/>
               <a:t>Third level</a:t>
             </a:r>
+            <a:endParaRPr lang="en-US"/>
           </a:p>
           <a:p>
             <a:pPr lvl="3"/>
@@ -3025,6 +3066,7 @@
               <a:rPr lang="en-US"/>
               <a:t>Fourth level</a:t>
             </a:r>
+            <a:endParaRPr lang="en-US"/>
           </a:p>
           <a:p>
             <a:pPr lvl="4"/>
@@ -3032,6 +3074,7 @@
               <a:rPr lang="en-US"/>
               <a:t>Fifth level</a:t>
             </a:r>
+            <a:endParaRPr lang="en-US"/>
           </a:p>
         </p:txBody>
       </p:sp>
@@ -3070,7 +3113,6 @@
           <a:p>
             <a:fld id="{5BCAD085-E8A6-8845-BD4E-CB4CCA059FC4}" type="datetimeFigureOut">
               <a:rPr lang="en-US" smtClean="0"/>
-              <a:t>4/23/2026</a:t>
             </a:fld>
             <a:endParaRPr lang="en-US"/>
           </a:p>
@@ -3148,7 +3190,6 @@
           <a:p>
             <a:fld id="{C1FF6DA9-008F-8B48-92A6-B652298478BF}" type="slidenum">
               <a:rPr lang="en-US" smtClean="0"/>
-              <a:t>‹#›</a:t>
             </a:fld>
             <a:endParaRPr lang="en-US"/>
           </a:p>
@@ -3459,8 +3500,10 @@
             <a:off x="4892040" y="329184"/>
             <a:ext cx="2377440" cy="420624"/>
           </a:xfrm>
-          <a:prstGeom prst="rect">
-            <a:avLst/>
+          <a:prstGeom prst="roundRect">
+            <a:avLst>
+              <a:gd name="adj" fmla="val 50000"/>
+            </a:avLst>
           </a:prstGeom>
           <a:solidFill>
             <a:srgbClr val="FFFFFF"/>
@@ -3506,6 +3549,12 @@
               </a:rPr>
               <a:t>选择漏洞并发起分析会话</a:t>
             </a:r>
+            <a:endParaRPr sz="1400" b="0" i="0">
+              <a:solidFill>
+                <a:srgbClr val="1E1E1E"/>
+              </a:solidFill>
+              <a:latin typeface="微软雅黑" panose="020B0503020204020204" charset="-122"/>
+            </a:endParaRPr>
           </a:p>
         </p:txBody>
       </p:sp>
@@ -3567,6 +3616,12 @@
               </a:rPr>
               <a:t>构建安全上下文</a:t>
             </a:r>
+            <a:endParaRPr sz="1400" b="0" i="0">
+              <a:solidFill>
+                <a:srgbClr val="1E1E1E"/>
+              </a:solidFill>
+              <a:latin typeface="微软雅黑" panose="020B0503020204020204" charset="-122"/>
+            </a:endParaRPr>
           </a:p>
         </p:txBody>
       </p:sp>
@@ -3628,6 +3683,12 @@
               </a:rPr>
               <a:t>生成候选监控 / 防护策略</a:t>
             </a:r>
+            <a:endParaRPr sz="1400" b="0" i="0">
+              <a:solidFill>
+                <a:srgbClr val="1E1E1E"/>
+              </a:solidFill>
+              <a:latin typeface="微软雅黑" panose="020B0503020204020204" charset="-122"/>
+            </a:endParaRPr>
           </a:p>
         </p:txBody>
       </p:sp>
@@ -3689,6 +3750,12 @@
               </a:rPr>
               <a:t>专家三维评审与同类型排序</a:t>
             </a:r>
+            <a:endParaRPr sz="1400" b="0" i="0">
+              <a:solidFill>
+                <a:srgbClr val="1E1E1E"/>
+              </a:solidFill>
+              <a:latin typeface="微软雅黑" panose="020B0503020204020204" charset="-122"/>
+            </a:endParaRPr>
           </a:p>
         </p:txBody>
       </p:sp>
@@ -3751,6 +3818,12 @@
               <a:t>是否需要
 反馈修订</a:t>
             </a:r>
+            <a:endParaRPr sz="1400" b="0" i="0">
+              <a:solidFill>
+                <a:srgbClr val="1E1E1E"/>
+              </a:solidFill>
+              <a:latin typeface="微软雅黑" panose="020B0503020204020204" charset="-122"/>
+            </a:endParaRPr>
           </a:p>
         </p:txBody>
       </p:sp>
@@ -3762,7 +3835,7 @@
         </p:nvSpPr>
         <p:spPr>
           <a:xfrm>
-            <a:off x="2697480" y="4681728"/>
+            <a:off x="1980565" y="3213608"/>
             <a:ext cx="2286000" cy="475488"/>
           </a:xfrm>
           <a:prstGeom prst="rect">
@@ -3812,6 +3885,12 @@
               </a:rPr>
               <a:t>反馈优化并重新生成</a:t>
             </a:r>
+            <a:endParaRPr sz="1400" b="0" i="0">
+              <a:solidFill>
+                <a:srgbClr val="1E1E1E"/>
+              </a:solidFill>
+              <a:latin typeface="微软雅黑" panose="020B0503020204020204" charset="-122"/>
+            </a:endParaRPr>
           </a:p>
         </p:txBody>
       </p:sp>
@@ -3873,6 +3952,12 @@
               </a:rPr>
               <a:t>确认交付结果</a:t>
             </a:r>
+            <a:endParaRPr sz="1400" b="0" i="0">
+              <a:solidFill>
+                <a:srgbClr val="1E1E1E"/>
+              </a:solidFill>
+              <a:latin typeface="微软雅黑" panose="020B0503020204020204" charset="-122"/>
+            </a:endParaRPr>
           </a:p>
         </p:txBody>
       </p:sp>
@@ -3887,13 +3972,15 @@
             <a:off x="4892040" y="5532120"/>
             <a:ext cx="2377440" cy="457200"/>
           </a:xfrm>
-          <a:prstGeom prst="rect">
-            <a:avLst/>
+          <a:prstGeom prst="roundRect">
+            <a:avLst>
+              <a:gd name="adj" fmla="val 50000"/>
+            </a:avLst>
           </a:prstGeom>
           <a:solidFill>
             <a:srgbClr val="FFFFFF"/>
           </a:solidFill>
-          <a:ln w="13970">
+          <a:ln w="13970" cap="rnd">
             <a:solidFill>
               <a:srgbClr val="4A4A4A"/>
             </a:solidFill>
@@ -3934,6 +4021,12 @@
               </a:rPr>
               <a:t>部署验证并记录审计</a:t>
             </a:r>
+            <a:endParaRPr sz="1400" b="0" i="0">
+              <a:solidFill>
+                <a:srgbClr val="1E1E1E"/>
+              </a:solidFill>
+              <a:latin typeface="微软雅黑" panose="020B0503020204020204" charset="-122"/>
+            </a:endParaRPr>
           </a:p>
         </p:txBody>
       </p:sp>
@@ -4175,6 +4268,12 @@
               </a:rPr>
               <a:t>否</a:t>
             </a:r>
+            <a:endParaRPr sz="1050" b="0" i="0">
+              <a:solidFill>
+                <a:srgbClr val="1E1E1E"/>
+              </a:solidFill>
+              <a:latin typeface="微软雅黑" panose="020B0503020204020204" charset="-122"/>
+            </a:endParaRPr>
           </a:p>
         </p:txBody>
       </p:sp>
@@ -4222,8 +4321,8 @@
         </p:nvCxnSpPr>
         <p:spPr>
           <a:xfrm flipH="1">
-            <a:off x="3822191" y="4005072"/>
-            <a:ext cx="1252729" cy="0"/>
+            <a:off x="3123565" y="4005072"/>
+            <a:ext cx="1951355" cy="0"/>
           </a:xfrm>
           <a:prstGeom prst="line">
             <a:avLst/>
@@ -4256,9 +4355,9 @@
           <p:nvPr/>
         </p:nvCxnSpPr>
         <p:spPr>
-          <a:xfrm>
-            <a:off x="3822191" y="4005072"/>
-            <a:ext cx="0" cy="676656"/>
+          <a:xfrm flipV="1">
+            <a:off x="3123691" y="3689477"/>
+            <a:ext cx="0" cy="315595"/>
           </a:xfrm>
           <a:prstGeom prst="line">
             <a:avLst/>
@@ -4293,7 +4392,7 @@
         </p:nvSpPr>
         <p:spPr>
           <a:xfrm>
-            <a:off x="3845052" y="3602736"/>
+            <a:off x="4027932" y="4070731"/>
             <a:ext cx="502920" cy="256032"/>
           </a:xfrm>
           <a:prstGeom prst="roundRect">
@@ -4343,9 +4442,88 @@
               </a:rPr>
               <a:t>是</a:t>
             </a:r>
-          </a:p>
-        </p:txBody>
-      </p:sp>
+            <a:endParaRPr sz="1050" b="0" i="0">
+              <a:solidFill>
+                <a:srgbClr val="1E1E1E"/>
+              </a:solidFill>
+              <a:latin typeface="微软雅黑" panose="020B0503020204020204" charset="-122"/>
+            </a:endParaRPr>
+          </a:p>
+        </p:txBody>
+      </p:sp>
+      <p:cxnSp>
+        <p:nvCxnSpPr>
+          <p:cNvPr id="2" name="Connector 14"/>
+          <p:cNvCxnSpPr/>
+          <p:nvPr/>
+        </p:nvCxnSpPr>
+        <p:spPr>
+          <a:xfrm>
+            <a:off x="3123565" y="2897886"/>
+            <a:ext cx="1612900" cy="0"/>
+          </a:xfrm>
+          <a:prstGeom prst="line">
+            <a:avLst/>
+          </a:prstGeom>
+          <a:ln w="12700">
+            <a:solidFill>
+              <a:srgbClr val="4A4A4A"/>
+            </a:solidFill>
+            <a:tailEnd type="arrow"/>
+          </a:ln>
+        </p:spPr>
+        <p:style>
+          <a:lnRef idx="2">
+            <a:schemeClr val="accent1"/>
+          </a:lnRef>
+          <a:fillRef idx="0">
+            <a:schemeClr val="accent1"/>
+          </a:fillRef>
+          <a:effectRef idx="1">
+            <a:schemeClr val="accent1"/>
+          </a:effectRef>
+          <a:fontRef idx="minor">
+            <a:schemeClr val="tx1"/>
+          </a:fontRef>
+        </p:style>
+      </p:cxnSp>
+      <p:cxnSp>
+        <p:nvCxnSpPr>
+          <p:cNvPr id="21" name="Connector 17"/>
+          <p:cNvCxnSpPr>
+            <a:stCxn id="8" idx="0"/>
+          </p:cNvCxnSpPr>
+          <p:nvPr/>
+        </p:nvCxnSpPr>
+        <p:spPr>
+          <a:xfrm flipV="1">
+            <a:off x="3123565" y="2898267"/>
+            <a:ext cx="0" cy="315595"/>
+          </a:xfrm>
+          <a:prstGeom prst="line">
+            <a:avLst/>
+          </a:prstGeom>
+          <a:ln w="12700">
+            <a:solidFill>
+              <a:srgbClr val="4A4A4A"/>
+            </a:solidFill>
+          </a:ln>
+        </p:spPr>
+        <p:style>
+          <a:lnRef idx="2">
+            <a:schemeClr val="accent1"/>
+          </a:lnRef>
+          <a:fillRef idx="0">
+            <a:schemeClr val="accent1"/>
+          </a:fillRef>
+          <a:effectRef idx="1">
+            <a:schemeClr val="accent1"/>
+          </a:effectRef>
+          <a:fontRef idx="minor">
+            <a:schemeClr val="tx1"/>
+          </a:fontRef>
+        </p:style>
+      </p:cxnSp>
     </p:spTree>
   </p:cSld>
   <p:clrMapOvr>
@@ -4594,14 +4772,22 @@
               </a:spcAft>
             </a:pPr>
             <a:r>
-              <a:rPr sz="1600" b="0" i="0">
+              <a:rPr sz="1600" b="0" i="0" dirty="0" err="1">
                 <a:solidFill>
                   <a:srgbClr val="1E1E1E"/>
                 </a:solidFill>
-                <a:latin typeface="微软雅黑" panose="020B0503020204020204" charset="-122"/>
+                <a:latin typeface="华文中宋" panose="02010600040101010101" pitchFamily="2" charset="-122"/>
+                <a:ea typeface="华文中宋" panose="02010600040101010101" pitchFamily="2" charset="-122"/>
               </a:rPr>
               <a:t>安全工程师</a:t>
             </a:r>
+            <a:endParaRPr sz="1600" b="0" i="0" dirty="0">
+              <a:solidFill>
+                <a:srgbClr val="1E1E1E"/>
+              </a:solidFill>
+              <a:latin typeface="华文中宋" panose="02010600040101010101" pitchFamily="2" charset="-122"/>
+              <a:ea typeface="华文中宋" panose="02010600040101010101" pitchFamily="2" charset="-122"/>
+            </a:endParaRPr>
           </a:p>
         </p:txBody>
       </p:sp>
@@ -4820,14 +5006,22 @@
               </a:spcAft>
             </a:pPr>
             <a:r>
-              <a:rPr sz="1600" b="0" i="0">
+              <a:rPr sz="1600" b="0" i="0" dirty="0" err="1">
                 <a:solidFill>
                   <a:srgbClr val="1E1E1E"/>
                 </a:solidFill>
-                <a:latin typeface="微软雅黑" panose="020B0503020204020204" charset="-122"/>
+                <a:latin typeface="华文中宋" panose="02010600040101010101" pitchFamily="2" charset="-122"/>
+                <a:ea typeface="华文中宋" panose="02010600040101010101" pitchFamily="2" charset="-122"/>
               </a:rPr>
               <a:t>专家评审员</a:t>
             </a:r>
+            <a:endParaRPr sz="1600" b="0" i="0" dirty="0">
+              <a:solidFill>
+                <a:srgbClr val="1E1E1E"/>
+              </a:solidFill>
+              <a:latin typeface="华文中宋" panose="02010600040101010101" pitchFamily="2" charset="-122"/>
+              <a:ea typeface="华文中宋" panose="02010600040101010101" pitchFamily="2" charset="-122"/>
+            </a:endParaRPr>
           </a:p>
         </p:txBody>
       </p:sp>
@@ -5238,6 +5432,12 @@
               </a:rPr>
               <a:t>部署验证</a:t>
             </a:r>
+            <a:endParaRPr sz="1600" b="0" i="0">
+              <a:solidFill>
+                <a:srgbClr val="1E1E1E"/>
+              </a:solidFill>
+              <a:latin typeface="微软雅黑" panose="020B0503020204020204" charset="-122"/>
+            </a:endParaRPr>
           </a:p>
         </p:txBody>
       </p:sp>
@@ -5312,7 +5512,7 @@
       </p:sp>
       <p:cxnSp>
         <p:nvCxnSpPr>
-          <p:cNvPr id="24" name="Connector 23"/>
+          <p:cNvPr id="24" name="Connector 23" descr="浏览&#10;"/>
           <p:cNvCxnSpPr/>
           <p:nvPr/>
         </p:nvCxnSpPr>
@@ -5349,14 +5549,14 @@
         <p:nvCxnSpPr>
           <p:cNvPr id="27" name="Connector 26"/>
           <p:cNvCxnSpPr>
-            <a:cxnSpLocks/>
+            <a:endCxn id="16" idx="2"/>
           </p:cNvCxnSpPr>
           <p:nvPr/>
         </p:nvCxnSpPr>
         <p:spPr>
           <a:xfrm>
             <a:off x="1254760" y="2207895"/>
-            <a:ext cx="1560195" cy="711835"/>
+            <a:ext cx="1625600" cy="509270"/>
           </a:xfrm>
           <a:prstGeom prst="line">
             <a:avLst/>
@@ -5386,14 +5586,14 @@
         <p:nvCxnSpPr>
           <p:cNvPr id="28" name="Connector 27"/>
           <p:cNvCxnSpPr>
-            <a:cxnSpLocks/>
+            <a:endCxn id="15" idx="3"/>
           </p:cNvCxnSpPr>
           <p:nvPr/>
         </p:nvCxnSpPr>
         <p:spPr>
           <a:xfrm flipV="1">
-            <a:off x="1400375" y="1633765"/>
-            <a:ext cx="1545390" cy="2985734"/>
+            <a:off x="1400375" y="1553084"/>
+            <a:ext cx="1845945" cy="3066415"/>
           </a:xfrm>
           <a:prstGeom prst="line">
             <a:avLst/>
@@ -5422,9 +5622,7 @@
       <p:cxnSp>
         <p:nvCxnSpPr>
           <p:cNvPr id="30" name="Connector 29"/>
-          <p:cNvCxnSpPr>
-            <a:cxnSpLocks/>
-          </p:cNvCxnSpPr>
+          <p:cNvCxnSpPr/>
           <p:nvPr/>
         </p:nvCxnSpPr>
         <p:spPr>
@@ -5460,7 +5658,6 @@
         <p:nvCxnSpPr>
           <p:cNvPr id="31" name="Connector 30"/>
           <p:cNvCxnSpPr>
-            <a:cxnSpLocks/>
             <a:stCxn id="16" idx="6"/>
             <a:endCxn id="17" idx="2"/>
           </p:cNvCxnSpPr>
@@ -5506,7 +5703,7 @@
         <p:spPr>
           <a:xfrm>
             <a:off x="4995934" y="2379662"/>
-            <a:ext cx="1567815" cy="368300"/>
+            <a:ext cx="1567815" cy="307777"/>
           </a:xfrm>
           <a:prstGeom prst="rect">
             <a:avLst/>
@@ -5520,12 +5717,16 @@
           <a:lstStyle/>
           <a:p>
             <a:r>
-              <a:rPr lang="en-US" altLang="zh-CN" dirty="0">
+              <a:rPr lang="en-US" altLang="zh-CN" sz="1400" dirty="0">
                 <a:latin typeface="Times New Roman" panose="02020603050405020304" charset="0"/>
                 <a:cs typeface="Times New Roman" panose="02020603050405020304" charset="0"/>
               </a:rPr>
               <a:t>&lt;&lt;include&gt;&gt;</a:t>
             </a:r>
+            <a:endParaRPr lang="en-US" altLang="zh-CN" sz="1400" dirty="0">
+              <a:latin typeface="Times New Roman" panose="02020603050405020304" charset="0"/>
+              <a:cs typeface="Times New Roman" panose="02020603050405020304" charset="0"/>
+            </a:endParaRPr>
           </a:p>
         </p:txBody>
       </p:sp>
@@ -5537,8 +5738,8 @@
         </p:nvSpPr>
         <p:spPr>
           <a:xfrm>
-            <a:off x="3895090" y="4632023"/>
-            <a:ext cx="1567815" cy="368300"/>
+            <a:off x="3895090" y="4674551"/>
+            <a:ext cx="1567815" cy="307777"/>
           </a:xfrm>
           <a:prstGeom prst="rect">
             <a:avLst/>
@@ -5552,26 +5753,23 @@
           <a:lstStyle/>
           <a:p>
             <a:r>
-              <a:rPr lang="en-US" altLang="zh-CN" dirty="0">
+              <a:rPr lang="en-US" altLang="zh-CN" sz="1400" dirty="0">
                 <a:latin typeface="Times New Roman" panose="02020603050405020304" charset="0"/>
                 <a:cs typeface="Times New Roman" panose="02020603050405020304" charset="0"/>
               </a:rPr>
               <a:t>&lt;&lt;extend&gt;&gt;</a:t>
             </a:r>
+            <a:endParaRPr lang="en-US" altLang="zh-CN" dirty="0">
+              <a:latin typeface="Times New Roman" panose="02020603050405020304" charset="0"/>
+              <a:cs typeface="Times New Roman" panose="02020603050405020304" charset="0"/>
+            </a:endParaRPr>
           </a:p>
         </p:txBody>
       </p:sp>
       <p:cxnSp>
         <p:nvCxnSpPr>
-          <p:cNvPr id="44" name="Connector 26">
-            <a:extLst>
-              <a:ext uri="{FF2B5EF4-FFF2-40B4-BE49-F238E27FC236}">
-                <a16:creationId xmlns:a16="http://schemas.microsoft.com/office/drawing/2014/main" id="{51AF5ED8-28CD-D9C3-E434-FE3D30F94685}"/>
-              </a:ext>
-            </a:extLst>
-          </p:cNvPr>
+          <p:cNvPr id="44" name="Connector 26"/>
           <p:cNvCxnSpPr>
-            <a:cxnSpLocks/>
             <a:endCxn id="23" idx="2"/>
           </p:cNvCxnSpPr>
           <p:nvPr/>
@@ -5607,16 +5805,8 @@
       </p:cxnSp>
       <p:cxnSp>
         <p:nvCxnSpPr>
-          <p:cNvPr id="47" name="Connector 30">
-            <a:extLst>
-              <a:ext uri="{FF2B5EF4-FFF2-40B4-BE49-F238E27FC236}">
-                <a16:creationId xmlns:a16="http://schemas.microsoft.com/office/drawing/2014/main" id="{456846DE-D15A-A79D-5951-0629822F1AD2}"/>
-              </a:ext>
-            </a:extLst>
-          </p:cNvPr>
-          <p:cNvCxnSpPr>
-            <a:cxnSpLocks/>
-          </p:cNvCxnSpPr>
+          <p:cNvPr id="47" name="Connector 30"/>
+          <p:cNvCxnSpPr/>
           <p:nvPr/>
         </p:nvCxnSpPr>
         <p:spPr>
@@ -5652,20 +5842,14 @@
       </p:cxnSp>
       <p:sp>
         <p:nvSpPr>
-          <p:cNvPr id="51" name="文本框 50">
-            <a:extLst>
-              <a:ext uri="{FF2B5EF4-FFF2-40B4-BE49-F238E27FC236}">
-                <a16:creationId xmlns:a16="http://schemas.microsoft.com/office/drawing/2014/main" id="{58418B9D-ED73-AA22-5723-CC34A16C9B76}"/>
-              </a:ext>
-            </a:extLst>
-          </p:cNvPr>
+          <p:cNvPr id="51" name="文本框 50"/>
           <p:cNvSpPr txBox="1"/>
           <p:nvPr/>
         </p:nvSpPr>
         <p:spPr>
           <a:xfrm>
-            <a:off x="5201376" y="3768314"/>
-            <a:ext cx="1567815" cy="368300"/>
+            <a:off x="5243905" y="3867549"/>
+            <a:ext cx="1567815" cy="307777"/>
           </a:xfrm>
           <a:prstGeom prst="rect">
             <a:avLst/>
@@ -5679,26 +5863,23 @@
           <a:lstStyle/>
           <a:p>
             <a:r>
-              <a:rPr lang="en-US" altLang="zh-CN" dirty="0">
+              <a:rPr lang="en-US" altLang="zh-CN" sz="1400" dirty="0">
                 <a:latin typeface="Times New Roman" panose="02020603050405020304" charset="0"/>
                 <a:cs typeface="Times New Roman" panose="02020603050405020304" charset="0"/>
               </a:rPr>
               <a:t>&lt;&lt;include&gt;&gt;</a:t>
             </a:r>
+            <a:endParaRPr lang="en-US" altLang="zh-CN" sz="1400" dirty="0">
+              <a:latin typeface="Times New Roman" panose="02020603050405020304" charset="0"/>
+              <a:cs typeface="Times New Roman" panose="02020603050405020304" charset="0"/>
+            </a:endParaRPr>
           </a:p>
         </p:txBody>
       </p:sp>
       <p:cxnSp>
         <p:nvCxnSpPr>
-          <p:cNvPr id="53" name="Connector 30">
-            <a:extLst>
-              <a:ext uri="{FF2B5EF4-FFF2-40B4-BE49-F238E27FC236}">
-                <a16:creationId xmlns:a16="http://schemas.microsoft.com/office/drawing/2014/main" id="{80E15376-E3A1-B3C7-2C71-088BDD3E3743}"/>
-              </a:ext>
-            </a:extLst>
-          </p:cNvPr>
+          <p:cNvPr id="53" name="Connector 30"/>
           <p:cNvCxnSpPr>
-            <a:cxnSpLocks/>
             <a:endCxn id="55" idx="2"/>
           </p:cNvCxnSpPr>
           <p:nvPr/>
@@ -5736,13 +5917,7 @@
       </p:cxnSp>
       <p:sp>
         <p:nvSpPr>
-          <p:cNvPr id="54" name="Oval 16">
-            <a:extLst>
-              <a:ext uri="{FF2B5EF4-FFF2-40B4-BE49-F238E27FC236}">
-                <a16:creationId xmlns:a16="http://schemas.microsoft.com/office/drawing/2014/main" id="{3CCBBAF3-0120-D820-AB68-E04217318C9F}"/>
-              </a:ext>
-            </a:extLst>
-          </p:cNvPr>
+          <p:cNvPr id="54" name="Oval 16"/>
           <p:cNvSpPr/>
           <p:nvPr/>
         </p:nvSpPr>
@@ -5811,13 +5986,7 @@
       </p:sp>
       <p:sp>
         <p:nvSpPr>
-          <p:cNvPr id="55" name="Oval 16">
-            <a:extLst>
-              <a:ext uri="{FF2B5EF4-FFF2-40B4-BE49-F238E27FC236}">
-                <a16:creationId xmlns:a16="http://schemas.microsoft.com/office/drawing/2014/main" id="{AE6E9073-AB78-CDC6-88C6-FA41BF5FECB4}"/>
-              </a:ext>
-            </a:extLst>
-          </p:cNvPr>
+          <p:cNvPr id="55" name="Oval 16"/>
           <p:cNvSpPr/>
           <p:nvPr/>
         </p:nvSpPr>
@@ -5886,15 +6055,8 @@
       </p:sp>
       <p:cxnSp>
         <p:nvCxnSpPr>
-          <p:cNvPr id="59" name="Connector 30">
-            <a:extLst>
-              <a:ext uri="{FF2B5EF4-FFF2-40B4-BE49-F238E27FC236}">
-                <a16:creationId xmlns:a16="http://schemas.microsoft.com/office/drawing/2014/main" id="{84F38380-8BB7-4A4B-447C-E30D77D34E69}"/>
-              </a:ext>
-            </a:extLst>
-          </p:cNvPr>
+          <p:cNvPr id="59" name="Connector 30"/>
           <p:cNvCxnSpPr>
-            <a:cxnSpLocks/>
             <a:stCxn id="15" idx="6"/>
             <a:endCxn id="54" idx="2"/>
           </p:cNvCxnSpPr>
@@ -5933,15 +6095,8 @@
       </p:cxnSp>
       <p:cxnSp>
         <p:nvCxnSpPr>
-          <p:cNvPr id="64" name="Connector 30">
-            <a:extLst>
-              <a:ext uri="{FF2B5EF4-FFF2-40B4-BE49-F238E27FC236}">
-                <a16:creationId xmlns:a16="http://schemas.microsoft.com/office/drawing/2014/main" id="{440098FD-21E7-5DBC-E671-36F65F8C3AD8}"/>
-              </a:ext>
-            </a:extLst>
-          </p:cNvPr>
+          <p:cNvPr id="64" name="Connector 30"/>
           <p:cNvCxnSpPr>
-            <a:cxnSpLocks/>
             <a:stCxn id="19" idx="0"/>
             <a:endCxn id="23" idx="4"/>
           </p:cNvCxnSpPr>
@@ -5980,15 +6135,8 @@
       </p:cxnSp>
       <p:cxnSp>
         <p:nvCxnSpPr>
-          <p:cNvPr id="70" name="Connector 30">
-            <a:extLst>
-              <a:ext uri="{FF2B5EF4-FFF2-40B4-BE49-F238E27FC236}">
-                <a16:creationId xmlns:a16="http://schemas.microsoft.com/office/drawing/2014/main" id="{7B4E49CC-8374-78E4-45A4-F02279C5B69C}"/>
-              </a:ext>
-            </a:extLst>
-          </p:cNvPr>
+          <p:cNvPr id="70" name="Connector 30"/>
           <p:cNvCxnSpPr>
-            <a:cxnSpLocks/>
             <a:stCxn id="16" idx="4"/>
             <a:endCxn id="23" idx="0"/>
           </p:cNvCxnSpPr>
@@ -6027,20 +6175,14 @@
       </p:cxnSp>
       <p:sp>
         <p:nvSpPr>
-          <p:cNvPr id="75" name="文本框 74">
-            <a:extLst>
-              <a:ext uri="{FF2B5EF4-FFF2-40B4-BE49-F238E27FC236}">
-                <a16:creationId xmlns:a16="http://schemas.microsoft.com/office/drawing/2014/main" id="{AEEB1418-C1A2-E195-0D5F-1E1F1E6AC818}"/>
-              </a:ext>
-            </a:extLst>
-          </p:cNvPr>
+          <p:cNvPr id="75" name="文本框 74"/>
           <p:cNvSpPr txBox="1"/>
           <p:nvPr/>
         </p:nvSpPr>
         <p:spPr>
           <a:xfrm>
             <a:off x="3907851" y="3240330"/>
-            <a:ext cx="1567815" cy="368300"/>
+            <a:ext cx="1567815" cy="307777"/>
           </a:xfrm>
           <a:prstGeom prst="rect">
             <a:avLst/>
@@ -6054,24 +6196,22 @@
           <a:lstStyle/>
           <a:p>
             <a:r>
-              <a:rPr lang="en-US" altLang="zh-CN" dirty="0">
+              <a:rPr lang="en-US" altLang="zh-CN" sz="1400" dirty="0">
                 <a:latin typeface="Times New Roman" panose="02020603050405020304" charset="0"/>
                 <a:cs typeface="Times New Roman" panose="02020603050405020304" charset="0"/>
               </a:rPr>
               <a:t>&lt;&lt;extend&gt;&gt;</a:t>
             </a:r>
-          </a:p>
-        </p:txBody>
-      </p:sp>
-      <p:sp>
-        <p:nvSpPr>
-          <p:cNvPr id="76" name="文本框 75">
-            <a:extLst>
-              <a:ext uri="{FF2B5EF4-FFF2-40B4-BE49-F238E27FC236}">
-                <a16:creationId xmlns:a16="http://schemas.microsoft.com/office/drawing/2014/main" id="{348D6E62-8849-947B-59A9-8E154753E4D6}"/>
-              </a:ext>
-            </a:extLst>
-          </p:cNvPr>
+            <a:endParaRPr lang="en-US" altLang="zh-CN" sz="1400" dirty="0">
+              <a:latin typeface="Times New Roman" panose="02020603050405020304" charset="0"/>
+              <a:cs typeface="Times New Roman" panose="02020603050405020304" charset="0"/>
+            </a:endParaRPr>
+          </a:p>
+        </p:txBody>
+      </p:sp>
+      <p:sp>
+        <p:nvSpPr>
+          <p:cNvPr id="76" name="文本框 75"/>
           <p:cNvSpPr txBox="1"/>
           <p:nvPr/>
         </p:nvSpPr>
@@ -6098,18 +6238,16 @@
               </a:rPr>
               <a:t>&lt;&lt;include&gt;&gt;</a:t>
             </a:r>
-          </a:p>
-        </p:txBody>
-      </p:sp>
-      <p:sp>
-        <p:nvSpPr>
-          <p:cNvPr id="77" name="文本框 76">
-            <a:extLst>
-              <a:ext uri="{FF2B5EF4-FFF2-40B4-BE49-F238E27FC236}">
-                <a16:creationId xmlns:a16="http://schemas.microsoft.com/office/drawing/2014/main" id="{BAC6C51F-2978-71B0-A054-61D1354A9554}"/>
-              </a:ext>
-            </a:extLst>
-          </p:cNvPr>
+            <a:endParaRPr lang="en-US" altLang="zh-CN" sz="1100" dirty="0">
+              <a:latin typeface="Times New Roman" panose="02020603050405020304" charset="0"/>
+              <a:cs typeface="Times New Roman" panose="02020603050405020304" charset="0"/>
+            </a:endParaRPr>
+          </a:p>
+        </p:txBody>
+      </p:sp>
+      <p:sp>
+        <p:nvSpPr>
+          <p:cNvPr id="77" name="文本框 76"/>
           <p:cNvSpPr txBox="1"/>
           <p:nvPr/>
         </p:nvSpPr>
@@ -6136,18 +6274,16 @@
               </a:rPr>
               <a:t>&lt;&lt;include&gt;&gt;</a:t>
             </a:r>
-          </a:p>
-        </p:txBody>
-      </p:sp>
-      <p:sp>
-        <p:nvSpPr>
-          <p:cNvPr id="78" name="文本框 77">
-            <a:extLst>
-              <a:ext uri="{FF2B5EF4-FFF2-40B4-BE49-F238E27FC236}">
-                <a16:creationId xmlns:a16="http://schemas.microsoft.com/office/drawing/2014/main" id="{2291DBB1-573E-8C16-00B6-8894E0BA5030}"/>
-              </a:ext>
-            </a:extLst>
-          </p:cNvPr>
+            <a:endParaRPr lang="en-US" altLang="zh-CN" sz="1200" dirty="0">
+              <a:latin typeface="Times New Roman" panose="02020603050405020304" charset="0"/>
+              <a:cs typeface="Times New Roman" panose="02020603050405020304" charset="0"/>
+            </a:endParaRPr>
+          </a:p>
+        </p:txBody>
+      </p:sp>
+      <p:sp>
+        <p:nvSpPr>
+          <p:cNvPr id="78" name="文本框 77"/>
           <p:cNvSpPr txBox="1"/>
           <p:nvPr/>
         </p:nvSpPr>
@@ -6174,18 +6310,16 @@
               </a:rPr>
               <a:t>&lt;&lt;include&gt;&gt;</a:t>
             </a:r>
-          </a:p>
-        </p:txBody>
-      </p:sp>
-      <p:sp>
-        <p:nvSpPr>
-          <p:cNvPr id="79" name="Oval 16">
-            <a:extLst>
-              <a:ext uri="{FF2B5EF4-FFF2-40B4-BE49-F238E27FC236}">
-                <a16:creationId xmlns:a16="http://schemas.microsoft.com/office/drawing/2014/main" id="{0B0155B9-4003-932E-89CB-6101C8B290A2}"/>
-              </a:ext>
-            </a:extLst>
-          </p:cNvPr>
+            <a:endParaRPr lang="en-US" altLang="zh-CN" sz="1200" dirty="0">
+              <a:latin typeface="Times New Roman" panose="02020603050405020304" charset="0"/>
+              <a:cs typeface="Times New Roman" panose="02020603050405020304" charset="0"/>
+            </a:endParaRPr>
+          </a:p>
+        </p:txBody>
+      </p:sp>
+      <p:sp>
+        <p:nvSpPr>
+          <p:cNvPr id="79" name="Oval 16"/>
           <p:cNvSpPr/>
           <p:nvPr/>
         </p:nvSpPr>
@@ -6254,13 +6388,7 @@
       </p:sp>
       <p:sp>
         <p:nvSpPr>
-          <p:cNvPr id="80" name="Oval 16">
-            <a:extLst>
-              <a:ext uri="{FF2B5EF4-FFF2-40B4-BE49-F238E27FC236}">
-                <a16:creationId xmlns:a16="http://schemas.microsoft.com/office/drawing/2014/main" id="{DAA285B3-E1E4-6B3B-71B5-BC43AB089094}"/>
-              </a:ext>
-            </a:extLst>
-          </p:cNvPr>
+          <p:cNvPr id="80" name="Oval 16"/>
           <p:cNvSpPr/>
           <p:nvPr/>
         </p:nvSpPr>
@@ -6329,15 +6457,8 @@
       </p:sp>
       <p:cxnSp>
         <p:nvCxnSpPr>
-          <p:cNvPr id="81" name="Connector 30">
-            <a:extLst>
-              <a:ext uri="{FF2B5EF4-FFF2-40B4-BE49-F238E27FC236}">
-                <a16:creationId xmlns:a16="http://schemas.microsoft.com/office/drawing/2014/main" id="{F2410A80-1381-0B63-A531-C18B002BD7F7}"/>
-              </a:ext>
-            </a:extLst>
-          </p:cNvPr>
+          <p:cNvPr id="81" name="Connector 30"/>
           <p:cNvCxnSpPr>
-            <a:cxnSpLocks/>
             <a:stCxn id="19" idx="6"/>
             <a:endCxn id="79" idx="2"/>
           </p:cNvCxnSpPr>
@@ -6376,16 +6497,8 @@
       </p:cxnSp>
       <p:cxnSp>
         <p:nvCxnSpPr>
-          <p:cNvPr id="82" name="Connector 30">
-            <a:extLst>
-              <a:ext uri="{FF2B5EF4-FFF2-40B4-BE49-F238E27FC236}">
-                <a16:creationId xmlns:a16="http://schemas.microsoft.com/office/drawing/2014/main" id="{95F26BBB-7AF5-1991-5FDC-FC7ED9A5AA06}"/>
-              </a:ext>
-            </a:extLst>
-          </p:cNvPr>
-          <p:cNvCxnSpPr>
-            <a:cxnSpLocks/>
-          </p:cNvCxnSpPr>
+          <p:cNvPr id="82" name="Connector 30"/>
+          <p:cNvCxnSpPr/>
           <p:nvPr/>
         </p:nvCxnSpPr>
         <p:spPr>
@@ -6421,13 +6534,7 @@
       </p:cxnSp>
       <p:sp>
         <p:nvSpPr>
-          <p:cNvPr id="87" name="文本框 86">
-            <a:extLst>
-              <a:ext uri="{FF2B5EF4-FFF2-40B4-BE49-F238E27FC236}">
-                <a16:creationId xmlns:a16="http://schemas.microsoft.com/office/drawing/2014/main" id="{F68C18C2-B66B-BD70-BF70-D6B734C74CB8}"/>
-              </a:ext>
-            </a:extLst>
-          </p:cNvPr>
+          <p:cNvPr id="87" name="文本框 86"/>
           <p:cNvSpPr txBox="1"/>
           <p:nvPr/>
         </p:nvSpPr>
@@ -6454,6 +6561,10 @@
               </a:rPr>
               <a:t>&lt;&lt;include&gt;&gt;</a:t>
             </a:r>
+            <a:endParaRPr lang="en-US" altLang="zh-CN" sz="1200" dirty="0">
+              <a:latin typeface="Times New Roman" panose="02020603050405020304" charset="0"/>
+              <a:cs typeface="Times New Roman" panose="02020603050405020304" charset="0"/>
+            </a:endParaRPr>
           </a:p>
         </p:txBody>
       </p:sp>
@@ -6532,7 +6643,6 @@
           <a:lstStyle/>
           <a:p>
             <a:pPr algn="ctr"/>
-            <a:endParaRPr/>
           </a:p>
         </p:txBody>
       </p:sp>
@@ -6645,6 +6755,12 @@
               </a:rPr>
               <a:t>CVE</a:t>
             </a:r>
+            <a:endParaRPr sz="1300" b="0" i="0">
+              <a:solidFill>
+                <a:srgbClr val="1E1E1E"/>
+              </a:solidFill>
+              <a:latin typeface="微软雅黑" panose="020B0503020204020204" charset="-122"/>
+            </a:endParaRPr>
           </a:p>
         </p:txBody>
       </p:sp>
@@ -6693,6 +6809,12 @@
 - Date published_date
 - Enum status</a:t>
             </a:r>
+            <a:endParaRPr sz="1150" b="0" i="0">
+              <a:solidFill>
+                <a:srgbClr val="1E1E1E"/>
+              </a:solidFill>
+              <a:latin typeface="微软雅黑" panose="020B0503020204020204" charset="-122"/>
+            </a:endParaRPr>
           </a:p>
         </p:txBody>
       </p:sp>
@@ -6736,6 +6858,12 @@
               <a:t>+ getSeverityLevel(): String
 + toFeatureVector(): List</a:t>
             </a:r>
+            <a:endParaRPr sz="1150" b="0" i="0">
+              <a:solidFill>
+                <a:srgbClr val="1E1E1E"/>
+              </a:solidFill>
+              <a:latin typeface="微软雅黑" panose="020B0503020204020204" charset="-122"/>
+            </a:endParaRPr>
           </a:p>
         </p:txBody>
       </p:sp>
@@ -6781,7 +6909,6 @@
           <a:lstStyle/>
           <a:p>
             <a:pPr algn="ctr"/>
-            <a:endParaRPr/>
           </a:p>
         </p:txBody>
       </p:sp>
@@ -6894,6 +7021,12 @@
               </a:rPr>
               <a:t>Session</a:t>
             </a:r>
+            <a:endParaRPr sz="1300" b="0" i="0">
+              <a:solidFill>
+                <a:srgbClr val="1E1E1E"/>
+              </a:solidFill>
+              <a:latin typeface="微软雅黑" panose="020B0503020204020204" charset="-122"/>
+            </a:endParaRPr>
           </a:p>
         </p:txBody>
       </p:sp>
@@ -6940,6 +7073,12 @@
 - DateTime created_at
 - Enum status</a:t>
             </a:r>
+            <a:endParaRPr sz="1150" b="0" i="0">
+              <a:solidFill>
+                <a:srgbClr val="1E1E1E"/>
+              </a:solidFill>
+              <a:latin typeface="微软雅黑" panose="020B0503020204020204" charset="-122"/>
+            </a:endParaRPr>
           </a:p>
         </p:txBody>
       </p:sp>
@@ -6983,6 +7122,12 @@
               <a:t>+ initWorkspace(): void
 + getLatestStrategy(): Strategy</a:t>
             </a:r>
+            <a:endParaRPr sz="1150" b="0" i="0">
+              <a:solidFill>
+                <a:srgbClr val="1E1E1E"/>
+              </a:solidFill>
+              <a:latin typeface="微软雅黑" panose="020B0503020204020204" charset="-122"/>
+            </a:endParaRPr>
           </a:p>
         </p:txBody>
       </p:sp>
@@ -7028,7 +7173,6 @@
           <a:lstStyle/>
           <a:p>
             <a:pPr algn="ctr"/>
-            <a:endParaRPr/>
           </a:p>
         </p:txBody>
       </p:sp>
@@ -7141,6 +7285,12 @@
               </a:rPr>
               <a:t>Strategy</a:t>
             </a:r>
+            <a:endParaRPr sz="1300" b="0" i="0">
+              <a:solidFill>
+                <a:srgbClr val="1E1E1E"/>
+              </a:solidFill>
+              <a:latin typeface="微软雅黑" panose="020B0503020204020204" charset="-122"/>
+            </a:endParaRPr>
           </a:p>
         </p:txBody>
       </p:sp>
@@ -7188,6 +7338,12 @@
 - Int version
 - DateTime generated_at</a:t>
             </a:r>
+            <a:endParaRPr sz="1150" b="0" i="0">
+              <a:solidFill>
+                <a:srgbClr val="1E1E1E"/>
+              </a:solidFill>
+              <a:latin typeface="微软雅黑" panose="020B0503020204020204" charset="-122"/>
+            </a:endParaRPr>
           </a:p>
         </p:txBody>
       </p:sp>
@@ -7231,6 +7387,12 @@
               <a:t>+ render(): String
 + diff(other): String</a:t>
             </a:r>
+            <a:endParaRPr sz="1150" b="0" i="0">
+              <a:solidFill>
+                <a:srgbClr val="1E1E1E"/>
+              </a:solidFill>
+              <a:latin typeface="微软雅黑" panose="020B0503020204020204" charset="-122"/>
+            </a:endParaRPr>
           </a:p>
         </p:txBody>
       </p:sp>
@@ -7276,7 +7438,6 @@
           <a:lstStyle/>
           <a:p>
             <a:pPr algn="ctr"/>
-            <a:endParaRPr/>
           </a:p>
         </p:txBody>
       </p:sp>
@@ -7389,6 +7550,12 @@
               </a:rPr>
               <a:t>Ranking</a:t>
             </a:r>
+            <a:endParaRPr sz="1300" b="0" i="0">
+              <a:solidFill>
+                <a:srgbClr val="1E1E1E"/>
+              </a:solidFill>
+              <a:latin typeface="微软雅黑" panose="020B0503020204020204" charset="-122"/>
+            </a:endParaRPr>
           </a:p>
         </p:txBody>
       </p:sp>
@@ -7436,6 +7603,12 @@
 - Map&lt;String, Float&gt; scores
 - String comment</a:t>
             </a:r>
+            <a:endParaRPr sz="1150" b="0" i="0">
+              <a:solidFill>
+                <a:srgbClr val="1E1E1E"/>
+              </a:solidFill>
+              <a:latin typeface="微软雅黑" panose="020B0503020204020204" charset="-122"/>
+            </a:endParaRPr>
           </a:p>
         </p:txBody>
       </p:sp>
@@ -7479,6 +7652,12 @@
               <a:t>+ validate(): Boolean
 + toPreferencePair(): Pair</a:t>
             </a:r>
+            <a:endParaRPr sz="1150" b="0" i="0">
+              <a:solidFill>
+                <a:srgbClr val="1E1E1E"/>
+              </a:solidFill>
+              <a:latin typeface="微软雅黑" panose="020B0503020204020204" charset="-122"/>
+            </a:endParaRPr>
           </a:p>
         </p:txBody>
       </p:sp>
@@ -7557,6 +7736,12 @@
               </a:rPr>
               <a:t>1</a:t>
             </a:r>
+            <a:endParaRPr sz="950" b="0" i="0">
+              <a:solidFill>
+                <a:srgbClr val="1E1E1E"/>
+              </a:solidFill>
+              <a:latin typeface="微软雅黑" panose="020B0503020204020204" charset="-122"/>
+            </a:endParaRPr>
           </a:p>
         </p:txBody>
       </p:sp>
@@ -7599,6 +7784,12 @@
               </a:rPr>
               <a:t>0..*</a:t>
             </a:r>
+            <a:endParaRPr sz="950" b="0" i="0">
+              <a:solidFill>
+                <a:srgbClr val="1E1E1E"/>
+              </a:solidFill>
+              <a:latin typeface="微软雅黑" panose="020B0503020204020204" charset="-122"/>
+            </a:endParaRPr>
           </a:p>
         </p:txBody>
       </p:sp>
@@ -7677,6 +7868,12 @@
               </a:rPr>
               <a:t>1</a:t>
             </a:r>
+            <a:endParaRPr sz="950" b="0" i="0">
+              <a:solidFill>
+                <a:srgbClr val="1E1E1E"/>
+              </a:solidFill>
+              <a:latin typeface="微软雅黑" panose="020B0503020204020204" charset="-122"/>
+            </a:endParaRPr>
           </a:p>
         </p:txBody>
       </p:sp>
@@ -7719,6 +7916,12 @@
               </a:rPr>
               <a:t>1..*</a:t>
             </a:r>
+            <a:endParaRPr sz="950" b="0" i="0">
+              <a:solidFill>
+                <a:srgbClr val="1E1E1E"/>
+              </a:solidFill>
+              <a:latin typeface="微软雅黑" panose="020B0503020204020204" charset="-122"/>
+            </a:endParaRPr>
           </a:p>
         </p:txBody>
       </p:sp>
@@ -7766,7 +7969,7 @@
         </p:nvSpPr>
         <p:spPr>
           <a:xfrm>
-            <a:off x="7142480" y="3014345"/>
+            <a:off x="7105142" y="2913635"/>
             <a:ext cx="304800" cy="312420"/>
           </a:xfrm>
           <a:prstGeom prst="rect">
@@ -7797,6 +8000,12 @@
               </a:rPr>
               <a:t>1</a:t>
             </a:r>
+            <a:endParaRPr sz="950" b="0" i="0">
+              <a:solidFill>
+                <a:srgbClr val="1E1E1E"/>
+              </a:solidFill>
+              <a:latin typeface="微软雅黑" panose="020B0503020204020204" charset="-122"/>
+            </a:endParaRPr>
           </a:p>
         </p:txBody>
       </p:sp>
@@ -7808,7 +8017,7 @@
         </p:nvSpPr>
         <p:spPr>
           <a:xfrm>
-            <a:off x="7221093" y="3556381"/>
+            <a:off x="7154672" y="3458084"/>
             <a:ext cx="292608" cy="146304"/>
           </a:xfrm>
           <a:prstGeom prst="rect">
@@ -7831,7 +8040,7 @@
               </a:spcAft>
             </a:pPr>
             <a:r>
-              <a:rPr sz="950" b="0" i="0">
+              <a:rPr sz="950" b="0" i="0" dirty="0">
                 <a:solidFill>
                   <a:srgbClr val="1E1E1E"/>
                 </a:solidFill>
@@ -7839,6 +8048,12 @@
               </a:rPr>
               <a:t>0..*</a:t>
             </a:r>
+            <a:endParaRPr sz="950" b="0" i="0" dirty="0">
+              <a:solidFill>
+                <a:srgbClr val="1E1E1E"/>
+              </a:solidFill>
+              <a:latin typeface="微软雅黑" panose="020B0503020204020204" charset="-122"/>
+            </a:endParaRPr>
           </a:p>
         </p:txBody>
       </p:sp>
@@ -7886,7 +8101,7 @@
         </p:nvSpPr>
         <p:spPr>
           <a:xfrm>
-            <a:off x="5081778" y="5070221"/>
+            <a:off x="5296488" y="5142230"/>
             <a:ext cx="310896" cy="146304"/>
           </a:xfrm>
           <a:prstGeom prst="rect">
@@ -7909,7 +8124,7 @@
               </a:spcAft>
             </a:pPr>
             <a:r>
-              <a:rPr sz="950" b="0" i="0">
+              <a:rPr sz="950" b="0" i="0" dirty="0">
                 <a:solidFill>
                   <a:srgbClr val="1E1E1E"/>
                 </a:solidFill>
@@ -7917,6 +8132,12 @@
               </a:rPr>
               <a:t>1..*</a:t>
             </a:r>
+            <a:endParaRPr sz="950" b="0" i="0" dirty="0">
+              <a:solidFill>
+                <a:srgbClr val="1E1E1E"/>
+              </a:solidFill>
+              <a:latin typeface="微软雅黑" panose="020B0503020204020204" charset="-122"/>
+            </a:endParaRPr>
           </a:p>
         </p:txBody>
       </p:sp>
@@ -7928,7 +8149,7 @@
         </p:nvSpPr>
         <p:spPr>
           <a:xfrm>
-            <a:off x="5639562" y="5070221"/>
+            <a:off x="5757371" y="5142230"/>
             <a:ext cx="274320" cy="146304"/>
           </a:xfrm>
           <a:prstGeom prst="rect">
@@ -7951,7 +8172,7 @@
               </a:spcAft>
             </a:pPr>
             <a:r>
-              <a:rPr sz="950" b="0" i="0">
+              <a:rPr sz="950" b="0" i="0" dirty="0">
                 <a:solidFill>
                   <a:srgbClr val="1E1E1E"/>
                 </a:solidFill>
@@ -7959,6 +8180,12 @@
               </a:rPr>
               <a:t>0..*</a:t>
             </a:r>
+            <a:endParaRPr sz="950" b="0" i="0" dirty="0">
+              <a:solidFill>
+                <a:srgbClr val="1E1E1E"/>
+              </a:solidFill>
+              <a:latin typeface="微软雅黑" panose="020B0503020204020204" charset="-122"/>
+            </a:endParaRPr>
           </a:p>
         </p:txBody>
       </p:sp>
@@ -8286,7 +8513,6 @@
       </a:style>
     </a:lnDef>
   </a:objectDefaults>
-  <a:extraClrSchemeLst/>
   <a:extLst>
     <a:ext uri="{05A4C25C-085E-4340-85A3-A5531E510DB2}">
       <thm15:themeFamily xmlns:thm15="http://schemas.microsoft.com/office/thememl/2012/main" name="Office Theme" id="{62F939B6-93AF-4DB8-9C6B-D6C7DFDC589F}" vid="{4A3C46E8-61CC-4603-A589-7422A47A8E4A}"/>
@@ -8546,8 +8772,6 @@
       </a:bgFillStyleLst>
     </a:fmtScheme>
   </a:themeElements>
-  <a:objectDefaults/>
-  <a:extraClrSchemeLst/>
   <a:extLst>
     <a:ext uri="{05A4C25C-085E-4340-85A3-A5531E510DB2}">
       <thm15:themeFamily xmlns:thm15="http://schemas.microsoft.com/office/thememl/2012/main" name="Office Theme" id="{62F939B6-93AF-4DB8-9C6B-D6C7DFDC589F}" vid="{4A3C46E8-61CC-4603-A589-7422A47A8E4A}"/>

--- a/images/chap4/chap4_core_diagrams.pptx
+++ b/images/chap4/chap4_core_diagrams.pptx
@@ -3675,15 +3675,24 @@
               </a:spcAft>
             </a:pPr>
             <a:r>
-              <a:rPr sz="1400" b="0" i="0">
+              <a:rPr lang="zh-CN" sz="1400" b="0" i="0">
                 <a:solidFill>
                   <a:srgbClr val="1E1E1E"/>
                 </a:solidFill>
                 <a:latin typeface="微软雅黑" panose="020B0503020204020204" charset="-122"/>
               </a:rPr>
-              <a:t>生成候选监控 / 防护策略</a:t>
-            </a:r>
-            <a:endParaRPr sz="1400" b="0" i="0">
+              <a:t>候选安全策略</a:t>
+            </a:r>
+            <a:r>
+              <a:rPr lang="zh-CN" sz="1400" b="0" i="0">
+                <a:solidFill>
+                  <a:srgbClr val="1E1E1E"/>
+                </a:solidFill>
+                <a:latin typeface="微软雅黑" panose="020B0503020204020204" charset="-122"/>
+              </a:rPr>
+              <a:t>生成</a:t>
+            </a:r>
+            <a:endParaRPr lang="zh-CN" sz="1400" b="0" i="0">
               <a:solidFill>
                 <a:srgbClr val="1E1E1E"/>
               </a:solidFill>

--- a/images/chap4/chap4_core_diagrams.pptx
+++ b/images/chap4/chap4_core_diagrams.pptx
@@ -112,12 +112,12 @@
   <p:extLst>
     <p:ext uri="{EFAFB233-063F-42B5-8137-9DF3F51BA10A}">
       <p15:sldGuideLst xmlns:p15="http://schemas.microsoft.com/office/powerpoint/2012/main">
-        <p15:guide id="1" orient="horz" pos="2125" userDrawn="1">
+        <p15:guide id="1" orient="horz" pos="2138" userDrawn="1">
           <p15:clr>
             <a:srgbClr val="A4A3A4"/>
           </p15:clr>
         </p15:guide>
-        <p15:guide id="2" pos="2914" userDrawn="1">
+        <p15:guide id="2" pos="2947" userDrawn="1">
           <p15:clr>
             <a:srgbClr val="A4A3A4"/>
           </p15:clr>
@@ -5076,6 +5076,10 @@
           <a:lstStyle/>
           <a:p>
             <a:pPr algn="ctr"/>
+            <a:r>
+              <a:rPr lang="en-US" altLang="zh-CN" sz="2800"/>
+              <a:t>KPEDefense</a:t>
+            </a:r>
             <a:endParaRPr sz="2800"/>
           </a:p>
         </p:txBody>
@@ -5089,7 +5093,7 @@
         <p:spPr>
           <a:xfrm>
             <a:off x="2880360" y="854710"/>
-            <a:ext cx="2497455" cy="818515"/>
+            <a:ext cx="2219325" cy="818515"/>
           </a:xfrm>
           <a:prstGeom prst="ellipse">
             <a:avLst/>
@@ -5226,8 +5230,8 @@
         </p:nvSpPr>
         <p:spPr>
           <a:xfrm>
-            <a:off x="6635432" y="2273281"/>
-            <a:ext cx="2029460" cy="818515"/>
+            <a:off x="6563995" y="2038985"/>
+            <a:ext cx="1910080" cy="571500"/>
           </a:xfrm>
           <a:prstGeom prst="ellipse">
             <a:avLst/>
@@ -5320,7 +5324,7 @@
         </p:nvSpPr>
         <p:spPr>
           <a:xfrm>
-            <a:off x="3141511" y="5178391"/>
+            <a:off x="3163736" y="5131401"/>
             <a:ext cx="1741170" cy="704850"/>
           </a:xfrm>
           <a:prstGeom prst="ellipse">
@@ -5389,7 +5393,7 @@
         </p:nvSpPr>
         <p:spPr>
           <a:xfrm>
-            <a:off x="6823293" y="3788202"/>
+            <a:off x="6811863" y="3793282"/>
             <a:ext cx="1409700" cy="704850"/>
           </a:xfrm>
           <a:prstGeom prst="ellipse">
@@ -5433,13 +5437,22 @@
               </a:spcAft>
             </a:pPr>
             <a:r>
+              <a:rPr lang="zh-CN" sz="1600" b="0" i="0">
+                <a:solidFill>
+                  <a:srgbClr val="1E1E1E"/>
+                </a:solidFill>
+                <a:latin typeface="微软雅黑" panose="020B0503020204020204" charset="-122"/>
+              </a:rPr>
+              <a:t>策略</a:t>
+            </a:r>
+            <a:r>
               <a:rPr sz="1600" b="0" i="0">
                 <a:solidFill>
                   <a:srgbClr val="1E1E1E"/>
                 </a:solidFill>
                 <a:latin typeface="微软雅黑" panose="020B0503020204020204" charset="-122"/>
               </a:rPr>
-              <a:t>部署验证</a:t>
+              <a:t>部署</a:t>
             </a:r>
             <a:endParaRPr sz="1600" b="0" i="0">
               <a:solidFill>
@@ -5601,7 +5614,7 @@
         </p:nvCxnSpPr>
         <p:spPr>
           <a:xfrm flipV="1">
-            <a:off x="1400375" y="1553084"/>
+            <a:off x="1359735" y="1553084"/>
             <a:ext cx="1845945" cy="3066415"/>
           </a:xfrm>
           <a:prstGeom prst="line">
@@ -5674,8 +5687,8 @@
         </p:nvCxnSpPr>
         <p:spPr>
           <a:xfrm flipV="1">
-            <a:off x="4909820" y="2682539"/>
-            <a:ext cx="1725612" cy="34836"/>
+            <a:off x="4909820" y="2324945"/>
+            <a:ext cx="1654175" cy="393065"/>
           </a:xfrm>
           <a:prstGeom prst="line">
             <a:avLst/>
@@ -5710,8 +5723,8 @@
           <p:nvPr/>
         </p:nvSpPr>
         <p:spPr>
-          <a:xfrm>
-            <a:off x="4995934" y="2379662"/>
+          <a:xfrm rot="20880000">
+            <a:off x="5114679" y="2220277"/>
             <a:ext cx="1567815" cy="307777"/>
           </a:xfrm>
           <a:prstGeom prst="rect">
@@ -5889,14 +5902,15 @@
         <p:nvCxnSpPr>
           <p:cNvPr id="53" name="Connector 30"/>
           <p:cNvCxnSpPr>
+            <a:stCxn id="15" idx="6"/>
             <a:endCxn id="55" idx="2"/>
           </p:cNvCxnSpPr>
           <p:nvPr/>
         </p:nvCxnSpPr>
         <p:spPr>
           <a:xfrm flipV="1">
-            <a:off x="5257457" y="816980"/>
-            <a:ext cx="826525" cy="288145"/>
+            <a:off x="5099977" y="828265"/>
+            <a:ext cx="1375410" cy="436245"/>
           </a:xfrm>
           <a:prstGeom prst="line">
             <a:avLst/>
@@ -5932,7 +5946,7 @@
         </p:nvSpPr>
         <p:spPr>
           <a:xfrm>
-            <a:off x="6044247" y="1254951"/>
+            <a:off x="6461442" y="1408621"/>
             <a:ext cx="1964055" cy="544840"/>
           </a:xfrm>
           <a:prstGeom prst="ellipse">
@@ -6001,7 +6015,7 @@
         </p:nvSpPr>
         <p:spPr>
           <a:xfrm>
-            <a:off x="6083982" y="540091"/>
+            <a:off x="6475142" y="550886"/>
             <a:ext cx="1964055" cy="553778"/>
           </a:xfrm>
           <a:prstGeom prst="ellipse">
@@ -6073,8 +6087,8 @@
         </p:nvCxnSpPr>
         <p:spPr>
           <a:xfrm>
-            <a:off x="5377815" y="1263968"/>
-            <a:ext cx="666432" cy="263403"/>
+            <a:off x="5099685" y="1263968"/>
+            <a:ext cx="1361440" cy="416560"/>
           </a:xfrm>
           <a:prstGeom prst="line">
             <a:avLst/>
@@ -6113,8 +6127,8 @@
         </p:nvCxnSpPr>
         <p:spPr>
           <a:xfrm flipH="1" flipV="1">
-            <a:off x="3956233" y="4512818"/>
-            <a:ext cx="55863" cy="665573"/>
+            <a:off x="3956851" y="4512911"/>
+            <a:ext cx="77470" cy="618490"/>
           </a:xfrm>
           <a:prstGeom prst="line">
             <a:avLst/>
@@ -6225,8 +6239,8 @@
           <p:nvPr/>
         </p:nvSpPr>
         <p:spPr>
-          <a:xfrm>
-            <a:off x="5163955" y="1378273"/>
+          <a:xfrm rot="20400000">
+            <a:off x="5262380" y="733113"/>
             <a:ext cx="1567815" cy="261610"/>
           </a:xfrm>
           <a:prstGeom prst="rect">
@@ -6261,8 +6275,8 @@
           <p:nvPr/>
         </p:nvSpPr>
         <p:spPr>
-          <a:xfrm>
-            <a:off x="5029065" y="708971"/>
+          <a:xfrm rot="900000">
+            <a:off x="5243060" y="1509071"/>
             <a:ext cx="1567815" cy="276999"/>
           </a:xfrm>
           <a:prstGeom prst="rect">
@@ -6297,8 +6311,8 @@
           <p:nvPr/>
         </p:nvSpPr>
         <p:spPr>
-          <a:xfrm>
-            <a:off x="4904723" y="5131215"/>
+          <a:xfrm rot="20460000">
+            <a:off x="4904723" y="5005485"/>
             <a:ext cx="1567815" cy="276999"/>
           </a:xfrm>
           <a:prstGeom prst="rect">
@@ -6403,7 +6417,7 @@
         </p:nvSpPr>
         <p:spPr>
           <a:xfrm>
-            <a:off x="6111874" y="5479727"/>
+            <a:off x="6111874" y="5618157"/>
             <a:ext cx="1964055" cy="553778"/>
           </a:xfrm>
           <a:prstGeom prst="ellipse">
@@ -6475,8 +6489,8 @@
         </p:nvCxnSpPr>
         <p:spPr>
           <a:xfrm flipV="1">
-            <a:off x="4882681" y="5150641"/>
-            <a:ext cx="1201300" cy="380175"/>
+            <a:off x="4904906" y="5150451"/>
+            <a:ext cx="1179195" cy="333375"/>
           </a:xfrm>
           <a:prstGeom prst="line">
             <a:avLst/>
@@ -6507,13 +6521,15 @@
       <p:cxnSp>
         <p:nvCxnSpPr>
           <p:cNvPr id="82" name="Connector 30"/>
-          <p:cNvCxnSpPr/>
+          <p:cNvCxnSpPr>
+            <a:endCxn id="80" idx="2"/>
+          </p:cNvCxnSpPr>
           <p:nvPr/>
         </p:nvCxnSpPr>
         <p:spPr>
           <a:xfrm>
             <a:off x="4882681" y="5665896"/>
-            <a:ext cx="1197446" cy="90720"/>
+            <a:ext cx="1229360" cy="228600"/>
           </a:xfrm>
           <a:prstGeom prst="line">
             <a:avLst/>
@@ -6548,8 +6564,8 @@
           <p:nvPr/>
         </p:nvSpPr>
         <p:spPr>
-          <a:xfrm>
-            <a:off x="4839017" y="5663261"/>
+          <a:xfrm rot="720000">
+            <a:off x="5092382" y="5617541"/>
             <a:ext cx="1567815" cy="276999"/>
           </a:xfrm>
           <a:prstGeom prst="rect">
@@ -6577,6 +6593,176 @@
           </a:p>
         </p:txBody>
       </p:sp>
+      <p:sp>
+        <p:nvSpPr>
+          <p:cNvPr id="20" name="Oval 16"/>
+          <p:cNvSpPr/>
+          <p:nvPr/>
+        </p:nvSpPr>
+        <p:spPr>
+          <a:xfrm>
+            <a:off x="6682740" y="2812415"/>
+            <a:ext cx="1742440" cy="698500"/>
+          </a:xfrm>
+          <a:prstGeom prst="ellipse">
+            <a:avLst/>
+          </a:prstGeom>
+          <a:solidFill>
+            <a:schemeClr val="bg1">
+              <a:lumMod val="85000"/>
+            </a:schemeClr>
+          </a:solidFill>
+          <a:ln w="13970">
+            <a:solidFill>
+              <a:srgbClr val="7A7A7A"/>
+            </a:solidFill>
+          </a:ln>
+        </p:spPr>
+        <p:style>
+          <a:lnRef idx="1">
+            <a:schemeClr val="accent1"/>
+          </a:lnRef>
+          <a:fillRef idx="3">
+            <a:schemeClr val="accent1"/>
+          </a:fillRef>
+          <a:effectRef idx="2">
+            <a:schemeClr val="accent1"/>
+          </a:effectRef>
+          <a:fontRef idx="minor">
+            <a:schemeClr val="lt1"/>
+          </a:fontRef>
+        </p:style>
+        <p:txBody>
+          <a:bodyPr wrap="square" lIns="0" tIns="0" rIns="0" bIns="0" rtlCol="0" anchor="ctr"/>
+          <a:lstStyle/>
+          <a:p>
+            <a:pPr algn="ctr">
+              <a:spcBef>
+                <a:spcPts val="0"/>
+              </a:spcBef>
+              <a:spcAft>
+                <a:spcPts val="0"/>
+              </a:spcAft>
+            </a:pPr>
+            <a:r>
+              <a:rPr lang="zh-CN" altLang="en-US" sz="1600" b="0" i="0" dirty="0">
+                <a:solidFill>
+                  <a:srgbClr val="1E1E1E"/>
+                </a:solidFill>
+                <a:latin typeface="微软雅黑" panose="020B0503020204020204" charset="-122"/>
+              </a:rPr>
+              <a:t>智能体会话</a:t>
+            </a:r>
+            <a:endParaRPr lang="zh-CN" altLang="en-US" sz="1600" b="0" i="0" dirty="0">
+              <a:solidFill>
+                <a:srgbClr val="1E1E1E"/>
+              </a:solidFill>
+              <a:latin typeface="微软雅黑" panose="020B0503020204020204" charset="-122"/>
+            </a:endParaRPr>
+          </a:p>
+          <a:p>
+            <a:pPr algn="ctr">
+              <a:spcBef>
+                <a:spcPts val="0"/>
+              </a:spcBef>
+              <a:spcAft>
+                <a:spcPts val="0"/>
+              </a:spcAft>
+            </a:pPr>
+            <a:r>
+              <a:rPr lang="zh-CN" altLang="en-US" sz="1600" b="0" i="0" dirty="0">
+                <a:solidFill>
+                  <a:srgbClr val="1E1E1E"/>
+                </a:solidFill>
+                <a:latin typeface="微软雅黑" panose="020B0503020204020204" charset="-122"/>
+              </a:rPr>
+              <a:t>管理</a:t>
+            </a:r>
+            <a:endParaRPr lang="zh-CN" altLang="en-US" sz="1600" b="0" i="0" dirty="0">
+              <a:solidFill>
+                <a:srgbClr val="1E1E1E"/>
+              </a:solidFill>
+              <a:latin typeface="微软雅黑" panose="020B0503020204020204" charset="-122"/>
+            </a:endParaRPr>
+          </a:p>
+        </p:txBody>
+      </p:sp>
+      <p:sp>
+        <p:nvSpPr>
+          <p:cNvPr id="21" name="文本框 20"/>
+          <p:cNvSpPr txBox="1"/>
+          <p:nvPr/>
+        </p:nvSpPr>
+        <p:spPr>
+          <a:xfrm rot="780000">
+            <a:off x="5263904" y="2946717"/>
+            <a:ext cx="1567815" cy="307777"/>
+          </a:xfrm>
+          <a:prstGeom prst="rect">
+            <a:avLst/>
+          </a:prstGeom>
+          <a:noFill/>
+        </p:spPr>
+        <p:txBody>
+          <a:bodyPr wrap="square" rtlCol="0">
+            <a:spAutoFit/>
+          </a:bodyPr>
+          <a:lstStyle/>
+          <a:p>
+            <a:r>
+              <a:rPr lang="en-US" altLang="zh-CN" sz="1400" dirty="0">
+                <a:latin typeface="Times New Roman" panose="02020603050405020304" charset="0"/>
+                <a:cs typeface="Times New Roman" panose="02020603050405020304" charset="0"/>
+              </a:rPr>
+              <a:t>&lt;&lt;include&gt;&gt;</a:t>
+            </a:r>
+            <a:endParaRPr lang="en-US" altLang="zh-CN" sz="1400" dirty="0">
+              <a:latin typeface="Times New Roman" panose="02020603050405020304" charset="0"/>
+              <a:cs typeface="Times New Roman" panose="02020603050405020304" charset="0"/>
+            </a:endParaRPr>
+          </a:p>
+        </p:txBody>
+      </p:sp>
+      <p:cxnSp>
+        <p:nvCxnSpPr>
+          <p:cNvPr id="25" name="Connector 30"/>
+          <p:cNvCxnSpPr>
+            <a:stCxn id="16" idx="6"/>
+            <a:endCxn id="20" idx="2"/>
+          </p:cNvCxnSpPr>
+          <p:nvPr/>
+        </p:nvCxnSpPr>
+        <p:spPr>
+          <a:xfrm>
+            <a:off x="4909820" y="2717375"/>
+            <a:ext cx="1772920" cy="444500"/>
+          </a:xfrm>
+          <a:prstGeom prst="line">
+            <a:avLst/>
+          </a:prstGeom>
+          <a:ln w="12700">
+            <a:solidFill>
+              <a:srgbClr val="7A7A7A"/>
+            </a:solidFill>
+            <a:prstDash val="dash"/>
+            <a:tailEnd type="arrow"/>
+          </a:ln>
+        </p:spPr>
+        <p:style>
+          <a:lnRef idx="2">
+            <a:schemeClr val="accent1"/>
+          </a:lnRef>
+          <a:fillRef idx="0">
+            <a:schemeClr val="accent1"/>
+          </a:fillRef>
+          <a:effectRef idx="1">
+            <a:schemeClr val="accent1"/>
+          </a:effectRef>
+          <a:fontRef idx="minor">
+            <a:schemeClr val="tx1"/>
+          </a:fontRef>
+        </p:style>
+      </p:cxnSp>
     </p:spTree>
   </p:cSld>
   <p:clrMapOvr>
